--- a/presentation.pptx
+++ b/presentation.pptx
@@ -4,12 +4,16 @@
   <p:sldMasterIdLst>
     <p:sldMasterId id="2147483648" r:id="rId1"/>
   </p:sldMasterIdLst>
+  <p:notesMasterIdLst>
+    <p:notesMasterId r:id="rId8"/>
+  </p:notesMasterIdLst>
   <p:sldIdLst>
-    <p:sldId id="256" r:id="rId2"/>
-    <p:sldId id="257" r:id="rId3"/>
-    <p:sldId id="258" r:id="rId4"/>
-    <p:sldId id="259" r:id="rId5"/>
-    <p:sldId id="260" r:id="rId6"/>
+    <p:sldId id="261" r:id="rId2"/>
+    <p:sldId id="262" r:id="rId3"/>
+    <p:sldId id="257" r:id="rId4"/>
+    <p:sldId id="258" r:id="rId5"/>
+    <p:sldId id="259" r:id="rId6"/>
+    <p:sldId id="260" r:id="rId7"/>
   </p:sldIdLst>
   <p:sldSz cx="12192000" cy="6858000"/>
   <p:notesSz cx="6858000" cy="9144000"/>
@@ -108,7 +112,455 @@
       </a:defRPr>
     </a:lvl9pPr>
   </p:defaultTextStyle>
+  <p:extLst>
+    <p:ext uri="{EFAFB233-063F-42B5-8137-9DF3F51BA10A}">
+      <p15:sldGuideLst xmlns:p15="http://schemas.microsoft.com/office/powerpoint/2012/main"/>
+    </p:ext>
+  </p:extLst>
 </p:presentation>
+</file>
+
+<file path=ppt/authors.xml><?xml version="1.0" encoding="utf-8"?>
+<p188:authorLst xmlns:a="http://schemas.openxmlformats.org/drawingml/2006/main" xmlns:r="http://schemas.openxmlformats.org/officeDocument/2006/relationships" xmlns:p188="http://schemas.microsoft.com/office/powerpoint/2018/8/main">
+  <p188:author id="{95582667-6102-27E7-ED8E-01A166EB4B6B}" name="Guest User" initials="GU" userId="Guest User" providerId="Windows Live"/>
+</p188:authorLst>
+</file>
+
+<file path=ppt/notesMasters/notesMaster1.xml><?xml version="1.0" encoding="utf-8"?>
+<p:notesMaster xmlns:a="http://schemas.openxmlformats.org/drawingml/2006/main" xmlns:r="http://schemas.openxmlformats.org/officeDocument/2006/relationships" xmlns:p="http://schemas.openxmlformats.org/presentationml/2006/main">
+  <p:cSld>
+    <p:bg>
+      <p:bgRef idx="1001">
+        <a:schemeClr val="bg1"/>
+      </p:bgRef>
+    </p:bg>
+    <p:spTree>
+      <p:nvGrpSpPr>
+        <p:cNvPr id="1" name=""/>
+        <p:cNvGrpSpPr/>
+        <p:nvPr/>
+      </p:nvGrpSpPr>
+      <p:grpSpPr>
+        <a:xfrm>
+          <a:off x="0" y="0"/>
+          <a:ext cx="0" cy="0"/>
+          <a:chOff x="0" y="0"/>
+          <a:chExt cx="0" cy="0"/>
+        </a:xfrm>
+      </p:grpSpPr>
+      <p:sp>
+        <p:nvSpPr>
+          <p:cNvPr id="2" name="Header Placeholder 1"/>
+          <p:cNvSpPr>
+            <a:spLocks noGrp="1"/>
+          </p:cNvSpPr>
+          <p:nvPr>
+            <p:ph type="hdr" sz="quarter"/>
+          </p:nvPr>
+        </p:nvSpPr>
+        <p:spPr>
+          <a:xfrm>
+            <a:off x="0" y="0"/>
+            <a:ext cx="2971800" cy="458788"/>
+          </a:xfrm>
+          <a:prstGeom prst="rect">
+            <a:avLst/>
+          </a:prstGeom>
+        </p:spPr>
+        <p:txBody>
+          <a:bodyPr vert="horz" lIns="91440" tIns="45720" rIns="91440" bIns="45720" rtlCol="0"/>
+          <a:lstStyle>
+            <a:lvl1pPr algn="l">
+              <a:defRPr sz="1200"/>
+            </a:lvl1pPr>
+          </a:lstStyle>
+          <a:p>
+            <a:endParaRPr lang="en-GB"/>
+          </a:p>
+        </p:txBody>
+      </p:sp>
+      <p:sp>
+        <p:nvSpPr>
+          <p:cNvPr id="3" name="Date Placeholder 2"/>
+          <p:cNvSpPr>
+            <a:spLocks noGrp="1"/>
+          </p:cNvSpPr>
+          <p:nvPr>
+            <p:ph type="dt" idx="1"/>
+          </p:nvPr>
+        </p:nvSpPr>
+        <p:spPr>
+          <a:xfrm>
+            <a:off x="3884613" y="0"/>
+            <a:ext cx="2971800" cy="458788"/>
+          </a:xfrm>
+          <a:prstGeom prst="rect">
+            <a:avLst/>
+          </a:prstGeom>
+        </p:spPr>
+        <p:txBody>
+          <a:bodyPr vert="horz" lIns="91440" tIns="45720" rIns="91440" bIns="45720" rtlCol="0"/>
+          <a:lstStyle>
+            <a:lvl1pPr algn="r">
+              <a:defRPr sz="1200"/>
+            </a:lvl1pPr>
+          </a:lstStyle>
+          <a:p>
+            <a:fld id="{812DE816-4AEB-4C5E-88A4-F622554AF666}" type="datetimeFigureOut">
+              <a:rPr lang="en-GB" smtClean="0"/>
+              <a:t>25/05/2026</a:t>
+            </a:fld>
+            <a:endParaRPr lang="en-GB"/>
+          </a:p>
+        </p:txBody>
+      </p:sp>
+      <p:sp>
+        <p:nvSpPr>
+          <p:cNvPr id="4" name="Slide Image Placeholder 3"/>
+          <p:cNvSpPr>
+            <a:spLocks noGrp="1" noRot="1" noChangeAspect="1"/>
+          </p:cNvSpPr>
+          <p:nvPr>
+            <p:ph type="sldImg" idx="2"/>
+          </p:nvPr>
+        </p:nvSpPr>
+        <p:spPr>
+          <a:xfrm>
+            <a:off x="685800" y="1143000"/>
+            <a:ext cx="5486400" cy="3086100"/>
+          </a:xfrm>
+          <a:prstGeom prst="rect">
+            <a:avLst/>
+          </a:prstGeom>
+          <a:noFill/>
+          <a:ln w="12700">
+            <a:solidFill>
+              <a:prstClr val="black"/>
+            </a:solidFill>
+          </a:ln>
+        </p:spPr>
+        <p:txBody>
+          <a:bodyPr vert="horz" lIns="91440" tIns="45720" rIns="91440" bIns="45720" rtlCol="0" anchor="ctr"/>
+          <a:lstStyle/>
+          <a:p>
+            <a:endParaRPr lang="en-GB"/>
+          </a:p>
+        </p:txBody>
+      </p:sp>
+      <p:sp>
+        <p:nvSpPr>
+          <p:cNvPr id="5" name="Notes Placeholder 4"/>
+          <p:cNvSpPr>
+            <a:spLocks noGrp="1"/>
+          </p:cNvSpPr>
+          <p:nvPr>
+            <p:ph type="body" sz="quarter" idx="3"/>
+          </p:nvPr>
+        </p:nvSpPr>
+        <p:spPr>
+          <a:xfrm>
+            <a:off x="685800" y="4400550"/>
+            <a:ext cx="5486400" cy="3600450"/>
+          </a:xfrm>
+          <a:prstGeom prst="rect">
+            <a:avLst/>
+          </a:prstGeom>
+        </p:spPr>
+        <p:txBody>
+          <a:bodyPr vert="horz" lIns="91440" tIns="45720" rIns="91440" bIns="45720" rtlCol="0"/>
+          <a:lstStyle/>
+          <a:p>
+            <a:pPr lvl="0"/>
+            <a:r>
+              <a:rPr lang="en-GB"/>
+              <a:t>Click to edit Master text styles</a:t>
+            </a:r>
+          </a:p>
+          <a:p>
+            <a:pPr lvl="1"/>
+            <a:r>
+              <a:rPr lang="en-GB"/>
+              <a:t>Second level</a:t>
+            </a:r>
+          </a:p>
+          <a:p>
+            <a:pPr lvl="2"/>
+            <a:r>
+              <a:rPr lang="en-GB"/>
+              <a:t>Third level</a:t>
+            </a:r>
+          </a:p>
+          <a:p>
+            <a:pPr lvl="3"/>
+            <a:r>
+              <a:rPr lang="en-GB"/>
+              <a:t>Fourth level</a:t>
+            </a:r>
+          </a:p>
+          <a:p>
+            <a:pPr lvl="4"/>
+            <a:r>
+              <a:rPr lang="en-GB"/>
+              <a:t>Fifth level</a:t>
+            </a:r>
+          </a:p>
+        </p:txBody>
+      </p:sp>
+      <p:sp>
+        <p:nvSpPr>
+          <p:cNvPr id="6" name="Footer Placeholder 5"/>
+          <p:cNvSpPr>
+            <a:spLocks noGrp="1"/>
+          </p:cNvSpPr>
+          <p:nvPr>
+            <p:ph type="ftr" sz="quarter" idx="4"/>
+          </p:nvPr>
+        </p:nvSpPr>
+        <p:spPr>
+          <a:xfrm>
+            <a:off x="0" y="8685213"/>
+            <a:ext cx="2971800" cy="458787"/>
+          </a:xfrm>
+          <a:prstGeom prst="rect">
+            <a:avLst/>
+          </a:prstGeom>
+        </p:spPr>
+        <p:txBody>
+          <a:bodyPr vert="horz" lIns="91440" tIns="45720" rIns="91440" bIns="45720" rtlCol="0" anchor="b"/>
+          <a:lstStyle>
+            <a:lvl1pPr algn="l">
+              <a:defRPr sz="1200"/>
+            </a:lvl1pPr>
+          </a:lstStyle>
+          <a:p>
+            <a:endParaRPr lang="en-GB"/>
+          </a:p>
+        </p:txBody>
+      </p:sp>
+      <p:sp>
+        <p:nvSpPr>
+          <p:cNvPr id="7" name="Slide Number Placeholder 6"/>
+          <p:cNvSpPr>
+            <a:spLocks noGrp="1"/>
+          </p:cNvSpPr>
+          <p:nvPr>
+            <p:ph type="sldNum" sz="quarter" idx="5"/>
+          </p:nvPr>
+        </p:nvSpPr>
+        <p:spPr>
+          <a:xfrm>
+            <a:off x="3884613" y="8685213"/>
+            <a:ext cx="2971800" cy="458787"/>
+          </a:xfrm>
+          <a:prstGeom prst="rect">
+            <a:avLst/>
+          </a:prstGeom>
+        </p:spPr>
+        <p:txBody>
+          <a:bodyPr vert="horz" lIns="91440" tIns="45720" rIns="91440" bIns="45720" rtlCol="0" anchor="b"/>
+          <a:lstStyle>
+            <a:lvl1pPr algn="r">
+              <a:defRPr sz="1200"/>
+            </a:lvl1pPr>
+          </a:lstStyle>
+          <a:p>
+            <a:fld id="{67FC2F5D-A00A-4392-B28E-0201BF8C74BB}" type="slidenum">
+              <a:rPr lang="en-GB" smtClean="0"/>
+              <a:t>‹#›</a:t>
+            </a:fld>
+            <a:endParaRPr lang="en-GB"/>
+          </a:p>
+        </p:txBody>
+      </p:sp>
+    </p:spTree>
+    <p:extLst>
+      <p:ext uri="{BB962C8B-B14F-4D97-AF65-F5344CB8AC3E}">
+        <p14:creationId xmlns:p14="http://schemas.microsoft.com/office/powerpoint/2010/main" val="1266318321"/>
+      </p:ext>
+    </p:extLst>
+  </p:cSld>
+  <p:clrMap bg1="lt1" tx1="dk1" bg2="lt2" tx2="dk2" accent1="accent1" accent2="accent2" accent3="accent3" accent4="accent4" accent5="accent5" accent6="accent6" hlink="hlink" folHlink="folHlink"/>
+  <p:notesStyle>
+    <a:lvl1pPr marL="0" algn="l" defTabSz="914400" rtl="0" eaLnBrk="1" latinLnBrk="0" hangingPunct="1">
+      <a:defRPr sz="1200" kern="1200">
+        <a:solidFill>
+          <a:schemeClr val="tx1"/>
+        </a:solidFill>
+        <a:latin typeface="+mn-lt"/>
+        <a:ea typeface="+mn-ea"/>
+        <a:cs typeface="+mn-cs"/>
+      </a:defRPr>
+    </a:lvl1pPr>
+    <a:lvl2pPr marL="457200" algn="l" defTabSz="914400" rtl="0" eaLnBrk="1" latinLnBrk="0" hangingPunct="1">
+      <a:defRPr sz="1200" kern="1200">
+        <a:solidFill>
+          <a:schemeClr val="tx1"/>
+        </a:solidFill>
+        <a:latin typeface="+mn-lt"/>
+        <a:ea typeface="+mn-ea"/>
+        <a:cs typeface="+mn-cs"/>
+      </a:defRPr>
+    </a:lvl2pPr>
+    <a:lvl3pPr marL="914400" algn="l" defTabSz="914400" rtl="0" eaLnBrk="1" latinLnBrk="0" hangingPunct="1">
+      <a:defRPr sz="1200" kern="1200">
+        <a:solidFill>
+          <a:schemeClr val="tx1"/>
+        </a:solidFill>
+        <a:latin typeface="+mn-lt"/>
+        <a:ea typeface="+mn-ea"/>
+        <a:cs typeface="+mn-cs"/>
+      </a:defRPr>
+    </a:lvl3pPr>
+    <a:lvl4pPr marL="1371600" algn="l" defTabSz="914400" rtl="0" eaLnBrk="1" latinLnBrk="0" hangingPunct="1">
+      <a:defRPr sz="1200" kern="1200">
+        <a:solidFill>
+          <a:schemeClr val="tx1"/>
+        </a:solidFill>
+        <a:latin typeface="+mn-lt"/>
+        <a:ea typeface="+mn-ea"/>
+        <a:cs typeface="+mn-cs"/>
+      </a:defRPr>
+    </a:lvl4pPr>
+    <a:lvl5pPr marL="1828800" algn="l" defTabSz="914400" rtl="0" eaLnBrk="1" latinLnBrk="0" hangingPunct="1">
+      <a:defRPr sz="1200" kern="1200">
+        <a:solidFill>
+          <a:schemeClr val="tx1"/>
+        </a:solidFill>
+        <a:latin typeface="+mn-lt"/>
+        <a:ea typeface="+mn-ea"/>
+        <a:cs typeface="+mn-cs"/>
+      </a:defRPr>
+    </a:lvl5pPr>
+    <a:lvl6pPr marL="2286000" algn="l" defTabSz="914400" rtl="0" eaLnBrk="1" latinLnBrk="0" hangingPunct="1">
+      <a:defRPr sz="1200" kern="1200">
+        <a:solidFill>
+          <a:schemeClr val="tx1"/>
+        </a:solidFill>
+        <a:latin typeface="+mn-lt"/>
+        <a:ea typeface="+mn-ea"/>
+        <a:cs typeface="+mn-cs"/>
+      </a:defRPr>
+    </a:lvl6pPr>
+    <a:lvl7pPr marL="2743200" algn="l" defTabSz="914400" rtl="0" eaLnBrk="1" latinLnBrk="0" hangingPunct="1">
+      <a:defRPr sz="1200" kern="1200">
+        <a:solidFill>
+          <a:schemeClr val="tx1"/>
+        </a:solidFill>
+        <a:latin typeface="+mn-lt"/>
+        <a:ea typeface="+mn-ea"/>
+        <a:cs typeface="+mn-cs"/>
+      </a:defRPr>
+    </a:lvl7pPr>
+    <a:lvl8pPr marL="3200400" algn="l" defTabSz="914400" rtl="0" eaLnBrk="1" latinLnBrk="0" hangingPunct="1">
+      <a:defRPr sz="1200" kern="1200">
+        <a:solidFill>
+          <a:schemeClr val="tx1"/>
+        </a:solidFill>
+        <a:latin typeface="+mn-lt"/>
+        <a:ea typeface="+mn-ea"/>
+        <a:cs typeface="+mn-cs"/>
+      </a:defRPr>
+    </a:lvl8pPr>
+    <a:lvl9pPr marL="3657600" algn="l" defTabSz="914400" rtl="0" eaLnBrk="1" latinLnBrk="0" hangingPunct="1">
+      <a:defRPr sz="1200" kern="1200">
+        <a:solidFill>
+          <a:schemeClr val="tx1"/>
+        </a:solidFill>
+        <a:latin typeface="+mn-lt"/>
+        <a:ea typeface="+mn-ea"/>
+        <a:cs typeface="+mn-cs"/>
+      </a:defRPr>
+    </a:lvl9pPr>
+  </p:notesStyle>
+</p:notesMaster>
+</file>
+
+<file path=ppt/notesSlides/notesSlide1.xml><?xml version="1.0" encoding="utf-8"?>
+<p:notes xmlns:a="http://schemas.openxmlformats.org/drawingml/2006/main" xmlns:r="http://schemas.openxmlformats.org/officeDocument/2006/relationships" xmlns:p="http://schemas.openxmlformats.org/presentationml/2006/main">
+  <p:cSld>
+    <p:spTree>
+      <p:nvGrpSpPr>
+        <p:cNvPr id="1" name=""/>
+        <p:cNvGrpSpPr/>
+        <p:nvPr/>
+      </p:nvGrpSpPr>
+      <p:grpSpPr>
+        <a:xfrm>
+          <a:off x="0" y="0"/>
+          <a:ext cx="0" cy="0"/>
+          <a:chOff x="0" y="0"/>
+          <a:chExt cx="0" cy="0"/>
+        </a:xfrm>
+      </p:grpSpPr>
+      <p:sp>
+        <p:nvSpPr>
+          <p:cNvPr id="2" name="Marcador de imagen de diapositiva 1"/>
+          <p:cNvSpPr>
+            <a:spLocks noGrp="1" noRot="1" noChangeAspect="1"/>
+          </p:cNvSpPr>
+          <p:nvPr>
+            <p:ph type="sldImg"/>
+          </p:nvPr>
+        </p:nvSpPr>
+        <p:spPr/>
+      </p:sp>
+      <p:sp>
+        <p:nvSpPr>
+          <p:cNvPr id="3" name="Marcador de notas 2"/>
+          <p:cNvSpPr>
+            <a:spLocks noGrp="1"/>
+          </p:cNvSpPr>
+          <p:nvPr>
+            <p:ph type="body" idx="1"/>
+          </p:nvPr>
+        </p:nvSpPr>
+        <p:spPr/>
+        <p:txBody>
+          <a:bodyPr/>
+          <a:lstStyle/>
+          <a:p>
+            <a:r>
+              <a:rPr lang="en-US" dirty="0"/>
+              <a:t>Recent technological advances enable faster and more effective responses in crisis situations. Let’s take a look at news footage from an incident in 2024.</a:t>
+            </a:r>
+            <a:endParaRPr lang="es-ES" dirty="0"/>
+          </a:p>
+        </p:txBody>
+      </p:sp>
+      <p:sp>
+        <p:nvSpPr>
+          <p:cNvPr id="4" name="Marcador de número de diapositiva 3"/>
+          <p:cNvSpPr>
+            <a:spLocks noGrp="1"/>
+          </p:cNvSpPr>
+          <p:nvPr>
+            <p:ph type="sldNum" sz="quarter" idx="5"/>
+          </p:nvPr>
+        </p:nvSpPr>
+        <p:spPr/>
+        <p:txBody>
+          <a:bodyPr/>
+          <a:lstStyle/>
+          <a:p>
+            <a:fld id="{F6EBE3E2-2B74-4E4F-B4E3-2A3C31E4FD1F}" type="slidenum">
+              <a:rPr lang="en-GB" smtClean="0"/>
+              <a:t>1</a:t>
+            </a:fld>
+            <a:endParaRPr lang="en-GB"/>
+          </a:p>
+        </p:txBody>
+      </p:sp>
+    </p:spTree>
+    <p:extLst>
+      <p:ext uri="{BB962C8B-B14F-4D97-AF65-F5344CB8AC3E}">
+        <p14:creationId xmlns:p14="http://schemas.microsoft.com/office/powerpoint/2010/main" val="1289421809"/>
+      </p:ext>
+    </p:extLst>
+  </p:cSld>
+  <p:clrMapOvr>
+    <a:masterClrMapping/>
+  </p:clrMapOvr>
+</p:notes>
 </file>
 
 <file path=ppt/slideLayouts/slideLayout1.xml><?xml version="1.0" encoding="utf-8"?>
@@ -312,7 +764,7 @@
           <a:p>
             <a:fld id="{DF77B1EE-E11C-4EC7-A74B-D7DD5378CF50}" type="slidenum">
               <a:rPr lang="de-DE" smtClean="0"/>
-              <a:t>‹Nr.›</a:t>
+              <a:t>‹#›</a:t>
             </a:fld>
             <a:endParaRPr lang="de-DE"/>
           </a:p>
@@ -510,7 +962,7 @@
           <a:p>
             <a:fld id="{DF77B1EE-E11C-4EC7-A74B-D7DD5378CF50}" type="slidenum">
               <a:rPr lang="de-DE" smtClean="0"/>
-              <a:t>‹Nr.›</a:t>
+              <a:t>‹#›</a:t>
             </a:fld>
             <a:endParaRPr lang="de-DE"/>
           </a:p>
@@ -718,7 +1170,7 @@
           <a:p>
             <a:fld id="{DF77B1EE-E11C-4EC7-A74B-D7DD5378CF50}" type="slidenum">
               <a:rPr lang="de-DE" smtClean="0"/>
-              <a:t>‹Nr.›</a:t>
+              <a:t>‹#›</a:t>
             </a:fld>
             <a:endParaRPr lang="de-DE"/>
           </a:p>
@@ -916,7 +1368,7 @@
           <a:p>
             <a:fld id="{DF77B1EE-E11C-4EC7-A74B-D7DD5378CF50}" type="slidenum">
               <a:rPr lang="de-DE" smtClean="0"/>
-              <a:t>‹Nr.›</a:t>
+              <a:t>‹#›</a:t>
             </a:fld>
             <a:endParaRPr lang="de-DE"/>
           </a:p>
@@ -1191,7 +1643,7 @@
           <a:p>
             <a:fld id="{DF77B1EE-E11C-4EC7-A74B-D7DD5378CF50}" type="slidenum">
               <a:rPr lang="de-DE" smtClean="0"/>
-              <a:t>‹Nr.›</a:t>
+              <a:t>‹#›</a:t>
             </a:fld>
             <a:endParaRPr lang="de-DE"/>
           </a:p>
@@ -1456,7 +1908,7 @@
           <a:p>
             <a:fld id="{DF77B1EE-E11C-4EC7-A74B-D7DD5378CF50}" type="slidenum">
               <a:rPr lang="de-DE" smtClean="0"/>
-              <a:t>‹Nr.›</a:t>
+              <a:t>‹#›</a:t>
             </a:fld>
             <a:endParaRPr lang="de-DE"/>
           </a:p>
@@ -1868,7 +2320,7 @@
           <a:p>
             <a:fld id="{DF77B1EE-E11C-4EC7-A74B-D7DD5378CF50}" type="slidenum">
               <a:rPr lang="de-DE" smtClean="0"/>
-              <a:t>‹Nr.›</a:t>
+              <a:t>‹#›</a:t>
             </a:fld>
             <a:endParaRPr lang="de-DE"/>
           </a:p>
@@ -2009,7 +2461,7 @@
           <a:p>
             <a:fld id="{DF77B1EE-E11C-4EC7-A74B-D7DD5378CF50}" type="slidenum">
               <a:rPr lang="de-DE" smtClean="0"/>
-              <a:t>‹Nr.›</a:t>
+              <a:t>‹#›</a:t>
             </a:fld>
             <a:endParaRPr lang="de-DE"/>
           </a:p>
@@ -2122,7 +2574,7 @@
           <a:p>
             <a:fld id="{DF77B1EE-E11C-4EC7-A74B-D7DD5378CF50}" type="slidenum">
               <a:rPr lang="de-DE" smtClean="0"/>
-              <a:t>‹Nr.›</a:t>
+              <a:t>‹#›</a:t>
             </a:fld>
             <a:endParaRPr lang="de-DE"/>
           </a:p>
@@ -2433,7 +2885,7 @@
           <a:p>
             <a:fld id="{DF77B1EE-E11C-4EC7-A74B-D7DD5378CF50}" type="slidenum">
               <a:rPr lang="de-DE" smtClean="0"/>
-              <a:t>‹Nr.›</a:t>
+              <a:t>‹#›</a:t>
             </a:fld>
             <a:endParaRPr lang="de-DE"/>
           </a:p>
@@ -2721,7 +3173,7 @@
           <a:p>
             <a:fld id="{DF77B1EE-E11C-4EC7-A74B-D7DD5378CF50}" type="slidenum">
               <a:rPr lang="de-DE" smtClean="0"/>
-              <a:t>‹Nr.›</a:t>
+              <a:t>‹#›</a:t>
             </a:fld>
             <a:endParaRPr lang="de-DE"/>
           </a:p>
@@ -2998,7 +3450,7 @@
           <a:p>
             <a:fld id="{DF77B1EE-E11C-4EC7-A74B-D7DD5378CF50}" type="slidenum">
               <a:rPr lang="de-DE" smtClean="0"/>
-              <a:t>‹Nr.›</a:t>
+              <a:t>‹#›</a:t>
             </a:fld>
             <a:endParaRPr lang="de-DE"/>
           </a:p>
@@ -3311,6 +3763,14 @@
 <file path=ppt/slides/slide1.xml><?xml version="1.0" encoding="utf-8"?>
 <p:sld xmlns:a="http://schemas.openxmlformats.org/drawingml/2006/main" xmlns:r="http://schemas.openxmlformats.org/officeDocument/2006/relationships" xmlns:p="http://schemas.openxmlformats.org/presentationml/2006/main">
   <p:cSld>
+    <p:bg>
+      <p:bgPr>
+        <a:solidFill>
+          <a:schemeClr val="bg1"/>
+        </a:solidFill>
+        <a:effectLst/>
+      </p:bgPr>
+    </p:bg>
     <p:spTree>
       <p:nvGrpSpPr>
         <p:cNvPr id="1" name=""/>
@@ -3325,12 +3785,312 @@
           <a:chExt cx="0" cy="0"/>
         </a:xfrm>
       </p:grpSpPr>
-      <p:sp>
-        <p:nvSpPr>
-          <p:cNvPr id="2" name="Titel 1">
-            <a:extLst>
-              <a:ext uri="{FF2B5EF4-FFF2-40B4-BE49-F238E27FC236}">
-                <a16:creationId xmlns:a16="http://schemas.microsoft.com/office/drawing/2014/main" id="{B0DC383A-4FDA-07DE-8896-4FE46AB0B042}"/>
+      <p:sp useBgFill="1">
+        <p:nvSpPr>
+          <p:cNvPr id="1031" name="Rectangle 1030">
+            <a:extLst>
+              <a:ext uri="{FF2B5EF4-FFF2-40B4-BE49-F238E27FC236}">
+                <a16:creationId xmlns:a16="http://schemas.microsoft.com/office/drawing/2014/main" id="{8555C5B3-193A-4749-9AFD-682E53CDDE8F}"/>
+              </a:ext>
+              <a:ext uri="{C183D7F6-B498-43B3-948B-1728B52AA6E4}">
+                <adec:decorative xmlns:adec="http://schemas.microsoft.com/office/drawing/2017/decorative" val="1"/>
+              </a:ext>
+            </a:extLst>
+          </p:cNvPr>
+          <p:cNvSpPr>
+            <a:spLocks noGrp="1" noRot="1" noChangeAspect="1" noMove="1" noResize="1" noEditPoints="1" noAdjustHandles="1" noChangeArrowheads="1" noChangeShapeType="1" noTextEdit="1"/>
+          </p:cNvSpPr>
+          <p:nvPr>
+            <p:extLst>
+              <p:ext uri="{386F3935-93C4-4BCD-93E2-E3B085C9AB24}">
+                <p16:designElem xmlns:p16="http://schemas.microsoft.com/office/powerpoint/2015/main" val="1"/>
+              </p:ext>
+            </p:extLst>
+          </p:nvPr>
+        </p:nvSpPr>
+        <p:spPr>
+          <a:xfrm>
+            <a:off x="0" y="0"/>
+            <a:ext cx="12192000" cy="6858000"/>
+          </a:xfrm>
+          <a:prstGeom prst="rect">
+            <a:avLst/>
+          </a:prstGeom>
+          <a:ln w="12700" cap="flat" cmpd="sng" algn="ctr">
+            <a:noFill/>
+            <a:prstDash val="solid"/>
+            <a:miter lim="800000"/>
+          </a:ln>
+          <a:effectLst/>
+          <a:extLst>
+            <a:ext uri="{91240B29-F687-4F45-9708-019B960494DF}">
+              <a14:hiddenLine xmlns:a14="http://schemas.microsoft.com/office/drawing/2010/main" w="12700" cap="flat" cmpd="sng" algn="ctr">
+                <a:solidFill>
+                  <a:schemeClr val="accent1">
+                    <a:shade val="50000"/>
+                  </a:schemeClr>
+                </a:solidFill>
+                <a:prstDash val="solid"/>
+                <a:miter lim="800000"/>
+              </a14:hiddenLine>
+            </a:ext>
+          </a:extLst>
+        </p:spPr>
+        <p:style>
+          <a:lnRef idx="2">
+            <a:schemeClr val="accent1">
+              <a:shade val="50000"/>
+            </a:schemeClr>
+          </a:lnRef>
+          <a:fillRef idx="1">
+            <a:schemeClr val="accent1"/>
+          </a:fillRef>
+          <a:effectRef idx="0">
+            <a:schemeClr val="accent1"/>
+          </a:effectRef>
+          <a:fontRef idx="minor">
+            <a:schemeClr val="lt1"/>
+          </a:fontRef>
+        </p:style>
+        <p:txBody>
+          <a:bodyPr rtlCol="0" anchor="ctr"/>
+          <a:lstStyle/>
+          <a:p>
+            <a:pPr algn="ctr"/>
+            <a:endParaRPr lang="en-US" dirty="0"/>
+          </a:p>
+        </p:txBody>
+      </p:sp>
+      <p:sp>
+        <p:nvSpPr>
+          <p:cNvPr id="1033" name="Rectangle 1032">
+            <a:extLst>
+              <a:ext uri="{FF2B5EF4-FFF2-40B4-BE49-F238E27FC236}">
+                <a16:creationId xmlns:a16="http://schemas.microsoft.com/office/drawing/2014/main" id="{2EAE06A6-F76A-41C9-827A-C561B004485C}"/>
+              </a:ext>
+              <a:ext uri="{C183D7F6-B498-43B3-948B-1728B52AA6E4}">
+                <adec:decorative xmlns:adec="http://schemas.microsoft.com/office/drawing/2017/decorative" val="1"/>
+              </a:ext>
+            </a:extLst>
+          </p:cNvPr>
+          <p:cNvSpPr>
+            <a:spLocks noGrp="1" noRot="1" noChangeAspect="1" noMove="1" noResize="1" noEditPoints="1" noAdjustHandles="1" noChangeArrowheads="1" noChangeShapeType="1" noTextEdit="1"/>
+          </p:cNvSpPr>
+          <p:nvPr>
+            <p:extLst>
+              <p:ext uri="{386F3935-93C4-4BCD-93E2-E3B085C9AB24}">
+                <p16:designElem xmlns:p16="http://schemas.microsoft.com/office/powerpoint/2015/main" val="1"/>
+              </p:ext>
+            </p:extLst>
+          </p:nvPr>
+        </p:nvSpPr>
+        <p:spPr>
+          <a:xfrm flipH="1">
+            <a:off x="0" y="-3"/>
+            <a:ext cx="12192000" cy="6858000"/>
+          </a:xfrm>
+          <a:prstGeom prst="rect">
+            <a:avLst/>
+          </a:prstGeom>
+          <a:gradFill>
+            <a:gsLst>
+              <a:gs pos="0">
+                <a:srgbClr val="000000"/>
+              </a:gs>
+              <a:gs pos="100000">
+                <a:schemeClr val="accent1">
+                  <a:lumMod val="75000"/>
+                </a:schemeClr>
+              </a:gs>
+            </a:gsLst>
+            <a:lin ang="6600000" scaled="0"/>
+          </a:gradFill>
+          <a:ln>
+            <a:noFill/>
+          </a:ln>
+        </p:spPr>
+        <p:style>
+          <a:lnRef idx="2">
+            <a:schemeClr val="accent1">
+              <a:shade val="50000"/>
+            </a:schemeClr>
+          </a:lnRef>
+          <a:fillRef idx="1">
+            <a:schemeClr val="accent1"/>
+          </a:fillRef>
+          <a:effectRef idx="0">
+            <a:schemeClr val="accent1"/>
+          </a:effectRef>
+          <a:fontRef idx="minor">
+            <a:schemeClr val="lt1"/>
+          </a:fontRef>
+        </p:style>
+        <p:txBody>
+          <a:bodyPr rtlCol="0" anchor="ctr"/>
+          <a:lstStyle/>
+          <a:p>
+            <a:pPr algn="ctr"/>
+            <a:endParaRPr lang="en-US" dirty="0"/>
+          </a:p>
+        </p:txBody>
+      </p:sp>
+      <p:sp>
+        <p:nvSpPr>
+          <p:cNvPr id="1035" name="Rectangle 1034">
+            <a:extLst>
+              <a:ext uri="{FF2B5EF4-FFF2-40B4-BE49-F238E27FC236}">
+                <a16:creationId xmlns:a16="http://schemas.microsoft.com/office/drawing/2014/main" id="{89F9D4E8-0639-444B-949B-9518585061AF}"/>
+              </a:ext>
+              <a:ext uri="{C183D7F6-B498-43B3-948B-1728B52AA6E4}">
+                <adec:decorative xmlns:adec="http://schemas.microsoft.com/office/drawing/2017/decorative" val="1"/>
+              </a:ext>
+            </a:extLst>
+          </p:cNvPr>
+          <p:cNvSpPr>
+            <a:spLocks noGrp="1" noRot="1" noChangeAspect="1" noMove="1" noResize="1" noEditPoints="1" noAdjustHandles="1" noChangeArrowheads="1" noChangeShapeType="1" noTextEdit="1"/>
+          </p:cNvSpPr>
+          <p:nvPr>
+            <p:extLst>
+              <p:ext uri="{386F3935-93C4-4BCD-93E2-E3B085C9AB24}">
+                <p16:designElem xmlns:p16="http://schemas.microsoft.com/office/powerpoint/2015/main" val="1"/>
+              </p:ext>
+            </p:extLst>
+          </p:nvPr>
+        </p:nvSpPr>
+        <p:spPr>
+          <a:xfrm flipH="1">
+            <a:off x="480861" y="0"/>
+            <a:ext cx="7661934" cy="6858000"/>
+          </a:xfrm>
+          <a:prstGeom prst="rect">
+            <a:avLst/>
+          </a:prstGeom>
+          <a:gradFill>
+            <a:gsLst>
+              <a:gs pos="0">
+                <a:schemeClr val="accent1">
+                  <a:lumMod val="75000"/>
+                  <a:alpha val="45000"/>
+                </a:schemeClr>
+              </a:gs>
+              <a:gs pos="100000">
+                <a:srgbClr val="000000">
+                  <a:alpha val="29000"/>
+                </a:srgbClr>
+              </a:gs>
+            </a:gsLst>
+            <a:lin ang="12000000" scaled="0"/>
+          </a:gradFill>
+          <a:ln>
+            <a:noFill/>
+          </a:ln>
+        </p:spPr>
+        <p:style>
+          <a:lnRef idx="2">
+            <a:schemeClr val="accent1">
+              <a:shade val="50000"/>
+            </a:schemeClr>
+          </a:lnRef>
+          <a:fillRef idx="1">
+            <a:schemeClr val="accent1"/>
+          </a:fillRef>
+          <a:effectRef idx="0">
+            <a:schemeClr val="accent1"/>
+          </a:effectRef>
+          <a:fontRef idx="minor">
+            <a:schemeClr val="lt1"/>
+          </a:fontRef>
+        </p:style>
+        <p:txBody>
+          <a:bodyPr rtlCol="0" anchor="ctr"/>
+          <a:lstStyle/>
+          <a:p>
+            <a:pPr algn="ctr"/>
+            <a:endParaRPr lang="en-US" dirty="0"/>
+          </a:p>
+        </p:txBody>
+      </p:sp>
+      <p:sp>
+        <p:nvSpPr>
+          <p:cNvPr id="1037" name="Rectangle 1036">
+            <a:extLst>
+              <a:ext uri="{FF2B5EF4-FFF2-40B4-BE49-F238E27FC236}">
+                <a16:creationId xmlns:a16="http://schemas.microsoft.com/office/drawing/2014/main" id="{7E3DA7A2-ED70-4BBA-AB72-00AD461FA405}"/>
+              </a:ext>
+              <a:ext uri="{C183D7F6-B498-43B3-948B-1728B52AA6E4}">
+                <adec:decorative xmlns:adec="http://schemas.microsoft.com/office/drawing/2017/decorative" val="1"/>
+              </a:ext>
+            </a:extLst>
+          </p:cNvPr>
+          <p:cNvSpPr>
+            <a:spLocks noGrp="1" noRot="1" noChangeAspect="1" noMove="1" noResize="1" noEditPoints="1" noAdjustHandles="1" noChangeArrowheads="1" noChangeShapeType="1" noTextEdit="1"/>
+          </p:cNvSpPr>
+          <p:nvPr>
+            <p:extLst>
+              <p:ext uri="{386F3935-93C4-4BCD-93E2-E3B085C9AB24}">
+                <p16:designElem xmlns:p16="http://schemas.microsoft.com/office/powerpoint/2015/main" val="1"/>
+              </p:ext>
+            </p:extLst>
+          </p:nvPr>
+        </p:nvSpPr>
+        <p:spPr>
+          <a:xfrm rot="10800000" flipH="1">
+            <a:off x="480862" y="-6"/>
+            <a:ext cx="11711138" cy="6410334"/>
+          </a:xfrm>
+          <a:prstGeom prst="rect">
+            <a:avLst/>
+          </a:prstGeom>
+          <a:gradFill>
+            <a:gsLst>
+              <a:gs pos="0">
+                <a:schemeClr val="accent1">
+                  <a:alpha val="0"/>
+                </a:schemeClr>
+              </a:gs>
+              <a:gs pos="100000">
+                <a:srgbClr val="000000">
+                  <a:alpha val="41000"/>
+                </a:srgbClr>
+              </a:gs>
+            </a:gsLst>
+            <a:lin ang="18000000" scaled="0"/>
+          </a:gradFill>
+          <a:ln>
+            <a:noFill/>
+          </a:ln>
+        </p:spPr>
+        <p:style>
+          <a:lnRef idx="2">
+            <a:schemeClr val="accent1">
+              <a:shade val="50000"/>
+            </a:schemeClr>
+          </a:lnRef>
+          <a:fillRef idx="1">
+            <a:schemeClr val="accent1"/>
+          </a:fillRef>
+          <a:effectRef idx="0">
+            <a:schemeClr val="accent1"/>
+          </a:effectRef>
+          <a:fontRef idx="minor">
+            <a:schemeClr val="lt1"/>
+          </a:fontRef>
+        </p:style>
+        <p:txBody>
+          <a:bodyPr rtlCol="0" anchor="ctr"/>
+          <a:lstStyle/>
+          <a:p>
+            <a:pPr algn="ctr"/>
+            <a:endParaRPr lang="en-US" dirty="0"/>
+          </a:p>
+        </p:txBody>
+      </p:sp>
+      <p:sp>
+        <p:nvSpPr>
+          <p:cNvPr id="2" name="Title 1">
+            <a:extLst>
+              <a:ext uri="{FF2B5EF4-FFF2-40B4-BE49-F238E27FC236}">
+                <a16:creationId xmlns:a16="http://schemas.microsoft.com/office/drawing/2014/main" id="{59FB47B0-2F4D-CB4B-26E4-D53C5285D018}"/>
               </a:ext>
             </a:extLst>
           </p:cNvPr>
@@ -3341,37 +4101,132 @@
             <p:ph type="ctrTitle"/>
           </p:nvPr>
         </p:nvSpPr>
-        <p:spPr/>
-        <p:txBody>
-          <a:bodyPr>
-            <a:normAutofit fontScale="90000"/>
+        <p:spPr>
+          <a:xfrm>
+            <a:off x="1127208" y="857251"/>
+            <a:ext cx="4747280" cy="3098061"/>
+          </a:xfrm>
+        </p:spPr>
+        <p:txBody>
+          <a:bodyPr anchor="b">
+            <a:normAutofit/>
           </a:bodyPr>
           <a:lstStyle/>
           <a:p>
-            <a:r>
-              <a:rPr lang="en-US" b="1" dirty="0"/>
+            <a:pPr algn="l"/>
+            <a:r>
+              <a:rPr lang="en-US" sz="4800" b="1" dirty="0">
+                <a:solidFill>
+                  <a:schemeClr val="bg1"/>
+                </a:solidFill>
+              </a:rPr>
               <a:t>Voice-Controlled Maze Game</a:t>
             </a:r>
             <a:br>
-              <a:rPr lang="en-US" b="1" dirty="0"/>
+              <a:rPr lang="en-US" sz="4800" b="1" dirty="0">
+                <a:solidFill>
+                  <a:schemeClr val="bg1"/>
+                </a:solidFill>
+              </a:rPr>
             </a:br>
             <a:r>
-              <a:rPr lang="en-US" sz="3600" b="1" dirty="0"/>
+              <a:rPr lang="en-US" sz="2400" b="1" dirty="0">
+                <a:solidFill>
+                  <a:schemeClr val="bg1"/>
+                </a:solidFill>
+              </a:rPr>
               <a:t>SCBIO Final Project 2026</a:t>
             </a:r>
-            <a:br>
-              <a:rPr lang="en-US" b="1" dirty="0"/>
-            </a:br>
-            <a:endParaRPr lang="de-DE" dirty="0"/>
-          </a:p>
-        </p:txBody>
-      </p:sp>
-      <p:sp>
-        <p:nvSpPr>
-          <p:cNvPr id="3" name="Untertitel 2">
-            <a:extLst>
-              <a:ext uri="{FF2B5EF4-FFF2-40B4-BE49-F238E27FC236}">
-                <a16:creationId xmlns:a16="http://schemas.microsoft.com/office/drawing/2014/main" id="{1334B2B9-DFFE-934F-CA48-D6F4EFD42E97}"/>
+            <a:endParaRPr lang="en-GB" sz="2400" dirty="0">
+              <a:solidFill>
+                <a:schemeClr val="bg1"/>
+              </a:solidFill>
+            </a:endParaRPr>
+          </a:p>
+        </p:txBody>
+      </p:sp>
+      <p:sp>
+        <p:nvSpPr>
+          <p:cNvPr id="1039" name="Rectangle 1038">
+            <a:extLst>
+              <a:ext uri="{FF2B5EF4-FFF2-40B4-BE49-F238E27FC236}">
+                <a16:creationId xmlns:a16="http://schemas.microsoft.com/office/drawing/2014/main" id="{FC485432-3647-4218-B5D3-15D3FA222B13}"/>
+              </a:ext>
+              <a:ext uri="{C183D7F6-B498-43B3-948B-1728B52AA6E4}">
+                <adec:decorative xmlns:adec="http://schemas.microsoft.com/office/drawing/2017/decorative" val="1"/>
+              </a:ext>
+            </a:extLst>
+          </p:cNvPr>
+          <p:cNvSpPr>
+            <a:spLocks noGrp="1" noRot="1" noChangeAspect="1" noMove="1" noResize="1" noEditPoints="1" noAdjustHandles="1" noChangeArrowheads="1" noChangeShapeType="1" noTextEdit="1"/>
+          </p:cNvSpPr>
+          <p:nvPr>
+            <p:extLst>
+              <p:ext uri="{386F3935-93C4-4BCD-93E2-E3B085C9AB24}">
+                <p16:designElem xmlns:p16="http://schemas.microsoft.com/office/powerpoint/2015/main" val="1"/>
+              </p:ext>
+            </p:extLst>
+          </p:nvPr>
+        </p:nvSpPr>
+        <p:spPr>
+          <a:xfrm rot="16200000">
+            <a:off x="4844797" y="-489206"/>
+            <a:ext cx="2502408" cy="12191998"/>
+          </a:xfrm>
+          <a:prstGeom prst="rect">
+            <a:avLst/>
+          </a:prstGeom>
+          <a:gradFill>
+            <a:gsLst>
+              <a:gs pos="0">
+                <a:schemeClr val="accent1">
+                  <a:alpha val="24000"/>
+                </a:schemeClr>
+              </a:gs>
+              <a:gs pos="78000">
+                <a:schemeClr val="accent1">
+                  <a:lumMod val="50000"/>
+                  <a:alpha val="0"/>
+                </a:schemeClr>
+              </a:gs>
+            </a:gsLst>
+            <a:lin ang="10200000" scaled="0"/>
+          </a:gradFill>
+          <a:ln>
+            <a:noFill/>
+          </a:ln>
+        </p:spPr>
+        <p:style>
+          <a:lnRef idx="2">
+            <a:schemeClr val="accent1">
+              <a:shade val="50000"/>
+            </a:schemeClr>
+          </a:lnRef>
+          <a:fillRef idx="1">
+            <a:schemeClr val="accent1"/>
+          </a:fillRef>
+          <a:effectRef idx="0">
+            <a:schemeClr val="accent1"/>
+          </a:effectRef>
+          <a:fontRef idx="minor">
+            <a:schemeClr val="lt1"/>
+          </a:fontRef>
+        </p:style>
+        <p:txBody>
+          <a:bodyPr rtlCol="0" anchor="ctr"/>
+          <a:lstStyle/>
+          <a:p>
+            <a:pPr algn="ctr"/>
+            <a:endParaRPr lang="en-US"/>
+          </a:p>
+        </p:txBody>
+      </p:sp>
+      <p:sp>
+        <p:nvSpPr>
+          <p:cNvPr id="3" name="Subtitle 2">
+            <a:extLst>
+              <a:ext uri="{FF2B5EF4-FFF2-40B4-BE49-F238E27FC236}">
+                <a16:creationId xmlns:a16="http://schemas.microsoft.com/office/drawing/2014/main" id="{D314810E-1A9E-0C2C-6135-74D6277F415F}"/>
               </a:ext>
             </a:extLst>
           </p:cNvPr>
@@ -3382,19 +4237,250 @@
             <p:ph type="subTitle" idx="1"/>
           </p:nvPr>
         </p:nvSpPr>
-        <p:spPr/>
-        <p:txBody>
-          <a:bodyPr/>
-          <a:lstStyle/>
-          <a:p>
-            <a:endParaRPr lang="de-DE" dirty="0"/>
-          </a:p>
-        </p:txBody>
-      </p:sp>
+        <p:spPr>
+          <a:xfrm>
+            <a:off x="1127208" y="4355585"/>
+            <a:ext cx="4393278" cy="1645163"/>
+          </a:xfrm>
+        </p:spPr>
+        <p:txBody>
+          <a:bodyPr vert="horz" lIns="91440" tIns="45720" rIns="91440" bIns="45720" rtlCol="0" anchor="t">
+            <a:noAutofit/>
+          </a:bodyPr>
+          <a:lstStyle/>
+          <a:p>
+            <a:pPr algn="l"/>
+            <a:r>
+              <a:rPr lang="en-GB" sz="1400" dirty="0">
+                <a:solidFill>
+                  <a:srgbClr val="FFFFFF"/>
+                </a:solidFill>
+              </a:rPr>
+              <a:t>Kewan</a:t>
+            </a:r>
+          </a:p>
+          <a:p>
+            <a:pPr algn="l"/>
+            <a:r>
+              <a:rPr lang="en-GB" sz="1400" dirty="0">
+                <a:solidFill>
+                  <a:srgbClr val="FFFFFF"/>
+                </a:solidFill>
+              </a:rPr>
+              <a:t>Michael Vogt</a:t>
+            </a:r>
+          </a:p>
+          <a:p>
+            <a:pPr algn="l"/>
+            <a:r>
+              <a:rPr lang="en-GB" sz="1400" dirty="0">
+                <a:solidFill>
+                  <a:srgbClr val="FFFFFF"/>
+                </a:solidFill>
+              </a:rPr>
+              <a:t>Tizian</a:t>
+            </a:r>
+          </a:p>
+          <a:p>
+            <a:pPr algn="l"/>
+            <a:r>
+              <a:rPr lang="en-GB" sz="1400" dirty="0">
+                <a:solidFill>
+                  <a:srgbClr val="FFFFFF"/>
+                </a:solidFill>
+              </a:rPr>
+              <a:t>Luca Delli Castelli</a:t>
+            </a:r>
+          </a:p>
+          <a:p>
+            <a:pPr algn="l"/>
+            <a:endParaRPr lang="en-GB" sz="1400" dirty="0">
+              <a:solidFill>
+                <a:srgbClr val="FFFFFF"/>
+              </a:solidFill>
+            </a:endParaRPr>
+          </a:p>
+          <a:p>
+            <a:pPr algn="l"/>
+            <a:r>
+              <a:rPr lang="en-GB" sz="1400" dirty="0">
+                <a:solidFill>
+                  <a:srgbClr val="FFFFFF"/>
+                </a:solidFill>
+                <a:ea typeface="+mn-lt"/>
+                <a:cs typeface="+mn-lt"/>
+              </a:rPr>
+              <a:t>Sistemas </a:t>
+            </a:r>
+            <a:r>
+              <a:rPr lang="en-GB" sz="1400" dirty="0" err="1">
+                <a:solidFill>
+                  <a:srgbClr val="FFFFFF"/>
+                </a:solidFill>
+                <a:ea typeface="+mn-lt"/>
+                <a:cs typeface="+mn-lt"/>
+              </a:rPr>
+              <a:t>Complexos</a:t>
+            </a:r>
+            <a:r>
+              <a:rPr lang="en-GB" sz="1400" dirty="0">
+                <a:solidFill>
+                  <a:srgbClr val="FFFFFF"/>
+                </a:solidFill>
+                <a:ea typeface="+mn-lt"/>
+                <a:cs typeface="+mn-lt"/>
+              </a:rPr>
+              <a:t> </a:t>
+            </a:r>
+            <a:r>
+              <a:rPr lang="en-GB" sz="1400" dirty="0" err="1">
+                <a:solidFill>
+                  <a:srgbClr val="FFFFFF"/>
+                </a:solidFill>
+                <a:ea typeface="+mn-lt"/>
+                <a:cs typeface="+mn-lt"/>
+              </a:rPr>
+              <a:t>Bioinspirados</a:t>
+            </a:r>
+            <a:r>
+              <a:rPr lang="en-GB" sz="1400" dirty="0">
+                <a:solidFill>
+                  <a:srgbClr val="FFFFFF"/>
+                </a:solidFill>
+                <a:ea typeface="+mn-lt"/>
+                <a:cs typeface="+mn-lt"/>
+              </a:rPr>
+              <a:t> (SCIBIO)</a:t>
+            </a:r>
+          </a:p>
+          <a:p>
+            <a:pPr algn="l"/>
+            <a:r>
+              <a:rPr lang="en-GB" sz="1400" dirty="0">
+                <a:solidFill>
+                  <a:srgbClr val="FFFFFF"/>
+                </a:solidFill>
+                <a:ea typeface="+mn-lt"/>
+                <a:cs typeface="+mn-lt"/>
+              </a:rPr>
+              <a:t>Lecturer: Fernando Escobar Ropero</a:t>
+            </a:r>
+          </a:p>
+        </p:txBody>
+      </p:sp>
+      <p:sp>
+        <p:nvSpPr>
+          <p:cNvPr id="1041" name="Oval 1040">
+            <a:extLst>
+              <a:ext uri="{FF2B5EF4-FFF2-40B4-BE49-F238E27FC236}">
+                <a16:creationId xmlns:a16="http://schemas.microsoft.com/office/drawing/2014/main" id="{F4AFDDCA-6ABA-4D23-8A5C-1BF0F4308148}"/>
+              </a:ext>
+              <a:ext uri="{C183D7F6-B498-43B3-948B-1728B52AA6E4}">
+                <adec:decorative xmlns:adec="http://schemas.microsoft.com/office/drawing/2017/decorative" val="1"/>
+              </a:ext>
+            </a:extLst>
+          </p:cNvPr>
+          <p:cNvSpPr>
+            <a:spLocks noGrp="1" noRot="1" noChangeAspect="1" noMove="1" noResize="1" noEditPoints="1" noAdjustHandles="1" noChangeArrowheads="1" noChangeShapeType="1" noTextEdit="1"/>
+          </p:cNvSpPr>
+          <p:nvPr>
+            <p:extLst>
+              <p:ext uri="{386F3935-93C4-4BCD-93E2-E3B085C9AB24}">
+                <p16:designElem xmlns:p16="http://schemas.microsoft.com/office/powerpoint/2015/main" val="1"/>
+              </p:ext>
+            </p:extLst>
+          </p:nvPr>
+        </p:nvSpPr>
+        <p:spPr>
+          <a:xfrm>
+            <a:off x="6390589" y="1062544"/>
+            <a:ext cx="4756162" cy="4756162"/>
+          </a:xfrm>
+          <a:prstGeom prst="ellipse">
+            <a:avLst/>
+          </a:prstGeom>
+          <a:solidFill>
+            <a:schemeClr val="bg1"/>
+          </a:solidFill>
+          <a:ln>
+            <a:noFill/>
+          </a:ln>
+        </p:spPr>
+        <p:style>
+          <a:lnRef idx="2">
+            <a:schemeClr val="accent1">
+              <a:shade val="50000"/>
+            </a:schemeClr>
+          </a:lnRef>
+          <a:fillRef idx="1">
+            <a:schemeClr val="accent1"/>
+          </a:fillRef>
+          <a:effectRef idx="0">
+            <a:schemeClr val="accent1"/>
+          </a:effectRef>
+          <a:fontRef idx="minor">
+            <a:schemeClr val="lt1"/>
+          </a:fontRef>
+        </p:style>
+        <p:txBody>
+          <a:bodyPr rtlCol="0" anchor="ctr"/>
+          <a:lstStyle/>
+          <a:p>
+            <a:pPr algn="ctr"/>
+            <a:endParaRPr lang="en-US"/>
+          </a:p>
+        </p:txBody>
+      </p:sp>
+      <p:pic>
+        <p:nvPicPr>
+          <p:cNvPr id="1026" name="Picture 2">
+            <a:extLst>
+              <a:ext uri="{FF2B5EF4-FFF2-40B4-BE49-F238E27FC236}">
+                <a16:creationId xmlns:a16="http://schemas.microsoft.com/office/drawing/2014/main" id="{6B830067-0DC3-6A75-3F15-3A30ADCC8D34}"/>
+              </a:ext>
+            </a:extLst>
+          </p:cNvPr>
+          <p:cNvPicPr>
+            <a:picLocks noChangeAspect="1" noChangeArrowheads="1"/>
+          </p:cNvPicPr>
+          <p:nvPr/>
+        </p:nvPicPr>
+        <p:blipFill>
+          <a:blip r:embed="rId3">
+            <a:extLst>
+              <a:ext uri="{28A0092B-C50C-407E-A947-70E740481C1C}">
+                <a14:useLocalDpi xmlns:a14="http://schemas.microsoft.com/office/drawing/2010/main" val="0"/>
+              </a:ext>
+            </a:extLst>
+          </a:blip>
+          <a:stretch>
+            <a:fillRect/>
+          </a:stretch>
+        </p:blipFill>
+        <p:spPr bwMode="auto">
+          <a:xfrm>
+            <a:off x="6920559" y="2777468"/>
+            <a:ext cx="3737164" cy="1317351"/>
+          </a:xfrm>
+          <a:prstGeom prst="rect">
+            <a:avLst/>
+          </a:prstGeom>
+          <a:noFill/>
+          <a:extLst>
+            <a:ext uri="{909E8E84-426E-40DD-AFC4-6F175D3DCCD1}">
+              <a14:hiddenFill xmlns:a14="http://schemas.microsoft.com/office/drawing/2010/main">
+                <a:solidFill>
+                  <a:srgbClr val="FFFFFF"/>
+                </a:solidFill>
+              </a14:hiddenFill>
+            </a:ext>
+          </a:extLst>
+        </p:spPr>
+      </p:pic>
     </p:spTree>
     <p:extLst>
       <p:ext uri="{BB962C8B-B14F-4D97-AF65-F5344CB8AC3E}">
-        <p14:creationId xmlns:p14="http://schemas.microsoft.com/office/powerpoint/2010/main" val="831325394"/>
+        <p14:creationId xmlns:p14="http://schemas.microsoft.com/office/powerpoint/2010/main" val="1416759022"/>
       </p:ext>
     </p:extLst>
   </p:cSld>
@@ -3405,6 +4491,994 @@
 </file>
 
 <file path=ppt/slides/slide2.xml><?xml version="1.0" encoding="utf-8"?>
+<p:sld xmlns:a="http://schemas.openxmlformats.org/drawingml/2006/main" xmlns:r="http://schemas.openxmlformats.org/officeDocument/2006/relationships" xmlns:p="http://schemas.openxmlformats.org/presentationml/2006/main">
+  <p:cSld>
+    <p:bg>
+      <p:bgPr>
+        <a:solidFill>
+          <a:schemeClr val="bg1"/>
+        </a:solidFill>
+        <a:effectLst/>
+      </p:bgPr>
+    </p:bg>
+    <p:spTree>
+      <p:nvGrpSpPr>
+        <p:cNvPr id="1" name=""/>
+        <p:cNvGrpSpPr/>
+        <p:nvPr/>
+      </p:nvGrpSpPr>
+      <p:grpSpPr>
+        <a:xfrm>
+          <a:off x="0" y="0"/>
+          <a:ext cx="0" cy="0"/>
+          <a:chOff x="0" y="0"/>
+          <a:chExt cx="0" cy="0"/>
+        </a:xfrm>
+      </p:grpSpPr>
+      <p:sp useBgFill="1">
+        <p:nvSpPr>
+          <p:cNvPr id="27" name="Rectangle 26">
+            <a:extLst>
+              <a:ext uri="{FF2B5EF4-FFF2-40B4-BE49-F238E27FC236}">
+                <a16:creationId xmlns:a16="http://schemas.microsoft.com/office/drawing/2014/main" id="{09588DA8-065E-4F6F-8EFD-43104AB2E0CF}"/>
+              </a:ext>
+              <a:ext uri="{C183D7F6-B498-43B3-948B-1728B52AA6E4}">
+                <adec:decorative xmlns:adec="http://schemas.microsoft.com/office/drawing/2017/decorative" val="1"/>
+              </a:ext>
+            </a:extLst>
+          </p:cNvPr>
+          <p:cNvSpPr>
+            <a:spLocks noGrp="1" noRot="1" noChangeAspect="1" noMove="1" noResize="1" noEditPoints="1" noAdjustHandles="1" noChangeArrowheads="1" noChangeShapeType="1" noTextEdit="1"/>
+          </p:cNvSpPr>
+          <p:nvPr>
+            <p:extLst>
+              <p:ext uri="{386F3935-93C4-4BCD-93E2-E3B085C9AB24}">
+                <p16:designElem xmlns:p16="http://schemas.microsoft.com/office/powerpoint/2015/main" val="1"/>
+              </p:ext>
+            </p:extLst>
+          </p:nvPr>
+        </p:nvSpPr>
+        <p:spPr>
+          <a:xfrm>
+            <a:off x="0" y="0"/>
+            <a:ext cx="12192000" cy="6858000"/>
+          </a:xfrm>
+          <a:prstGeom prst="rect">
+            <a:avLst/>
+          </a:prstGeom>
+          <a:ln w="12700" cap="flat" cmpd="sng" algn="ctr">
+            <a:noFill/>
+            <a:prstDash val="solid"/>
+            <a:miter lim="800000"/>
+          </a:ln>
+          <a:effectLst/>
+          <a:extLst>
+            <a:ext uri="{91240B29-F687-4F45-9708-019B960494DF}">
+              <a14:hiddenLine xmlns:a14="http://schemas.microsoft.com/office/drawing/2010/main" w="12700" cap="flat" cmpd="sng" algn="ctr">
+                <a:solidFill>
+                  <a:schemeClr val="accent1">
+                    <a:shade val="50000"/>
+                  </a:schemeClr>
+                </a:solidFill>
+                <a:prstDash val="solid"/>
+                <a:miter lim="800000"/>
+              </a14:hiddenLine>
+            </a:ext>
+          </a:extLst>
+        </p:spPr>
+        <p:style>
+          <a:lnRef idx="2">
+            <a:schemeClr val="accent1">
+              <a:shade val="50000"/>
+            </a:schemeClr>
+          </a:lnRef>
+          <a:fillRef idx="1">
+            <a:schemeClr val="accent1"/>
+          </a:fillRef>
+          <a:effectRef idx="0">
+            <a:schemeClr val="accent1"/>
+          </a:effectRef>
+          <a:fontRef idx="minor">
+            <a:schemeClr val="lt1"/>
+          </a:fontRef>
+        </p:style>
+        <p:txBody>
+          <a:bodyPr rtlCol="0" anchor="ctr"/>
+          <a:lstStyle/>
+          <a:p>
+            <a:pPr algn="ctr"/>
+            <a:endParaRPr lang="en-US"/>
+          </a:p>
+        </p:txBody>
+      </p:sp>
+      <p:sp useBgFill="1">
+        <p:nvSpPr>
+          <p:cNvPr id="29" name="Rectangle 28">
+            <a:extLst>
+              <a:ext uri="{FF2B5EF4-FFF2-40B4-BE49-F238E27FC236}">
+                <a16:creationId xmlns:a16="http://schemas.microsoft.com/office/drawing/2014/main" id="{C4285719-470E-454C-AF62-8323075F1F5B}"/>
+              </a:ext>
+              <a:ext uri="{C183D7F6-B498-43B3-948B-1728B52AA6E4}">
+                <adec:decorative xmlns:adec="http://schemas.microsoft.com/office/drawing/2017/decorative" val="1"/>
+              </a:ext>
+            </a:extLst>
+          </p:cNvPr>
+          <p:cNvSpPr>
+            <a:spLocks noGrp="1" noRot="1" noChangeAspect="1" noMove="1" noResize="1" noEditPoints="1" noAdjustHandles="1" noChangeArrowheads="1" noChangeShapeType="1" noTextEdit="1"/>
+          </p:cNvSpPr>
+          <p:nvPr>
+            <p:extLst>
+              <p:ext uri="{386F3935-93C4-4BCD-93E2-E3B085C9AB24}">
+                <p16:designElem xmlns:p16="http://schemas.microsoft.com/office/powerpoint/2015/main" val="1"/>
+              </p:ext>
+            </p:extLst>
+          </p:nvPr>
+        </p:nvSpPr>
+        <p:spPr>
+          <a:xfrm>
+            <a:off x="0" y="0"/>
+            <a:ext cx="12188952" cy="6858000"/>
+          </a:xfrm>
+          <a:prstGeom prst="rect">
+            <a:avLst/>
+          </a:prstGeom>
+          <a:ln w="12700" cap="flat" cmpd="sng" algn="ctr">
+            <a:noFill/>
+            <a:prstDash val="solid"/>
+            <a:miter lim="800000"/>
+          </a:ln>
+          <a:effectLst/>
+          <a:extLst>
+            <a:ext uri="{91240B29-F687-4F45-9708-019B960494DF}">
+              <a14:hiddenLine xmlns:a14="http://schemas.microsoft.com/office/drawing/2010/main" w="12700" cap="flat" cmpd="sng" algn="ctr">
+                <a:solidFill>
+                  <a:schemeClr val="accent1">
+                    <a:shade val="50000"/>
+                  </a:schemeClr>
+                </a:solidFill>
+                <a:prstDash val="solid"/>
+                <a:miter lim="800000"/>
+              </a14:hiddenLine>
+            </a:ext>
+          </a:extLst>
+        </p:spPr>
+        <p:style>
+          <a:lnRef idx="2">
+            <a:schemeClr val="accent1">
+              <a:shade val="50000"/>
+            </a:schemeClr>
+          </a:lnRef>
+          <a:fillRef idx="1">
+            <a:schemeClr val="accent1"/>
+          </a:fillRef>
+          <a:effectRef idx="0">
+            <a:schemeClr val="accent1"/>
+          </a:effectRef>
+          <a:fontRef idx="minor">
+            <a:schemeClr val="lt1"/>
+          </a:fontRef>
+        </p:style>
+        <p:txBody>
+          <a:bodyPr rtlCol="0" anchor="ctr"/>
+          <a:lstStyle/>
+          <a:p>
+            <a:pPr algn="ctr"/>
+            <a:endParaRPr lang="en-US"/>
+          </a:p>
+        </p:txBody>
+      </p:sp>
+      <p:sp>
+        <p:nvSpPr>
+          <p:cNvPr id="31" name="Rectangle 30">
+            <a:extLst>
+              <a:ext uri="{FF2B5EF4-FFF2-40B4-BE49-F238E27FC236}">
+                <a16:creationId xmlns:a16="http://schemas.microsoft.com/office/drawing/2014/main" id="{CD9FE4EF-C4D8-49A0-B2FF-81D8DB7D8A24}"/>
+              </a:ext>
+              <a:ext uri="{C183D7F6-B498-43B3-948B-1728B52AA6E4}">
+                <adec:decorative xmlns:adec="http://schemas.microsoft.com/office/drawing/2017/decorative" val="1"/>
+              </a:ext>
+            </a:extLst>
+          </p:cNvPr>
+          <p:cNvSpPr>
+            <a:spLocks noGrp="1" noRot="1" noChangeAspect="1" noMove="1" noResize="1" noEditPoints="1" noAdjustHandles="1" noChangeArrowheads="1" noChangeShapeType="1" noTextEdit="1"/>
+          </p:cNvSpPr>
+          <p:nvPr>
+            <p:extLst>
+              <p:ext uri="{386F3935-93C4-4BCD-93E2-E3B085C9AB24}">
+                <p16:designElem xmlns:p16="http://schemas.microsoft.com/office/powerpoint/2015/main" val="1"/>
+              </p:ext>
+            </p:extLst>
+          </p:nvPr>
+        </p:nvSpPr>
+        <p:spPr>
+          <a:xfrm rot="5400000" flipH="1">
+            <a:off x="-1410084" y="1410082"/>
+            <a:ext cx="6858000" cy="4037836"/>
+          </a:xfrm>
+          <a:prstGeom prst="rect">
+            <a:avLst/>
+          </a:prstGeom>
+          <a:gradFill>
+            <a:gsLst>
+              <a:gs pos="8000">
+                <a:srgbClr val="000000"/>
+              </a:gs>
+              <a:gs pos="100000">
+                <a:schemeClr val="accent1">
+                  <a:lumMod val="75000"/>
+                </a:schemeClr>
+              </a:gs>
+            </a:gsLst>
+            <a:lin ang="3000000" scaled="0"/>
+          </a:gradFill>
+          <a:ln>
+            <a:noFill/>
+          </a:ln>
+        </p:spPr>
+        <p:style>
+          <a:lnRef idx="2">
+            <a:schemeClr val="accent1">
+              <a:shade val="50000"/>
+            </a:schemeClr>
+          </a:lnRef>
+          <a:fillRef idx="1">
+            <a:schemeClr val="accent1"/>
+          </a:fillRef>
+          <a:effectRef idx="0">
+            <a:schemeClr val="accent1"/>
+          </a:effectRef>
+          <a:fontRef idx="minor">
+            <a:schemeClr val="lt1"/>
+          </a:fontRef>
+        </p:style>
+        <p:txBody>
+          <a:bodyPr rtlCol="0" anchor="ctr"/>
+          <a:lstStyle/>
+          <a:p>
+            <a:pPr algn="ctr"/>
+            <a:endParaRPr lang="en-US"/>
+          </a:p>
+        </p:txBody>
+      </p:sp>
+      <p:sp>
+        <p:nvSpPr>
+          <p:cNvPr id="33" name="Rectangle 32">
+            <a:extLst>
+              <a:ext uri="{FF2B5EF4-FFF2-40B4-BE49-F238E27FC236}">
+                <a16:creationId xmlns:a16="http://schemas.microsoft.com/office/drawing/2014/main" id="{4300840D-0A0B-4512-BACA-B439D5B9C57C}"/>
+              </a:ext>
+              <a:ext uri="{C183D7F6-B498-43B3-948B-1728B52AA6E4}">
+                <adec:decorative xmlns:adec="http://schemas.microsoft.com/office/drawing/2017/decorative" val="1"/>
+              </a:ext>
+            </a:extLst>
+          </p:cNvPr>
+          <p:cNvSpPr>
+            <a:spLocks noGrp="1" noRot="1" noChangeAspect="1" noMove="1" noResize="1" noEditPoints="1" noAdjustHandles="1" noChangeArrowheads="1" noChangeShapeType="1" noTextEdit="1"/>
+          </p:cNvSpPr>
+          <p:nvPr>
+            <p:extLst>
+              <p:ext uri="{386F3935-93C4-4BCD-93E2-E3B085C9AB24}">
+                <p16:designElem xmlns:p16="http://schemas.microsoft.com/office/powerpoint/2015/main" val="1"/>
+              </p:ext>
+            </p:extLst>
+          </p:nvPr>
+        </p:nvSpPr>
+        <p:spPr>
+          <a:xfrm rot="5400000" flipH="1">
+            <a:off x="-1410085" y="1420219"/>
+            <a:ext cx="6857999" cy="4037839"/>
+          </a:xfrm>
+          <a:prstGeom prst="rect">
+            <a:avLst/>
+          </a:prstGeom>
+          <a:gradFill>
+            <a:gsLst>
+              <a:gs pos="0">
+                <a:srgbClr val="000000">
+                  <a:alpha val="0"/>
+                </a:srgbClr>
+              </a:gs>
+              <a:gs pos="99000">
+                <a:schemeClr val="accent1">
+                  <a:alpha val="46000"/>
+                </a:schemeClr>
+              </a:gs>
+            </a:gsLst>
+            <a:lin ang="1800000" scaled="0"/>
+          </a:gradFill>
+          <a:ln>
+            <a:noFill/>
+          </a:ln>
+        </p:spPr>
+        <p:style>
+          <a:lnRef idx="2">
+            <a:schemeClr val="accent1">
+              <a:shade val="50000"/>
+            </a:schemeClr>
+          </a:lnRef>
+          <a:fillRef idx="1">
+            <a:schemeClr val="accent1"/>
+          </a:fillRef>
+          <a:effectRef idx="0">
+            <a:schemeClr val="accent1"/>
+          </a:effectRef>
+          <a:fontRef idx="minor">
+            <a:schemeClr val="lt1"/>
+          </a:fontRef>
+        </p:style>
+        <p:txBody>
+          <a:bodyPr rtlCol="0" anchor="ctr"/>
+          <a:lstStyle/>
+          <a:p>
+            <a:pPr algn="ctr"/>
+            <a:endParaRPr lang="en-US"/>
+          </a:p>
+        </p:txBody>
+      </p:sp>
+      <p:sp>
+        <p:nvSpPr>
+          <p:cNvPr id="35" name="Rectangle 34">
+            <a:extLst>
+              <a:ext uri="{FF2B5EF4-FFF2-40B4-BE49-F238E27FC236}">
+                <a16:creationId xmlns:a16="http://schemas.microsoft.com/office/drawing/2014/main" id="{D2B78728-A580-49A7-84F9-6EF6F583ADE0}"/>
+              </a:ext>
+              <a:ext uri="{C183D7F6-B498-43B3-948B-1728B52AA6E4}">
+                <adec:decorative xmlns:adec="http://schemas.microsoft.com/office/drawing/2017/decorative" val="1"/>
+              </a:ext>
+            </a:extLst>
+          </p:cNvPr>
+          <p:cNvSpPr>
+            <a:spLocks noGrp="1" noRot="1" noChangeAspect="1" noMove="1" noResize="1" noEditPoints="1" noAdjustHandles="1" noChangeArrowheads="1" noChangeShapeType="1" noTextEdit="1"/>
+          </p:cNvSpPr>
+          <p:nvPr>
+            <p:extLst>
+              <p:ext uri="{386F3935-93C4-4BCD-93E2-E3B085C9AB24}">
+                <p16:designElem xmlns:p16="http://schemas.microsoft.com/office/powerpoint/2015/main" val="1"/>
+              </p:ext>
+            </p:extLst>
+          </p:nvPr>
+        </p:nvSpPr>
+        <p:spPr>
+          <a:xfrm rot="5400000" flipH="1">
+            <a:off x="767923" y="3588085"/>
+            <a:ext cx="2501979" cy="4037841"/>
+          </a:xfrm>
+          <a:prstGeom prst="rect">
+            <a:avLst/>
+          </a:prstGeom>
+          <a:gradFill>
+            <a:gsLst>
+              <a:gs pos="2000">
+                <a:schemeClr val="accent1">
+                  <a:alpha val="29000"/>
+                </a:schemeClr>
+              </a:gs>
+              <a:gs pos="100000">
+                <a:srgbClr val="000000">
+                  <a:alpha val="30000"/>
+                </a:srgbClr>
+              </a:gs>
+            </a:gsLst>
+            <a:lin ang="7800000" scaled="0"/>
+          </a:gradFill>
+          <a:ln>
+            <a:noFill/>
+          </a:ln>
+        </p:spPr>
+        <p:style>
+          <a:lnRef idx="2">
+            <a:schemeClr val="accent1">
+              <a:shade val="50000"/>
+            </a:schemeClr>
+          </a:lnRef>
+          <a:fillRef idx="1">
+            <a:schemeClr val="accent1"/>
+          </a:fillRef>
+          <a:effectRef idx="0">
+            <a:schemeClr val="accent1"/>
+          </a:effectRef>
+          <a:fontRef idx="minor">
+            <a:schemeClr val="lt1"/>
+          </a:fontRef>
+        </p:style>
+        <p:txBody>
+          <a:bodyPr rtlCol="0" anchor="ctr"/>
+          <a:lstStyle/>
+          <a:p>
+            <a:pPr algn="ctr"/>
+            <a:endParaRPr lang="en-US" dirty="0"/>
+          </a:p>
+        </p:txBody>
+      </p:sp>
+      <p:sp>
+        <p:nvSpPr>
+          <p:cNvPr id="37" name="Freeform: Shape 36">
+            <a:extLst>
+              <a:ext uri="{FF2B5EF4-FFF2-40B4-BE49-F238E27FC236}">
+                <a16:creationId xmlns:a16="http://schemas.microsoft.com/office/drawing/2014/main" id="{38FAA1A1-D861-433F-88FA-1E9D6FD31D11}"/>
+              </a:ext>
+              <a:ext uri="{C183D7F6-B498-43B3-948B-1728B52AA6E4}">
+                <adec:decorative xmlns:adec="http://schemas.microsoft.com/office/drawing/2017/decorative" val="1"/>
+              </a:ext>
+            </a:extLst>
+          </p:cNvPr>
+          <p:cNvSpPr>
+            <a:spLocks noGrp="1" noRot="1" noChangeAspect="1" noMove="1" noResize="1" noEditPoints="1" noAdjustHandles="1" noChangeArrowheads="1" noChangeShapeType="1" noTextEdit="1"/>
+          </p:cNvSpPr>
+          <p:nvPr>
+            <p:extLst>
+              <p:ext uri="{386F3935-93C4-4BCD-93E2-E3B085C9AB24}">
+                <p16:designElem xmlns:p16="http://schemas.microsoft.com/office/powerpoint/2015/main" val="1"/>
+              </p:ext>
+            </p:extLst>
+          </p:nvPr>
+        </p:nvSpPr>
+        <p:spPr>
+          <a:xfrm rot="20635413">
+            <a:off x="-501737" y="969718"/>
+            <a:ext cx="3900357" cy="4178958"/>
+          </a:xfrm>
+          <a:custGeom>
+            <a:avLst/>
+            <a:gdLst>
+              <a:gd name="connsiteX0" fmla="*/ 2432225 w 3900357"/>
+              <a:gd name="connsiteY0" fmla="*/ 93939 h 4178958"/>
+              <a:gd name="connsiteX1" fmla="*/ 3900357 w 3900357"/>
+              <a:gd name="connsiteY1" fmla="*/ 2089479 h 4178958"/>
+              <a:gd name="connsiteX2" fmla="*/ 1810878 w 3900357"/>
+              <a:gd name="connsiteY2" fmla="*/ 4178958 h 4178958"/>
+              <a:gd name="connsiteX3" fmla="*/ 78249 w 3900357"/>
+              <a:gd name="connsiteY3" fmla="*/ 3257727 h 4178958"/>
+              <a:gd name="connsiteX4" fmla="*/ 0 w 3900357"/>
+              <a:gd name="connsiteY4" fmla="*/ 3128923 h 4178958"/>
+              <a:gd name="connsiteX5" fmla="*/ 831324 w 3900357"/>
+              <a:gd name="connsiteY5" fmla="*/ 244281 h 4178958"/>
+              <a:gd name="connsiteX6" fmla="*/ 997559 w 3900357"/>
+              <a:gd name="connsiteY6" fmla="*/ 164202 h 4178958"/>
+              <a:gd name="connsiteX7" fmla="*/ 1810878 w 3900357"/>
+              <a:gd name="connsiteY7" fmla="*/ 0 h 4178958"/>
+              <a:gd name="connsiteX8" fmla="*/ 2432225 w 3900357"/>
+              <a:gd name="connsiteY8" fmla="*/ 93939 h 4178958"/>
+            </a:gdLst>
+            <a:ahLst/>
+            <a:cxnLst>
+              <a:cxn ang="0">
+                <a:pos x="connsiteX0" y="connsiteY0"/>
+              </a:cxn>
+              <a:cxn ang="0">
+                <a:pos x="connsiteX1" y="connsiteY1"/>
+              </a:cxn>
+              <a:cxn ang="0">
+                <a:pos x="connsiteX2" y="connsiteY2"/>
+              </a:cxn>
+              <a:cxn ang="0">
+                <a:pos x="connsiteX3" y="connsiteY3"/>
+              </a:cxn>
+              <a:cxn ang="0">
+                <a:pos x="connsiteX4" y="connsiteY4"/>
+              </a:cxn>
+              <a:cxn ang="0">
+                <a:pos x="connsiteX5" y="connsiteY5"/>
+              </a:cxn>
+              <a:cxn ang="0">
+                <a:pos x="connsiteX6" y="connsiteY6"/>
+              </a:cxn>
+              <a:cxn ang="0">
+                <a:pos x="connsiteX7" y="connsiteY7"/>
+              </a:cxn>
+              <a:cxn ang="0">
+                <a:pos x="connsiteX8" y="connsiteY8"/>
+              </a:cxn>
+            </a:cxnLst>
+            <a:rect l="l" t="t" r="r" b="b"/>
+            <a:pathLst>
+              <a:path w="3900357" h="4178958">
+                <a:moveTo>
+                  <a:pt x="2432225" y="93939"/>
+                </a:moveTo>
+                <a:cubicBezTo>
+                  <a:pt x="3282786" y="358491"/>
+                  <a:pt x="3900357" y="1151865"/>
+                  <a:pt x="3900357" y="2089479"/>
+                </a:cubicBezTo>
+                <a:cubicBezTo>
+                  <a:pt x="3900357" y="3243466"/>
+                  <a:pt x="2964865" y="4178958"/>
+                  <a:pt x="1810878" y="4178958"/>
+                </a:cubicBezTo>
+                <a:cubicBezTo>
+                  <a:pt x="1089636" y="4178958"/>
+                  <a:pt x="453744" y="3813531"/>
+                  <a:pt x="78249" y="3257727"/>
+                </a:cubicBezTo>
+                <a:lnTo>
+                  <a:pt x="0" y="3128923"/>
+                </a:lnTo>
+                <a:lnTo>
+                  <a:pt x="831324" y="244281"/>
+                </a:lnTo>
+                <a:lnTo>
+                  <a:pt x="997559" y="164202"/>
+                </a:lnTo>
+                <a:cubicBezTo>
+                  <a:pt x="1247540" y="58468"/>
+                  <a:pt x="1522381" y="0"/>
+                  <a:pt x="1810878" y="0"/>
+                </a:cubicBezTo>
+                <a:cubicBezTo>
+                  <a:pt x="2027251" y="0"/>
+                  <a:pt x="2235942" y="32888"/>
+                  <a:pt x="2432225" y="93939"/>
+                </a:cubicBezTo>
+                <a:close/>
+              </a:path>
+            </a:pathLst>
+          </a:custGeom>
+          <a:gradFill>
+            <a:gsLst>
+              <a:gs pos="29000">
+                <a:srgbClr val="000000">
+                  <a:alpha val="0"/>
+                </a:srgbClr>
+              </a:gs>
+              <a:gs pos="100000">
+                <a:schemeClr val="accent1">
+                  <a:alpha val="43000"/>
+                </a:schemeClr>
+              </a:gs>
+            </a:gsLst>
+            <a:lin ang="1800000" scaled="0"/>
+          </a:gradFill>
+          <a:ln>
+            <a:noFill/>
+          </a:ln>
+        </p:spPr>
+        <p:style>
+          <a:lnRef idx="2">
+            <a:schemeClr val="accent1">
+              <a:shade val="50000"/>
+            </a:schemeClr>
+          </a:lnRef>
+          <a:fillRef idx="1">
+            <a:schemeClr val="accent1"/>
+          </a:fillRef>
+          <a:effectRef idx="0">
+            <a:schemeClr val="accent1"/>
+          </a:effectRef>
+          <a:fontRef idx="minor">
+            <a:schemeClr val="lt1"/>
+          </a:fontRef>
+        </p:style>
+        <p:txBody>
+          <a:bodyPr wrap="square" rtlCol="0" anchor="ctr">
+            <a:noAutofit/>
+          </a:bodyPr>
+          <a:lstStyle/>
+          <a:p>
+            <a:pPr algn="ctr"/>
+            <a:endParaRPr lang="en-US" dirty="0"/>
+          </a:p>
+        </p:txBody>
+      </p:sp>
+      <p:sp>
+        <p:nvSpPr>
+          <p:cNvPr id="39" name="Rectangle 38">
+            <a:extLst>
+              <a:ext uri="{FF2B5EF4-FFF2-40B4-BE49-F238E27FC236}">
+                <a16:creationId xmlns:a16="http://schemas.microsoft.com/office/drawing/2014/main" id="{8D71EDA1-87BF-4D5D-AB79-F346FD19278A}"/>
+              </a:ext>
+              <a:ext uri="{C183D7F6-B498-43B3-948B-1728B52AA6E4}">
+                <adec:decorative xmlns:adec="http://schemas.microsoft.com/office/drawing/2017/decorative" val="1"/>
+              </a:ext>
+            </a:extLst>
+          </p:cNvPr>
+          <p:cNvSpPr>
+            <a:spLocks noGrp="1" noRot="1" noChangeAspect="1" noMove="1" noResize="1" noEditPoints="1" noAdjustHandles="1" noChangeArrowheads="1" noChangeShapeType="1" noTextEdit="1"/>
+          </p:cNvSpPr>
+          <p:nvPr>
+            <p:extLst>
+              <p:ext uri="{386F3935-93C4-4BCD-93E2-E3B085C9AB24}">
+                <p16:designElem xmlns:p16="http://schemas.microsoft.com/office/powerpoint/2015/main" val="1"/>
+              </p:ext>
+            </p:extLst>
+          </p:nvPr>
+        </p:nvSpPr>
+        <p:spPr>
+          <a:xfrm rot="5400000" flipH="1">
+            <a:off x="-1410093" y="1399943"/>
+            <a:ext cx="6858003" cy="4037835"/>
+          </a:xfrm>
+          <a:prstGeom prst="rect">
+            <a:avLst/>
+          </a:prstGeom>
+          <a:gradFill>
+            <a:gsLst>
+              <a:gs pos="0">
+                <a:srgbClr val="000000">
+                  <a:alpha val="0"/>
+                </a:srgbClr>
+              </a:gs>
+              <a:gs pos="99000">
+                <a:schemeClr val="accent1">
+                  <a:lumMod val="60000"/>
+                  <a:lumOff val="40000"/>
+                  <a:alpha val="11000"/>
+                </a:schemeClr>
+              </a:gs>
+            </a:gsLst>
+            <a:lin ang="7200000" scaled="0"/>
+          </a:gradFill>
+          <a:ln>
+            <a:noFill/>
+          </a:ln>
+        </p:spPr>
+        <p:style>
+          <a:lnRef idx="2">
+            <a:schemeClr val="accent1">
+              <a:shade val="50000"/>
+            </a:schemeClr>
+          </a:lnRef>
+          <a:fillRef idx="1">
+            <a:schemeClr val="accent1"/>
+          </a:fillRef>
+          <a:effectRef idx="0">
+            <a:schemeClr val="accent1"/>
+          </a:effectRef>
+          <a:fontRef idx="minor">
+            <a:schemeClr val="lt1"/>
+          </a:fontRef>
+        </p:style>
+        <p:txBody>
+          <a:bodyPr rtlCol="0" anchor="ctr"/>
+          <a:lstStyle/>
+          <a:p>
+            <a:pPr algn="ctr"/>
+            <a:endParaRPr lang="en-US"/>
+          </a:p>
+        </p:txBody>
+      </p:sp>
+      <p:sp>
+        <p:nvSpPr>
+          <p:cNvPr id="2" name="Title 1">
+            <a:extLst>
+              <a:ext uri="{FF2B5EF4-FFF2-40B4-BE49-F238E27FC236}">
+                <a16:creationId xmlns:a16="http://schemas.microsoft.com/office/drawing/2014/main" id="{CBD7F146-BBFE-BAAD-B8EF-92A6A3A48B5F}"/>
+              </a:ext>
+            </a:extLst>
+          </p:cNvPr>
+          <p:cNvSpPr>
+            <a:spLocks noGrp="1"/>
+          </p:cNvSpPr>
+          <p:nvPr>
+            <p:ph type="title"/>
+          </p:nvPr>
+        </p:nvSpPr>
+        <p:spPr>
+          <a:xfrm>
+            <a:off x="466722" y="586855"/>
+            <a:ext cx="3201366" cy="3387497"/>
+          </a:xfrm>
+        </p:spPr>
+        <p:txBody>
+          <a:bodyPr vert="horz" lIns="91440" tIns="45720" rIns="91440" bIns="45720" rtlCol="0" anchor="b">
+            <a:normAutofit/>
+          </a:bodyPr>
+          <a:lstStyle/>
+          <a:p>
+            <a:pPr algn="r"/>
+            <a:r>
+              <a:rPr lang="en-US" sz="4000" kern="1200">
+                <a:solidFill>
+                  <a:srgbClr val="FFFFFF"/>
+                </a:solidFill>
+                <a:latin typeface="+mj-lt"/>
+                <a:ea typeface="+mj-ea"/>
+                <a:cs typeface="+mj-cs"/>
+              </a:rPr>
+              <a:t>O</a:t>
+            </a:r>
+            <a:r>
+              <a:rPr lang="en-US" sz="4000" kern="1200" dirty="0">
+                <a:solidFill>
+                  <a:srgbClr val="FFFFFF"/>
+                </a:solidFill>
+                <a:latin typeface="+mj-lt"/>
+                <a:ea typeface="+mj-ea"/>
+                <a:cs typeface="+mj-cs"/>
+              </a:rPr>
+              <a:t>utline</a:t>
+            </a:r>
+          </a:p>
+        </p:txBody>
+      </p:sp>
+      <p:sp>
+        <p:nvSpPr>
+          <p:cNvPr id="7" name="Rectangle 4">
+            <a:extLst>
+              <a:ext uri="{FF2B5EF4-FFF2-40B4-BE49-F238E27FC236}">
+                <a16:creationId xmlns:a16="http://schemas.microsoft.com/office/drawing/2014/main" id="{CA100D25-9D52-D420-8AAC-FE9937270484}"/>
+              </a:ext>
+            </a:extLst>
+          </p:cNvPr>
+          <p:cNvSpPr>
+            <a:spLocks noChangeArrowheads="1"/>
+          </p:cNvSpPr>
+          <p:nvPr/>
+        </p:nvSpPr>
+        <p:spPr bwMode="auto">
+          <a:xfrm>
+            <a:off x="4810259" y="649480"/>
+            <a:ext cx="6555347" cy="5546047"/>
+          </a:xfrm>
+          <a:prstGeom prst="rect">
+            <a:avLst/>
+          </a:prstGeom>
+          <a:extLst>
+            <a:ext uri="{909E8E84-426E-40DD-AFC4-6F175D3DCCD1}">
+              <a14:hiddenFill xmlns:a14="http://schemas.microsoft.com/office/drawing/2010/main">
+                <a:solidFill>
+                  <a:schemeClr val="accent1"/>
+                </a:solidFill>
+              </a14:hiddenFill>
+            </a:ext>
+            <a:ext uri="{91240B29-F687-4F45-9708-019B960494DF}">
+              <a14:hiddenLine xmlns:a14="http://schemas.microsoft.com/office/drawing/2010/main" w="9525">
+                <a:solidFill>
+                  <a:schemeClr val="tx1"/>
+                </a:solidFill>
+                <a:miter lim="800000"/>
+                <a:headEnd/>
+                <a:tailEnd/>
+              </a14:hiddenLine>
+            </a:ext>
+            <a:ext uri="{AF507438-7753-43E0-B8FC-AC1667EBCBE1}">
+              <a14:hiddenEffects xmlns:a14="http://schemas.microsoft.com/office/drawing/2010/main">
+                <a:effectLst>
+                  <a:outerShdw dist="35921" dir="2700000" algn="ctr" rotWithShape="0">
+                    <a:schemeClr val="bg2"/>
+                  </a:outerShdw>
+                </a:effectLst>
+              </a14:hiddenEffects>
+            </a:ext>
+          </a:extLst>
+        </p:spPr>
+        <p:txBody>
+          <a:bodyPr vert="horz" lIns="91440" tIns="45720" rIns="91440" bIns="45720" numCol="1" rtlCol="0" anchor="ctr" anchorCtr="0" compatLnSpc="1">
+            <a:prstTxWarp prst="textNoShape">
+              <a:avLst/>
+            </a:prstTxWarp>
+            <a:normAutofit/>
+          </a:bodyPr>
+          <a:lstStyle/>
+          <a:p>
+            <a:pPr marL="228600" marR="0" lvl="0" indent="-457200" fontAlgn="base">
+              <a:lnSpc>
+                <a:spcPct val="90000"/>
+              </a:lnSpc>
+              <a:spcBef>
+                <a:spcPct val="0"/>
+              </a:spcBef>
+              <a:spcAft>
+                <a:spcPts val="600"/>
+              </a:spcAft>
+              <a:buClrTx/>
+              <a:buSzTx/>
+              <a:buFont typeface="+mj-lt"/>
+              <a:buAutoNum type="arabicPeriod"/>
+              <a:tabLst/>
+            </a:pPr>
+            <a:r>
+              <a:rPr kumimoji="0" lang="en-US" altLang="en-US" sz="2000" b="0" i="0" u="none" strike="noStrike" cap="none" normalizeH="0" baseline="0" dirty="0">
+                <a:ln>
+                  <a:noFill/>
+                </a:ln>
+                <a:effectLst/>
+              </a:rPr>
+              <a:t>Project Idea</a:t>
+            </a:r>
+          </a:p>
+          <a:p>
+            <a:pPr marL="228600" marR="0" lvl="0" indent="-457200" fontAlgn="base">
+              <a:lnSpc>
+                <a:spcPct val="90000"/>
+              </a:lnSpc>
+              <a:spcBef>
+                <a:spcPct val="0"/>
+              </a:spcBef>
+              <a:spcAft>
+                <a:spcPts val="600"/>
+              </a:spcAft>
+              <a:buClrTx/>
+              <a:buSzTx/>
+              <a:buFont typeface="+mj-lt"/>
+              <a:buAutoNum type="arabicPeriod"/>
+              <a:tabLst/>
+            </a:pPr>
+            <a:r>
+              <a:rPr kumimoji="0" lang="en-US" altLang="en-US" sz="2000" b="0" i="0" u="none" strike="noStrike" cap="none" normalizeH="0" baseline="0" dirty="0">
+                <a:ln>
+                  <a:noFill/>
+                </a:ln>
+                <a:effectLst/>
+              </a:rPr>
+              <a:t>Technologies Used</a:t>
+            </a:r>
+          </a:p>
+          <a:p>
+            <a:pPr marL="228600" marR="0" lvl="0" indent="-457200" fontAlgn="base">
+              <a:lnSpc>
+                <a:spcPct val="90000"/>
+              </a:lnSpc>
+              <a:spcBef>
+                <a:spcPct val="0"/>
+              </a:spcBef>
+              <a:spcAft>
+                <a:spcPts val="600"/>
+              </a:spcAft>
+              <a:buClrTx/>
+              <a:buSzTx/>
+              <a:buFont typeface="+mj-lt"/>
+              <a:buAutoNum type="arabicPeriod"/>
+              <a:tabLst/>
+            </a:pPr>
+            <a:r>
+              <a:rPr kumimoji="0" lang="en-US" altLang="en-US" sz="2000" b="0" i="0" u="none" strike="noStrike" cap="none" normalizeH="0" baseline="0" dirty="0">
+                <a:ln>
+                  <a:noFill/>
+                </a:ln>
+                <a:effectLst/>
+              </a:rPr>
+              <a:t>System Structure</a:t>
+            </a:r>
+          </a:p>
+          <a:p>
+            <a:pPr marL="228600" marR="0" lvl="0" indent="-457200" fontAlgn="base">
+              <a:lnSpc>
+                <a:spcPct val="90000"/>
+              </a:lnSpc>
+              <a:spcBef>
+                <a:spcPct val="0"/>
+              </a:spcBef>
+              <a:spcAft>
+                <a:spcPts val="600"/>
+              </a:spcAft>
+              <a:buClrTx/>
+              <a:buSzTx/>
+              <a:buFont typeface="+mj-lt"/>
+              <a:buAutoNum type="arabicPeriod"/>
+              <a:tabLst/>
+            </a:pPr>
+            <a:r>
+              <a:rPr kumimoji="0" lang="en-US" altLang="en-US" sz="2000" b="0" i="0" u="none" strike="noStrike" cap="none" normalizeH="0" baseline="0" dirty="0">
+                <a:ln>
+                  <a:noFill/>
+                </a:ln>
+                <a:effectLst/>
+              </a:rPr>
+              <a:t>Development Decisions</a:t>
+            </a:r>
+          </a:p>
+          <a:p>
+            <a:pPr marL="228600" marR="0" lvl="0" indent="-457200" fontAlgn="base">
+              <a:lnSpc>
+                <a:spcPct val="90000"/>
+              </a:lnSpc>
+              <a:spcBef>
+                <a:spcPct val="0"/>
+              </a:spcBef>
+              <a:spcAft>
+                <a:spcPts val="600"/>
+              </a:spcAft>
+              <a:buClrTx/>
+              <a:buSzTx/>
+              <a:buFont typeface="+mj-lt"/>
+              <a:buAutoNum type="arabicPeriod"/>
+              <a:tabLst/>
+            </a:pPr>
+            <a:r>
+              <a:rPr kumimoji="0" lang="en-US" altLang="en-US" sz="2000" b="0" i="0" u="none" strike="noStrike" cap="none" normalizeH="0" baseline="0" dirty="0">
+                <a:ln>
+                  <a:noFill/>
+                </a:ln>
+                <a:effectLst/>
+              </a:rPr>
+              <a:t>Task Division</a:t>
+            </a:r>
+          </a:p>
+          <a:p>
+            <a:pPr marL="228600" marR="0" lvl="0" indent="-457200" fontAlgn="base">
+              <a:lnSpc>
+                <a:spcPct val="90000"/>
+              </a:lnSpc>
+              <a:spcBef>
+                <a:spcPct val="0"/>
+              </a:spcBef>
+              <a:spcAft>
+                <a:spcPts val="600"/>
+              </a:spcAft>
+              <a:buClrTx/>
+              <a:buSzTx/>
+              <a:buFont typeface="+mj-lt"/>
+              <a:buAutoNum type="arabicPeriod"/>
+              <a:tabLst/>
+            </a:pPr>
+            <a:r>
+              <a:rPr kumimoji="0" lang="en-US" altLang="en-US" sz="2000" b="0" i="0" u="none" strike="noStrike" cap="none" normalizeH="0" baseline="0" dirty="0">
+                <a:ln>
+                  <a:noFill/>
+                </a:ln>
+                <a:effectLst/>
+              </a:rPr>
+              <a:t>Demonstration</a:t>
+            </a:r>
+          </a:p>
+          <a:p>
+            <a:pPr marL="228600" marR="0" lvl="0" indent="-457200" fontAlgn="base">
+              <a:lnSpc>
+                <a:spcPct val="90000"/>
+              </a:lnSpc>
+              <a:spcBef>
+                <a:spcPct val="0"/>
+              </a:spcBef>
+              <a:spcAft>
+                <a:spcPts val="600"/>
+              </a:spcAft>
+              <a:buClrTx/>
+              <a:buSzTx/>
+              <a:buFont typeface="+mj-lt"/>
+              <a:buAutoNum type="arabicPeriod"/>
+              <a:tabLst/>
+            </a:pPr>
+            <a:r>
+              <a:rPr kumimoji="0" lang="en-US" altLang="en-US" sz="2000" b="0" i="0" u="none" strike="noStrike" cap="none" normalizeH="0" baseline="0" dirty="0">
+                <a:ln>
+                  <a:noFill/>
+                </a:ln>
+                <a:effectLst/>
+              </a:rPr>
+              <a:t>Conclusion</a:t>
+            </a:r>
+          </a:p>
+          <a:p>
+            <a:pPr marL="0" marR="0" lvl="0" indent="-228600" fontAlgn="base">
+              <a:lnSpc>
+                <a:spcPct val="90000"/>
+              </a:lnSpc>
+              <a:spcBef>
+                <a:spcPct val="0"/>
+              </a:spcBef>
+              <a:spcAft>
+                <a:spcPts val="600"/>
+              </a:spcAft>
+              <a:buClrTx/>
+              <a:buSzTx/>
+              <a:buFont typeface="Arial" panose="020B0604020202020204" pitchFamily="34" charset="0"/>
+              <a:buChar char="•"/>
+              <a:tabLst/>
+            </a:pPr>
+            <a:endParaRPr kumimoji="0" lang="en-US" altLang="en-US" sz="2000" b="0" i="0" u="none" strike="noStrike" cap="none" normalizeH="0" baseline="0" dirty="0">
+              <a:ln>
+                <a:noFill/>
+              </a:ln>
+              <a:effectLst/>
+            </a:endParaRPr>
+          </a:p>
+        </p:txBody>
+      </p:sp>
+    </p:spTree>
+    <p:extLst>
+      <p:ext uri="{BB962C8B-B14F-4D97-AF65-F5344CB8AC3E}">
+        <p14:creationId xmlns:p14="http://schemas.microsoft.com/office/powerpoint/2010/main" val="3082935939"/>
+      </p:ext>
+    </p:extLst>
+  </p:cSld>
+  <p:clrMapOvr>
+    <a:masterClrMapping/>
+  </p:clrMapOvr>
+</p:sld>
+</file>
+
+<file path=ppt/slides/slide3.xml><?xml version="1.0" encoding="utf-8"?>
 <p:sld xmlns:a="http://schemas.openxmlformats.org/drawingml/2006/main" xmlns:r="http://schemas.openxmlformats.org/officeDocument/2006/relationships" xmlns:p="http://schemas.openxmlformats.org/presentationml/2006/main">
   <p:cSld>
     <p:spTree>
@@ -3467,7 +5541,9 @@
         </p:nvSpPr>
         <p:spPr/>
         <p:txBody>
-          <a:bodyPr/>
+          <a:bodyPr>
+            <a:normAutofit fontScale="92500" lnSpcReduction="10000"/>
+          </a:bodyPr>
           <a:lstStyle/>
           <a:p>
             <a:pPr marL="0" indent="0">
@@ -3494,6 +5570,42 @@
             <a:r>
               <a:rPr lang="en-US" dirty="0"/>
               <a:t>No large training dataset required</a:t>
+            </a:r>
+          </a:p>
+          <a:p>
+            <a:endParaRPr lang="de-DE" dirty="0"/>
+          </a:p>
+          <a:p>
+            <a:r>
+              <a:rPr lang="en-GB" dirty="0"/>
+              <a:t>Maze game controlled by voice </a:t>
+            </a:r>
+          </a:p>
+          <a:p>
+            <a:r>
+              <a:rPr lang="en-GB" dirty="0"/>
+              <a:t>Combination of: </a:t>
+            </a:r>
+          </a:p>
+          <a:p>
+            <a:pPr lvl="1"/>
+            <a:r>
+              <a:rPr lang="en-GB" dirty="0"/>
+              <a:t>Speech Recognition </a:t>
+            </a:r>
+          </a:p>
+          <a:p>
+            <a:pPr lvl="1"/>
+            <a:r>
+              <a:rPr lang="en-GB" dirty="0"/>
+              <a:t>Game Development </a:t>
+            </a:r>
+          </a:p>
+          <a:p>
+            <a:pPr lvl="1"/>
+            <a:r>
+              <a:rPr lang="en-GB" dirty="0"/>
+              <a:t>Real-time interaction</a:t>
             </a:r>
           </a:p>
           <a:p>
@@ -3514,7 +5626,7 @@
 </p:sld>
 </file>
 
-<file path=ppt/slides/slide3.xml><?xml version="1.0" encoding="utf-8"?>
+<file path=ppt/slides/slide4.xml><?xml version="1.0" encoding="utf-8"?>
 <p:sld xmlns:a="http://schemas.openxmlformats.org/drawingml/2006/main" xmlns:r="http://schemas.openxmlformats.org/officeDocument/2006/relationships" xmlns:p="http://schemas.openxmlformats.org/presentationml/2006/main">
   <p:cSld>
     <p:spTree>
@@ -3693,7 +5805,7 @@
 </p:sld>
 </file>
 
-<file path=ppt/slides/slide4.xml><?xml version="1.0" encoding="utf-8"?>
+<file path=ppt/slides/slide5.xml><?xml version="1.0" encoding="utf-8"?>
 <p:sld xmlns:a="http://schemas.openxmlformats.org/drawingml/2006/main" xmlns:r="http://schemas.openxmlformats.org/officeDocument/2006/relationships" xmlns:p="http://schemas.openxmlformats.org/presentationml/2006/main">
   <p:cSld>
     <p:spTree>
@@ -3805,7 +5917,7 @@
 </p:sld>
 </file>
 
-<file path=ppt/slides/slide5.xml><?xml version="1.0" encoding="utf-8"?>
+<file path=ppt/slides/slide6.xml><?xml version="1.0" encoding="utf-8"?>
 <p:sld xmlns:a="http://schemas.openxmlformats.org/drawingml/2006/main" xmlns:r="http://schemas.openxmlformats.org/officeDocument/2006/relationships" xmlns:p="http://schemas.openxmlformats.org/presentationml/2006/main">
   <p:cSld>
     <p:spTree>
@@ -4265,4 +6377,319 @@
     </a:ext>
   </a:extLst>
 </a:theme>
+</file>
+
+<file path=ppt/theme/theme2.xml><?xml version="1.0" encoding="utf-8"?>
+<a:theme xmlns:a="http://schemas.openxmlformats.org/drawingml/2006/main" name="Office Theme">
+  <a:themeElements>
+    <a:clrScheme name="Office">
+      <a:dk1>
+        <a:sysClr val="windowText" lastClr="000000"/>
+      </a:dk1>
+      <a:lt1>
+        <a:sysClr val="window" lastClr="FFFFFF"/>
+      </a:lt1>
+      <a:dk2>
+        <a:srgbClr val="0E2841"/>
+      </a:dk2>
+      <a:lt2>
+        <a:srgbClr val="E8E8E8"/>
+      </a:lt2>
+      <a:accent1>
+        <a:srgbClr val="156082"/>
+      </a:accent1>
+      <a:accent2>
+        <a:srgbClr val="E97132"/>
+      </a:accent2>
+      <a:accent3>
+        <a:srgbClr val="196B24"/>
+      </a:accent3>
+      <a:accent4>
+        <a:srgbClr val="0F9ED5"/>
+      </a:accent4>
+      <a:accent5>
+        <a:srgbClr val="A02B93"/>
+      </a:accent5>
+      <a:accent6>
+        <a:srgbClr val="4EA72E"/>
+      </a:accent6>
+      <a:hlink>
+        <a:srgbClr val="467886"/>
+      </a:hlink>
+      <a:folHlink>
+        <a:srgbClr val="96607D"/>
+      </a:folHlink>
+    </a:clrScheme>
+    <a:fontScheme name="Office">
+      <a:majorFont>
+        <a:latin typeface="Aptos Display" panose="02110004020202020204"/>
+        <a:ea typeface=""/>
+        <a:cs typeface=""/>
+        <a:font script="Jpan" typeface="游ゴシック Light"/>
+        <a:font script="Hang" typeface="맑은 고딕"/>
+        <a:font script="Hans" typeface="等线 Light"/>
+        <a:font script="Hant" typeface="新細明體"/>
+        <a:font script="Arab" typeface="Times New Roman"/>
+        <a:font script="Hebr" typeface="Times New Roman"/>
+        <a:font script="Thai" typeface="Angsana New"/>
+        <a:font script="Ethi" typeface="Nyala"/>
+        <a:font script="Beng" typeface="Vrinda"/>
+        <a:font script="Gujr" typeface="Shruti"/>
+        <a:font script="Khmr" typeface="MoolBoran"/>
+        <a:font script="Knda" typeface="Tunga"/>
+        <a:font script="Guru" typeface="Raavi"/>
+        <a:font script="Cans" typeface="Euphemia"/>
+        <a:font script="Cher" typeface="Plantagenet Cherokee"/>
+        <a:font script="Yiii" typeface="Microsoft Yi Baiti"/>
+        <a:font script="Tibt" typeface="Microsoft Himalaya"/>
+        <a:font script="Thaa" typeface="MV Boli"/>
+        <a:font script="Deva" typeface="Mangal"/>
+        <a:font script="Telu" typeface="Gautami"/>
+        <a:font script="Taml" typeface="Latha"/>
+        <a:font script="Syrc" typeface="Estrangelo Edessa"/>
+        <a:font script="Orya" typeface="Kalinga"/>
+        <a:font script="Mlym" typeface="Kartika"/>
+        <a:font script="Laoo" typeface="DokChampa"/>
+        <a:font script="Sinh" typeface="Iskoola Pota"/>
+        <a:font script="Mong" typeface="Mongolian Baiti"/>
+        <a:font script="Viet" typeface="Times New Roman"/>
+        <a:font script="Uigh" typeface="Microsoft Uighur"/>
+        <a:font script="Geor" typeface="Sylfaen"/>
+        <a:font script="Armn" typeface="Arial"/>
+        <a:font script="Bugi" typeface="Leelawadee UI"/>
+        <a:font script="Bopo" typeface="Microsoft JhengHei"/>
+        <a:font script="Java" typeface="Javanese Text"/>
+        <a:font script="Lisu" typeface="Segoe UI"/>
+        <a:font script="Mymr" typeface="Myanmar Text"/>
+        <a:font script="Nkoo" typeface="Ebrima"/>
+        <a:font script="Olck" typeface="Nirmala UI"/>
+        <a:font script="Osma" typeface="Ebrima"/>
+        <a:font script="Phag" typeface="Phagspa"/>
+        <a:font script="Syrn" typeface="Estrangelo Edessa"/>
+        <a:font script="Syrj" typeface="Estrangelo Edessa"/>
+        <a:font script="Syre" typeface="Estrangelo Edessa"/>
+        <a:font script="Sora" typeface="Nirmala UI"/>
+        <a:font script="Tale" typeface="Microsoft Tai Le"/>
+        <a:font script="Talu" typeface="Microsoft New Tai Lue"/>
+        <a:font script="Tfng" typeface="Ebrima"/>
+      </a:majorFont>
+      <a:minorFont>
+        <a:latin typeface="Aptos" panose="02110004020202020204"/>
+        <a:ea typeface=""/>
+        <a:cs typeface=""/>
+        <a:font script="Jpan" typeface="游ゴシック"/>
+        <a:font script="Hang" typeface="맑은 고딕"/>
+        <a:font script="Hans" typeface="等线"/>
+        <a:font script="Hant" typeface="新細明體"/>
+        <a:font script="Arab" typeface="Arial"/>
+        <a:font script="Hebr" typeface="Arial"/>
+        <a:font script="Thai" typeface="Cordia New"/>
+        <a:font script="Ethi" typeface="Nyala"/>
+        <a:font script="Beng" typeface="Vrinda"/>
+        <a:font script="Gujr" typeface="Shruti"/>
+        <a:font script="Khmr" typeface="DaunPenh"/>
+        <a:font script="Knda" typeface="Tunga"/>
+        <a:font script="Guru" typeface="Raavi"/>
+        <a:font script="Cans" typeface="Euphemia"/>
+        <a:font script="Cher" typeface="Plantagenet Cherokee"/>
+        <a:font script="Yiii" typeface="Microsoft Yi Baiti"/>
+        <a:font script="Tibt" typeface="Microsoft Himalaya"/>
+        <a:font script="Thaa" typeface="MV Boli"/>
+        <a:font script="Deva" typeface="Mangal"/>
+        <a:font script="Telu" typeface="Gautami"/>
+        <a:font script="Taml" typeface="Latha"/>
+        <a:font script="Syrc" typeface="Estrangelo Edessa"/>
+        <a:font script="Orya" typeface="Kalinga"/>
+        <a:font script="Mlym" typeface="Kartika"/>
+        <a:font script="Laoo" typeface="DokChampa"/>
+        <a:font script="Sinh" typeface="Iskoola Pota"/>
+        <a:font script="Mong" typeface="Mongolian Baiti"/>
+        <a:font script="Viet" typeface="Arial"/>
+        <a:font script="Uigh" typeface="Microsoft Uighur"/>
+        <a:font script="Geor" typeface="Sylfaen"/>
+        <a:font script="Armn" typeface="Arial"/>
+        <a:font script="Bugi" typeface="Leelawadee UI"/>
+        <a:font script="Bopo" typeface="Microsoft JhengHei"/>
+        <a:font script="Java" typeface="Javanese Text"/>
+        <a:font script="Lisu" typeface="Segoe UI"/>
+        <a:font script="Mymr" typeface="Myanmar Text"/>
+        <a:font script="Nkoo" typeface="Ebrima"/>
+        <a:font script="Olck" typeface="Nirmala UI"/>
+        <a:font script="Osma" typeface="Ebrima"/>
+        <a:font script="Phag" typeface="Phagspa"/>
+        <a:font script="Syrn" typeface="Estrangelo Edessa"/>
+        <a:font script="Syrj" typeface="Estrangelo Edessa"/>
+        <a:font script="Syre" typeface="Estrangelo Edessa"/>
+        <a:font script="Sora" typeface="Nirmala UI"/>
+        <a:font script="Tale" typeface="Microsoft Tai Le"/>
+        <a:font script="Talu" typeface="Microsoft New Tai Lue"/>
+        <a:font script="Tfng" typeface="Ebrima"/>
+      </a:minorFont>
+    </a:fontScheme>
+    <a:fmtScheme name="Office">
+      <a:fillStyleLst>
+        <a:solidFill>
+          <a:schemeClr val="phClr"/>
+        </a:solidFill>
+        <a:gradFill rotWithShape="1">
+          <a:gsLst>
+            <a:gs pos="0">
+              <a:schemeClr val="phClr">
+                <a:lumMod val="110000"/>
+                <a:satMod val="105000"/>
+                <a:tint val="67000"/>
+              </a:schemeClr>
+            </a:gs>
+            <a:gs pos="50000">
+              <a:schemeClr val="phClr">
+                <a:lumMod val="105000"/>
+                <a:satMod val="103000"/>
+                <a:tint val="73000"/>
+              </a:schemeClr>
+            </a:gs>
+            <a:gs pos="100000">
+              <a:schemeClr val="phClr">
+                <a:lumMod val="105000"/>
+                <a:satMod val="109000"/>
+                <a:tint val="81000"/>
+              </a:schemeClr>
+            </a:gs>
+          </a:gsLst>
+          <a:lin ang="5400000" scaled="0"/>
+        </a:gradFill>
+        <a:gradFill rotWithShape="1">
+          <a:gsLst>
+            <a:gs pos="0">
+              <a:schemeClr val="phClr">
+                <a:satMod val="103000"/>
+                <a:lumMod val="102000"/>
+                <a:tint val="94000"/>
+              </a:schemeClr>
+            </a:gs>
+            <a:gs pos="50000">
+              <a:schemeClr val="phClr">
+                <a:satMod val="110000"/>
+                <a:lumMod val="100000"/>
+                <a:shade val="100000"/>
+              </a:schemeClr>
+            </a:gs>
+            <a:gs pos="100000">
+              <a:schemeClr val="phClr">
+                <a:lumMod val="99000"/>
+                <a:satMod val="120000"/>
+                <a:shade val="78000"/>
+              </a:schemeClr>
+            </a:gs>
+          </a:gsLst>
+          <a:lin ang="5400000" scaled="0"/>
+        </a:gradFill>
+      </a:fillStyleLst>
+      <a:lnStyleLst>
+        <a:ln w="12700" cap="flat" cmpd="sng" algn="ctr">
+          <a:solidFill>
+            <a:schemeClr val="phClr"/>
+          </a:solidFill>
+          <a:prstDash val="solid"/>
+          <a:miter lim="800000"/>
+        </a:ln>
+        <a:ln w="19050" cap="flat" cmpd="sng" algn="ctr">
+          <a:solidFill>
+            <a:schemeClr val="phClr"/>
+          </a:solidFill>
+          <a:prstDash val="solid"/>
+          <a:miter lim="800000"/>
+        </a:ln>
+        <a:ln w="25400" cap="flat" cmpd="sng" algn="ctr">
+          <a:solidFill>
+            <a:schemeClr val="phClr"/>
+          </a:solidFill>
+          <a:prstDash val="solid"/>
+          <a:miter lim="800000"/>
+        </a:ln>
+      </a:lnStyleLst>
+      <a:effectStyleLst>
+        <a:effectStyle>
+          <a:effectLst/>
+        </a:effectStyle>
+        <a:effectStyle>
+          <a:effectLst/>
+        </a:effectStyle>
+        <a:effectStyle>
+          <a:effectLst>
+            <a:outerShdw blurRad="57150" dist="19050" dir="5400000" algn="ctr" rotWithShape="0">
+              <a:srgbClr val="000000">
+                <a:alpha val="63000"/>
+              </a:srgbClr>
+            </a:outerShdw>
+          </a:effectLst>
+        </a:effectStyle>
+      </a:effectStyleLst>
+      <a:bgFillStyleLst>
+        <a:solidFill>
+          <a:schemeClr val="phClr"/>
+        </a:solidFill>
+        <a:solidFill>
+          <a:schemeClr val="phClr">
+            <a:tint val="95000"/>
+            <a:satMod val="170000"/>
+          </a:schemeClr>
+        </a:solidFill>
+        <a:gradFill rotWithShape="1">
+          <a:gsLst>
+            <a:gs pos="0">
+              <a:schemeClr val="phClr">
+                <a:tint val="93000"/>
+                <a:satMod val="150000"/>
+                <a:shade val="98000"/>
+                <a:lumMod val="102000"/>
+              </a:schemeClr>
+            </a:gs>
+            <a:gs pos="50000">
+              <a:schemeClr val="phClr">
+                <a:tint val="98000"/>
+                <a:satMod val="130000"/>
+                <a:shade val="90000"/>
+                <a:lumMod val="103000"/>
+              </a:schemeClr>
+            </a:gs>
+            <a:gs pos="100000">
+              <a:schemeClr val="phClr">
+                <a:shade val="63000"/>
+                <a:satMod val="120000"/>
+              </a:schemeClr>
+            </a:gs>
+          </a:gsLst>
+          <a:lin ang="5400000" scaled="0"/>
+        </a:gradFill>
+      </a:bgFillStyleLst>
+    </a:fmtScheme>
+  </a:themeElements>
+  <a:objectDefaults>
+    <a:lnDef>
+      <a:spPr/>
+      <a:bodyPr/>
+      <a:lstStyle/>
+      <a:style>
+        <a:lnRef idx="2">
+          <a:schemeClr val="accent1"/>
+        </a:lnRef>
+        <a:fillRef idx="0">
+          <a:schemeClr val="accent1"/>
+        </a:fillRef>
+        <a:effectRef idx="1">
+          <a:schemeClr val="accent1"/>
+        </a:effectRef>
+        <a:fontRef idx="minor">
+          <a:schemeClr val="tx1"/>
+        </a:fontRef>
+      </a:style>
+    </a:lnDef>
+  </a:objectDefaults>
+  <a:extraClrSchemeLst/>
+  <a:extLst>
+    <a:ext uri="{05A4C25C-085E-4340-85A3-A5531E510DB2}">
+      <thm15:themeFamily xmlns:thm15="http://schemas.microsoft.com/office/thememl/2012/main" name="Office Theme" id="{2E142A2C-CD16-42D6-873A-C26D2A0506FA}" vid="{1BDDFF52-6CD6-40A5-AB3C-68EB2F1E4D0A}"/>
+    </a:ext>
+  </a:extLst>
+</a:theme>
 </file>
--- a/presentation.pptx
+++ b/presentation.pptx
@@ -5,15 +5,17 @@
     <p:sldMasterId id="2147483648" r:id="rId1"/>
   </p:sldMasterIdLst>
   <p:notesMasterIdLst>
-    <p:notesMasterId r:id="rId8"/>
+    <p:notesMasterId r:id="rId10"/>
   </p:notesMasterIdLst>
   <p:sldIdLst>
     <p:sldId id="261" r:id="rId2"/>
     <p:sldId id="262" r:id="rId3"/>
     <p:sldId id="257" r:id="rId4"/>
     <p:sldId id="258" r:id="rId5"/>
-    <p:sldId id="259" r:id="rId6"/>
-    <p:sldId id="260" r:id="rId7"/>
+    <p:sldId id="265" r:id="rId6"/>
+    <p:sldId id="267" r:id="rId7"/>
+    <p:sldId id="259" r:id="rId8"/>
+    <p:sldId id="260" r:id="rId9"/>
   </p:sldIdLst>
   <p:sldSz cx="12192000" cy="6858000"/>
   <p:notesSz cx="6858000" cy="9144000"/>
@@ -554,6 +556,770 @@
     <p:extLst>
       <p:ext uri="{BB962C8B-B14F-4D97-AF65-F5344CB8AC3E}">
         <p14:creationId xmlns:p14="http://schemas.microsoft.com/office/powerpoint/2010/main" val="1289421809"/>
+      </p:ext>
+    </p:extLst>
+  </p:cSld>
+  <p:clrMapOvr>
+    <a:masterClrMapping/>
+  </p:clrMapOvr>
+</p:notes>
+</file>
+
+<file path=ppt/notesSlides/notesSlide2.xml><?xml version="1.0" encoding="utf-8"?>
+<p:notes xmlns:a="http://schemas.openxmlformats.org/drawingml/2006/main" xmlns:r="http://schemas.openxmlformats.org/officeDocument/2006/relationships" xmlns:p="http://schemas.openxmlformats.org/presentationml/2006/main">
+  <p:cSld>
+    <p:spTree>
+      <p:nvGrpSpPr>
+        <p:cNvPr id="1" name=""/>
+        <p:cNvGrpSpPr/>
+        <p:nvPr/>
+      </p:nvGrpSpPr>
+      <p:grpSpPr>
+        <a:xfrm>
+          <a:off x="0" y="0"/>
+          <a:ext cx="0" cy="0"/>
+          <a:chOff x="0" y="0"/>
+          <a:chExt cx="0" cy="0"/>
+        </a:xfrm>
+      </p:grpSpPr>
+      <p:sp>
+        <p:nvSpPr>
+          <p:cNvPr id="2" name="Slide Image Placeholder 1"/>
+          <p:cNvSpPr>
+            <a:spLocks noGrp="1" noRot="1" noChangeAspect="1"/>
+          </p:cNvSpPr>
+          <p:nvPr>
+            <p:ph type="sldImg"/>
+          </p:nvPr>
+        </p:nvSpPr>
+        <p:spPr/>
+      </p:sp>
+      <p:sp>
+        <p:nvSpPr>
+          <p:cNvPr id="3" name="Notes Placeholder 2"/>
+          <p:cNvSpPr>
+            <a:spLocks noGrp="1"/>
+          </p:cNvSpPr>
+          <p:nvPr>
+            <p:ph type="body" idx="1"/>
+          </p:nvPr>
+        </p:nvSpPr>
+        <p:spPr/>
+        <p:txBody>
+          <a:bodyPr/>
+          <a:lstStyle/>
+          <a:p>
+            <a:r>
+              <a:rPr lang="en-GB" dirty="0"/>
+              <a:t>First, we introduce speech recognition using </a:t>
+            </a:r>
+            <a:r>
+              <a:rPr lang="en-GB" dirty="0" err="1"/>
+              <a:t>Vosk</a:t>
+            </a:r>
+            <a:r>
+              <a:rPr lang="en-GB" dirty="0"/>
+              <a:t> and Kaldi. The input is a raw audio signal, which is converted into MFCC features (Mel-Frequency Cepstral Coefficients). These features represent important speech frequencies based on how humans perceive sound.</a:t>
+            </a:r>
+          </a:p>
+          <a:p>
+            <a:r>
+              <a:rPr lang="en-GB" dirty="0" err="1"/>
+              <a:t>Vosk</a:t>
+            </a:r>
+            <a:r>
+              <a:rPr lang="en-GB" dirty="0"/>
+              <a:t> and Kaldi mainly use two models. First, the acoustic model maps these audio features to possible speech sounds. In this pipeline, a GMM-HMM based acoustic model is used. Gaussian Mixture Models, or GMMs, are used to model the probability of speech sounds, while Hidden Markov Models, or HMMs, model how speech changes over time.</a:t>
+            </a:r>
+          </a:p>
+          <a:p>
+            <a:r>
+              <a:rPr lang="en-GB" dirty="0"/>
+              <a:t>Then, the language model predicts the most likely word sequence using word probabilities and grammar statistics. Finally, the decoder combines the acoustic model scores and the language model scores to determine the most probable sentence or command.</a:t>
+            </a:r>
+          </a:p>
+          <a:p>
+            <a:r>
+              <a:rPr lang="en-GB" dirty="0"/>
+              <a:t>In our project, we extract commands like ‘up’, ‘down’, ‘left’, ‘right’, and ‘exit’ to control the maze game</a:t>
+            </a:r>
+          </a:p>
+          <a:p>
+            <a:pPr marL="0" marR="0" lvl="0" indent="0" algn="l" defTabSz="914400" rtl="0" eaLnBrk="1" fontAlgn="auto" latinLnBrk="0" hangingPunct="1">
+              <a:lnSpc>
+                <a:spcPct val="100000"/>
+              </a:lnSpc>
+              <a:spcBef>
+                <a:spcPts val="0"/>
+              </a:spcBef>
+              <a:spcAft>
+                <a:spcPts val="0"/>
+              </a:spcAft>
+              <a:buClrTx/>
+              <a:buSzTx/>
+              <a:buFontTx/>
+              <a:buNone/>
+              <a:tabLst/>
+              <a:defRPr/>
+            </a:pPr>
+            <a:endParaRPr lang="en-GB" sz="1200" b="0" i="0" kern="1200" dirty="0">
+              <a:solidFill>
+                <a:schemeClr val="tx1"/>
+              </a:solidFill>
+              <a:effectLst/>
+              <a:latin typeface="+mn-lt"/>
+              <a:ea typeface="+mn-ea"/>
+              <a:cs typeface="+mn-cs"/>
+            </a:endParaRPr>
+          </a:p>
+          <a:p>
+            <a:pPr marL="0" marR="0" lvl="0" indent="0" algn="l" defTabSz="914400" rtl="0" eaLnBrk="1" fontAlgn="auto" latinLnBrk="0" hangingPunct="1">
+              <a:lnSpc>
+                <a:spcPct val="100000"/>
+              </a:lnSpc>
+              <a:spcBef>
+                <a:spcPts val="0"/>
+              </a:spcBef>
+              <a:spcAft>
+                <a:spcPts val="0"/>
+              </a:spcAft>
+              <a:buClrTx/>
+              <a:buSzTx/>
+              <a:buFontTx/>
+              <a:buNone/>
+              <a:tabLst/>
+              <a:defRPr/>
+            </a:pPr>
+            <a:endParaRPr lang="en-GB" sz="1200" b="0" i="0" kern="1200" dirty="0">
+              <a:solidFill>
+                <a:schemeClr val="tx1"/>
+              </a:solidFill>
+              <a:effectLst/>
+              <a:latin typeface="+mn-lt"/>
+              <a:ea typeface="+mn-ea"/>
+              <a:cs typeface="+mn-cs"/>
+            </a:endParaRPr>
+          </a:p>
+          <a:p>
+            <a:pPr marL="0" marR="0" lvl="0" indent="0" algn="l" defTabSz="914400" rtl="0" eaLnBrk="1" fontAlgn="auto" latinLnBrk="0" hangingPunct="1">
+              <a:lnSpc>
+                <a:spcPct val="100000"/>
+              </a:lnSpc>
+              <a:spcBef>
+                <a:spcPts val="0"/>
+              </a:spcBef>
+              <a:spcAft>
+                <a:spcPts val="0"/>
+              </a:spcAft>
+              <a:buClrTx/>
+              <a:buSzTx/>
+              <a:buFontTx/>
+              <a:buNone/>
+              <a:tabLst/>
+              <a:defRPr/>
+            </a:pPr>
+            <a:r>
+              <a:rPr lang="en-GB" sz="1200" b="0" i="0" kern="1200" dirty="0">
+                <a:solidFill>
+                  <a:schemeClr val="tx1"/>
+                </a:solidFill>
+                <a:effectLst/>
+                <a:latin typeface="+mn-lt"/>
+                <a:ea typeface="+mn-ea"/>
+                <a:cs typeface="+mn-cs"/>
+              </a:rPr>
+              <a:t>https://www.researchgate.net/publication/228828379_The_Kaldi_speech_recognition_toolkit</a:t>
+            </a:r>
+          </a:p>
+          <a:p>
+            <a:pPr marL="0" marR="0" lvl="0" indent="0" algn="l" defTabSz="914400" rtl="0" eaLnBrk="1" fontAlgn="auto" latinLnBrk="0" hangingPunct="1">
+              <a:lnSpc>
+                <a:spcPct val="100000"/>
+              </a:lnSpc>
+              <a:spcBef>
+                <a:spcPts val="0"/>
+              </a:spcBef>
+              <a:spcAft>
+                <a:spcPts val="0"/>
+              </a:spcAft>
+              <a:buClrTx/>
+              <a:buSzTx/>
+              <a:buFontTx/>
+              <a:buNone/>
+              <a:tabLst/>
+              <a:defRPr/>
+            </a:pPr>
+            <a:endParaRPr lang="en-GB" sz="1200" b="0" i="0" kern="1200" dirty="0">
+              <a:solidFill>
+                <a:schemeClr val="tx1"/>
+              </a:solidFill>
+              <a:effectLst/>
+              <a:latin typeface="+mn-lt"/>
+              <a:ea typeface="+mn-ea"/>
+              <a:cs typeface="+mn-cs"/>
+            </a:endParaRPr>
+          </a:p>
+          <a:p>
+            <a:pPr marL="0" marR="0" lvl="0" indent="0" algn="l" defTabSz="914400" rtl="0" eaLnBrk="1" fontAlgn="auto" latinLnBrk="0" hangingPunct="1">
+              <a:lnSpc>
+                <a:spcPct val="100000"/>
+              </a:lnSpc>
+              <a:spcBef>
+                <a:spcPts val="0"/>
+              </a:spcBef>
+              <a:spcAft>
+                <a:spcPts val="0"/>
+              </a:spcAft>
+              <a:buClrTx/>
+              <a:buSzTx/>
+              <a:buFontTx/>
+              <a:buNone/>
+              <a:tabLst/>
+              <a:defRPr/>
+            </a:pPr>
+            <a:r>
+              <a:rPr lang="en-GB" sz="1200" b="0" i="0" kern="1200" dirty="0">
+                <a:solidFill>
+                  <a:schemeClr val="tx1"/>
+                </a:solidFill>
+                <a:effectLst/>
+                <a:latin typeface="+mn-lt"/>
+                <a:ea typeface="+mn-ea"/>
+                <a:cs typeface="+mn-cs"/>
+              </a:rPr>
+              <a:t>https://alphacephei.com/vosk/models</a:t>
+            </a:r>
+          </a:p>
+          <a:p>
+            <a:pPr marL="0" marR="0" lvl="0" indent="0" algn="l" defTabSz="914400" rtl="0" eaLnBrk="1" fontAlgn="auto" latinLnBrk="0" hangingPunct="1">
+              <a:lnSpc>
+                <a:spcPct val="100000"/>
+              </a:lnSpc>
+              <a:spcBef>
+                <a:spcPts val="0"/>
+              </a:spcBef>
+              <a:spcAft>
+                <a:spcPts val="0"/>
+              </a:spcAft>
+              <a:buClrTx/>
+              <a:buSzTx/>
+              <a:buFontTx/>
+              <a:buNone/>
+              <a:tabLst/>
+              <a:defRPr/>
+            </a:pPr>
+            <a:r>
+              <a:rPr lang="en-GB" sz="1200" b="0" i="0" kern="1200" dirty="0">
+                <a:solidFill>
+                  <a:schemeClr val="tx1"/>
+                </a:solidFill>
+                <a:effectLst/>
+                <a:latin typeface="+mn-lt"/>
+                <a:ea typeface="+mn-ea"/>
+                <a:cs typeface="+mn-cs"/>
+              </a:rPr>
+              <a:t>In </a:t>
+            </a:r>
+            <a:r>
+              <a:rPr lang="en-GB" sz="1200" b="0" i="0" kern="1200" dirty="0" err="1">
+                <a:solidFill>
+                  <a:schemeClr val="tx1"/>
+                </a:solidFill>
+                <a:effectLst/>
+                <a:latin typeface="+mn-lt"/>
+                <a:ea typeface="+mn-ea"/>
+                <a:cs typeface="+mn-cs"/>
+              </a:rPr>
+              <a:t>zwei</a:t>
+            </a:r>
+            <a:r>
+              <a:rPr lang="en-GB" sz="1200" b="0" i="0" kern="1200" dirty="0">
+                <a:solidFill>
+                  <a:schemeClr val="tx1"/>
+                </a:solidFill>
+                <a:effectLst/>
+                <a:latin typeface="+mn-lt"/>
+                <a:ea typeface="+mn-ea"/>
+                <a:cs typeface="+mn-cs"/>
+              </a:rPr>
+              <a:t> test </a:t>
+            </a:r>
+            <a:r>
+              <a:rPr lang="en-GB" sz="1200" b="0" i="0" kern="1200" dirty="0" err="1">
+                <a:solidFill>
+                  <a:schemeClr val="tx1"/>
+                </a:solidFill>
+                <a:effectLst/>
+                <a:latin typeface="+mn-lt"/>
+                <a:ea typeface="+mn-ea"/>
+                <a:cs typeface="+mn-cs"/>
+              </a:rPr>
+              <a:t>zwsichen</a:t>
+            </a:r>
+            <a:r>
+              <a:rPr lang="en-GB" sz="1200" b="0" i="0" kern="1200" dirty="0">
+                <a:solidFill>
+                  <a:schemeClr val="tx1"/>
+                </a:solidFill>
+                <a:effectLst/>
+                <a:latin typeface="+mn-lt"/>
+                <a:ea typeface="+mn-ea"/>
+                <a:cs typeface="+mn-cs"/>
+              </a:rPr>
+              <a:t> 9.85 und 10.38 WER</a:t>
+            </a:r>
+            <a:br>
+              <a:rPr lang="en-GB" sz="1200" b="0" i="0" kern="1200" dirty="0">
+                <a:solidFill>
+                  <a:schemeClr val="tx1"/>
+                </a:solidFill>
+                <a:effectLst/>
+                <a:latin typeface="+mn-lt"/>
+                <a:ea typeface="+mn-ea"/>
+                <a:cs typeface="+mn-cs"/>
+              </a:rPr>
+            </a:br>
+            <a:r>
+              <a:rPr lang="en-GB" sz="1200" b="0" i="0" kern="1200" dirty="0">
+                <a:solidFill>
+                  <a:schemeClr val="tx1"/>
+                </a:solidFill>
+                <a:effectLst/>
+                <a:latin typeface="+mn-lt"/>
+                <a:ea typeface="+mn-ea"/>
+                <a:cs typeface="+mn-cs"/>
+              </a:rPr>
+              <a:t>9.85 (</a:t>
+            </a:r>
+            <a:r>
+              <a:rPr lang="en-GB" sz="1200" b="0" i="0" kern="1200" dirty="0" err="1">
+                <a:solidFill>
+                  <a:schemeClr val="tx1"/>
+                </a:solidFill>
+                <a:effectLst/>
+                <a:latin typeface="+mn-lt"/>
+                <a:ea typeface="+mn-ea"/>
+                <a:cs typeface="+mn-cs"/>
+              </a:rPr>
+              <a:t>librispeech</a:t>
+            </a:r>
+            <a:r>
+              <a:rPr lang="en-GB" sz="1200" b="0" i="0" kern="1200" dirty="0">
+                <a:solidFill>
+                  <a:schemeClr val="tx1"/>
+                </a:solidFill>
+                <a:effectLst/>
+                <a:latin typeface="+mn-lt"/>
+                <a:ea typeface="+mn-ea"/>
+                <a:cs typeface="+mn-cs"/>
+              </a:rPr>
+              <a:t> test-clean) 10.38 (</a:t>
+            </a:r>
+            <a:r>
+              <a:rPr lang="en-GB" sz="1200" b="0" i="0" kern="1200" dirty="0" err="1">
+                <a:solidFill>
+                  <a:schemeClr val="tx1"/>
+                </a:solidFill>
+                <a:effectLst/>
+                <a:latin typeface="+mn-lt"/>
+                <a:ea typeface="+mn-ea"/>
+                <a:cs typeface="+mn-cs"/>
+              </a:rPr>
+              <a:t>tedlium</a:t>
+            </a:r>
+            <a:r>
+              <a:rPr lang="en-GB" sz="1200" b="0" i="0" kern="1200" dirty="0">
+                <a:solidFill>
+                  <a:schemeClr val="tx1"/>
+                </a:solidFill>
+                <a:effectLst/>
+                <a:latin typeface="+mn-lt"/>
+                <a:ea typeface="+mn-ea"/>
+                <a:cs typeface="+mn-cs"/>
+              </a:rPr>
+              <a:t>)</a:t>
+            </a:r>
+          </a:p>
+          <a:p>
+            <a:endParaRPr lang="en-GB" dirty="0"/>
+          </a:p>
+        </p:txBody>
+      </p:sp>
+      <p:sp>
+        <p:nvSpPr>
+          <p:cNvPr id="4" name="Slide Number Placeholder 3"/>
+          <p:cNvSpPr>
+            <a:spLocks noGrp="1"/>
+          </p:cNvSpPr>
+          <p:nvPr>
+            <p:ph type="sldNum" sz="quarter" idx="5"/>
+          </p:nvPr>
+        </p:nvSpPr>
+        <p:spPr/>
+        <p:txBody>
+          <a:bodyPr/>
+          <a:lstStyle/>
+          <a:p>
+            <a:fld id="{67FC2F5D-A00A-4392-B28E-0201BF8C74BB}" type="slidenum">
+              <a:rPr lang="en-GB" smtClean="0"/>
+              <a:t>5</a:t>
+            </a:fld>
+            <a:endParaRPr lang="en-GB"/>
+          </a:p>
+        </p:txBody>
+      </p:sp>
+    </p:spTree>
+    <p:extLst>
+      <p:ext uri="{BB962C8B-B14F-4D97-AF65-F5344CB8AC3E}">
+        <p14:creationId xmlns:p14="http://schemas.microsoft.com/office/powerpoint/2010/main" val="3349419425"/>
+      </p:ext>
+    </p:extLst>
+  </p:cSld>
+  <p:clrMapOvr>
+    <a:masterClrMapping/>
+  </p:clrMapOvr>
+</p:notes>
+</file>
+
+<file path=ppt/notesSlides/notesSlide3.xml><?xml version="1.0" encoding="utf-8"?>
+<p:notes xmlns:a="http://schemas.openxmlformats.org/drawingml/2006/main" xmlns:r="http://schemas.openxmlformats.org/officeDocument/2006/relationships" xmlns:p="http://schemas.openxmlformats.org/presentationml/2006/main">
+  <p:cSld>
+    <p:spTree>
+      <p:nvGrpSpPr>
+        <p:cNvPr id="1" name="">
+          <a:extLst>
+            <a:ext uri="{FF2B5EF4-FFF2-40B4-BE49-F238E27FC236}">
+              <a16:creationId xmlns:a16="http://schemas.microsoft.com/office/drawing/2014/main" id="{A8C2992B-4C1C-92A7-ABA9-43DB1242C969}"/>
+            </a:ext>
+          </a:extLst>
+        </p:cNvPr>
+        <p:cNvGrpSpPr/>
+        <p:nvPr/>
+      </p:nvGrpSpPr>
+      <p:grpSpPr>
+        <a:xfrm>
+          <a:off x="0" y="0"/>
+          <a:ext cx="0" cy="0"/>
+          <a:chOff x="0" y="0"/>
+          <a:chExt cx="0" cy="0"/>
+        </a:xfrm>
+      </p:grpSpPr>
+      <p:sp>
+        <p:nvSpPr>
+          <p:cNvPr id="2" name="Slide Image Placeholder 1">
+            <a:extLst>
+              <a:ext uri="{FF2B5EF4-FFF2-40B4-BE49-F238E27FC236}">
+                <a16:creationId xmlns:a16="http://schemas.microsoft.com/office/drawing/2014/main" id="{01672793-F39E-4D8D-FFCE-0554330121FC}"/>
+              </a:ext>
+            </a:extLst>
+          </p:cNvPr>
+          <p:cNvSpPr>
+            <a:spLocks noGrp="1" noRot="1" noChangeAspect="1"/>
+          </p:cNvSpPr>
+          <p:nvPr>
+            <p:ph type="sldImg"/>
+          </p:nvPr>
+        </p:nvSpPr>
+        <p:spPr/>
+      </p:sp>
+      <p:sp>
+        <p:nvSpPr>
+          <p:cNvPr id="3" name="Notes Placeholder 2">
+            <a:extLst>
+              <a:ext uri="{FF2B5EF4-FFF2-40B4-BE49-F238E27FC236}">
+                <a16:creationId xmlns:a16="http://schemas.microsoft.com/office/drawing/2014/main" id="{879CEF1A-0CD4-4905-BB5D-8582A9CFD824}"/>
+              </a:ext>
+            </a:extLst>
+          </p:cNvPr>
+          <p:cNvSpPr>
+            <a:spLocks noGrp="1"/>
+          </p:cNvSpPr>
+          <p:nvPr>
+            <p:ph type="body" idx="1"/>
+          </p:nvPr>
+        </p:nvSpPr>
+        <p:spPr/>
+        <p:txBody>
+          <a:bodyPr/>
+          <a:lstStyle/>
+          <a:p>
+            <a:pPr marL="0" marR="0" lvl="0" indent="0" algn="l" defTabSz="914400" rtl="0" eaLnBrk="1" fontAlgn="auto" latinLnBrk="0" hangingPunct="1">
+              <a:lnSpc>
+                <a:spcPct val="100000"/>
+              </a:lnSpc>
+              <a:spcBef>
+                <a:spcPts val="0"/>
+              </a:spcBef>
+              <a:spcAft>
+                <a:spcPts val="0"/>
+              </a:spcAft>
+              <a:buClrTx/>
+              <a:buSzTx/>
+              <a:buFontTx/>
+              <a:buNone/>
+              <a:tabLst/>
+              <a:defRPr/>
+            </a:pPr>
+            <a:r>
+              <a:rPr lang="en-GB" sz="1200" b="0" i="0" kern="1200" dirty="0">
+                <a:solidFill>
+                  <a:schemeClr val="tx1"/>
+                </a:solidFill>
+                <a:effectLst/>
+                <a:latin typeface="+mn-lt"/>
+                <a:ea typeface="+mn-ea"/>
+                <a:cs typeface="+mn-cs"/>
+              </a:rPr>
+              <a:t>https://www.researchgate.net/publication/228828379_The_Kaldi_speech_recognition_toolkit</a:t>
+            </a:r>
+          </a:p>
+          <a:p>
+            <a:pPr marL="0" marR="0" lvl="0" indent="0" algn="l" defTabSz="914400" rtl="0" eaLnBrk="1" fontAlgn="auto" latinLnBrk="0" hangingPunct="1">
+              <a:lnSpc>
+                <a:spcPct val="100000"/>
+              </a:lnSpc>
+              <a:spcBef>
+                <a:spcPts val="0"/>
+              </a:spcBef>
+              <a:spcAft>
+                <a:spcPts val="0"/>
+              </a:spcAft>
+              <a:buClrTx/>
+              <a:buSzTx/>
+              <a:buFontTx/>
+              <a:buNone/>
+              <a:tabLst/>
+              <a:defRPr/>
+            </a:pPr>
+            <a:endParaRPr lang="en-GB" sz="1200" b="0" i="0" kern="1200" dirty="0">
+              <a:solidFill>
+                <a:schemeClr val="tx1"/>
+              </a:solidFill>
+              <a:effectLst/>
+              <a:latin typeface="+mn-lt"/>
+              <a:ea typeface="+mn-ea"/>
+              <a:cs typeface="+mn-cs"/>
+            </a:endParaRPr>
+          </a:p>
+          <a:p>
+            <a:pPr marL="0" marR="0" lvl="0" indent="0" algn="l" defTabSz="914400" rtl="0" eaLnBrk="1" fontAlgn="auto" latinLnBrk="0" hangingPunct="1">
+              <a:lnSpc>
+                <a:spcPct val="100000"/>
+              </a:lnSpc>
+              <a:spcBef>
+                <a:spcPts val="0"/>
+              </a:spcBef>
+              <a:spcAft>
+                <a:spcPts val="0"/>
+              </a:spcAft>
+              <a:buClrTx/>
+              <a:buSzTx/>
+              <a:buFontTx/>
+              <a:buNone/>
+              <a:tabLst/>
+              <a:defRPr/>
+            </a:pPr>
+            <a:r>
+              <a:rPr lang="en-GB" sz="1200" b="0" i="0" kern="1200" dirty="0">
+                <a:solidFill>
+                  <a:schemeClr val="tx1"/>
+                </a:solidFill>
+                <a:effectLst/>
+                <a:latin typeface="+mn-lt"/>
+                <a:ea typeface="+mn-ea"/>
+                <a:cs typeface="+mn-cs"/>
+              </a:rPr>
+              <a:t>https://alphacephei.com/vosk/models</a:t>
+            </a:r>
+          </a:p>
+          <a:p>
+            <a:pPr marL="0" marR="0" lvl="0" indent="0" algn="l" defTabSz="914400" rtl="0" eaLnBrk="1" fontAlgn="auto" latinLnBrk="0" hangingPunct="1">
+              <a:lnSpc>
+                <a:spcPct val="100000"/>
+              </a:lnSpc>
+              <a:spcBef>
+                <a:spcPts val="0"/>
+              </a:spcBef>
+              <a:spcAft>
+                <a:spcPts val="0"/>
+              </a:spcAft>
+              <a:buClrTx/>
+              <a:buSzTx/>
+              <a:buFontTx/>
+              <a:buNone/>
+              <a:tabLst/>
+              <a:defRPr/>
+            </a:pPr>
+            <a:r>
+              <a:rPr lang="en-GB" sz="1200" b="0" i="0" kern="1200" dirty="0">
+                <a:solidFill>
+                  <a:schemeClr val="tx1"/>
+                </a:solidFill>
+                <a:effectLst/>
+                <a:latin typeface="+mn-lt"/>
+                <a:ea typeface="+mn-ea"/>
+                <a:cs typeface="+mn-cs"/>
+              </a:rPr>
+              <a:t>In </a:t>
+            </a:r>
+            <a:r>
+              <a:rPr lang="en-GB" sz="1200" b="0" i="0" kern="1200" dirty="0" err="1">
+                <a:solidFill>
+                  <a:schemeClr val="tx1"/>
+                </a:solidFill>
+                <a:effectLst/>
+                <a:latin typeface="+mn-lt"/>
+                <a:ea typeface="+mn-ea"/>
+                <a:cs typeface="+mn-cs"/>
+              </a:rPr>
+              <a:t>zwei</a:t>
+            </a:r>
+            <a:r>
+              <a:rPr lang="en-GB" sz="1200" b="0" i="0" kern="1200" dirty="0">
+                <a:solidFill>
+                  <a:schemeClr val="tx1"/>
+                </a:solidFill>
+                <a:effectLst/>
+                <a:latin typeface="+mn-lt"/>
+                <a:ea typeface="+mn-ea"/>
+                <a:cs typeface="+mn-cs"/>
+              </a:rPr>
+              <a:t> test </a:t>
+            </a:r>
+            <a:r>
+              <a:rPr lang="en-GB" sz="1200" b="0" i="0" kern="1200" dirty="0" err="1">
+                <a:solidFill>
+                  <a:schemeClr val="tx1"/>
+                </a:solidFill>
+                <a:effectLst/>
+                <a:latin typeface="+mn-lt"/>
+                <a:ea typeface="+mn-ea"/>
+                <a:cs typeface="+mn-cs"/>
+              </a:rPr>
+              <a:t>zwsichen</a:t>
+            </a:r>
+            <a:r>
+              <a:rPr lang="en-GB" sz="1200" b="0" i="0" kern="1200" dirty="0">
+                <a:solidFill>
+                  <a:schemeClr val="tx1"/>
+                </a:solidFill>
+                <a:effectLst/>
+                <a:latin typeface="+mn-lt"/>
+                <a:ea typeface="+mn-ea"/>
+                <a:cs typeface="+mn-cs"/>
+              </a:rPr>
+              <a:t> 9.85 und 10.38 WER</a:t>
+            </a:r>
+            <a:br>
+              <a:rPr lang="en-GB" sz="1200" b="0" i="0" kern="1200" dirty="0">
+                <a:solidFill>
+                  <a:schemeClr val="tx1"/>
+                </a:solidFill>
+                <a:effectLst/>
+                <a:latin typeface="+mn-lt"/>
+                <a:ea typeface="+mn-ea"/>
+                <a:cs typeface="+mn-cs"/>
+              </a:rPr>
+            </a:br>
+            <a:r>
+              <a:rPr lang="en-GB" sz="1200" b="0" i="0" kern="1200" dirty="0">
+                <a:solidFill>
+                  <a:schemeClr val="tx1"/>
+                </a:solidFill>
+                <a:effectLst/>
+                <a:latin typeface="+mn-lt"/>
+                <a:ea typeface="+mn-ea"/>
+                <a:cs typeface="+mn-cs"/>
+              </a:rPr>
+              <a:t>9.85 (</a:t>
+            </a:r>
+            <a:r>
+              <a:rPr lang="en-GB" sz="1200" b="0" i="0" kern="1200" dirty="0" err="1">
+                <a:solidFill>
+                  <a:schemeClr val="tx1"/>
+                </a:solidFill>
+                <a:effectLst/>
+                <a:latin typeface="+mn-lt"/>
+                <a:ea typeface="+mn-ea"/>
+                <a:cs typeface="+mn-cs"/>
+              </a:rPr>
+              <a:t>librispeech</a:t>
+            </a:r>
+            <a:r>
+              <a:rPr lang="en-GB" sz="1200" b="0" i="0" kern="1200" dirty="0">
+                <a:solidFill>
+                  <a:schemeClr val="tx1"/>
+                </a:solidFill>
+                <a:effectLst/>
+                <a:latin typeface="+mn-lt"/>
+                <a:ea typeface="+mn-ea"/>
+                <a:cs typeface="+mn-cs"/>
+              </a:rPr>
+              <a:t> test-clean) 10.38 (</a:t>
+            </a:r>
+            <a:r>
+              <a:rPr lang="en-GB" sz="1200" b="0" i="0" kern="1200" dirty="0" err="1">
+                <a:solidFill>
+                  <a:schemeClr val="tx1"/>
+                </a:solidFill>
+                <a:effectLst/>
+                <a:latin typeface="+mn-lt"/>
+                <a:ea typeface="+mn-ea"/>
+                <a:cs typeface="+mn-cs"/>
+              </a:rPr>
+              <a:t>tedlium</a:t>
+            </a:r>
+            <a:r>
+              <a:rPr lang="en-GB" sz="1200" b="0" i="0" kern="1200" dirty="0">
+                <a:solidFill>
+                  <a:schemeClr val="tx1"/>
+                </a:solidFill>
+                <a:effectLst/>
+                <a:latin typeface="+mn-lt"/>
+                <a:ea typeface="+mn-ea"/>
+                <a:cs typeface="+mn-cs"/>
+              </a:rPr>
+              <a:t>)</a:t>
+            </a:r>
+          </a:p>
+          <a:p>
+            <a:endParaRPr lang="en-GB" dirty="0"/>
+          </a:p>
+        </p:txBody>
+      </p:sp>
+      <p:sp>
+        <p:nvSpPr>
+          <p:cNvPr id="4" name="Slide Number Placeholder 3">
+            <a:extLst>
+              <a:ext uri="{FF2B5EF4-FFF2-40B4-BE49-F238E27FC236}">
+                <a16:creationId xmlns:a16="http://schemas.microsoft.com/office/drawing/2014/main" id="{2203D6CD-C99E-101E-81A6-C45D25930183}"/>
+              </a:ext>
+            </a:extLst>
+          </p:cNvPr>
+          <p:cNvSpPr>
+            <a:spLocks noGrp="1"/>
+          </p:cNvSpPr>
+          <p:nvPr>
+            <p:ph type="sldNum" sz="quarter" idx="5"/>
+          </p:nvPr>
+        </p:nvSpPr>
+        <p:spPr/>
+        <p:txBody>
+          <a:bodyPr/>
+          <a:lstStyle/>
+          <a:p>
+            <a:fld id="{67FC2F5D-A00A-4392-B28E-0201BF8C74BB}" type="slidenum">
+              <a:rPr lang="en-GB" smtClean="0"/>
+              <a:t>6</a:t>
+            </a:fld>
+            <a:endParaRPr lang="en-GB"/>
+          </a:p>
+        </p:txBody>
+      </p:sp>
+    </p:spTree>
+    <p:extLst>
+      <p:ext uri="{BB962C8B-B14F-4D97-AF65-F5344CB8AC3E}">
+        <p14:creationId xmlns:p14="http://schemas.microsoft.com/office/powerpoint/2010/main" val="3075283093"/>
       </p:ext>
     </p:extLst>
   </p:cSld>
@@ -5808,6 +6574,14 @@
 <file path=ppt/slides/slide5.xml><?xml version="1.0" encoding="utf-8"?>
 <p:sld xmlns:a="http://schemas.openxmlformats.org/drawingml/2006/main" xmlns:r="http://schemas.openxmlformats.org/officeDocument/2006/relationships" xmlns:p="http://schemas.openxmlformats.org/presentationml/2006/main">
   <p:cSld>
+    <p:bg>
+      <p:bgPr>
+        <a:solidFill>
+          <a:schemeClr val="bg1"/>
+        </a:solidFill>
+        <a:effectLst/>
+      </p:bgPr>
+    </p:bg>
     <p:spTree>
       <p:nvGrpSpPr>
         <p:cNvPr id="1" name=""/>
@@ -5822,6 +6596,972 @@
           <a:chExt cx="0" cy="0"/>
         </a:xfrm>
       </p:grpSpPr>
+      <p:sp useBgFill="1">
+        <p:nvSpPr>
+          <p:cNvPr id="13" name="Rectangle 12">
+            <a:extLst>
+              <a:ext uri="{FF2B5EF4-FFF2-40B4-BE49-F238E27FC236}">
+                <a16:creationId xmlns:a16="http://schemas.microsoft.com/office/drawing/2014/main" id="{A8384FB5-9ADC-4DDC-881B-597D56F5B15D}"/>
+              </a:ext>
+              <a:ext uri="{C183D7F6-B498-43B3-948B-1728B52AA6E4}">
+                <adec:decorative xmlns:adec="http://schemas.microsoft.com/office/drawing/2017/decorative" val="1"/>
+              </a:ext>
+            </a:extLst>
+          </p:cNvPr>
+          <p:cNvSpPr>
+            <a:spLocks noGrp="1" noRot="1" noChangeAspect="1" noMove="1" noResize="1" noEditPoints="1" noAdjustHandles="1" noChangeArrowheads="1" noChangeShapeType="1" noTextEdit="1"/>
+          </p:cNvSpPr>
+          <p:nvPr>
+            <p:extLst>
+              <p:ext uri="{386F3935-93C4-4BCD-93E2-E3B085C9AB24}">
+                <p16:designElem xmlns:p16="http://schemas.microsoft.com/office/powerpoint/2015/main" val="1"/>
+              </p:ext>
+            </p:extLst>
+          </p:nvPr>
+        </p:nvSpPr>
+        <p:spPr>
+          <a:xfrm>
+            <a:off x="0" y="0"/>
+            <a:ext cx="12192000" cy="6858000"/>
+          </a:xfrm>
+          <a:prstGeom prst="rect">
+            <a:avLst/>
+          </a:prstGeom>
+          <a:ln w="12700" cap="flat" cmpd="sng" algn="ctr">
+            <a:noFill/>
+            <a:prstDash val="solid"/>
+            <a:miter lim="800000"/>
+          </a:ln>
+          <a:effectLst/>
+          <a:extLst>
+            <a:ext uri="{91240B29-F687-4F45-9708-019B960494DF}">
+              <a14:hiddenLine xmlns:a14="http://schemas.microsoft.com/office/drawing/2010/main" w="12700" cap="flat" cmpd="sng" algn="ctr">
+                <a:solidFill>
+                  <a:schemeClr val="accent1">
+                    <a:shade val="50000"/>
+                  </a:schemeClr>
+                </a:solidFill>
+                <a:prstDash val="solid"/>
+                <a:miter lim="800000"/>
+              </a14:hiddenLine>
+            </a:ext>
+          </a:extLst>
+        </p:spPr>
+        <p:style>
+          <a:lnRef idx="2">
+            <a:schemeClr val="accent1">
+              <a:shade val="50000"/>
+            </a:schemeClr>
+          </a:lnRef>
+          <a:fillRef idx="1">
+            <a:schemeClr val="accent1"/>
+          </a:fillRef>
+          <a:effectRef idx="0">
+            <a:schemeClr val="accent1"/>
+          </a:effectRef>
+          <a:fontRef idx="minor">
+            <a:schemeClr val="lt1"/>
+          </a:fontRef>
+        </p:style>
+        <p:txBody>
+          <a:bodyPr rtlCol="0" anchor="ctr"/>
+          <a:lstStyle/>
+          <a:p>
+            <a:pPr algn="ctr"/>
+            <a:endParaRPr lang="en-US"/>
+          </a:p>
+        </p:txBody>
+      </p:sp>
+      <p:sp>
+        <p:nvSpPr>
+          <p:cNvPr id="15" name="Rectangle 14">
+            <a:extLst>
+              <a:ext uri="{FF2B5EF4-FFF2-40B4-BE49-F238E27FC236}">
+                <a16:creationId xmlns:a16="http://schemas.microsoft.com/office/drawing/2014/main" id="{1199E1B1-A8C0-4FE8-A5A8-1CB41D69F857}"/>
+              </a:ext>
+              <a:ext uri="{C183D7F6-B498-43B3-948B-1728B52AA6E4}">
+                <adec:decorative xmlns:adec="http://schemas.microsoft.com/office/drawing/2017/decorative" val="1"/>
+              </a:ext>
+            </a:extLst>
+          </p:cNvPr>
+          <p:cNvSpPr>
+            <a:spLocks noGrp="1" noRot="1" noChangeAspect="1" noMove="1" noResize="1" noEditPoints="1" noAdjustHandles="1" noChangeArrowheads="1" noChangeShapeType="1" noTextEdit="1"/>
+          </p:cNvSpPr>
+          <p:nvPr>
+            <p:extLst>
+              <p:ext uri="{386F3935-93C4-4BCD-93E2-E3B085C9AB24}">
+                <p16:designElem xmlns:p16="http://schemas.microsoft.com/office/powerpoint/2015/main" val="1"/>
+              </p:ext>
+            </p:extLst>
+          </p:nvPr>
+        </p:nvSpPr>
+        <p:spPr>
+          <a:xfrm rot="10800000" flipH="1">
+            <a:off x="2" y="0"/>
+            <a:ext cx="12191998" cy="1575955"/>
+          </a:xfrm>
+          <a:prstGeom prst="rect">
+            <a:avLst/>
+          </a:prstGeom>
+          <a:gradFill>
+            <a:gsLst>
+              <a:gs pos="0">
+                <a:srgbClr val="000000">
+                  <a:alpha val="96000"/>
+                </a:srgbClr>
+              </a:gs>
+              <a:gs pos="100000">
+                <a:schemeClr val="accent1">
+                  <a:lumMod val="75000"/>
+                </a:schemeClr>
+              </a:gs>
+            </a:gsLst>
+            <a:lin ang="6000000" scaled="0"/>
+          </a:gradFill>
+          <a:ln>
+            <a:noFill/>
+          </a:ln>
+        </p:spPr>
+        <p:style>
+          <a:lnRef idx="2">
+            <a:schemeClr val="accent1">
+              <a:shade val="50000"/>
+            </a:schemeClr>
+          </a:lnRef>
+          <a:fillRef idx="1">
+            <a:schemeClr val="accent1"/>
+          </a:fillRef>
+          <a:effectRef idx="0">
+            <a:schemeClr val="accent1"/>
+          </a:effectRef>
+          <a:fontRef idx="minor">
+            <a:schemeClr val="lt1"/>
+          </a:fontRef>
+        </p:style>
+        <p:txBody>
+          <a:bodyPr rtlCol="0" anchor="ctr"/>
+          <a:lstStyle/>
+          <a:p>
+            <a:pPr algn="ctr"/>
+            <a:endParaRPr lang="en-US"/>
+          </a:p>
+        </p:txBody>
+      </p:sp>
+      <p:sp>
+        <p:nvSpPr>
+          <p:cNvPr id="17" name="Rectangle 16">
+            <a:extLst>
+              <a:ext uri="{FF2B5EF4-FFF2-40B4-BE49-F238E27FC236}">
+                <a16:creationId xmlns:a16="http://schemas.microsoft.com/office/drawing/2014/main" id="{84A8DE83-DE75-4B41-9DB4-A7EC0B0DEC0B}"/>
+              </a:ext>
+              <a:ext uri="{C183D7F6-B498-43B3-948B-1728B52AA6E4}">
+                <adec:decorative xmlns:adec="http://schemas.microsoft.com/office/drawing/2017/decorative" val="1"/>
+              </a:ext>
+            </a:extLst>
+          </p:cNvPr>
+          <p:cNvSpPr>
+            <a:spLocks noGrp="1" noRot="1" noChangeAspect="1" noMove="1" noResize="1" noEditPoints="1" noAdjustHandles="1" noChangeArrowheads="1" noChangeShapeType="1" noTextEdit="1"/>
+          </p:cNvSpPr>
+          <p:nvPr>
+            <p:extLst>
+              <p:ext uri="{386F3935-93C4-4BCD-93E2-E3B085C9AB24}">
+                <p16:designElem xmlns:p16="http://schemas.microsoft.com/office/powerpoint/2015/main" val="1"/>
+              </p:ext>
+            </p:extLst>
+          </p:nvPr>
+        </p:nvSpPr>
+        <p:spPr>
+          <a:xfrm>
+            <a:off x="0" y="0"/>
+            <a:ext cx="8128856" cy="1575461"/>
+          </a:xfrm>
+          <a:prstGeom prst="rect">
+            <a:avLst/>
+          </a:prstGeom>
+          <a:gradFill>
+            <a:gsLst>
+              <a:gs pos="0">
+                <a:schemeClr val="accent1">
+                  <a:alpha val="41000"/>
+                </a:schemeClr>
+              </a:gs>
+              <a:gs pos="74000">
+                <a:schemeClr val="accent1">
+                  <a:lumMod val="60000"/>
+                  <a:lumOff val="40000"/>
+                  <a:alpha val="0"/>
+                </a:schemeClr>
+              </a:gs>
+            </a:gsLst>
+            <a:lin ang="8400000" scaled="0"/>
+          </a:gradFill>
+          <a:ln>
+            <a:noFill/>
+          </a:ln>
+        </p:spPr>
+        <p:style>
+          <a:lnRef idx="2">
+            <a:schemeClr val="accent1">
+              <a:shade val="50000"/>
+            </a:schemeClr>
+          </a:lnRef>
+          <a:fillRef idx="1">
+            <a:schemeClr val="accent1"/>
+          </a:fillRef>
+          <a:effectRef idx="0">
+            <a:schemeClr val="accent1"/>
+          </a:effectRef>
+          <a:fontRef idx="minor">
+            <a:schemeClr val="lt1"/>
+          </a:fontRef>
+        </p:style>
+        <p:txBody>
+          <a:bodyPr rtlCol="0" anchor="ctr"/>
+          <a:lstStyle/>
+          <a:p>
+            <a:pPr algn="ctr"/>
+            <a:endParaRPr lang="en-US"/>
+          </a:p>
+        </p:txBody>
+      </p:sp>
+      <p:sp>
+        <p:nvSpPr>
+          <p:cNvPr id="19" name="Rectangle 18">
+            <a:extLst>
+              <a:ext uri="{FF2B5EF4-FFF2-40B4-BE49-F238E27FC236}">
+                <a16:creationId xmlns:a16="http://schemas.microsoft.com/office/drawing/2014/main" id="{A7009A0A-BEF5-4EAC-AF15-E4F9F002E239}"/>
+              </a:ext>
+              <a:ext uri="{C183D7F6-B498-43B3-948B-1728B52AA6E4}">
+                <adec:decorative xmlns:adec="http://schemas.microsoft.com/office/drawing/2017/decorative" val="1"/>
+              </a:ext>
+            </a:extLst>
+          </p:cNvPr>
+          <p:cNvSpPr>
+            <a:spLocks noGrp="1" noRot="1" noChangeAspect="1" noMove="1" noResize="1" noEditPoints="1" noAdjustHandles="1" noChangeArrowheads="1" noChangeShapeType="1" noTextEdit="1"/>
+          </p:cNvSpPr>
+          <p:nvPr>
+            <p:extLst>
+              <p:ext uri="{386F3935-93C4-4BCD-93E2-E3B085C9AB24}">
+                <p16:designElem xmlns:p16="http://schemas.microsoft.com/office/powerpoint/2015/main" val="1"/>
+              </p:ext>
+            </p:extLst>
+          </p:nvPr>
+        </p:nvSpPr>
+        <p:spPr>
+          <a:xfrm flipH="1">
+            <a:off x="-3" y="-1"/>
+            <a:ext cx="12192002" cy="1574311"/>
+          </a:xfrm>
+          <a:prstGeom prst="rect">
+            <a:avLst/>
+          </a:prstGeom>
+          <a:gradFill>
+            <a:gsLst>
+              <a:gs pos="0">
+                <a:srgbClr val="000000">
+                  <a:alpha val="63000"/>
+                </a:srgbClr>
+              </a:gs>
+              <a:gs pos="78000">
+                <a:schemeClr val="accent1">
+                  <a:alpha val="15000"/>
+                </a:schemeClr>
+              </a:gs>
+            </a:gsLst>
+            <a:lin ang="15600000" scaled="0"/>
+          </a:gradFill>
+          <a:ln>
+            <a:noFill/>
+          </a:ln>
+        </p:spPr>
+        <p:style>
+          <a:lnRef idx="2">
+            <a:schemeClr val="accent1">
+              <a:shade val="50000"/>
+            </a:schemeClr>
+          </a:lnRef>
+          <a:fillRef idx="1">
+            <a:schemeClr val="accent1"/>
+          </a:fillRef>
+          <a:effectRef idx="0">
+            <a:schemeClr val="accent1"/>
+          </a:effectRef>
+          <a:fontRef idx="minor">
+            <a:schemeClr val="lt1"/>
+          </a:fontRef>
+        </p:style>
+        <p:txBody>
+          <a:bodyPr rtlCol="0" anchor="ctr"/>
+          <a:lstStyle/>
+          <a:p>
+            <a:pPr algn="ctr"/>
+            <a:endParaRPr lang="en-US"/>
+          </a:p>
+        </p:txBody>
+      </p:sp>
+      <p:sp>
+        <p:nvSpPr>
+          <p:cNvPr id="2" name="Title 1">
+            <a:extLst>
+              <a:ext uri="{FF2B5EF4-FFF2-40B4-BE49-F238E27FC236}">
+                <a16:creationId xmlns:a16="http://schemas.microsoft.com/office/drawing/2014/main" id="{1DC43200-F066-9A23-D854-DB860B26BAC5}"/>
+              </a:ext>
+            </a:extLst>
+          </p:cNvPr>
+          <p:cNvSpPr>
+            <a:spLocks noGrp="1"/>
+          </p:cNvSpPr>
+          <p:nvPr>
+            <p:ph type="title"/>
+          </p:nvPr>
+        </p:nvSpPr>
+        <p:spPr>
+          <a:xfrm>
+            <a:off x="699713" y="248038"/>
+            <a:ext cx="7063721" cy="1159200"/>
+          </a:xfrm>
+        </p:spPr>
+        <p:txBody>
+          <a:bodyPr vert="horz" lIns="91440" tIns="45720" rIns="91440" bIns="45720" rtlCol="0" anchor="ctr">
+            <a:normAutofit/>
+          </a:bodyPr>
+          <a:lstStyle/>
+          <a:p>
+            <a:r>
+              <a:rPr lang="en-US" sz="4000" kern="1200">
+                <a:solidFill>
+                  <a:srgbClr val="FFFFFF"/>
+                </a:solidFill>
+                <a:latin typeface="+mj-lt"/>
+                <a:ea typeface="+mj-ea"/>
+                <a:cs typeface="+mj-cs"/>
+              </a:rPr>
+              <a:t>Intoduction to Vosk</a:t>
+            </a:r>
+          </a:p>
+        </p:txBody>
+      </p:sp>
+      <p:pic>
+        <p:nvPicPr>
+          <p:cNvPr id="8" name="Picture 7">
+            <a:extLst>
+              <a:ext uri="{FF2B5EF4-FFF2-40B4-BE49-F238E27FC236}">
+                <a16:creationId xmlns:a16="http://schemas.microsoft.com/office/drawing/2014/main" id="{1B48D639-FD8A-0FDE-188F-EECB87DEF95B}"/>
+              </a:ext>
+            </a:extLst>
+          </p:cNvPr>
+          <p:cNvPicPr>
+            <a:picLocks noChangeAspect="1"/>
+          </p:cNvPicPr>
+          <p:nvPr/>
+        </p:nvPicPr>
+        <p:blipFill>
+          <a:blip r:embed="rId3"/>
+          <a:stretch>
+            <a:fillRect/>
+          </a:stretch>
+        </p:blipFill>
+        <p:spPr>
+          <a:xfrm>
+            <a:off x="1665989" y="1966293"/>
+            <a:ext cx="8860021" cy="4452160"/>
+          </a:xfrm>
+          <a:prstGeom prst="rect">
+            <a:avLst/>
+          </a:prstGeom>
+        </p:spPr>
+      </p:pic>
+    </p:spTree>
+    <p:extLst>
+      <p:ext uri="{BB962C8B-B14F-4D97-AF65-F5344CB8AC3E}">
+        <p14:creationId xmlns:p14="http://schemas.microsoft.com/office/powerpoint/2010/main" val="2968610124"/>
+      </p:ext>
+    </p:extLst>
+  </p:cSld>
+  <p:clrMapOvr>
+    <a:masterClrMapping/>
+  </p:clrMapOvr>
+</p:sld>
+</file>
+
+<file path=ppt/slides/slide6.xml><?xml version="1.0" encoding="utf-8"?>
+<p:sld xmlns:a="http://schemas.openxmlformats.org/drawingml/2006/main" xmlns:r="http://schemas.openxmlformats.org/officeDocument/2006/relationships" xmlns:p="http://schemas.openxmlformats.org/presentationml/2006/main">
+  <p:cSld>
+    <p:bg>
+      <p:bgPr>
+        <a:solidFill>
+          <a:schemeClr val="bg1"/>
+        </a:solidFill>
+        <a:effectLst/>
+      </p:bgPr>
+    </p:bg>
+    <p:spTree>
+      <p:nvGrpSpPr>
+        <p:cNvPr id="1" name="">
+          <a:extLst>
+            <a:ext uri="{FF2B5EF4-FFF2-40B4-BE49-F238E27FC236}">
+              <a16:creationId xmlns:a16="http://schemas.microsoft.com/office/drawing/2014/main" id="{E556D4CB-8D72-EA34-77AB-824233AF8759}"/>
+            </a:ext>
+          </a:extLst>
+        </p:cNvPr>
+        <p:cNvGrpSpPr/>
+        <p:nvPr/>
+      </p:nvGrpSpPr>
+      <p:grpSpPr>
+        <a:xfrm>
+          <a:off x="0" y="0"/>
+          <a:ext cx="0" cy="0"/>
+          <a:chOff x="0" y="0"/>
+          <a:chExt cx="0" cy="0"/>
+        </a:xfrm>
+      </p:grpSpPr>
+      <p:sp useBgFill="1">
+        <p:nvSpPr>
+          <p:cNvPr id="13" name="Rectangle 12">
+            <a:extLst>
+              <a:ext uri="{FF2B5EF4-FFF2-40B4-BE49-F238E27FC236}">
+                <a16:creationId xmlns:a16="http://schemas.microsoft.com/office/drawing/2014/main" id="{FD0EDDDC-0FAD-4229-A2BF-E00B79D55E28}"/>
+              </a:ext>
+              <a:ext uri="{C183D7F6-B498-43B3-948B-1728B52AA6E4}">
+                <adec:decorative xmlns:adec="http://schemas.microsoft.com/office/drawing/2017/decorative" val="1"/>
+              </a:ext>
+            </a:extLst>
+          </p:cNvPr>
+          <p:cNvSpPr>
+            <a:spLocks noGrp="1" noRot="1" noChangeAspect="1" noMove="1" noResize="1" noEditPoints="1" noAdjustHandles="1" noChangeArrowheads="1" noChangeShapeType="1" noTextEdit="1"/>
+          </p:cNvSpPr>
+          <p:nvPr>
+            <p:extLst>
+              <p:ext uri="{386F3935-93C4-4BCD-93E2-E3B085C9AB24}">
+                <p16:designElem xmlns:p16="http://schemas.microsoft.com/office/powerpoint/2015/main" val="1"/>
+              </p:ext>
+            </p:extLst>
+          </p:nvPr>
+        </p:nvSpPr>
+        <p:spPr>
+          <a:xfrm>
+            <a:off x="0" y="0"/>
+            <a:ext cx="12192000" cy="6858000"/>
+          </a:xfrm>
+          <a:prstGeom prst="rect">
+            <a:avLst/>
+          </a:prstGeom>
+          <a:ln w="12700" cap="flat" cmpd="sng" algn="ctr">
+            <a:noFill/>
+            <a:prstDash val="solid"/>
+            <a:miter lim="800000"/>
+          </a:ln>
+          <a:effectLst/>
+          <a:extLst>
+            <a:ext uri="{91240B29-F687-4F45-9708-019B960494DF}">
+              <a14:hiddenLine xmlns:a14="http://schemas.microsoft.com/office/drawing/2010/main" w="12700" cap="flat" cmpd="sng" algn="ctr">
+                <a:solidFill>
+                  <a:schemeClr val="accent1">
+                    <a:shade val="50000"/>
+                  </a:schemeClr>
+                </a:solidFill>
+                <a:prstDash val="solid"/>
+                <a:miter lim="800000"/>
+              </a14:hiddenLine>
+            </a:ext>
+          </a:extLst>
+        </p:spPr>
+        <p:style>
+          <a:lnRef idx="2">
+            <a:schemeClr val="accent1">
+              <a:shade val="50000"/>
+            </a:schemeClr>
+          </a:lnRef>
+          <a:fillRef idx="1">
+            <a:schemeClr val="accent1"/>
+          </a:fillRef>
+          <a:effectRef idx="0">
+            <a:schemeClr val="accent1"/>
+          </a:effectRef>
+          <a:fontRef idx="minor">
+            <a:schemeClr val="lt1"/>
+          </a:fontRef>
+        </p:style>
+        <p:txBody>
+          <a:bodyPr rtlCol="0" anchor="ctr"/>
+          <a:lstStyle/>
+          <a:p>
+            <a:pPr algn="ctr"/>
+            <a:endParaRPr lang="en-US"/>
+          </a:p>
+        </p:txBody>
+      </p:sp>
+      <p:sp>
+        <p:nvSpPr>
+          <p:cNvPr id="15" name="Rectangle 14">
+            <a:extLst>
+              <a:ext uri="{FF2B5EF4-FFF2-40B4-BE49-F238E27FC236}">
+                <a16:creationId xmlns:a16="http://schemas.microsoft.com/office/drawing/2014/main" id="{8E2916D6-8B87-2854-3944-1A2051FF926C}"/>
+              </a:ext>
+              <a:ext uri="{C183D7F6-B498-43B3-948B-1728B52AA6E4}">
+                <adec:decorative xmlns:adec="http://schemas.microsoft.com/office/drawing/2017/decorative" val="1"/>
+              </a:ext>
+            </a:extLst>
+          </p:cNvPr>
+          <p:cNvSpPr>
+            <a:spLocks noGrp="1" noRot="1" noChangeAspect="1" noMove="1" noResize="1" noEditPoints="1" noAdjustHandles="1" noChangeArrowheads="1" noChangeShapeType="1" noTextEdit="1"/>
+          </p:cNvSpPr>
+          <p:nvPr>
+            <p:extLst>
+              <p:ext uri="{386F3935-93C4-4BCD-93E2-E3B085C9AB24}">
+                <p16:designElem xmlns:p16="http://schemas.microsoft.com/office/powerpoint/2015/main" val="1"/>
+              </p:ext>
+            </p:extLst>
+          </p:nvPr>
+        </p:nvSpPr>
+        <p:spPr>
+          <a:xfrm rot="10800000" flipH="1">
+            <a:off x="2" y="0"/>
+            <a:ext cx="12191998" cy="1575955"/>
+          </a:xfrm>
+          <a:prstGeom prst="rect">
+            <a:avLst/>
+          </a:prstGeom>
+          <a:gradFill>
+            <a:gsLst>
+              <a:gs pos="0">
+                <a:srgbClr val="000000">
+                  <a:alpha val="96000"/>
+                </a:srgbClr>
+              </a:gs>
+              <a:gs pos="100000">
+                <a:schemeClr val="accent1">
+                  <a:lumMod val="75000"/>
+                </a:schemeClr>
+              </a:gs>
+            </a:gsLst>
+            <a:lin ang="6000000" scaled="0"/>
+          </a:gradFill>
+          <a:ln>
+            <a:noFill/>
+          </a:ln>
+        </p:spPr>
+        <p:style>
+          <a:lnRef idx="2">
+            <a:schemeClr val="accent1">
+              <a:shade val="50000"/>
+            </a:schemeClr>
+          </a:lnRef>
+          <a:fillRef idx="1">
+            <a:schemeClr val="accent1"/>
+          </a:fillRef>
+          <a:effectRef idx="0">
+            <a:schemeClr val="accent1"/>
+          </a:effectRef>
+          <a:fontRef idx="minor">
+            <a:schemeClr val="lt1"/>
+          </a:fontRef>
+        </p:style>
+        <p:txBody>
+          <a:bodyPr rtlCol="0" anchor="ctr"/>
+          <a:lstStyle/>
+          <a:p>
+            <a:pPr algn="ctr"/>
+            <a:endParaRPr lang="en-US"/>
+          </a:p>
+        </p:txBody>
+      </p:sp>
+      <p:sp>
+        <p:nvSpPr>
+          <p:cNvPr id="17" name="Rectangle 16">
+            <a:extLst>
+              <a:ext uri="{FF2B5EF4-FFF2-40B4-BE49-F238E27FC236}">
+                <a16:creationId xmlns:a16="http://schemas.microsoft.com/office/drawing/2014/main" id="{E4BB8EAD-00B0-CED7-D46B-AA505A22B4DF}"/>
+              </a:ext>
+              <a:ext uri="{C183D7F6-B498-43B3-948B-1728B52AA6E4}">
+                <adec:decorative xmlns:adec="http://schemas.microsoft.com/office/drawing/2017/decorative" val="1"/>
+              </a:ext>
+            </a:extLst>
+          </p:cNvPr>
+          <p:cNvSpPr>
+            <a:spLocks noGrp="1" noRot="1" noChangeAspect="1" noMove="1" noResize="1" noEditPoints="1" noAdjustHandles="1" noChangeArrowheads="1" noChangeShapeType="1" noTextEdit="1"/>
+          </p:cNvSpPr>
+          <p:nvPr>
+            <p:extLst>
+              <p:ext uri="{386F3935-93C4-4BCD-93E2-E3B085C9AB24}">
+                <p16:designElem xmlns:p16="http://schemas.microsoft.com/office/powerpoint/2015/main" val="1"/>
+              </p:ext>
+            </p:extLst>
+          </p:nvPr>
+        </p:nvSpPr>
+        <p:spPr>
+          <a:xfrm>
+            <a:off x="0" y="0"/>
+            <a:ext cx="8128856" cy="1575461"/>
+          </a:xfrm>
+          <a:prstGeom prst="rect">
+            <a:avLst/>
+          </a:prstGeom>
+          <a:gradFill>
+            <a:gsLst>
+              <a:gs pos="0">
+                <a:schemeClr val="accent1">
+                  <a:alpha val="41000"/>
+                </a:schemeClr>
+              </a:gs>
+              <a:gs pos="74000">
+                <a:schemeClr val="accent1">
+                  <a:lumMod val="60000"/>
+                  <a:lumOff val="40000"/>
+                  <a:alpha val="0"/>
+                </a:schemeClr>
+              </a:gs>
+            </a:gsLst>
+            <a:lin ang="8400000" scaled="0"/>
+          </a:gradFill>
+          <a:ln>
+            <a:noFill/>
+          </a:ln>
+        </p:spPr>
+        <p:style>
+          <a:lnRef idx="2">
+            <a:schemeClr val="accent1">
+              <a:shade val="50000"/>
+            </a:schemeClr>
+          </a:lnRef>
+          <a:fillRef idx="1">
+            <a:schemeClr val="accent1"/>
+          </a:fillRef>
+          <a:effectRef idx="0">
+            <a:schemeClr val="accent1"/>
+          </a:effectRef>
+          <a:fontRef idx="minor">
+            <a:schemeClr val="lt1"/>
+          </a:fontRef>
+        </p:style>
+        <p:txBody>
+          <a:bodyPr rtlCol="0" anchor="ctr"/>
+          <a:lstStyle/>
+          <a:p>
+            <a:pPr algn="ctr"/>
+            <a:endParaRPr lang="en-US"/>
+          </a:p>
+        </p:txBody>
+      </p:sp>
+      <p:sp>
+        <p:nvSpPr>
+          <p:cNvPr id="19" name="Rectangle 18">
+            <a:extLst>
+              <a:ext uri="{FF2B5EF4-FFF2-40B4-BE49-F238E27FC236}">
+                <a16:creationId xmlns:a16="http://schemas.microsoft.com/office/drawing/2014/main" id="{8BEA9C0D-0CFE-D0B1-9B50-A6F460CEE10D}"/>
+              </a:ext>
+              <a:ext uri="{C183D7F6-B498-43B3-948B-1728B52AA6E4}">
+                <adec:decorative xmlns:adec="http://schemas.microsoft.com/office/drawing/2017/decorative" val="1"/>
+              </a:ext>
+            </a:extLst>
+          </p:cNvPr>
+          <p:cNvSpPr>
+            <a:spLocks noGrp="1" noRot="1" noChangeAspect="1" noMove="1" noResize="1" noEditPoints="1" noAdjustHandles="1" noChangeArrowheads="1" noChangeShapeType="1" noTextEdit="1"/>
+          </p:cNvSpPr>
+          <p:nvPr>
+            <p:extLst>
+              <p:ext uri="{386F3935-93C4-4BCD-93E2-E3B085C9AB24}">
+                <p16:designElem xmlns:p16="http://schemas.microsoft.com/office/powerpoint/2015/main" val="1"/>
+              </p:ext>
+            </p:extLst>
+          </p:nvPr>
+        </p:nvSpPr>
+        <p:spPr>
+          <a:xfrm flipH="1">
+            <a:off x="-3" y="-1"/>
+            <a:ext cx="12192002" cy="1574311"/>
+          </a:xfrm>
+          <a:prstGeom prst="rect">
+            <a:avLst/>
+          </a:prstGeom>
+          <a:gradFill>
+            <a:gsLst>
+              <a:gs pos="0">
+                <a:srgbClr val="000000">
+                  <a:alpha val="63000"/>
+                </a:srgbClr>
+              </a:gs>
+              <a:gs pos="78000">
+                <a:schemeClr val="accent1">
+                  <a:alpha val="15000"/>
+                </a:schemeClr>
+              </a:gs>
+            </a:gsLst>
+            <a:lin ang="15600000" scaled="0"/>
+          </a:gradFill>
+          <a:ln>
+            <a:noFill/>
+          </a:ln>
+        </p:spPr>
+        <p:style>
+          <a:lnRef idx="2">
+            <a:schemeClr val="accent1">
+              <a:shade val="50000"/>
+            </a:schemeClr>
+          </a:lnRef>
+          <a:fillRef idx="1">
+            <a:schemeClr val="accent1"/>
+          </a:fillRef>
+          <a:effectRef idx="0">
+            <a:schemeClr val="accent1"/>
+          </a:effectRef>
+          <a:fontRef idx="minor">
+            <a:schemeClr val="lt1"/>
+          </a:fontRef>
+        </p:style>
+        <p:txBody>
+          <a:bodyPr rtlCol="0" anchor="ctr"/>
+          <a:lstStyle/>
+          <a:p>
+            <a:pPr algn="ctr"/>
+            <a:endParaRPr lang="en-US"/>
+          </a:p>
+        </p:txBody>
+      </p:sp>
+      <p:sp>
+        <p:nvSpPr>
+          <p:cNvPr id="2" name="Title 1">
+            <a:extLst>
+              <a:ext uri="{FF2B5EF4-FFF2-40B4-BE49-F238E27FC236}">
+                <a16:creationId xmlns:a16="http://schemas.microsoft.com/office/drawing/2014/main" id="{2C70697B-8D98-ADBA-4AF4-112D9BEF6834}"/>
+              </a:ext>
+            </a:extLst>
+          </p:cNvPr>
+          <p:cNvSpPr>
+            <a:spLocks noGrp="1"/>
+          </p:cNvSpPr>
+          <p:nvPr>
+            <p:ph type="title"/>
+          </p:nvPr>
+        </p:nvSpPr>
+        <p:spPr>
+          <a:xfrm>
+            <a:off x="699713" y="248038"/>
+            <a:ext cx="7063721" cy="1159200"/>
+          </a:xfrm>
+        </p:spPr>
+        <p:txBody>
+          <a:bodyPr vert="horz" lIns="91440" tIns="45720" rIns="91440" bIns="45720" rtlCol="0" anchor="ctr">
+            <a:normAutofit/>
+          </a:bodyPr>
+          <a:lstStyle/>
+          <a:p>
+            <a:r>
+              <a:rPr lang="en-GB" sz="4000" dirty="0">
+                <a:solidFill>
+                  <a:schemeClr val="bg1"/>
+                </a:solidFill>
+              </a:rPr>
+              <a:t>Implementation of Voice Control</a:t>
+            </a:r>
+            <a:endParaRPr lang="en-US" sz="4000" kern="1200" dirty="0">
+              <a:solidFill>
+                <a:schemeClr val="bg1"/>
+              </a:solidFill>
+              <a:latin typeface="+mj-lt"/>
+              <a:ea typeface="+mj-ea"/>
+              <a:cs typeface="+mj-cs"/>
+            </a:endParaRPr>
+          </a:p>
+        </p:txBody>
+      </p:sp>
+      <p:sp>
+        <p:nvSpPr>
+          <p:cNvPr id="3" name="Content Placeholder 2">
+            <a:extLst>
+              <a:ext uri="{FF2B5EF4-FFF2-40B4-BE49-F238E27FC236}">
+                <a16:creationId xmlns:a16="http://schemas.microsoft.com/office/drawing/2014/main" id="{A8A93CD5-2767-92E3-8B6B-2A03214C2653}"/>
+              </a:ext>
+            </a:extLst>
+          </p:cNvPr>
+          <p:cNvSpPr>
+            <a:spLocks noGrp="1"/>
+          </p:cNvSpPr>
+          <p:nvPr>
+            <p:ph idx="1"/>
+          </p:nvPr>
+        </p:nvSpPr>
+        <p:spPr>
+          <a:xfrm>
+            <a:off x="838200" y="1825625"/>
+            <a:ext cx="10515600" cy="4351338"/>
+          </a:xfrm>
+        </p:spPr>
+        <p:txBody>
+          <a:bodyPr/>
+          <a:lstStyle/>
+          <a:p>
+            <a:r>
+              <a:rPr lang="en-GB" dirty="0"/>
+              <a:t>Why did we choose </a:t>
+            </a:r>
+            <a:r>
+              <a:rPr lang="en-GB" dirty="0" err="1"/>
+              <a:t>Vosk</a:t>
+            </a:r>
+            <a:r>
+              <a:rPr lang="en-GB" dirty="0"/>
+              <a:t>?</a:t>
+            </a:r>
+          </a:p>
+          <a:p>
+            <a:pPr lvl="1"/>
+            <a:r>
+              <a:rPr lang="en-GB" dirty="0"/>
+              <a:t>Pretrained model </a:t>
+            </a:r>
+            <a:r>
+              <a:rPr lang="en-GB" dirty="0">
+                <a:sym typeface="Wingdings" panose="05000000000000000000" pitchFamily="2" charset="2"/>
+              </a:rPr>
+              <a:t> Transfer Learning</a:t>
+            </a:r>
+            <a:endParaRPr lang="en-GB" dirty="0"/>
+          </a:p>
+          <a:p>
+            <a:pPr lvl="1"/>
+            <a:r>
+              <a:rPr lang="en-GB" dirty="0"/>
+              <a:t>Real-time speech recognition </a:t>
+            </a:r>
+          </a:p>
+          <a:p>
+            <a:pPr lvl="1"/>
+            <a:r>
+              <a:rPr lang="en-GB" dirty="0"/>
+              <a:t>Works offline</a:t>
+            </a:r>
+          </a:p>
+          <a:p>
+            <a:pPr lvl="1"/>
+            <a:endParaRPr lang="en-GB" dirty="0"/>
+          </a:p>
+          <a:p>
+            <a:r>
+              <a:rPr lang="en-GB" dirty="0"/>
+              <a:t>WER of 9,85 – 10,38, BUT Accuracy depends on: </a:t>
+            </a:r>
+          </a:p>
+          <a:p>
+            <a:pPr lvl="1"/>
+            <a:r>
+              <a:rPr lang="en-GB" dirty="0"/>
+              <a:t>Microphone quality </a:t>
+            </a:r>
+          </a:p>
+          <a:p>
+            <a:pPr lvl="1"/>
+            <a:r>
+              <a:rPr lang="en-GB" dirty="0"/>
+              <a:t>Background noise </a:t>
+            </a:r>
+          </a:p>
+          <a:p>
+            <a:pPr lvl="1"/>
+            <a:r>
+              <a:rPr lang="en-GB" dirty="0"/>
+              <a:t>Pronunciation / accent </a:t>
+            </a:r>
+          </a:p>
+          <a:p>
+            <a:pPr lvl="1"/>
+            <a:endParaRPr lang="en-GB" dirty="0"/>
+          </a:p>
+          <a:p>
+            <a:endParaRPr lang="en-GB" dirty="0"/>
+          </a:p>
+        </p:txBody>
+      </p:sp>
+      <p:pic>
+        <p:nvPicPr>
+          <p:cNvPr id="4" name="Picture 3">
+            <a:extLst>
+              <a:ext uri="{FF2B5EF4-FFF2-40B4-BE49-F238E27FC236}">
+                <a16:creationId xmlns:a16="http://schemas.microsoft.com/office/drawing/2014/main" id="{48F50F23-5026-C56B-983A-5B3D42C6E679}"/>
+              </a:ext>
+            </a:extLst>
+          </p:cNvPr>
+          <p:cNvPicPr>
+            <a:picLocks noChangeAspect="1"/>
+          </p:cNvPicPr>
+          <p:nvPr/>
+        </p:nvPicPr>
+        <p:blipFill>
+          <a:blip r:embed="rId3"/>
+          <a:stretch>
+            <a:fillRect/>
+          </a:stretch>
+        </p:blipFill>
+        <p:spPr>
+          <a:xfrm>
+            <a:off x="6148754" y="4753862"/>
+            <a:ext cx="5205046" cy="1739013"/>
+          </a:xfrm>
+          <a:prstGeom prst="rect">
+            <a:avLst/>
+          </a:prstGeom>
+        </p:spPr>
+      </p:pic>
+      <p:pic>
+        <p:nvPicPr>
+          <p:cNvPr id="5" name="Picture 4">
+            <a:extLst>
+              <a:ext uri="{FF2B5EF4-FFF2-40B4-BE49-F238E27FC236}">
+                <a16:creationId xmlns:a16="http://schemas.microsoft.com/office/drawing/2014/main" id="{B0EA5C4F-F630-57F3-9FA6-25CE106F9F9E}"/>
+              </a:ext>
+            </a:extLst>
+          </p:cNvPr>
+          <p:cNvPicPr>
+            <a:picLocks noChangeAspect="1"/>
+          </p:cNvPicPr>
+          <p:nvPr/>
+        </p:nvPicPr>
+        <p:blipFill>
+          <a:blip r:embed="rId4"/>
+          <a:stretch>
+            <a:fillRect/>
+          </a:stretch>
+        </p:blipFill>
+        <p:spPr>
+          <a:xfrm>
+            <a:off x="8981744" y="2732712"/>
+            <a:ext cx="2372056" cy="1886213"/>
+          </a:xfrm>
+          <a:prstGeom prst="rect">
+            <a:avLst/>
+          </a:prstGeom>
+        </p:spPr>
+      </p:pic>
+    </p:spTree>
+    <p:extLst>
+      <p:ext uri="{BB962C8B-B14F-4D97-AF65-F5344CB8AC3E}">
+        <p14:creationId xmlns:p14="http://schemas.microsoft.com/office/powerpoint/2010/main" val="3070597332"/>
+      </p:ext>
+    </p:extLst>
+  </p:cSld>
+  <p:clrMapOvr>
+    <a:masterClrMapping/>
+  </p:clrMapOvr>
+</p:sld>
+</file>
+
+<file path=ppt/slides/slide7.xml><?xml version="1.0" encoding="utf-8"?>
+<p:sld xmlns:a="http://schemas.openxmlformats.org/drawingml/2006/main" xmlns:r="http://schemas.openxmlformats.org/officeDocument/2006/relationships" xmlns:p="http://schemas.openxmlformats.org/presentationml/2006/main">
+  <p:cSld>
+    <p:spTree>
+      <p:nvGrpSpPr>
+        <p:cNvPr id="1" name=""/>
+        <p:cNvGrpSpPr/>
+        <p:nvPr/>
+      </p:nvGrpSpPr>
+      <p:grpSpPr>
+        <a:xfrm>
+          <a:off x="0" y="0"/>
+          <a:ext cx="0" cy="0"/>
+          <a:chOff x="0" y="0"/>
+          <a:chExt cx="0" cy="0"/>
+        </a:xfrm>
+      </p:grpSpPr>
       <p:sp>
         <p:nvSpPr>
           <p:cNvPr id="2" name="Titel 1">
@@ -5917,7 +7657,7 @@
 </p:sld>
 </file>
 
-<file path=ppt/slides/slide6.xml><?xml version="1.0" encoding="utf-8"?>
+<file path=ppt/slides/slide8.xml><?xml version="1.0" encoding="utf-8"?>
 <p:sld xmlns:a="http://schemas.openxmlformats.org/drawingml/2006/main" xmlns:r="http://schemas.openxmlformats.org/officeDocument/2006/relationships" xmlns:p="http://schemas.openxmlformats.org/presentationml/2006/main">
   <p:cSld>
     <p:spTree>

--- a/presentation.pptx
+++ b/presentation.pptx
@@ -5,7 +5,7 @@
     <p:sldMasterId id="2147483648" r:id="rId1"/>
   </p:sldMasterIdLst>
   <p:notesMasterIdLst>
-    <p:notesMasterId r:id="rId10"/>
+    <p:notesMasterId r:id="rId12"/>
   </p:notesMasterIdLst>
   <p:sldIdLst>
     <p:sldId id="261" r:id="rId2"/>
@@ -14,8 +14,10 @@
     <p:sldId id="258" r:id="rId5"/>
     <p:sldId id="265" r:id="rId6"/>
     <p:sldId id="267" r:id="rId7"/>
-    <p:sldId id="259" r:id="rId8"/>
-    <p:sldId id="260" r:id="rId9"/>
+    <p:sldId id="270" r:id="rId8"/>
+    <p:sldId id="271" r:id="rId9"/>
+    <p:sldId id="259" r:id="rId10"/>
+    <p:sldId id="260" r:id="rId11"/>
   </p:sldIdLst>
   <p:sldSz cx="12192000" cy="6858000"/>
   <p:notesSz cx="6858000" cy="9144000"/>
@@ -210,7 +212,7 @@
           <a:p>
             <a:fld id="{812DE816-4AEB-4C5E-88A4-F622554AF666}" type="datetimeFigureOut">
               <a:rPr lang="en-GB" smtClean="0"/>
-              <a:t>25/05/2026</a:t>
+              <a:t>26/05/2026</a:t>
             </a:fld>
             <a:endParaRPr lang="en-GB"/>
           </a:p>
@@ -1329,6 +1331,222 @@
 </p:notes>
 </file>
 
+<file path=ppt/notesSlides/notesSlide4.xml><?xml version="1.0" encoding="utf-8"?>
+<p:notes xmlns:a="http://schemas.openxmlformats.org/drawingml/2006/main" xmlns:r="http://schemas.openxmlformats.org/officeDocument/2006/relationships" xmlns:p="http://schemas.openxmlformats.org/presentationml/2006/main">
+  <p:cSld>
+    <p:spTree>
+      <p:nvGrpSpPr>
+        <p:cNvPr id="1" name="">
+          <a:extLst>
+            <a:ext uri="{FF2B5EF4-FFF2-40B4-BE49-F238E27FC236}">
+              <a16:creationId xmlns:a16="http://schemas.microsoft.com/office/drawing/2014/main" id="{014ECA78-4AB8-A85A-AFCD-0818DF9C4EAD}"/>
+            </a:ext>
+          </a:extLst>
+        </p:cNvPr>
+        <p:cNvGrpSpPr/>
+        <p:nvPr/>
+      </p:nvGrpSpPr>
+      <p:grpSpPr>
+        <a:xfrm>
+          <a:off x="0" y="0"/>
+          <a:ext cx="0" cy="0"/>
+          <a:chOff x="0" y="0"/>
+          <a:chExt cx="0" cy="0"/>
+        </a:xfrm>
+      </p:grpSpPr>
+      <p:sp>
+        <p:nvSpPr>
+          <p:cNvPr id="2" name="Slide Image Placeholder 1">
+            <a:extLst>
+              <a:ext uri="{FF2B5EF4-FFF2-40B4-BE49-F238E27FC236}">
+                <a16:creationId xmlns:a16="http://schemas.microsoft.com/office/drawing/2014/main" id="{EFAA382E-819C-7106-3083-9BEE8C4E247C}"/>
+              </a:ext>
+            </a:extLst>
+          </p:cNvPr>
+          <p:cNvSpPr>
+            <a:spLocks noGrp="1" noRot="1" noChangeAspect="1"/>
+          </p:cNvSpPr>
+          <p:nvPr>
+            <p:ph type="sldImg"/>
+          </p:nvPr>
+        </p:nvSpPr>
+        <p:spPr/>
+      </p:sp>
+      <p:sp>
+        <p:nvSpPr>
+          <p:cNvPr id="3" name="Notes Placeholder 2">
+            <a:extLst>
+              <a:ext uri="{FF2B5EF4-FFF2-40B4-BE49-F238E27FC236}">
+                <a16:creationId xmlns:a16="http://schemas.microsoft.com/office/drawing/2014/main" id="{82764A91-D28B-F968-1722-7278EA94902C}"/>
+              </a:ext>
+            </a:extLst>
+          </p:cNvPr>
+          <p:cNvSpPr>
+            <a:spLocks noGrp="1"/>
+          </p:cNvSpPr>
+          <p:nvPr>
+            <p:ph type="body" idx="1"/>
+          </p:nvPr>
+        </p:nvSpPr>
+        <p:spPr/>
+        <p:txBody>
+          <a:bodyPr/>
+          <a:lstStyle/>
+          <a:p>
+            <a:endParaRPr lang="en-GB" dirty="0"/>
+          </a:p>
+        </p:txBody>
+      </p:sp>
+      <p:sp>
+        <p:nvSpPr>
+          <p:cNvPr id="4" name="Slide Number Placeholder 3">
+            <a:extLst>
+              <a:ext uri="{FF2B5EF4-FFF2-40B4-BE49-F238E27FC236}">
+                <a16:creationId xmlns:a16="http://schemas.microsoft.com/office/drawing/2014/main" id="{5B615E4B-577E-AF0F-3A25-102794F6C231}"/>
+              </a:ext>
+            </a:extLst>
+          </p:cNvPr>
+          <p:cNvSpPr>
+            <a:spLocks noGrp="1"/>
+          </p:cNvSpPr>
+          <p:nvPr>
+            <p:ph type="sldNum" sz="quarter" idx="5"/>
+          </p:nvPr>
+        </p:nvSpPr>
+        <p:spPr/>
+        <p:txBody>
+          <a:bodyPr/>
+          <a:lstStyle/>
+          <a:p>
+            <a:fld id="{67FC2F5D-A00A-4392-B28E-0201BF8C74BB}" type="slidenum">
+              <a:rPr lang="en-GB" smtClean="0"/>
+              <a:t>7</a:t>
+            </a:fld>
+            <a:endParaRPr lang="en-GB"/>
+          </a:p>
+        </p:txBody>
+      </p:sp>
+    </p:spTree>
+    <p:extLst>
+      <p:ext uri="{BB962C8B-B14F-4D97-AF65-F5344CB8AC3E}">
+        <p14:creationId xmlns:p14="http://schemas.microsoft.com/office/powerpoint/2010/main" val="3648500059"/>
+      </p:ext>
+    </p:extLst>
+  </p:cSld>
+  <p:clrMapOvr>
+    <a:masterClrMapping/>
+  </p:clrMapOvr>
+</p:notes>
+</file>
+
+<file path=ppt/notesSlides/notesSlide5.xml><?xml version="1.0" encoding="utf-8"?>
+<p:notes xmlns:a="http://schemas.openxmlformats.org/drawingml/2006/main" xmlns:r="http://schemas.openxmlformats.org/officeDocument/2006/relationships" xmlns:p="http://schemas.openxmlformats.org/presentationml/2006/main">
+  <p:cSld>
+    <p:spTree>
+      <p:nvGrpSpPr>
+        <p:cNvPr id="1" name="">
+          <a:extLst>
+            <a:ext uri="{FF2B5EF4-FFF2-40B4-BE49-F238E27FC236}">
+              <a16:creationId xmlns:a16="http://schemas.microsoft.com/office/drawing/2014/main" id="{88100ACA-D4A8-DDB3-2FE0-1C53DF4952E6}"/>
+            </a:ext>
+          </a:extLst>
+        </p:cNvPr>
+        <p:cNvGrpSpPr/>
+        <p:nvPr/>
+      </p:nvGrpSpPr>
+      <p:grpSpPr>
+        <a:xfrm>
+          <a:off x="0" y="0"/>
+          <a:ext cx="0" cy="0"/>
+          <a:chOff x="0" y="0"/>
+          <a:chExt cx="0" cy="0"/>
+        </a:xfrm>
+      </p:grpSpPr>
+      <p:sp>
+        <p:nvSpPr>
+          <p:cNvPr id="2" name="Slide Image Placeholder 1">
+            <a:extLst>
+              <a:ext uri="{FF2B5EF4-FFF2-40B4-BE49-F238E27FC236}">
+                <a16:creationId xmlns:a16="http://schemas.microsoft.com/office/drawing/2014/main" id="{EA861AA4-8115-E8A9-EF6C-D647AE623E40}"/>
+              </a:ext>
+            </a:extLst>
+          </p:cNvPr>
+          <p:cNvSpPr>
+            <a:spLocks noGrp="1" noRot="1" noChangeAspect="1"/>
+          </p:cNvSpPr>
+          <p:nvPr>
+            <p:ph type="sldImg"/>
+          </p:nvPr>
+        </p:nvSpPr>
+        <p:spPr/>
+      </p:sp>
+      <p:sp>
+        <p:nvSpPr>
+          <p:cNvPr id="3" name="Notes Placeholder 2">
+            <a:extLst>
+              <a:ext uri="{FF2B5EF4-FFF2-40B4-BE49-F238E27FC236}">
+                <a16:creationId xmlns:a16="http://schemas.microsoft.com/office/drawing/2014/main" id="{0EF3C81B-F4DC-45A1-DD32-C9BEA16F4C0A}"/>
+              </a:ext>
+            </a:extLst>
+          </p:cNvPr>
+          <p:cNvSpPr>
+            <a:spLocks noGrp="1"/>
+          </p:cNvSpPr>
+          <p:nvPr>
+            <p:ph type="body" idx="1"/>
+          </p:nvPr>
+        </p:nvSpPr>
+        <p:spPr/>
+        <p:txBody>
+          <a:bodyPr/>
+          <a:lstStyle/>
+          <a:p>
+            <a:endParaRPr lang="en-GB" dirty="0"/>
+          </a:p>
+        </p:txBody>
+      </p:sp>
+      <p:sp>
+        <p:nvSpPr>
+          <p:cNvPr id="4" name="Slide Number Placeholder 3">
+            <a:extLst>
+              <a:ext uri="{FF2B5EF4-FFF2-40B4-BE49-F238E27FC236}">
+                <a16:creationId xmlns:a16="http://schemas.microsoft.com/office/drawing/2014/main" id="{A522BE93-F0D7-B8EC-2B2F-CA3A69993ED7}"/>
+              </a:ext>
+            </a:extLst>
+          </p:cNvPr>
+          <p:cNvSpPr>
+            <a:spLocks noGrp="1"/>
+          </p:cNvSpPr>
+          <p:nvPr>
+            <p:ph type="sldNum" sz="quarter" idx="5"/>
+          </p:nvPr>
+        </p:nvSpPr>
+        <p:spPr/>
+        <p:txBody>
+          <a:bodyPr/>
+          <a:lstStyle/>
+          <a:p>
+            <a:fld id="{67FC2F5D-A00A-4392-B28E-0201BF8C74BB}" type="slidenum">
+              <a:rPr lang="en-GB" smtClean="0"/>
+              <a:t>8</a:t>
+            </a:fld>
+            <a:endParaRPr lang="en-GB"/>
+          </a:p>
+        </p:txBody>
+      </p:sp>
+    </p:spTree>
+    <p:extLst>
+      <p:ext uri="{BB962C8B-B14F-4D97-AF65-F5344CB8AC3E}">
+        <p14:creationId xmlns:p14="http://schemas.microsoft.com/office/powerpoint/2010/main" val="704544054"/>
+      </p:ext>
+    </p:extLst>
+  </p:cSld>
+  <p:clrMapOvr>
+    <a:masterClrMapping/>
+  </p:clrMapOvr>
+</p:notes>
+</file>
+
 <file path=ppt/slideLayouts/slideLayout1.xml><?xml version="1.0" encoding="utf-8"?>
 <p:sldLayout xmlns:a="http://schemas.openxmlformats.org/drawingml/2006/main" xmlns:r="http://schemas.openxmlformats.org/officeDocument/2006/relationships" xmlns:p="http://schemas.openxmlformats.org/presentationml/2006/main" type="title" preserve="1">
   <p:cSld name="Titelfolie">
@@ -1476,7 +1694,7 @@
           <a:p>
             <a:fld id="{259F4B15-8AB2-4C86-B5C5-75A9D4FD84E4}" type="datetimeFigureOut">
               <a:rPr lang="de-DE" smtClean="0"/>
-              <a:t>25.05.2026</a:t>
+              <a:t>26.05.2026</a:t>
             </a:fld>
             <a:endParaRPr lang="de-DE"/>
           </a:p>
@@ -1674,7 +1892,7 @@
           <a:p>
             <a:fld id="{259F4B15-8AB2-4C86-B5C5-75A9D4FD84E4}" type="datetimeFigureOut">
               <a:rPr lang="de-DE" smtClean="0"/>
-              <a:t>25.05.2026</a:t>
+              <a:t>26.05.2026</a:t>
             </a:fld>
             <a:endParaRPr lang="de-DE"/>
           </a:p>
@@ -1882,7 +2100,7 @@
           <a:p>
             <a:fld id="{259F4B15-8AB2-4C86-B5C5-75A9D4FD84E4}" type="datetimeFigureOut">
               <a:rPr lang="de-DE" smtClean="0"/>
-              <a:t>25.05.2026</a:t>
+              <a:t>26.05.2026</a:t>
             </a:fld>
             <a:endParaRPr lang="de-DE"/>
           </a:p>
@@ -2080,7 +2298,7 @@
           <a:p>
             <a:fld id="{259F4B15-8AB2-4C86-B5C5-75A9D4FD84E4}" type="datetimeFigureOut">
               <a:rPr lang="de-DE" smtClean="0"/>
-              <a:t>25.05.2026</a:t>
+              <a:t>26.05.2026</a:t>
             </a:fld>
             <a:endParaRPr lang="de-DE"/>
           </a:p>
@@ -2355,7 +2573,7 @@
           <a:p>
             <a:fld id="{259F4B15-8AB2-4C86-B5C5-75A9D4FD84E4}" type="datetimeFigureOut">
               <a:rPr lang="de-DE" smtClean="0"/>
-              <a:t>25.05.2026</a:t>
+              <a:t>26.05.2026</a:t>
             </a:fld>
             <a:endParaRPr lang="de-DE"/>
           </a:p>
@@ -2620,7 +2838,7 @@
           <a:p>
             <a:fld id="{259F4B15-8AB2-4C86-B5C5-75A9D4FD84E4}" type="datetimeFigureOut">
               <a:rPr lang="de-DE" smtClean="0"/>
-              <a:t>25.05.2026</a:t>
+              <a:t>26.05.2026</a:t>
             </a:fld>
             <a:endParaRPr lang="de-DE"/>
           </a:p>
@@ -3032,7 +3250,7 @@
           <a:p>
             <a:fld id="{259F4B15-8AB2-4C86-B5C5-75A9D4FD84E4}" type="datetimeFigureOut">
               <a:rPr lang="de-DE" smtClean="0"/>
-              <a:t>25.05.2026</a:t>
+              <a:t>26.05.2026</a:t>
             </a:fld>
             <a:endParaRPr lang="de-DE"/>
           </a:p>
@@ -3173,7 +3391,7 @@
           <a:p>
             <a:fld id="{259F4B15-8AB2-4C86-B5C5-75A9D4FD84E4}" type="datetimeFigureOut">
               <a:rPr lang="de-DE" smtClean="0"/>
-              <a:t>25.05.2026</a:t>
+              <a:t>26.05.2026</a:t>
             </a:fld>
             <a:endParaRPr lang="de-DE"/>
           </a:p>
@@ -3286,7 +3504,7 @@
           <a:p>
             <a:fld id="{259F4B15-8AB2-4C86-B5C5-75A9D4FD84E4}" type="datetimeFigureOut">
               <a:rPr lang="de-DE" smtClean="0"/>
-              <a:t>25.05.2026</a:t>
+              <a:t>26.05.2026</a:t>
             </a:fld>
             <a:endParaRPr lang="de-DE"/>
           </a:p>
@@ -3597,7 +3815,7 @@
           <a:p>
             <a:fld id="{259F4B15-8AB2-4C86-B5C5-75A9D4FD84E4}" type="datetimeFigureOut">
               <a:rPr lang="de-DE" smtClean="0"/>
-              <a:t>25.05.2026</a:t>
+              <a:t>26.05.2026</a:t>
             </a:fld>
             <a:endParaRPr lang="de-DE"/>
           </a:p>
@@ -3885,7 +4103,7 @@
           <a:p>
             <a:fld id="{259F4B15-8AB2-4C86-B5C5-75A9D4FD84E4}" type="datetimeFigureOut">
               <a:rPr lang="de-DE" smtClean="0"/>
-              <a:t>25.05.2026</a:t>
+              <a:t>26.05.2026</a:t>
             </a:fld>
             <a:endParaRPr lang="de-DE"/>
           </a:p>
@@ -4126,7 +4344,7 @@
           <a:p>
             <a:fld id="{259F4B15-8AB2-4C86-B5C5-75A9D4FD84E4}" type="datetimeFigureOut">
               <a:rPr lang="de-DE" smtClean="0"/>
-              <a:t>25.05.2026</a:t>
+              <a:t>26.05.2026</a:t>
             </a:fld>
             <a:endParaRPr lang="de-DE"/>
           </a:p>
@@ -5256,6 +5474,153 @@
 </p:sld>
 </file>
 
+<file path=ppt/slides/slide10.xml><?xml version="1.0" encoding="utf-8"?>
+<p:sld xmlns:a="http://schemas.openxmlformats.org/drawingml/2006/main" xmlns:r="http://schemas.openxmlformats.org/officeDocument/2006/relationships" xmlns:p="http://schemas.openxmlformats.org/presentationml/2006/main">
+  <p:cSld>
+    <p:spTree>
+      <p:nvGrpSpPr>
+        <p:cNvPr id="1" name=""/>
+        <p:cNvGrpSpPr/>
+        <p:nvPr/>
+      </p:nvGrpSpPr>
+      <p:grpSpPr>
+        <a:xfrm>
+          <a:off x="0" y="0"/>
+          <a:ext cx="0" cy="0"/>
+          <a:chOff x="0" y="0"/>
+          <a:chExt cx="0" cy="0"/>
+        </a:xfrm>
+      </p:grpSpPr>
+      <p:sp>
+        <p:nvSpPr>
+          <p:cNvPr id="2" name="Titel 1">
+            <a:extLst>
+              <a:ext uri="{FF2B5EF4-FFF2-40B4-BE49-F238E27FC236}">
+                <a16:creationId xmlns:a16="http://schemas.microsoft.com/office/drawing/2014/main" id="{FA111BCC-1FCB-797D-6A46-449BCAB31DD4}"/>
+              </a:ext>
+            </a:extLst>
+          </p:cNvPr>
+          <p:cNvSpPr>
+            <a:spLocks noGrp="1"/>
+          </p:cNvSpPr>
+          <p:nvPr>
+            <p:ph type="title"/>
+          </p:nvPr>
+        </p:nvSpPr>
+        <p:spPr/>
+        <p:txBody>
+          <a:bodyPr/>
+          <a:lstStyle/>
+          <a:p>
+            <a:r>
+              <a:rPr lang="de-DE" dirty="0" err="1"/>
+              <a:t>Conclusion</a:t>
+            </a:r>
+            <a:endParaRPr lang="de-DE" dirty="0"/>
+          </a:p>
+        </p:txBody>
+      </p:sp>
+      <p:sp>
+        <p:nvSpPr>
+          <p:cNvPr id="3" name="Inhaltsplatzhalter 2">
+            <a:extLst>
+              <a:ext uri="{FF2B5EF4-FFF2-40B4-BE49-F238E27FC236}">
+                <a16:creationId xmlns:a16="http://schemas.microsoft.com/office/drawing/2014/main" id="{13680EE8-07C5-28E5-EB00-12F747B70BC0}"/>
+              </a:ext>
+            </a:extLst>
+          </p:cNvPr>
+          <p:cNvSpPr>
+            <a:spLocks noGrp="1"/>
+          </p:cNvSpPr>
+          <p:nvPr>
+            <p:ph idx="1"/>
+          </p:nvPr>
+        </p:nvSpPr>
+        <p:spPr/>
+        <p:txBody>
+          <a:bodyPr/>
+          <a:lstStyle/>
+          <a:p>
+            <a:r>
+              <a:rPr lang="de-DE" dirty="0" err="1"/>
+              <a:t>Successful</a:t>
+            </a:r>
+            <a:r>
+              <a:rPr lang="de-DE" dirty="0"/>
+              <a:t> </a:t>
+            </a:r>
+            <a:r>
+              <a:rPr lang="de-DE" dirty="0" err="1"/>
+              <a:t>proof</a:t>
+            </a:r>
+            <a:r>
+              <a:rPr lang="de-DE" dirty="0"/>
+              <a:t> </a:t>
+            </a:r>
+            <a:r>
+              <a:rPr lang="de-DE" dirty="0" err="1"/>
+              <a:t>of</a:t>
+            </a:r>
+            <a:r>
+              <a:rPr lang="de-DE" dirty="0"/>
+              <a:t> </a:t>
+            </a:r>
+            <a:r>
+              <a:rPr lang="de-DE" dirty="0" err="1"/>
+              <a:t>concept</a:t>
+            </a:r>
+            <a:endParaRPr lang="de-DE" dirty="0"/>
+          </a:p>
+          <a:p>
+            <a:r>
+              <a:rPr lang="de-DE" dirty="0"/>
+              <a:t>Speech </a:t>
+            </a:r>
+            <a:r>
+              <a:rPr lang="de-DE" dirty="0" err="1"/>
+              <a:t>as</a:t>
+            </a:r>
+            <a:r>
+              <a:rPr lang="de-DE" dirty="0"/>
+              <a:t> </a:t>
+            </a:r>
+            <a:r>
+              <a:rPr lang="de-DE" dirty="0" err="1"/>
+              <a:t>lightweight</a:t>
+            </a:r>
+            <a:r>
+              <a:rPr lang="de-DE" dirty="0"/>
+              <a:t> interface</a:t>
+            </a:r>
+            <a:endParaRPr lang="en-US" dirty="0"/>
+          </a:p>
+          <a:p>
+            <a:r>
+              <a:rPr lang="en-US" dirty="0"/>
+              <a:t>Real-time control works </a:t>
+            </a:r>
+          </a:p>
+          <a:p>
+            <a:r>
+              <a:rPr lang="en-US" dirty="0"/>
+              <a:t>Reliable command recognition </a:t>
+            </a:r>
+          </a:p>
+        </p:txBody>
+      </p:sp>
+    </p:spTree>
+    <p:extLst>
+      <p:ext uri="{BB962C8B-B14F-4D97-AF65-F5344CB8AC3E}">
+        <p14:creationId xmlns:p14="http://schemas.microsoft.com/office/powerpoint/2010/main" val="3625072128"/>
+      </p:ext>
+    </p:extLst>
+  </p:cSld>
+  <p:clrMapOvr>
+    <a:masterClrMapping/>
+  </p:clrMapOvr>
+</p:sld>
+</file>
+
 <file path=ppt/slides/slide2.xml><?xml version="1.0" encoding="utf-8"?>
 <p:sld xmlns:a="http://schemas.openxmlformats.org/drawingml/2006/main" xmlns:r="http://schemas.openxmlformats.org/officeDocument/2006/relationships" xmlns:p="http://schemas.openxmlformats.org/presentationml/2006/main">
   <p:cSld>
@@ -7548,9 +7913,23 @@
 <file path=ppt/slides/slide7.xml><?xml version="1.0" encoding="utf-8"?>
 <p:sld xmlns:a="http://schemas.openxmlformats.org/drawingml/2006/main" xmlns:r="http://schemas.openxmlformats.org/officeDocument/2006/relationships" xmlns:p="http://schemas.openxmlformats.org/presentationml/2006/main">
   <p:cSld>
+    <p:bg>
+      <p:bgPr>
+        <a:solidFill>
+          <a:schemeClr val="bg1"/>
+        </a:solidFill>
+        <a:effectLst/>
+      </p:bgPr>
+    </p:bg>
     <p:spTree>
       <p:nvGrpSpPr>
-        <p:cNvPr id="1" name=""/>
+        <p:cNvPr id="1" name="">
+          <a:extLst>
+            <a:ext uri="{FF2B5EF4-FFF2-40B4-BE49-F238E27FC236}">
+              <a16:creationId xmlns:a16="http://schemas.microsoft.com/office/drawing/2014/main" id="{CB34A122-7797-DA5A-B347-1451091C335E}"/>
+            </a:ext>
+          </a:extLst>
+        </p:cNvPr>
         <p:cNvGrpSpPr/>
         <p:nvPr/>
       </p:nvGrpSpPr>
@@ -7562,12 +7941,315 @@
           <a:chExt cx="0" cy="0"/>
         </a:xfrm>
       </p:grpSpPr>
-      <p:sp>
-        <p:nvSpPr>
-          <p:cNvPr id="2" name="Titel 1">
-            <a:extLst>
-              <a:ext uri="{FF2B5EF4-FFF2-40B4-BE49-F238E27FC236}">
-                <a16:creationId xmlns:a16="http://schemas.microsoft.com/office/drawing/2014/main" id="{DE91ACC9-79D4-17C2-681B-F78A70151FD9}"/>
+      <p:sp useBgFill="1">
+        <p:nvSpPr>
+          <p:cNvPr id="13" name="Rectangle 12">
+            <a:extLst>
+              <a:ext uri="{FF2B5EF4-FFF2-40B4-BE49-F238E27FC236}">
+                <a16:creationId xmlns:a16="http://schemas.microsoft.com/office/drawing/2014/main" id="{BF1F40FB-18AB-757F-52E2-A5D850BD4022}"/>
+              </a:ext>
+              <a:ext uri="{C183D7F6-B498-43B3-948B-1728B52AA6E4}">
+                <adec:decorative xmlns:adec="http://schemas.microsoft.com/office/drawing/2017/decorative" val="1"/>
+              </a:ext>
+            </a:extLst>
+          </p:cNvPr>
+          <p:cNvSpPr>
+            <a:spLocks noGrp="1" noRot="1" noChangeAspect="1" noMove="1" noResize="1" noEditPoints="1" noAdjustHandles="1" noChangeArrowheads="1" noChangeShapeType="1" noTextEdit="1"/>
+          </p:cNvSpPr>
+          <p:nvPr>
+            <p:extLst>
+              <p:ext uri="{386F3935-93C4-4BCD-93E2-E3B085C9AB24}">
+                <p16:designElem xmlns:p16="http://schemas.microsoft.com/office/powerpoint/2015/main" val="1"/>
+              </p:ext>
+            </p:extLst>
+          </p:nvPr>
+        </p:nvSpPr>
+        <p:spPr>
+          <a:xfrm>
+            <a:off x="0" y="0"/>
+            <a:ext cx="12192000" cy="6858000"/>
+          </a:xfrm>
+          <a:prstGeom prst="rect">
+            <a:avLst/>
+          </a:prstGeom>
+          <a:ln w="12700" cap="flat" cmpd="sng" algn="ctr">
+            <a:noFill/>
+            <a:prstDash val="solid"/>
+            <a:miter lim="800000"/>
+          </a:ln>
+          <a:effectLst/>
+          <a:extLst>
+            <a:ext uri="{91240B29-F687-4F45-9708-019B960494DF}">
+              <a14:hiddenLine xmlns:a14="http://schemas.microsoft.com/office/drawing/2010/main" w="12700" cap="flat" cmpd="sng" algn="ctr">
+                <a:solidFill>
+                  <a:schemeClr val="accent1">
+                    <a:shade val="50000"/>
+                  </a:schemeClr>
+                </a:solidFill>
+                <a:prstDash val="solid"/>
+                <a:miter lim="800000"/>
+              </a14:hiddenLine>
+            </a:ext>
+          </a:extLst>
+        </p:spPr>
+        <p:style>
+          <a:lnRef idx="2">
+            <a:schemeClr val="accent1">
+              <a:shade val="50000"/>
+            </a:schemeClr>
+          </a:lnRef>
+          <a:fillRef idx="1">
+            <a:schemeClr val="accent1"/>
+          </a:fillRef>
+          <a:effectRef idx="0">
+            <a:schemeClr val="accent1"/>
+          </a:effectRef>
+          <a:fontRef idx="minor">
+            <a:schemeClr val="lt1"/>
+          </a:fontRef>
+        </p:style>
+        <p:txBody>
+          <a:bodyPr rtlCol="0" anchor="ctr"/>
+          <a:lstStyle/>
+          <a:p>
+            <a:pPr algn="ctr"/>
+            <a:endParaRPr lang="en-US"/>
+          </a:p>
+        </p:txBody>
+      </p:sp>
+      <p:sp>
+        <p:nvSpPr>
+          <p:cNvPr id="15" name="Rectangle 14">
+            <a:extLst>
+              <a:ext uri="{FF2B5EF4-FFF2-40B4-BE49-F238E27FC236}">
+                <a16:creationId xmlns:a16="http://schemas.microsoft.com/office/drawing/2014/main" id="{C32230C8-DA72-BBD1-07A1-06C4C3B72063}"/>
+              </a:ext>
+              <a:ext uri="{C183D7F6-B498-43B3-948B-1728B52AA6E4}">
+                <adec:decorative xmlns:adec="http://schemas.microsoft.com/office/drawing/2017/decorative" val="1"/>
+              </a:ext>
+            </a:extLst>
+          </p:cNvPr>
+          <p:cNvSpPr>
+            <a:spLocks noGrp="1" noRot="1" noChangeAspect="1" noMove="1" noResize="1" noEditPoints="1" noAdjustHandles="1" noChangeArrowheads="1" noChangeShapeType="1" noTextEdit="1"/>
+          </p:cNvSpPr>
+          <p:nvPr>
+            <p:extLst>
+              <p:ext uri="{386F3935-93C4-4BCD-93E2-E3B085C9AB24}">
+                <p16:designElem xmlns:p16="http://schemas.microsoft.com/office/powerpoint/2015/main" val="1"/>
+              </p:ext>
+            </p:extLst>
+          </p:nvPr>
+        </p:nvSpPr>
+        <p:spPr>
+          <a:xfrm rot="10800000" flipH="1">
+            <a:off x="2" y="0"/>
+            <a:ext cx="12191998" cy="1575955"/>
+          </a:xfrm>
+          <a:prstGeom prst="rect">
+            <a:avLst/>
+          </a:prstGeom>
+          <a:gradFill>
+            <a:gsLst>
+              <a:gs pos="0">
+                <a:srgbClr val="000000">
+                  <a:alpha val="96000"/>
+                </a:srgbClr>
+              </a:gs>
+              <a:gs pos="100000">
+                <a:schemeClr val="accent1">
+                  <a:lumMod val="75000"/>
+                </a:schemeClr>
+              </a:gs>
+            </a:gsLst>
+            <a:lin ang="6000000" scaled="0"/>
+          </a:gradFill>
+          <a:ln>
+            <a:noFill/>
+          </a:ln>
+        </p:spPr>
+        <p:style>
+          <a:lnRef idx="2">
+            <a:schemeClr val="accent1">
+              <a:shade val="50000"/>
+            </a:schemeClr>
+          </a:lnRef>
+          <a:fillRef idx="1">
+            <a:schemeClr val="accent1"/>
+          </a:fillRef>
+          <a:effectRef idx="0">
+            <a:schemeClr val="accent1"/>
+          </a:effectRef>
+          <a:fontRef idx="minor">
+            <a:schemeClr val="lt1"/>
+          </a:fontRef>
+        </p:style>
+        <p:txBody>
+          <a:bodyPr rtlCol="0" anchor="ctr"/>
+          <a:lstStyle/>
+          <a:p>
+            <a:pPr algn="ctr"/>
+            <a:endParaRPr lang="en-US"/>
+          </a:p>
+        </p:txBody>
+      </p:sp>
+      <p:sp>
+        <p:nvSpPr>
+          <p:cNvPr id="17" name="Rectangle 16">
+            <a:extLst>
+              <a:ext uri="{FF2B5EF4-FFF2-40B4-BE49-F238E27FC236}">
+                <a16:creationId xmlns:a16="http://schemas.microsoft.com/office/drawing/2014/main" id="{EB24B9B3-556D-0995-AB5A-1A5793ECA5AF}"/>
+              </a:ext>
+              <a:ext uri="{C183D7F6-B498-43B3-948B-1728B52AA6E4}">
+                <adec:decorative xmlns:adec="http://schemas.microsoft.com/office/drawing/2017/decorative" val="1"/>
+              </a:ext>
+            </a:extLst>
+          </p:cNvPr>
+          <p:cNvSpPr>
+            <a:spLocks noGrp="1" noRot="1" noChangeAspect="1" noMove="1" noResize="1" noEditPoints="1" noAdjustHandles="1" noChangeArrowheads="1" noChangeShapeType="1" noTextEdit="1"/>
+          </p:cNvSpPr>
+          <p:nvPr>
+            <p:extLst>
+              <p:ext uri="{386F3935-93C4-4BCD-93E2-E3B085C9AB24}">
+                <p16:designElem xmlns:p16="http://schemas.microsoft.com/office/powerpoint/2015/main" val="1"/>
+              </p:ext>
+            </p:extLst>
+          </p:nvPr>
+        </p:nvSpPr>
+        <p:spPr>
+          <a:xfrm>
+            <a:off x="0" y="0"/>
+            <a:ext cx="8128856" cy="1575461"/>
+          </a:xfrm>
+          <a:prstGeom prst="rect">
+            <a:avLst/>
+          </a:prstGeom>
+          <a:gradFill>
+            <a:gsLst>
+              <a:gs pos="0">
+                <a:schemeClr val="accent1">
+                  <a:alpha val="41000"/>
+                </a:schemeClr>
+              </a:gs>
+              <a:gs pos="74000">
+                <a:schemeClr val="accent1">
+                  <a:lumMod val="60000"/>
+                  <a:lumOff val="40000"/>
+                  <a:alpha val="0"/>
+                </a:schemeClr>
+              </a:gs>
+            </a:gsLst>
+            <a:lin ang="8400000" scaled="0"/>
+          </a:gradFill>
+          <a:ln>
+            <a:noFill/>
+          </a:ln>
+        </p:spPr>
+        <p:style>
+          <a:lnRef idx="2">
+            <a:schemeClr val="accent1">
+              <a:shade val="50000"/>
+            </a:schemeClr>
+          </a:lnRef>
+          <a:fillRef idx="1">
+            <a:schemeClr val="accent1"/>
+          </a:fillRef>
+          <a:effectRef idx="0">
+            <a:schemeClr val="accent1"/>
+          </a:effectRef>
+          <a:fontRef idx="minor">
+            <a:schemeClr val="lt1"/>
+          </a:fontRef>
+        </p:style>
+        <p:txBody>
+          <a:bodyPr rtlCol="0" anchor="ctr"/>
+          <a:lstStyle/>
+          <a:p>
+            <a:pPr algn="ctr"/>
+            <a:endParaRPr lang="en-US"/>
+          </a:p>
+        </p:txBody>
+      </p:sp>
+      <p:sp>
+        <p:nvSpPr>
+          <p:cNvPr id="19" name="Rectangle 18">
+            <a:extLst>
+              <a:ext uri="{FF2B5EF4-FFF2-40B4-BE49-F238E27FC236}">
+                <a16:creationId xmlns:a16="http://schemas.microsoft.com/office/drawing/2014/main" id="{5EFE942F-C8E6-ABD6-610D-1CEB19DF51DD}"/>
+              </a:ext>
+              <a:ext uri="{C183D7F6-B498-43B3-948B-1728B52AA6E4}">
+                <adec:decorative xmlns:adec="http://schemas.microsoft.com/office/drawing/2017/decorative" val="1"/>
+              </a:ext>
+            </a:extLst>
+          </p:cNvPr>
+          <p:cNvSpPr>
+            <a:spLocks noGrp="1" noRot="1" noChangeAspect="1" noMove="1" noResize="1" noEditPoints="1" noAdjustHandles="1" noChangeArrowheads="1" noChangeShapeType="1" noTextEdit="1"/>
+          </p:cNvSpPr>
+          <p:nvPr>
+            <p:extLst>
+              <p:ext uri="{386F3935-93C4-4BCD-93E2-E3B085C9AB24}">
+                <p16:designElem xmlns:p16="http://schemas.microsoft.com/office/powerpoint/2015/main" val="1"/>
+              </p:ext>
+            </p:extLst>
+          </p:nvPr>
+        </p:nvSpPr>
+        <p:spPr>
+          <a:xfrm flipH="1">
+            <a:off x="-3" y="-1"/>
+            <a:ext cx="12192002" cy="1574311"/>
+          </a:xfrm>
+          <a:prstGeom prst="rect">
+            <a:avLst/>
+          </a:prstGeom>
+          <a:gradFill>
+            <a:gsLst>
+              <a:gs pos="0">
+                <a:srgbClr val="000000">
+                  <a:alpha val="63000"/>
+                </a:srgbClr>
+              </a:gs>
+              <a:gs pos="78000">
+                <a:schemeClr val="accent1">
+                  <a:alpha val="15000"/>
+                </a:schemeClr>
+              </a:gs>
+            </a:gsLst>
+            <a:lin ang="15600000" scaled="0"/>
+          </a:gradFill>
+          <a:ln>
+            <a:noFill/>
+          </a:ln>
+        </p:spPr>
+        <p:style>
+          <a:lnRef idx="2">
+            <a:schemeClr val="accent1">
+              <a:shade val="50000"/>
+            </a:schemeClr>
+          </a:lnRef>
+          <a:fillRef idx="1">
+            <a:schemeClr val="accent1"/>
+          </a:fillRef>
+          <a:effectRef idx="0">
+            <a:schemeClr val="accent1"/>
+          </a:effectRef>
+          <a:fontRef idx="minor">
+            <a:schemeClr val="lt1"/>
+          </a:fontRef>
+        </p:style>
+        <p:txBody>
+          <a:bodyPr rtlCol="0" anchor="ctr"/>
+          <a:lstStyle/>
+          <a:p>
+            <a:pPr algn="ctr"/>
+            <a:endParaRPr lang="en-US"/>
+          </a:p>
+        </p:txBody>
+      </p:sp>
+      <p:sp>
+        <p:nvSpPr>
+          <p:cNvPr id="2" name="Title 1">
+            <a:extLst>
+              <a:ext uri="{FF2B5EF4-FFF2-40B4-BE49-F238E27FC236}">
+                <a16:creationId xmlns:a16="http://schemas.microsoft.com/office/drawing/2014/main" id="{24C08299-A037-119E-EFFC-EE036847024F}"/>
               </a:ext>
             </a:extLst>
           </p:cNvPr>
@@ -7578,29 +8260,43 @@
             <p:ph type="title"/>
           </p:nvPr>
         </p:nvSpPr>
-        <p:spPr/>
-        <p:txBody>
-          <a:bodyPr/>
-          <a:lstStyle/>
-          <a:p>
-            <a:r>
-              <a:rPr lang="de-DE" dirty="0"/>
-              <a:t>System </a:t>
-            </a:r>
-            <a:r>
-              <a:rPr lang="de-DE" dirty="0" err="1"/>
-              <a:t>Overview</a:t>
-            </a:r>
-            <a:endParaRPr lang="de-DE" dirty="0"/>
-          </a:p>
-        </p:txBody>
-      </p:sp>
-      <p:sp>
-        <p:nvSpPr>
-          <p:cNvPr id="3" name="Inhaltsplatzhalter 2">
-            <a:extLst>
-              <a:ext uri="{FF2B5EF4-FFF2-40B4-BE49-F238E27FC236}">
-                <a16:creationId xmlns:a16="http://schemas.microsoft.com/office/drawing/2014/main" id="{DAB83250-174B-4DC9-6B1F-0F086478514B}"/>
+        <p:spPr>
+          <a:xfrm>
+            <a:off x="699713" y="248038"/>
+            <a:ext cx="7063721" cy="1159200"/>
+          </a:xfrm>
+        </p:spPr>
+        <p:txBody>
+          <a:bodyPr vert="horz" lIns="91440" tIns="45720" rIns="91440" bIns="45720" rtlCol="0" anchor="ctr">
+            <a:normAutofit/>
+          </a:bodyPr>
+          <a:lstStyle/>
+          <a:p>
+            <a:r>
+              <a:rPr lang="en-GB" sz="4000" dirty="0">
+                <a:solidFill>
+                  <a:schemeClr val="bg1"/>
+                </a:solidFill>
+              </a:rPr>
+              <a:t>Game integration</a:t>
+            </a:r>
+            <a:endParaRPr lang="en-US" sz="4000" kern="1200" dirty="0">
+              <a:solidFill>
+                <a:schemeClr val="bg1"/>
+              </a:solidFill>
+              <a:latin typeface="+mj-lt"/>
+              <a:ea typeface="+mj-ea"/>
+              <a:cs typeface="+mj-cs"/>
+            </a:endParaRPr>
+          </a:p>
+        </p:txBody>
+      </p:sp>
+      <p:sp>
+        <p:nvSpPr>
+          <p:cNvPr id="3" name="Content Placeholder 2">
+            <a:extLst>
+              <a:ext uri="{FF2B5EF4-FFF2-40B4-BE49-F238E27FC236}">
+                <a16:creationId xmlns:a16="http://schemas.microsoft.com/office/drawing/2014/main" id="{25DEF4F3-5AA0-C4A7-F9EA-33A485BF28C3}"/>
               </a:ext>
             </a:extLst>
           </p:cNvPr>
@@ -7611,43 +8307,104 @@
             <p:ph idx="1"/>
           </p:nvPr>
         </p:nvSpPr>
-        <p:spPr/>
-        <p:txBody>
-          <a:bodyPr/>
-          <a:lstStyle/>
-          <a:p>
-            <a:r>
-              <a:rPr lang="en-US" dirty="0"/>
-              <a:t>Audio input </a:t>
-            </a:r>
-          </a:p>
-          <a:p>
-            <a:r>
-              <a:rPr lang="en-US" dirty="0"/>
-              <a:t>MFCC feature extraction </a:t>
-            </a:r>
-          </a:p>
-          <a:p>
-            <a:r>
-              <a:rPr lang="en-US" dirty="0"/>
-              <a:t>DNN + HMM processing </a:t>
-            </a:r>
-          </a:p>
-          <a:p>
-            <a:r>
-              <a:rPr lang="en-US" dirty="0"/>
-              <a:t>Word prediction</a:t>
-            </a:r>
-          </a:p>
-          <a:p>
-            <a:endParaRPr lang="de-DE" dirty="0"/>
+        <p:spPr>
+          <a:xfrm>
+            <a:off x="6047084" y="1899919"/>
+            <a:ext cx="5623560" cy="1056641"/>
+          </a:xfrm>
+        </p:spPr>
+        <p:txBody>
+          <a:bodyPr>
+            <a:normAutofit/>
+          </a:bodyPr>
+          <a:lstStyle/>
+          <a:p>
+            <a:r>
+              <a:rPr lang="en-GB" dirty="0"/>
+              <a:t>recursive backtracking maze generation</a:t>
+            </a:r>
+          </a:p>
+        </p:txBody>
+      </p:sp>
+      <p:pic>
+        <p:nvPicPr>
+          <p:cNvPr id="6" name="Picture 5">
+            <a:extLst>
+              <a:ext uri="{FF2B5EF4-FFF2-40B4-BE49-F238E27FC236}">
+                <a16:creationId xmlns:a16="http://schemas.microsoft.com/office/drawing/2014/main" id="{075156BD-F60A-FF0C-227C-6D7E339C9026}"/>
+              </a:ext>
+            </a:extLst>
+          </p:cNvPr>
+          <p:cNvPicPr>
+            <a:picLocks noChangeAspect="1"/>
+          </p:cNvPicPr>
+          <p:nvPr/>
+        </p:nvPicPr>
+        <p:blipFill>
+          <a:blip r:embed="rId3"/>
+          <a:srcRect t="2536"/>
+          <a:stretch>
+            <a:fillRect/>
+          </a:stretch>
+        </p:blipFill>
+        <p:spPr>
+          <a:xfrm>
+            <a:off x="699713" y="1765887"/>
+            <a:ext cx="4820920" cy="4844075"/>
+          </a:xfrm>
+          <a:prstGeom prst="rect">
+            <a:avLst/>
+          </a:prstGeom>
+        </p:spPr>
+      </p:pic>
+      <p:sp>
+        <p:nvSpPr>
+          <p:cNvPr id="8" name="TextBox 7">
+            <a:extLst>
+              <a:ext uri="{FF2B5EF4-FFF2-40B4-BE49-F238E27FC236}">
+                <a16:creationId xmlns:a16="http://schemas.microsoft.com/office/drawing/2014/main" id="{0C01C29D-DED3-AC37-489D-99100642E287}"/>
+              </a:ext>
+            </a:extLst>
+          </p:cNvPr>
+          <p:cNvSpPr txBox="1"/>
+          <p:nvPr/>
+        </p:nvSpPr>
+        <p:spPr>
+          <a:xfrm>
+            <a:off x="6502400" y="2956560"/>
+            <a:ext cx="4307840" cy="1200329"/>
+          </a:xfrm>
+          <a:prstGeom prst="rect">
+            <a:avLst/>
+          </a:prstGeom>
+          <a:noFill/>
+        </p:spPr>
+        <p:txBody>
+          <a:bodyPr wrap="square" rtlCol="0">
+            <a:spAutoFit/>
+          </a:bodyPr>
+          <a:lstStyle/>
+          <a:p>
+            <a:r>
+              <a:rPr lang="en-GB" dirty="0"/>
+              <a:t>1- initialize maze with walls everywhere </a:t>
+            </a:r>
+          </a:p>
+          <a:p>
+            <a:endParaRPr lang="en-GB" dirty="0"/>
+          </a:p>
+          <a:p>
+            <a:r>
+              <a:rPr lang="en-GB" dirty="0"/>
+              <a:t>2- do a depth first search while removing the walls between neighbours </a:t>
+            </a:r>
           </a:p>
         </p:txBody>
       </p:sp>
     </p:spTree>
     <p:extLst>
       <p:ext uri="{BB962C8B-B14F-4D97-AF65-F5344CB8AC3E}">
-        <p14:creationId xmlns:p14="http://schemas.microsoft.com/office/powerpoint/2010/main" val="466913703"/>
+        <p14:creationId xmlns:p14="http://schemas.microsoft.com/office/powerpoint/2010/main" val="125624488"/>
       </p:ext>
     </p:extLst>
   </p:cSld>
@@ -7658,6 +8415,749 @@
 </file>
 
 <file path=ppt/slides/slide8.xml><?xml version="1.0" encoding="utf-8"?>
+<p:sld xmlns:a="http://schemas.openxmlformats.org/drawingml/2006/main" xmlns:r="http://schemas.openxmlformats.org/officeDocument/2006/relationships" xmlns:p="http://schemas.openxmlformats.org/presentationml/2006/main">
+  <p:cSld>
+    <p:bg>
+      <p:bgPr>
+        <a:solidFill>
+          <a:schemeClr val="bg1"/>
+        </a:solidFill>
+        <a:effectLst/>
+      </p:bgPr>
+    </p:bg>
+    <p:spTree>
+      <p:nvGrpSpPr>
+        <p:cNvPr id="1" name="">
+          <a:extLst>
+            <a:ext uri="{FF2B5EF4-FFF2-40B4-BE49-F238E27FC236}">
+              <a16:creationId xmlns:a16="http://schemas.microsoft.com/office/drawing/2014/main" id="{A99956A7-46B4-9625-F3E4-A95F35906949}"/>
+            </a:ext>
+          </a:extLst>
+        </p:cNvPr>
+        <p:cNvGrpSpPr/>
+        <p:nvPr/>
+      </p:nvGrpSpPr>
+      <p:grpSpPr>
+        <a:xfrm>
+          <a:off x="0" y="0"/>
+          <a:ext cx="0" cy="0"/>
+          <a:chOff x="0" y="0"/>
+          <a:chExt cx="0" cy="0"/>
+        </a:xfrm>
+      </p:grpSpPr>
+      <p:sp useBgFill="1">
+        <p:nvSpPr>
+          <p:cNvPr id="13" name="Rectangle 12">
+            <a:extLst>
+              <a:ext uri="{FF2B5EF4-FFF2-40B4-BE49-F238E27FC236}">
+                <a16:creationId xmlns:a16="http://schemas.microsoft.com/office/drawing/2014/main" id="{9D474B9D-F108-890B-7F40-677FA49E91B7}"/>
+              </a:ext>
+              <a:ext uri="{C183D7F6-B498-43B3-948B-1728B52AA6E4}">
+                <adec:decorative xmlns:adec="http://schemas.microsoft.com/office/drawing/2017/decorative" val="1"/>
+              </a:ext>
+            </a:extLst>
+          </p:cNvPr>
+          <p:cNvSpPr>
+            <a:spLocks noGrp="1" noRot="1" noChangeAspect="1" noMove="1" noResize="1" noEditPoints="1" noAdjustHandles="1" noChangeArrowheads="1" noChangeShapeType="1" noTextEdit="1"/>
+          </p:cNvSpPr>
+          <p:nvPr>
+            <p:extLst>
+              <p:ext uri="{386F3935-93C4-4BCD-93E2-E3B085C9AB24}">
+                <p16:designElem xmlns:p16="http://schemas.microsoft.com/office/powerpoint/2015/main" val="1"/>
+              </p:ext>
+            </p:extLst>
+          </p:nvPr>
+        </p:nvSpPr>
+        <p:spPr>
+          <a:xfrm>
+            <a:off x="0" y="0"/>
+            <a:ext cx="12192000" cy="6858000"/>
+          </a:xfrm>
+          <a:prstGeom prst="rect">
+            <a:avLst/>
+          </a:prstGeom>
+          <a:ln w="12700" cap="flat" cmpd="sng" algn="ctr">
+            <a:noFill/>
+            <a:prstDash val="solid"/>
+            <a:miter lim="800000"/>
+          </a:ln>
+          <a:effectLst/>
+          <a:extLst>
+            <a:ext uri="{91240B29-F687-4F45-9708-019B960494DF}">
+              <a14:hiddenLine xmlns:a14="http://schemas.microsoft.com/office/drawing/2010/main" w="12700" cap="flat" cmpd="sng" algn="ctr">
+                <a:solidFill>
+                  <a:schemeClr val="accent1">
+                    <a:shade val="50000"/>
+                  </a:schemeClr>
+                </a:solidFill>
+                <a:prstDash val="solid"/>
+                <a:miter lim="800000"/>
+              </a14:hiddenLine>
+            </a:ext>
+          </a:extLst>
+        </p:spPr>
+        <p:style>
+          <a:lnRef idx="2">
+            <a:schemeClr val="accent1">
+              <a:shade val="50000"/>
+            </a:schemeClr>
+          </a:lnRef>
+          <a:fillRef idx="1">
+            <a:schemeClr val="accent1"/>
+          </a:fillRef>
+          <a:effectRef idx="0">
+            <a:schemeClr val="accent1"/>
+          </a:effectRef>
+          <a:fontRef idx="minor">
+            <a:schemeClr val="lt1"/>
+          </a:fontRef>
+        </p:style>
+        <p:txBody>
+          <a:bodyPr rtlCol="0" anchor="ctr"/>
+          <a:lstStyle/>
+          <a:p>
+            <a:pPr algn="ctr"/>
+            <a:endParaRPr lang="en-US"/>
+          </a:p>
+        </p:txBody>
+      </p:sp>
+      <p:sp>
+        <p:nvSpPr>
+          <p:cNvPr id="15" name="Rectangle 14">
+            <a:extLst>
+              <a:ext uri="{FF2B5EF4-FFF2-40B4-BE49-F238E27FC236}">
+                <a16:creationId xmlns:a16="http://schemas.microsoft.com/office/drawing/2014/main" id="{8F7C90E5-F183-A269-4E23-2DA300B26169}"/>
+              </a:ext>
+              <a:ext uri="{C183D7F6-B498-43B3-948B-1728B52AA6E4}">
+                <adec:decorative xmlns:adec="http://schemas.microsoft.com/office/drawing/2017/decorative" val="1"/>
+              </a:ext>
+            </a:extLst>
+          </p:cNvPr>
+          <p:cNvSpPr>
+            <a:spLocks noGrp="1" noRot="1" noChangeAspect="1" noMove="1" noResize="1" noEditPoints="1" noAdjustHandles="1" noChangeArrowheads="1" noChangeShapeType="1" noTextEdit="1"/>
+          </p:cNvSpPr>
+          <p:nvPr>
+            <p:extLst>
+              <p:ext uri="{386F3935-93C4-4BCD-93E2-E3B085C9AB24}">
+                <p16:designElem xmlns:p16="http://schemas.microsoft.com/office/powerpoint/2015/main" val="1"/>
+              </p:ext>
+            </p:extLst>
+          </p:nvPr>
+        </p:nvSpPr>
+        <p:spPr>
+          <a:xfrm rot="10800000" flipH="1">
+            <a:off x="2" y="0"/>
+            <a:ext cx="12191998" cy="1575955"/>
+          </a:xfrm>
+          <a:prstGeom prst="rect">
+            <a:avLst/>
+          </a:prstGeom>
+          <a:gradFill>
+            <a:gsLst>
+              <a:gs pos="0">
+                <a:srgbClr val="000000">
+                  <a:alpha val="96000"/>
+                </a:srgbClr>
+              </a:gs>
+              <a:gs pos="100000">
+                <a:schemeClr val="accent1">
+                  <a:lumMod val="75000"/>
+                </a:schemeClr>
+              </a:gs>
+            </a:gsLst>
+            <a:lin ang="6000000" scaled="0"/>
+          </a:gradFill>
+          <a:ln>
+            <a:noFill/>
+          </a:ln>
+        </p:spPr>
+        <p:style>
+          <a:lnRef idx="2">
+            <a:schemeClr val="accent1">
+              <a:shade val="50000"/>
+            </a:schemeClr>
+          </a:lnRef>
+          <a:fillRef idx="1">
+            <a:schemeClr val="accent1"/>
+          </a:fillRef>
+          <a:effectRef idx="0">
+            <a:schemeClr val="accent1"/>
+          </a:effectRef>
+          <a:fontRef idx="minor">
+            <a:schemeClr val="lt1"/>
+          </a:fontRef>
+        </p:style>
+        <p:txBody>
+          <a:bodyPr rtlCol="0" anchor="ctr"/>
+          <a:lstStyle/>
+          <a:p>
+            <a:pPr algn="ctr"/>
+            <a:endParaRPr lang="en-US"/>
+          </a:p>
+        </p:txBody>
+      </p:sp>
+      <p:sp>
+        <p:nvSpPr>
+          <p:cNvPr id="17" name="Rectangle 16">
+            <a:extLst>
+              <a:ext uri="{FF2B5EF4-FFF2-40B4-BE49-F238E27FC236}">
+                <a16:creationId xmlns:a16="http://schemas.microsoft.com/office/drawing/2014/main" id="{05B3C5F7-A888-EB15-E4B6-F64EBF0A5073}"/>
+              </a:ext>
+              <a:ext uri="{C183D7F6-B498-43B3-948B-1728B52AA6E4}">
+                <adec:decorative xmlns:adec="http://schemas.microsoft.com/office/drawing/2017/decorative" val="1"/>
+              </a:ext>
+            </a:extLst>
+          </p:cNvPr>
+          <p:cNvSpPr>
+            <a:spLocks noGrp="1" noRot="1" noChangeAspect="1" noMove="1" noResize="1" noEditPoints="1" noAdjustHandles="1" noChangeArrowheads="1" noChangeShapeType="1" noTextEdit="1"/>
+          </p:cNvSpPr>
+          <p:nvPr>
+            <p:extLst>
+              <p:ext uri="{386F3935-93C4-4BCD-93E2-E3B085C9AB24}">
+                <p16:designElem xmlns:p16="http://schemas.microsoft.com/office/powerpoint/2015/main" val="1"/>
+              </p:ext>
+            </p:extLst>
+          </p:nvPr>
+        </p:nvSpPr>
+        <p:spPr>
+          <a:xfrm>
+            <a:off x="0" y="0"/>
+            <a:ext cx="8128856" cy="1575461"/>
+          </a:xfrm>
+          <a:prstGeom prst="rect">
+            <a:avLst/>
+          </a:prstGeom>
+          <a:gradFill>
+            <a:gsLst>
+              <a:gs pos="0">
+                <a:schemeClr val="accent1">
+                  <a:alpha val="41000"/>
+                </a:schemeClr>
+              </a:gs>
+              <a:gs pos="74000">
+                <a:schemeClr val="accent1">
+                  <a:lumMod val="60000"/>
+                  <a:lumOff val="40000"/>
+                  <a:alpha val="0"/>
+                </a:schemeClr>
+              </a:gs>
+            </a:gsLst>
+            <a:lin ang="8400000" scaled="0"/>
+          </a:gradFill>
+          <a:ln>
+            <a:noFill/>
+          </a:ln>
+        </p:spPr>
+        <p:style>
+          <a:lnRef idx="2">
+            <a:schemeClr val="accent1">
+              <a:shade val="50000"/>
+            </a:schemeClr>
+          </a:lnRef>
+          <a:fillRef idx="1">
+            <a:schemeClr val="accent1"/>
+          </a:fillRef>
+          <a:effectRef idx="0">
+            <a:schemeClr val="accent1"/>
+          </a:effectRef>
+          <a:fontRef idx="minor">
+            <a:schemeClr val="lt1"/>
+          </a:fontRef>
+        </p:style>
+        <p:txBody>
+          <a:bodyPr rtlCol="0" anchor="ctr"/>
+          <a:lstStyle/>
+          <a:p>
+            <a:pPr algn="ctr"/>
+            <a:endParaRPr lang="en-US"/>
+          </a:p>
+        </p:txBody>
+      </p:sp>
+      <p:sp>
+        <p:nvSpPr>
+          <p:cNvPr id="19" name="Rectangle 18">
+            <a:extLst>
+              <a:ext uri="{FF2B5EF4-FFF2-40B4-BE49-F238E27FC236}">
+                <a16:creationId xmlns:a16="http://schemas.microsoft.com/office/drawing/2014/main" id="{F3F6812B-1151-3841-2C70-DFB38E78B24D}"/>
+              </a:ext>
+              <a:ext uri="{C183D7F6-B498-43B3-948B-1728B52AA6E4}">
+                <adec:decorative xmlns:adec="http://schemas.microsoft.com/office/drawing/2017/decorative" val="1"/>
+              </a:ext>
+            </a:extLst>
+          </p:cNvPr>
+          <p:cNvSpPr>
+            <a:spLocks noGrp="1" noRot="1" noChangeAspect="1" noMove="1" noResize="1" noEditPoints="1" noAdjustHandles="1" noChangeArrowheads="1" noChangeShapeType="1" noTextEdit="1"/>
+          </p:cNvSpPr>
+          <p:nvPr>
+            <p:extLst>
+              <p:ext uri="{386F3935-93C4-4BCD-93E2-E3B085C9AB24}">
+                <p16:designElem xmlns:p16="http://schemas.microsoft.com/office/powerpoint/2015/main" val="1"/>
+              </p:ext>
+            </p:extLst>
+          </p:nvPr>
+        </p:nvSpPr>
+        <p:spPr>
+          <a:xfrm flipH="1">
+            <a:off x="-3" y="-1"/>
+            <a:ext cx="12192002" cy="1574311"/>
+          </a:xfrm>
+          <a:prstGeom prst="rect">
+            <a:avLst/>
+          </a:prstGeom>
+          <a:gradFill>
+            <a:gsLst>
+              <a:gs pos="0">
+                <a:srgbClr val="000000">
+                  <a:alpha val="63000"/>
+                </a:srgbClr>
+              </a:gs>
+              <a:gs pos="78000">
+                <a:schemeClr val="accent1">
+                  <a:alpha val="15000"/>
+                </a:schemeClr>
+              </a:gs>
+            </a:gsLst>
+            <a:lin ang="15600000" scaled="0"/>
+          </a:gradFill>
+          <a:ln>
+            <a:noFill/>
+          </a:ln>
+        </p:spPr>
+        <p:style>
+          <a:lnRef idx="2">
+            <a:schemeClr val="accent1">
+              <a:shade val="50000"/>
+            </a:schemeClr>
+          </a:lnRef>
+          <a:fillRef idx="1">
+            <a:schemeClr val="accent1"/>
+          </a:fillRef>
+          <a:effectRef idx="0">
+            <a:schemeClr val="accent1"/>
+          </a:effectRef>
+          <a:fontRef idx="minor">
+            <a:schemeClr val="lt1"/>
+          </a:fontRef>
+        </p:style>
+        <p:txBody>
+          <a:bodyPr rtlCol="0" anchor="ctr"/>
+          <a:lstStyle/>
+          <a:p>
+            <a:pPr algn="ctr"/>
+            <a:endParaRPr lang="en-US"/>
+          </a:p>
+        </p:txBody>
+      </p:sp>
+      <p:sp>
+        <p:nvSpPr>
+          <p:cNvPr id="2" name="Title 1">
+            <a:extLst>
+              <a:ext uri="{FF2B5EF4-FFF2-40B4-BE49-F238E27FC236}">
+                <a16:creationId xmlns:a16="http://schemas.microsoft.com/office/drawing/2014/main" id="{CE91FCD4-D558-EC04-D133-F00AA2F7A2EC}"/>
+              </a:ext>
+            </a:extLst>
+          </p:cNvPr>
+          <p:cNvSpPr>
+            <a:spLocks noGrp="1"/>
+          </p:cNvSpPr>
+          <p:nvPr>
+            <p:ph type="title"/>
+          </p:nvPr>
+        </p:nvSpPr>
+        <p:spPr>
+          <a:xfrm>
+            <a:off x="699713" y="248038"/>
+            <a:ext cx="7063721" cy="1159200"/>
+          </a:xfrm>
+        </p:spPr>
+        <p:txBody>
+          <a:bodyPr vert="horz" lIns="91440" tIns="45720" rIns="91440" bIns="45720" rtlCol="0" anchor="ctr">
+            <a:normAutofit/>
+          </a:bodyPr>
+          <a:lstStyle/>
+          <a:p>
+            <a:r>
+              <a:rPr lang="en-GB" sz="4000" dirty="0">
+                <a:solidFill>
+                  <a:schemeClr val="bg1"/>
+                </a:solidFill>
+              </a:rPr>
+              <a:t>Game integration</a:t>
+            </a:r>
+            <a:endParaRPr lang="en-US" sz="4000" kern="1200" dirty="0">
+              <a:solidFill>
+                <a:schemeClr val="bg1"/>
+              </a:solidFill>
+              <a:latin typeface="+mj-lt"/>
+              <a:ea typeface="+mj-ea"/>
+              <a:cs typeface="+mj-cs"/>
+            </a:endParaRPr>
+          </a:p>
+        </p:txBody>
+      </p:sp>
+      <p:pic>
+        <p:nvPicPr>
+          <p:cNvPr id="6" name="Picture 5">
+            <a:extLst>
+              <a:ext uri="{FF2B5EF4-FFF2-40B4-BE49-F238E27FC236}">
+                <a16:creationId xmlns:a16="http://schemas.microsoft.com/office/drawing/2014/main" id="{27351AA0-1576-AF35-533F-93138789F743}"/>
+              </a:ext>
+            </a:extLst>
+          </p:cNvPr>
+          <p:cNvPicPr>
+            <a:picLocks noChangeAspect="1"/>
+          </p:cNvPicPr>
+          <p:nvPr/>
+        </p:nvPicPr>
+        <p:blipFill>
+          <a:blip r:embed="rId3"/>
+          <a:srcRect t="2536"/>
+          <a:stretch>
+            <a:fillRect/>
+          </a:stretch>
+        </p:blipFill>
+        <p:spPr>
+          <a:xfrm>
+            <a:off x="699713" y="1765887"/>
+            <a:ext cx="4820920" cy="4844075"/>
+          </a:xfrm>
+          <a:prstGeom prst="rect">
+            <a:avLst/>
+          </a:prstGeom>
+        </p:spPr>
+      </p:pic>
+      <p:pic>
+        <p:nvPicPr>
+          <p:cNvPr id="9" name="Picture 8">
+            <a:extLst>
+              <a:ext uri="{FF2B5EF4-FFF2-40B4-BE49-F238E27FC236}">
+                <a16:creationId xmlns:a16="http://schemas.microsoft.com/office/drawing/2014/main" id="{B2C0A6C8-5D43-92EB-EA16-424655F4349C}"/>
+              </a:ext>
+            </a:extLst>
+          </p:cNvPr>
+          <p:cNvPicPr>
+            <a:picLocks noChangeAspect="1"/>
+          </p:cNvPicPr>
+          <p:nvPr/>
+        </p:nvPicPr>
+        <p:blipFill>
+          <a:blip r:embed="rId4"/>
+          <a:stretch>
+            <a:fillRect/>
+          </a:stretch>
+        </p:blipFill>
+        <p:spPr>
+          <a:xfrm>
+            <a:off x="699713" y="1763082"/>
+            <a:ext cx="4793253" cy="4787614"/>
+          </a:xfrm>
+          <a:prstGeom prst="rect">
+            <a:avLst/>
+          </a:prstGeom>
+        </p:spPr>
+      </p:pic>
+      <p:grpSp>
+        <p:nvGrpSpPr>
+          <p:cNvPr id="26" name="Group 25">
+            <a:extLst>
+              <a:ext uri="{FF2B5EF4-FFF2-40B4-BE49-F238E27FC236}">
+                <a16:creationId xmlns:a16="http://schemas.microsoft.com/office/drawing/2014/main" id="{00292793-C6BB-C7E6-D6CF-E3A7CA90A6E1}"/>
+              </a:ext>
+            </a:extLst>
+          </p:cNvPr>
+          <p:cNvGrpSpPr/>
+          <p:nvPr/>
+        </p:nvGrpSpPr>
+        <p:grpSpPr>
+          <a:xfrm>
+            <a:off x="7677756" y="2764529"/>
+            <a:ext cx="2357120" cy="3553688"/>
+            <a:chOff x="8016240" y="2316480"/>
+            <a:chExt cx="2357120" cy="3553688"/>
+          </a:xfrm>
+        </p:grpSpPr>
+        <p:sp>
+          <p:nvSpPr>
+            <p:cNvPr id="12" name="Rectangle: Rounded Corners 11">
+              <a:extLst>
+                <a:ext uri="{FF2B5EF4-FFF2-40B4-BE49-F238E27FC236}">
+                  <a16:creationId xmlns:a16="http://schemas.microsoft.com/office/drawing/2014/main" id="{C0D50266-3730-1F07-FC3C-3BF65A9C53F5}"/>
+                </a:ext>
+              </a:extLst>
+            </p:cNvPr>
+            <p:cNvSpPr/>
+            <p:nvPr/>
+          </p:nvSpPr>
+          <p:spPr>
+            <a:xfrm>
+              <a:off x="8016240" y="2316480"/>
+              <a:ext cx="2357120" cy="690880"/>
+            </a:xfrm>
+            <a:prstGeom prst="roundRect">
+              <a:avLst/>
+            </a:prstGeom>
+          </p:spPr>
+          <p:style>
+            <a:lnRef idx="2">
+              <a:schemeClr val="accent1">
+                <a:shade val="15000"/>
+              </a:schemeClr>
+            </a:lnRef>
+            <a:fillRef idx="1">
+              <a:schemeClr val="accent1"/>
+            </a:fillRef>
+            <a:effectRef idx="0">
+              <a:schemeClr val="accent1"/>
+            </a:effectRef>
+            <a:fontRef idx="minor">
+              <a:schemeClr val="lt1"/>
+            </a:fontRef>
+          </p:style>
+          <p:txBody>
+            <a:bodyPr rtlCol="0" anchor="ctr"/>
+            <a:lstStyle/>
+            <a:p>
+              <a:pPr algn="ctr"/>
+              <a:r>
+                <a:rPr lang="en-GB" dirty="0"/>
+                <a:t>speech</a:t>
+              </a:r>
+            </a:p>
+          </p:txBody>
+        </p:sp>
+        <p:sp>
+          <p:nvSpPr>
+            <p:cNvPr id="14" name="Rectangle: Rounded Corners 13">
+              <a:extLst>
+                <a:ext uri="{FF2B5EF4-FFF2-40B4-BE49-F238E27FC236}">
+                  <a16:creationId xmlns:a16="http://schemas.microsoft.com/office/drawing/2014/main" id="{478BA6BF-FF76-4C3A-8CCC-5845A0A51F06}"/>
+                </a:ext>
+              </a:extLst>
+            </p:cNvPr>
+            <p:cNvSpPr/>
+            <p:nvPr/>
+          </p:nvSpPr>
+          <p:spPr>
+            <a:xfrm>
+              <a:off x="8016240" y="3747884"/>
+              <a:ext cx="2357120" cy="690880"/>
+            </a:xfrm>
+            <a:prstGeom prst="roundRect">
+              <a:avLst/>
+            </a:prstGeom>
+          </p:spPr>
+          <p:style>
+            <a:lnRef idx="2">
+              <a:schemeClr val="accent1">
+                <a:shade val="15000"/>
+              </a:schemeClr>
+            </a:lnRef>
+            <a:fillRef idx="1">
+              <a:schemeClr val="accent1"/>
+            </a:fillRef>
+            <a:effectRef idx="0">
+              <a:schemeClr val="accent1"/>
+            </a:effectRef>
+            <a:fontRef idx="minor">
+              <a:schemeClr val="lt1"/>
+            </a:fontRef>
+          </p:style>
+          <p:txBody>
+            <a:bodyPr rtlCol="0" anchor="ctr"/>
+            <a:lstStyle/>
+            <a:p>
+              <a:pPr algn="ctr"/>
+              <a:r>
+                <a:rPr lang="en-GB" dirty="0"/>
+                <a:t>text</a:t>
+              </a:r>
+            </a:p>
+          </p:txBody>
+        </p:sp>
+        <p:sp>
+          <p:nvSpPr>
+            <p:cNvPr id="16" name="Rectangle: Rounded Corners 15">
+              <a:extLst>
+                <a:ext uri="{FF2B5EF4-FFF2-40B4-BE49-F238E27FC236}">
+                  <a16:creationId xmlns:a16="http://schemas.microsoft.com/office/drawing/2014/main" id="{E42F8C2E-C7C1-06C3-0418-EF1626B841F7}"/>
+                </a:ext>
+              </a:extLst>
+            </p:cNvPr>
+            <p:cNvSpPr/>
+            <p:nvPr/>
+          </p:nvSpPr>
+          <p:spPr>
+            <a:xfrm>
+              <a:off x="8016240" y="5179288"/>
+              <a:ext cx="2357120" cy="690880"/>
+            </a:xfrm>
+            <a:prstGeom prst="roundRect">
+              <a:avLst/>
+            </a:prstGeom>
+          </p:spPr>
+          <p:style>
+            <a:lnRef idx="2">
+              <a:schemeClr val="accent1">
+                <a:shade val="15000"/>
+              </a:schemeClr>
+            </a:lnRef>
+            <a:fillRef idx="1">
+              <a:schemeClr val="accent1"/>
+            </a:fillRef>
+            <a:effectRef idx="0">
+              <a:schemeClr val="accent1"/>
+            </a:effectRef>
+            <a:fontRef idx="minor">
+              <a:schemeClr val="lt1"/>
+            </a:fontRef>
+          </p:style>
+          <p:txBody>
+            <a:bodyPr rtlCol="0" anchor="ctr"/>
+            <a:lstStyle/>
+            <a:p>
+              <a:pPr algn="ctr"/>
+              <a:r>
+                <a:rPr lang="en-GB" dirty="0"/>
+                <a:t>direction</a:t>
+              </a:r>
+            </a:p>
+          </p:txBody>
+        </p:sp>
+        <p:cxnSp>
+          <p:nvCxnSpPr>
+            <p:cNvPr id="20" name="Straight Arrow Connector 19">
+              <a:extLst>
+                <a:ext uri="{FF2B5EF4-FFF2-40B4-BE49-F238E27FC236}">
+                  <a16:creationId xmlns:a16="http://schemas.microsoft.com/office/drawing/2014/main" id="{1C522B68-A831-E4C1-3F07-A07D02117E82}"/>
+                </a:ext>
+              </a:extLst>
+            </p:cNvPr>
+            <p:cNvCxnSpPr>
+              <a:stCxn id="12" idx="2"/>
+              <a:endCxn id="14" idx="0"/>
+            </p:cNvCxnSpPr>
+            <p:nvPr/>
+          </p:nvCxnSpPr>
+          <p:spPr>
+            <a:xfrm>
+              <a:off x="9194800" y="3007360"/>
+              <a:ext cx="0" cy="740524"/>
+            </a:xfrm>
+            <a:prstGeom prst="straightConnector1">
+              <a:avLst/>
+            </a:prstGeom>
+            <a:ln>
+              <a:tailEnd type="triangle"/>
+            </a:ln>
+          </p:spPr>
+          <p:style>
+            <a:lnRef idx="2">
+              <a:schemeClr val="accent1"/>
+            </a:lnRef>
+            <a:fillRef idx="0">
+              <a:schemeClr val="accent1"/>
+            </a:fillRef>
+            <a:effectRef idx="1">
+              <a:schemeClr val="accent1"/>
+            </a:effectRef>
+            <a:fontRef idx="minor">
+              <a:schemeClr val="tx1"/>
+            </a:fontRef>
+          </p:style>
+        </p:cxnSp>
+        <p:cxnSp>
+          <p:nvCxnSpPr>
+            <p:cNvPr id="24" name="Straight Arrow Connector 23">
+              <a:extLst>
+                <a:ext uri="{FF2B5EF4-FFF2-40B4-BE49-F238E27FC236}">
+                  <a16:creationId xmlns:a16="http://schemas.microsoft.com/office/drawing/2014/main" id="{0CB9133D-E143-A3C3-F85C-24675FB91EAF}"/>
+                </a:ext>
+              </a:extLst>
+            </p:cNvPr>
+            <p:cNvCxnSpPr>
+              <a:stCxn id="14" idx="2"/>
+              <a:endCxn id="16" idx="0"/>
+            </p:cNvCxnSpPr>
+            <p:nvPr/>
+          </p:nvCxnSpPr>
+          <p:spPr>
+            <a:xfrm>
+              <a:off x="9194800" y="4438764"/>
+              <a:ext cx="0" cy="740524"/>
+            </a:xfrm>
+            <a:prstGeom prst="straightConnector1">
+              <a:avLst/>
+            </a:prstGeom>
+            <a:ln>
+              <a:tailEnd type="triangle"/>
+            </a:ln>
+          </p:spPr>
+          <p:style>
+            <a:lnRef idx="2">
+              <a:schemeClr val="accent1"/>
+            </a:lnRef>
+            <a:fillRef idx="0">
+              <a:schemeClr val="accent1"/>
+            </a:fillRef>
+            <a:effectRef idx="1">
+              <a:schemeClr val="accent1"/>
+            </a:effectRef>
+            <a:fontRef idx="minor">
+              <a:schemeClr val="tx1"/>
+            </a:fontRef>
+          </p:style>
+        </p:cxnSp>
+      </p:grpSp>
+      <p:sp>
+        <p:nvSpPr>
+          <p:cNvPr id="25" name="TextBox 24">
+            <a:extLst>
+              <a:ext uri="{FF2B5EF4-FFF2-40B4-BE49-F238E27FC236}">
+                <a16:creationId xmlns:a16="http://schemas.microsoft.com/office/drawing/2014/main" id="{ECC63EB7-8C93-D0E4-9883-BD353DBA142A}"/>
+              </a:ext>
+            </a:extLst>
+          </p:cNvPr>
+          <p:cNvSpPr txBox="1"/>
+          <p:nvPr/>
+        </p:nvSpPr>
+        <p:spPr>
+          <a:xfrm>
+            <a:off x="7800104" y="1847077"/>
+            <a:ext cx="2112424" cy="646331"/>
+          </a:xfrm>
+          <a:prstGeom prst="rect">
+            <a:avLst/>
+          </a:prstGeom>
+          <a:noFill/>
+        </p:spPr>
+        <p:txBody>
+          <a:bodyPr wrap="square" rtlCol="0">
+            <a:spAutoFit/>
+          </a:bodyPr>
+          <a:lstStyle/>
+          <a:p>
+            <a:pPr algn="ctr"/>
+            <a:r>
+              <a:rPr lang="en-GB" sz="3600" b="1" dirty="0"/>
+              <a:t>Pipeline</a:t>
+            </a:r>
+          </a:p>
+        </p:txBody>
+      </p:sp>
+    </p:spTree>
+    <p:extLst>
+      <p:ext uri="{BB962C8B-B14F-4D97-AF65-F5344CB8AC3E}">
+        <p14:creationId xmlns:p14="http://schemas.microsoft.com/office/powerpoint/2010/main" val="2180038919"/>
+      </p:ext>
+    </p:extLst>
+  </p:cSld>
+  <p:clrMapOvr>
+    <a:masterClrMapping/>
+  </p:clrMapOvr>
+</p:sld>
+</file>
+
+<file path=ppt/slides/slide9.xml><?xml version="1.0" encoding="utf-8"?>
 <p:sld xmlns:a="http://schemas.openxmlformats.org/drawingml/2006/main" xmlns:r="http://schemas.openxmlformats.org/officeDocument/2006/relationships" xmlns:p="http://schemas.openxmlformats.org/presentationml/2006/main">
   <p:cSld>
     <p:spTree>
@@ -7679,7 +9179,7 @@
           <p:cNvPr id="2" name="Titel 1">
             <a:extLst>
               <a:ext uri="{FF2B5EF4-FFF2-40B4-BE49-F238E27FC236}">
-                <a16:creationId xmlns:a16="http://schemas.microsoft.com/office/drawing/2014/main" id="{FA111BCC-1FCB-797D-6A46-449BCAB31DD4}"/>
+                <a16:creationId xmlns:a16="http://schemas.microsoft.com/office/drawing/2014/main" id="{DE91ACC9-79D4-17C2-681B-F78A70151FD9}"/>
               </a:ext>
             </a:extLst>
           </p:cNvPr>
@@ -7696,8 +9196,12 @@
           <a:lstStyle/>
           <a:p>
             <a:r>
+              <a:rPr lang="de-DE" dirty="0"/>
+              <a:t>System </a:t>
+            </a:r>
+            <a:r>
               <a:rPr lang="de-DE" dirty="0" err="1"/>
-              <a:t>Conclusion</a:t>
+              <a:t>Overview</a:t>
             </a:r>
             <a:endParaRPr lang="de-DE" dirty="0"/>
           </a:p>
@@ -7708,7 +9212,7 @@
           <p:cNvPr id="3" name="Inhaltsplatzhalter 2">
             <a:extLst>
               <a:ext uri="{FF2B5EF4-FFF2-40B4-BE49-F238E27FC236}">
-                <a16:creationId xmlns:a16="http://schemas.microsoft.com/office/drawing/2014/main" id="{13680EE8-07C5-28E5-EB00-12F747B70BC0}"/>
+                <a16:creationId xmlns:a16="http://schemas.microsoft.com/office/drawing/2014/main" id="{DAB83250-174B-4DC9-6B1F-0F086478514B}"/>
               </a:ext>
             </a:extLst>
           </p:cNvPr>
@@ -7725,76 +9229,37 @@
           <a:lstStyle/>
           <a:p>
             <a:r>
-              <a:rPr lang="de-DE" dirty="0" err="1"/>
-              <a:t>Successful</a:t>
-            </a:r>
-            <a:r>
-              <a:rPr lang="de-DE" dirty="0"/>
-              <a:t> </a:t>
-            </a:r>
-            <a:r>
-              <a:rPr lang="de-DE" dirty="0" err="1"/>
-              <a:t>proof</a:t>
-            </a:r>
-            <a:r>
-              <a:rPr lang="de-DE" dirty="0"/>
-              <a:t> </a:t>
-            </a:r>
-            <a:r>
-              <a:rPr lang="de-DE" dirty="0" err="1"/>
-              <a:t>of</a:t>
-            </a:r>
-            <a:r>
-              <a:rPr lang="de-DE" dirty="0"/>
-              <a:t> </a:t>
-            </a:r>
-            <a:r>
-              <a:rPr lang="de-DE" dirty="0" err="1"/>
-              <a:t>concept</a:t>
-            </a:r>
+              <a:rPr lang="en-US" dirty="0"/>
+              <a:t>Audio input </a:t>
+            </a:r>
+          </a:p>
+          <a:p>
+            <a:r>
+              <a:rPr lang="en-US" dirty="0"/>
+              <a:t>MFCC feature extraction </a:t>
+            </a:r>
+          </a:p>
+          <a:p>
+            <a:r>
+              <a:rPr lang="en-US" dirty="0"/>
+              <a:t>DNN + HMM processing </a:t>
+            </a:r>
+          </a:p>
+          <a:p>
+            <a:r>
+              <a:rPr lang="en-US" dirty="0"/>
+              <a:t>Word prediction</a:t>
+            </a:r>
+          </a:p>
+          <a:p>
             <a:endParaRPr lang="de-DE" dirty="0"/>
-          </a:p>
-          <a:p>
-            <a:r>
-              <a:rPr lang="de-DE" dirty="0"/>
-              <a:t>Speech </a:t>
-            </a:r>
-            <a:r>
-              <a:rPr lang="de-DE" dirty="0" err="1"/>
-              <a:t>as</a:t>
-            </a:r>
-            <a:r>
-              <a:rPr lang="de-DE" dirty="0"/>
-              <a:t> </a:t>
-            </a:r>
-            <a:r>
-              <a:rPr lang="de-DE" dirty="0" err="1"/>
-              <a:t>lightweight</a:t>
-            </a:r>
-            <a:r>
-              <a:rPr lang="de-DE" dirty="0"/>
-              <a:t> interface</a:t>
-            </a:r>
-            <a:endParaRPr lang="en-US" dirty="0"/>
-          </a:p>
-          <a:p>
-            <a:r>
-              <a:rPr lang="en-US" dirty="0"/>
-              <a:t>Real-time control works </a:t>
-            </a:r>
-          </a:p>
-          <a:p>
-            <a:r>
-              <a:rPr lang="en-US" dirty="0"/>
-              <a:t>Reliable command recognition </a:t>
-            </a:r>
           </a:p>
         </p:txBody>
       </p:sp>
     </p:spTree>
     <p:extLst>
       <p:ext uri="{BB962C8B-B14F-4D97-AF65-F5344CB8AC3E}">
-        <p14:creationId xmlns:p14="http://schemas.microsoft.com/office/powerpoint/2010/main" val="3625072128"/>
+        <p14:creationId xmlns:p14="http://schemas.microsoft.com/office/powerpoint/2010/main" val="466913703"/>
       </p:ext>
     </p:extLst>
   </p:cSld>

--- a/presentation.pptx
+++ b/presentation.pptx
@@ -5,17 +5,20 @@
     <p:sldMasterId id="2147483648" r:id="rId1"/>
   </p:sldMasterIdLst>
   <p:notesMasterIdLst>
-    <p:notesMasterId r:id="rId10"/>
+    <p:notesMasterId r:id="rId13"/>
   </p:notesMasterIdLst>
   <p:sldIdLst>
     <p:sldId id="261" r:id="rId2"/>
     <p:sldId id="262" r:id="rId3"/>
-    <p:sldId id="257" r:id="rId4"/>
-    <p:sldId id="258" r:id="rId5"/>
+    <p:sldId id="272" r:id="rId4"/>
+    <p:sldId id="275" r:id="rId5"/>
     <p:sldId id="265" r:id="rId6"/>
     <p:sldId id="267" r:id="rId7"/>
-    <p:sldId id="259" r:id="rId8"/>
-    <p:sldId id="260" r:id="rId9"/>
+    <p:sldId id="270" r:id="rId8"/>
+    <p:sldId id="271" r:id="rId9"/>
+    <p:sldId id="273" r:id="rId10"/>
+    <p:sldId id="274" r:id="rId11"/>
+    <p:sldId id="259" r:id="rId12"/>
   </p:sldIdLst>
   <p:sldSz cx="12192000" cy="6858000"/>
   <p:notesSz cx="6858000" cy="9144000"/>
@@ -210,7 +213,7 @@
           <a:p>
             <a:fld id="{812DE816-4AEB-4C5E-88A4-F622554AF666}" type="datetimeFigureOut">
               <a:rPr lang="en-GB" smtClean="0"/>
-              <a:t>25/05/2026</a:t>
+              <a:t>26/05/2026</a:t>
             </a:fld>
             <a:endParaRPr lang="en-GB"/>
           </a:p>
@@ -521,10 +524,6 @@
           <a:bodyPr/>
           <a:lstStyle/>
           <a:p>
-            <a:r>
-              <a:rPr lang="en-US" dirty="0"/>
-              <a:t>Recent technological advances enable faster and more effective responses in crisis situations. Let’s take a look at news footage from an incident in 2024.</a:t>
-            </a:r>
             <a:endParaRPr lang="es-ES" dirty="0"/>
           </a:p>
         </p:txBody>
@@ -566,6 +565,222 @@
 </file>
 
 <file path=ppt/notesSlides/notesSlide2.xml><?xml version="1.0" encoding="utf-8"?>
+<p:notes xmlns:a="http://schemas.openxmlformats.org/drawingml/2006/main" xmlns:r="http://schemas.openxmlformats.org/officeDocument/2006/relationships" xmlns:p="http://schemas.openxmlformats.org/presentationml/2006/main">
+  <p:cSld>
+    <p:spTree>
+      <p:nvGrpSpPr>
+        <p:cNvPr id="1" name="">
+          <a:extLst>
+            <a:ext uri="{FF2B5EF4-FFF2-40B4-BE49-F238E27FC236}">
+              <a16:creationId xmlns:a16="http://schemas.microsoft.com/office/drawing/2014/main" id="{C55791F7-471E-36CA-9673-C443ACE7EB64}"/>
+            </a:ext>
+          </a:extLst>
+        </p:cNvPr>
+        <p:cNvGrpSpPr/>
+        <p:nvPr/>
+      </p:nvGrpSpPr>
+      <p:grpSpPr>
+        <a:xfrm>
+          <a:off x="0" y="0"/>
+          <a:ext cx="0" cy="0"/>
+          <a:chOff x="0" y="0"/>
+          <a:chExt cx="0" cy="0"/>
+        </a:xfrm>
+      </p:grpSpPr>
+      <p:sp>
+        <p:nvSpPr>
+          <p:cNvPr id="2" name="Slide Image Placeholder 1">
+            <a:extLst>
+              <a:ext uri="{FF2B5EF4-FFF2-40B4-BE49-F238E27FC236}">
+                <a16:creationId xmlns:a16="http://schemas.microsoft.com/office/drawing/2014/main" id="{664B4E37-05D8-A0AE-12C8-97918B23CEAD}"/>
+              </a:ext>
+            </a:extLst>
+          </p:cNvPr>
+          <p:cNvSpPr>
+            <a:spLocks noGrp="1" noRot="1" noChangeAspect="1"/>
+          </p:cNvSpPr>
+          <p:nvPr>
+            <p:ph type="sldImg"/>
+          </p:nvPr>
+        </p:nvSpPr>
+        <p:spPr/>
+      </p:sp>
+      <p:sp>
+        <p:nvSpPr>
+          <p:cNvPr id="3" name="Notes Placeholder 2">
+            <a:extLst>
+              <a:ext uri="{FF2B5EF4-FFF2-40B4-BE49-F238E27FC236}">
+                <a16:creationId xmlns:a16="http://schemas.microsoft.com/office/drawing/2014/main" id="{2ABB869B-FFE4-8749-03A4-FAFA02FF5DF9}"/>
+              </a:ext>
+            </a:extLst>
+          </p:cNvPr>
+          <p:cNvSpPr>
+            <a:spLocks noGrp="1"/>
+          </p:cNvSpPr>
+          <p:nvPr>
+            <p:ph type="body" idx="1"/>
+          </p:nvPr>
+        </p:nvSpPr>
+        <p:spPr/>
+        <p:txBody>
+          <a:bodyPr/>
+          <a:lstStyle/>
+          <a:p>
+            <a:endParaRPr lang="en-GB" dirty="0"/>
+          </a:p>
+        </p:txBody>
+      </p:sp>
+      <p:sp>
+        <p:nvSpPr>
+          <p:cNvPr id="4" name="Slide Number Placeholder 3">
+            <a:extLst>
+              <a:ext uri="{FF2B5EF4-FFF2-40B4-BE49-F238E27FC236}">
+                <a16:creationId xmlns:a16="http://schemas.microsoft.com/office/drawing/2014/main" id="{6D7C93B6-72D8-BD07-C8A1-00C55ABE975C}"/>
+              </a:ext>
+            </a:extLst>
+          </p:cNvPr>
+          <p:cNvSpPr>
+            <a:spLocks noGrp="1"/>
+          </p:cNvSpPr>
+          <p:nvPr>
+            <p:ph type="sldNum" sz="quarter" idx="5"/>
+          </p:nvPr>
+        </p:nvSpPr>
+        <p:spPr/>
+        <p:txBody>
+          <a:bodyPr/>
+          <a:lstStyle/>
+          <a:p>
+            <a:fld id="{67FC2F5D-A00A-4392-B28E-0201BF8C74BB}" type="slidenum">
+              <a:rPr lang="en-GB" smtClean="0"/>
+              <a:t>3</a:t>
+            </a:fld>
+            <a:endParaRPr lang="en-GB"/>
+          </a:p>
+        </p:txBody>
+      </p:sp>
+    </p:spTree>
+    <p:extLst>
+      <p:ext uri="{BB962C8B-B14F-4D97-AF65-F5344CB8AC3E}">
+        <p14:creationId xmlns:p14="http://schemas.microsoft.com/office/powerpoint/2010/main" val="4155630013"/>
+      </p:ext>
+    </p:extLst>
+  </p:cSld>
+  <p:clrMapOvr>
+    <a:masterClrMapping/>
+  </p:clrMapOvr>
+</p:notes>
+</file>
+
+<file path=ppt/notesSlides/notesSlide3.xml><?xml version="1.0" encoding="utf-8"?>
+<p:notes xmlns:a="http://schemas.openxmlformats.org/drawingml/2006/main" xmlns:r="http://schemas.openxmlformats.org/officeDocument/2006/relationships" xmlns:p="http://schemas.openxmlformats.org/presentationml/2006/main">
+  <p:cSld>
+    <p:spTree>
+      <p:nvGrpSpPr>
+        <p:cNvPr id="1" name="">
+          <a:extLst>
+            <a:ext uri="{FF2B5EF4-FFF2-40B4-BE49-F238E27FC236}">
+              <a16:creationId xmlns:a16="http://schemas.microsoft.com/office/drawing/2014/main" id="{342CA277-7FDC-29B6-D9DF-50A9321DEA04}"/>
+            </a:ext>
+          </a:extLst>
+        </p:cNvPr>
+        <p:cNvGrpSpPr/>
+        <p:nvPr/>
+      </p:nvGrpSpPr>
+      <p:grpSpPr>
+        <a:xfrm>
+          <a:off x="0" y="0"/>
+          <a:ext cx="0" cy="0"/>
+          <a:chOff x="0" y="0"/>
+          <a:chExt cx="0" cy="0"/>
+        </a:xfrm>
+      </p:grpSpPr>
+      <p:sp>
+        <p:nvSpPr>
+          <p:cNvPr id="2" name="Slide Image Placeholder 1">
+            <a:extLst>
+              <a:ext uri="{FF2B5EF4-FFF2-40B4-BE49-F238E27FC236}">
+                <a16:creationId xmlns:a16="http://schemas.microsoft.com/office/drawing/2014/main" id="{2CB70BB8-4308-D6D4-8E9D-7096F4DD1205}"/>
+              </a:ext>
+            </a:extLst>
+          </p:cNvPr>
+          <p:cNvSpPr>
+            <a:spLocks noGrp="1" noRot="1" noChangeAspect="1"/>
+          </p:cNvSpPr>
+          <p:nvPr>
+            <p:ph type="sldImg"/>
+          </p:nvPr>
+        </p:nvSpPr>
+        <p:spPr/>
+      </p:sp>
+      <p:sp>
+        <p:nvSpPr>
+          <p:cNvPr id="3" name="Notes Placeholder 2">
+            <a:extLst>
+              <a:ext uri="{FF2B5EF4-FFF2-40B4-BE49-F238E27FC236}">
+                <a16:creationId xmlns:a16="http://schemas.microsoft.com/office/drawing/2014/main" id="{401FD81D-731B-025B-BD8D-48FCE4F6C5D2}"/>
+              </a:ext>
+            </a:extLst>
+          </p:cNvPr>
+          <p:cNvSpPr>
+            <a:spLocks noGrp="1"/>
+          </p:cNvSpPr>
+          <p:nvPr>
+            <p:ph type="body" idx="1"/>
+          </p:nvPr>
+        </p:nvSpPr>
+        <p:spPr/>
+        <p:txBody>
+          <a:bodyPr/>
+          <a:lstStyle/>
+          <a:p>
+            <a:endParaRPr lang="en-GB" dirty="0"/>
+          </a:p>
+        </p:txBody>
+      </p:sp>
+      <p:sp>
+        <p:nvSpPr>
+          <p:cNvPr id="4" name="Slide Number Placeholder 3">
+            <a:extLst>
+              <a:ext uri="{FF2B5EF4-FFF2-40B4-BE49-F238E27FC236}">
+                <a16:creationId xmlns:a16="http://schemas.microsoft.com/office/drawing/2014/main" id="{4117E3BD-4CC1-D604-8881-31DE2EF76833}"/>
+              </a:ext>
+            </a:extLst>
+          </p:cNvPr>
+          <p:cNvSpPr>
+            <a:spLocks noGrp="1"/>
+          </p:cNvSpPr>
+          <p:nvPr>
+            <p:ph type="sldNum" sz="quarter" idx="5"/>
+          </p:nvPr>
+        </p:nvSpPr>
+        <p:spPr/>
+        <p:txBody>
+          <a:bodyPr/>
+          <a:lstStyle/>
+          <a:p>
+            <a:fld id="{67FC2F5D-A00A-4392-B28E-0201BF8C74BB}" type="slidenum">
+              <a:rPr lang="en-GB" smtClean="0"/>
+              <a:t>4</a:t>
+            </a:fld>
+            <a:endParaRPr lang="en-GB"/>
+          </a:p>
+        </p:txBody>
+      </p:sp>
+    </p:spTree>
+    <p:extLst>
+      <p:ext uri="{BB962C8B-B14F-4D97-AF65-F5344CB8AC3E}">
+        <p14:creationId xmlns:p14="http://schemas.microsoft.com/office/powerpoint/2010/main" val="3184862252"/>
+      </p:ext>
+    </p:extLst>
+  </p:cSld>
+  <p:clrMapOvr>
+    <a:masterClrMapping/>
+  </p:clrMapOvr>
+</p:notes>
+</file>
+
+<file path=ppt/notesSlides/notesSlide4.xml><?xml version="1.0" encoding="utf-8"?>
 <p:notes xmlns:a="http://schemas.openxmlformats.org/drawingml/2006/main" xmlns:r="http://schemas.openxmlformats.org/officeDocument/2006/relationships" xmlns:p="http://schemas.openxmlformats.org/presentationml/2006/main">
   <p:cSld>
     <p:spTree>
@@ -777,168 +992,15 @@
               <a:tabLst/>
               <a:defRPr/>
             </a:pPr>
-            <a:r>
-              <a:rPr lang="en-GB" sz="1200" b="0" i="0" kern="1200" dirty="0">
-                <a:solidFill>
-                  <a:schemeClr val="tx1"/>
-                </a:solidFill>
-                <a:effectLst/>
-                <a:latin typeface="+mn-lt"/>
-                <a:ea typeface="+mn-ea"/>
-                <a:cs typeface="+mn-cs"/>
-              </a:rPr>
-              <a:t>https://alphacephei.com/vosk/models</a:t>
-            </a:r>
-          </a:p>
-          <a:p>
-            <a:pPr marL="0" marR="0" lvl="0" indent="0" algn="l" defTabSz="914400" rtl="0" eaLnBrk="1" fontAlgn="auto" latinLnBrk="0" hangingPunct="1">
-              <a:lnSpc>
-                <a:spcPct val="100000"/>
-              </a:lnSpc>
-              <a:spcBef>
-                <a:spcPts val="0"/>
-              </a:spcBef>
-              <a:spcAft>
-                <a:spcPts val="0"/>
-              </a:spcAft>
-              <a:buClrTx/>
-              <a:buSzTx/>
-              <a:buFontTx/>
-              <a:buNone/>
-              <a:tabLst/>
-              <a:defRPr/>
-            </a:pPr>
-            <a:r>
-              <a:rPr lang="en-GB" sz="1200" b="0" i="0" kern="1200" dirty="0">
-                <a:solidFill>
-                  <a:schemeClr val="tx1"/>
-                </a:solidFill>
-                <a:effectLst/>
-                <a:latin typeface="+mn-lt"/>
-                <a:ea typeface="+mn-ea"/>
-                <a:cs typeface="+mn-cs"/>
-              </a:rPr>
-              <a:t>In </a:t>
-            </a:r>
-            <a:r>
-              <a:rPr lang="en-GB" sz="1200" b="0" i="0" kern="1200" dirty="0" err="1">
-                <a:solidFill>
-                  <a:schemeClr val="tx1"/>
-                </a:solidFill>
-                <a:effectLst/>
-                <a:latin typeface="+mn-lt"/>
-                <a:ea typeface="+mn-ea"/>
-                <a:cs typeface="+mn-cs"/>
-              </a:rPr>
-              <a:t>zwei</a:t>
-            </a:r>
-            <a:r>
-              <a:rPr lang="en-GB" sz="1200" b="0" i="0" kern="1200" dirty="0">
-                <a:solidFill>
-                  <a:schemeClr val="tx1"/>
-                </a:solidFill>
-                <a:effectLst/>
-                <a:latin typeface="+mn-lt"/>
-                <a:ea typeface="+mn-ea"/>
-                <a:cs typeface="+mn-cs"/>
-              </a:rPr>
-              <a:t> test </a:t>
-            </a:r>
-            <a:r>
-              <a:rPr lang="en-GB" sz="1200" b="0" i="0" kern="1200" dirty="0" err="1">
-                <a:solidFill>
-                  <a:schemeClr val="tx1"/>
-                </a:solidFill>
-                <a:effectLst/>
-                <a:latin typeface="+mn-lt"/>
-                <a:ea typeface="+mn-ea"/>
-                <a:cs typeface="+mn-cs"/>
-              </a:rPr>
-              <a:t>zwsichen</a:t>
-            </a:r>
-            <a:r>
-              <a:rPr lang="en-GB" sz="1200" b="0" i="0" kern="1200" dirty="0">
-                <a:solidFill>
-                  <a:schemeClr val="tx1"/>
-                </a:solidFill>
-                <a:effectLst/>
-                <a:latin typeface="+mn-lt"/>
-                <a:ea typeface="+mn-ea"/>
-                <a:cs typeface="+mn-cs"/>
-              </a:rPr>
-              <a:t> 9.85 und 10.38 WER</a:t>
-            </a:r>
-            <a:br>
-              <a:rPr lang="en-GB" sz="1200" b="0" i="0" kern="1200" dirty="0">
-                <a:solidFill>
-                  <a:schemeClr val="tx1"/>
-                </a:solidFill>
-                <a:effectLst/>
-                <a:latin typeface="+mn-lt"/>
-                <a:ea typeface="+mn-ea"/>
-                <a:cs typeface="+mn-cs"/>
-              </a:rPr>
-            </a:br>
-            <a:r>
-              <a:rPr lang="en-GB" sz="1200" b="0" i="0" kern="1200" dirty="0">
-                <a:solidFill>
-                  <a:schemeClr val="tx1"/>
-                </a:solidFill>
-                <a:effectLst/>
-                <a:latin typeface="+mn-lt"/>
-                <a:ea typeface="+mn-ea"/>
-                <a:cs typeface="+mn-cs"/>
-              </a:rPr>
-              <a:t>9.85 (</a:t>
-            </a:r>
-            <a:r>
-              <a:rPr lang="en-GB" sz="1200" b="0" i="0" kern="1200" dirty="0" err="1">
-                <a:solidFill>
-                  <a:schemeClr val="tx1"/>
-                </a:solidFill>
-                <a:effectLst/>
-                <a:latin typeface="+mn-lt"/>
-                <a:ea typeface="+mn-ea"/>
-                <a:cs typeface="+mn-cs"/>
-              </a:rPr>
-              <a:t>librispeech</a:t>
-            </a:r>
-            <a:r>
-              <a:rPr lang="en-GB" sz="1200" b="0" i="0" kern="1200" dirty="0">
-                <a:solidFill>
-                  <a:schemeClr val="tx1"/>
-                </a:solidFill>
-                <a:effectLst/>
-                <a:latin typeface="+mn-lt"/>
-                <a:ea typeface="+mn-ea"/>
-                <a:cs typeface="+mn-cs"/>
-              </a:rPr>
-              <a:t> test-clean) 10.38 (</a:t>
-            </a:r>
-            <a:r>
-              <a:rPr lang="en-GB" sz="1200" b="0" i="0" kern="1200" dirty="0" err="1">
-                <a:solidFill>
-                  <a:schemeClr val="tx1"/>
-                </a:solidFill>
-                <a:effectLst/>
-                <a:latin typeface="+mn-lt"/>
-                <a:ea typeface="+mn-ea"/>
-                <a:cs typeface="+mn-cs"/>
-              </a:rPr>
-              <a:t>tedlium</a:t>
-            </a:r>
-            <a:r>
-              <a:rPr lang="en-GB" sz="1200" b="0" i="0" kern="1200" dirty="0">
-                <a:solidFill>
-                  <a:schemeClr val="tx1"/>
-                </a:solidFill>
-                <a:effectLst/>
-                <a:latin typeface="+mn-lt"/>
-                <a:ea typeface="+mn-ea"/>
-                <a:cs typeface="+mn-cs"/>
-              </a:rPr>
-              <a:t>)</a:t>
-            </a:r>
+            <a:endParaRPr lang="en-GB" sz="1200" b="0" i="0" kern="1200" dirty="0">
+              <a:solidFill>
+                <a:schemeClr val="tx1"/>
+              </a:solidFill>
+              <a:effectLst/>
+              <a:latin typeface="+mn-lt"/>
+              <a:ea typeface="+mn-ea"/>
+              <a:cs typeface="+mn-cs"/>
+            </a:endParaRPr>
           </a:p>
           <a:p>
             <a:endParaRPr lang="en-GB" dirty="0"/>
@@ -981,7 +1043,7 @@
 </p:notes>
 </file>
 
-<file path=ppt/notesSlides/notesSlide3.xml><?xml version="1.0" encoding="utf-8"?>
+<file path=ppt/notesSlides/notesSlide5.xml><?xml version="1.0" encoding="utf-8"?>
 <p:notes xmlns:a="http://schemas.openxmlformats.org/drawingml/2006/main" xmlns:r="http://schemas.openxmlformats.org/officeDocument/2006/relationships" xmlns:p="http://schemas.openxmlformats.org/presentationml/2006/main">
   <p:cSld>
     <p:spTree>
@@ -1320,6 +1382,438 @@
     <p:extLst>
       <p:ext uri="{BB962C8B-B14F-4D97-AF65-F5344CB8AC3E}">
         <p14:creationId xmlns:p14="http://schemas.microsoft.com/office/powerpoint/2010/main" val="3075283093"/>
+      </p:ext>
+    </p:extLst>
+  </p:cSld>
+  <p:clrMapOvr>
+    <a:masterClrMapping/>
+  </p:clrMapOvr>
+</p:notes>
+</file>
+
+<file path=ppt/notesSlides/notesSlide6.xml><?xml version="1.0" encoding="utf-8"?>
+<p:notes xmlns:a="http://schemas.openxmlformats.org/drawingml/2006/main" xmlns:r="http://schemas.openxmlformats.org/officeDocument/2006/relationships" xmlns:p="http://schemas.openxmlformats.org/presentationml/2006/main">
+  <p:cSld>
+    <p:spTree>
+      <p:nvGrpSpPr>
+        <p:cNvPr id="1" name="">
+          <a:extLst>
+            <a:ext uri="{FF2B5EF4-FFF2-40B4-BE49-F238E27FC236}">
+              <a16:creationId xmlns:a16="http://schemas.microsoft.com/office/drawing/2014/main" id="{014ECA78-4AB8-A85A-AFCD-0818DF9C4EAD}"/>
+            </a:ext>
+          </a:extLst>
+        </p:cNvPr>
+        <p:cNvGrpSpPr/>
+        <p:nvPr/>
+      </p:nvGrpSpPr>
+      <p:grpSpPr>
+        <a:xfrm>
+          <a:off x="0" y="0"/>
+          <a:ext cx="0" cy="0"/>
+          <a:chOff x="0" y="0"/>
+          <a:chExt cx="0" cy="0"/>
+        </a:xfrm>
+      </p:grpSpPr>
+      <p:sp>
+        <p:nvSpPr>
+          <p:cNvPr id="2" name="Slide Image Placeholder 1">
+            <a:extLst>
+              <a:ext uri="{FF2B5EF4-FFF2-40B4-BE49-F238E27FC236}">
+                <a16:creationId xmlns:a16="http://schemas.microsoft.com/office/drawing/2014/main" id="{EFAA382E-819C-7106-3083-9BEE8C4E247C}"/>
+              </a:ext>
+            </a:extLst>
+          </p:cNvPr>
+          <p:cNvSpPr>
+            <a:spLocks noGrp="1" noRot="1" noChangeAspect="1"/>
+          </p:cNvSpPr>
+          <p:nvPr>
+            <p:ph type="sldImg"/>
+          </p:nvPr>
+        </p:nvSpPr>
+        <p:spPr/>
+      </p:sp>
+      <p:sp>
+        <p:nvSpPr>
+          <p:cNvPr id="3" name="Notes Placeholder 2">
+            <a:extLst>
+              <a:ext uri="{FF2B5EF4-FFF2-40B4-BE49-F238E27FC236}">
+                <a16:creationId xmlns:a16="http://schemas.microsoft.com/office/drawing/2014/main" id="{82764A91-D28B-F968-1722-7278EA94902C}"/>
+              </a:ext>
+            </a:extLst>
+          </p:cNvPr>
+          <p:cNvSpPr>
+            <a:spLocks noGrp="1"/>
+          </p:cNvSpPr>
+          <p:nvPr>
+            <p:ph type="body" idx="1"/>
+          </p:nvPr>
+        </p:nvSpPr>
+        <p:spPr/>
+        <p:txBody>
+          <a:bodyPr/>
+          <a:lstStyle/>
+          <a:p>
+            <a:endParaRPr lang="en-GB" dirty="0"/>
+          </a:p>
+        </p:txBody>
+      </p:sp>
+      <p:sp>
+        <p:nvSpPr>
+          <p:cNvPr id="4" name="Slide Number Placeholder 3">
+            <a:extLst>
+              <a:ext uri="{FF2B5EF4-FFF2-40B4-BE49-F238E27FC236}">
+                <a16:creationId xmlns:a16="http://schemas.microsoft.com/office/drawing/2014/main" id="{5B615E4B-577E-AF0F-3A25-102794F6C231}"/>
+              </a:ext>
+            </a:extLst>
+          </p:cNvPr>
+          <p:cNvSpPr>
+            <a:spLocks noGrp="1"/>
+          </p:cNvSpPr>
+          <p:nvPr>
+            <p:ph type="sldNum" sz="quarter" idx="5"/>
+          </p:nvPr>
+        </p:nvSpPr>
+        <p:spPr/>
+        <p:txBody>
+          <a:bodyPr/>
+          <a:lstStyle/>
+          <a:p>
+            <a:fld id="{67FC2F5D-A00A-4392-B28E-0201BF8C74BB}" type="slidenum">
+              <a:rPr lang="en-GB" smtClean="0"/>
+              <a:t>7</a:t>
+            </a:fld>
+            <a:endParaRPr lang="en-GB"/>
+          </a:p>
+        </p:txBody>
+      </p:sp>
+    </p:spTree>
+    <p:extLst>
+      <p:ext uri="{BB962C8B-B14F-4D97-AF65-F5344CB8AC3E}">
+        <p14:creationId xmlns:p14="http://schemas.microsoft.com/office/powerpoint/2010/main" val="3648500059"/>
+      </p:ext>
+    </p:extLst>
+  </p:cSld>
+  <p:clrMapOvr>
+    <a:masterClrMapping/>
+  </p:clrMapOvr>
+</p:notes>
+</file>
+
+<file path=ppt/notesSlides/notesSlide7.xml><?xml version="1.0" encoding="utf-8"?>
+<p:notes xmlns:a="http://schemas.openxmlformats.org/drawingml/2006/main" xmlns:r="http://schemas.openxmlformats.org/officeDocument/2006/relationships" xmlns:p="http://schemas.openxmlformats.org/presentationml/2006/main">
+  <p:cSld>
+    <p:spTree>
+      <p:nvGrpSpPr>
+        <p:cNvPr id="1" name="">
+          <a:extLst>
+            <a:ext uri="{FF2B5EF4-FFF2-40B4-BE49-F238E27FC236}">
+              <a16:creationId xmlns:a16="http://schemas.microsoft.com/office/drawing/2014/main" id="{88100ACA-D4A8-DDB3-2FE0-1C53DF4952E6}"/>
+            </a:ext>
+          </a:extLst>
+        </p:cNvPr>
+        <p:cNvGrpSpPr/>
+        <p:nvPr/>
+      </p:nvGrpSpPr>
+      <p:grpSpPr>
+        <a:xfrm>
+          <a:off x="0" y="0"/>
+          <a:ext cx="0" cy="0"/>
+          <a:chOff x="0" y="0"/>
+          <a:chExt cx="0" cy="0"/>
+        </a:xfrm>
+      </p:grpSpPr>
+      <p:sp>
+        <p:nvSpPr>
+          <p:cNvPr id="2" name="Slide Image Placeholder 1">
+            <a:extLst>
+              <a:ext uri="{FF2B5EF4-FFF2-40B4-BE49-F238E27FC236}">
+                <a16:creationId xmlns:a16="http://schemas.microsoft.com/office/drawing/2014/main" id="{EA861AA4-8115-E8A9-EF6C-D647AE623E40}"/>
+              </a:ext>
+            </a:extLst>
+          </p:cNvPr>
+          <p:cNvSpPr>
+            <a:spLocks noGrp="1" noRot="1" noChangeAspect="1"/>
+          </p:cNvSpPr>
+          <p:nvPr>
+            <p:ph type="sldImg"/>
+          </p:nvPr>
+        </p:nvSpPr>
+        <p:spPr/>
+      </p:sp>
+      <p:sp>
+        <p:nvSpPr>
+          <p:cNvPr id="3" name="Notes Placeholder 2">
+            <a:extLst>
+              <a:ext uri="{FF2B5EF4-FFF2-40B4-BE49-F238E27FC236}">
+                <a16:creationId xmlns:a16="http://schemas.microsoft.com/office/drawing/2014/main" id="{0EF3C81B-F4DC-45A1-DD32-C9BEA16F4C0A}"/>
+              </a:ext>
+            </a:extLst>
+          </p:cNvPr>
+          <p:cNvSpPr>
+            <a:spLocks noGrp="1"/>
+          </p:cNvSpPr>
+          <p:nvPr>
+            <p:ph type="body" idx="1"/>
+          </p:nvPr>
+        </p:nvSpPr>
+        <p:spPr/>
+        <p:txBody>
+          <a:bodyPr/>
+          <a:lstStyle/>
+          <a:p>
+            <a:endParaRPr lang="en-GB" dirty="0"/>
+          </a:p>
+        </p:txBody>
+      </p:sp>
+      <p:sp>
+        <p:nvSpPr>
+          <p:cNvPr id="4" name="Slide Number Placeholder 3">
+            <a:extLst>
+              <a:ext uri="{FF2B5EF4-FFF2-40B4-BE49-F238E27FC236}">
+                <a16:creationId xmlns:a16="http://schemas.microsoft.com/office/drawing/2014/main" id="{A522BE93-F0D7-B8EC-2B2F-CA3A69993ED7}"/>
+              </a:ext>
+            </a:extLst>
+          </p:cNvPr>
+          <p:cNvSpPr>
+            <a:spLocks noGrp="1"/>
+          </p:cNvSpPr>
+          <p:nvPr>
+            <p:ph type="sldNum" sz="quarter" idx="5"/>
+          </p:nvPr>
+        </p:nvSpPr>
+        <p:spPr/>
+        <p:txBody>
+          <a:bodyPr/>
+          <a:lstStyle/>
+          <a:p>
+            <a:fld id="{67FC2F5D-A00A-4392-B28E-0201BF8C74BB}" type="slidenum">
+              <a:rPr lang="en-GB" smtClean="0"/>
+              <a:t>8</a:t>
+            </a:fld>
+            <a:endParaRPr lang="en-GB"/>
+          </a:p>
+        </p:txBody>
+      </p:sp>
+    </p:spTree>
+    <p:extLst>
+      <p:ext uri="{BB962C8B-B14F-4D97-AF65-F5344CB8AC3E}">
+        <p14:creationId xmlns:p14="http://schemas.microsoft.com/office/powerpoint/2010/main" val="704544054"/>
+      </p:ext>
+    </p:extLst>
+  </p:cSld>
+  <p:clrMapOvr>
+    <a:masterClrMapping/>
+  </p:clrMapOvr>
+</p:notes>
+</file>
+
+<file path=ppt/notesSlides/notesSlide8.xml><?xml version="1.0" encoding="utf-8"?>
+<p:notes xmlns:a="http://schemas.openxmlformats.org/drawingml/2006/main" xmlns:r="http://schemas.openxmlformats.org/officeDocument/2006/relationships" xmlns:p="http://schemas.openxmlformats.org/presentationml/2006/main">
+  <p:cSld>
+    <p:spTree>
+      <p:nvGrpSpPr>
+        <p:cNvPr id="1" name="">
+          <a:extLst>
+            <a:ext uri="{FF2B5EF4-FFF2-40B4-BE49-F238E27FC236}">
+              <a16:creationId xmlns:a16="http://schemas.microsoft.com/office/drawing/2014/main" id="{59B2F022-8B42-F602-D76C-5D9AF63AE95B}"/>
+            </a:ext>
+          </a:extLst>
+        </p:cNvPr>
+        <p:cNvGrpSpPr/>
+        <p:nvPr/>
+      </p:nvGrpSpPr>
+      <p:grpSpPr>
+        <a:xfrm>
+          <a:off x="0" y="0"/>
+          <a:ext cx="0" cy="0"/>
+          <a:chOff x="0" y="0"/>
+          <a:chExt cx="0" cy="0"/>
+        </a:xfrm>
+      </p:grpSpPr>
+      <p:sp>
+        <p:nvSpPr>
+          <p:cNvPr id="2" name="Slide Image Placeholder 1">
+            <a:extLst>
+              <a:ext uri="{FF2B5EF4-FFF2-40B4-BE49-F238E27FC236}">
+                <a16:creationId xmlns:a16="http://schemas.microsoft.com/office/drawing/2014/main" id="{CFE6D740-8879-79E8-828B-11C780D76AFF}"/>
+              </a:ext>
+            </a:extLst>
+          </p:cNvPr>
+          <p:cNvSpPr>
+            <a:spLocks noGrp="1" noRot="1" noChangeAspect="1"/>
+          </p:cNvSpPr>
+          <p:nvPr>
+            <p:ph type="sldImg"/>
+          </p:nvPr>
+        </p:nvSpPr>
+        <p:spPr/>
+      </p:sp>
+      <p:sp>
+        <p:nvSpPr>
+          <p:cNvPr id="3" name="Notes Placeholder 2">
+            <a:extLst>
+              <a:ext uri="{FF2B5EF4-FFF2-40B4-BE49-F238E27FC236}">
+                <a16:creationId xmlns:a16="http://schemas.microsoft.com/office/drawing/2014/main" id="{0A36B1DA-0059-CADD-501F-1ECF2A6F8F1B}"/>
+              </a:ext>
+            </a:extLst>
+          </p:cNvPr>
+          <p:cNvSpPr>
+            <a:spLocks noGrp="1"/>
+          </p:cNvSpPr>
+          <p:nvPr>
+            <p:ph type="body" idx="1"/>
+          </p:nvPr>
+        </p:nvSpPr>
+        <p:spPr/>
+        <p:txBody>
+          <a:bodyPr/>
+          <a:lstStyle/>
+          <a:p>
+            <a:endParaRPr lang="en-GB" dirty="0"/>
+          </a:p>
+        </p:txBody>
+      </p:sp>
+      <p:sp>
+        <p:nvSpPr>
+          <p:cNvPr id="4" name="Slide Number Placeholder 3">
+            <a:extLst>
+              <a:ext uri="{FF2B5EF4-FFF2-40B4-BE49-F238E27FC236}">
+                <a16:creationId xmlns:a16="http://schemas.microsoft.com/office/drawing/2014/main" id="{21A67D41-D644-2540-94CA-13D583532B74}"/>
+              </a:ext>
+            </a:extLst>
+          </p:cNvPr>
+          <p:cNvSpPr>
+            <a:spLocks noGrp="1"/>
+          </p:cNvSpPr>
+          <p:nvPr>
+            <p:ph type="sldNum" sz="quarter" idx="5"/>
+          </p:nvPr>
+        </p:nvSpPr>
+        <p:spPr/>
+        <p:txBody>
+          <a:bodyPr/>
+          <a:lstStyle/>
+          <a:p>
+            <a:fld id="{67FC2F5D-A00A-4392-B28E-0201BF8C74BB}" type="slidenum">
+              <a:rPr lang="en-GB" smtClean="0"/>
+              <a:t>9</a:t>
+            </a:fld>
+            <a:endParaRPr lang="en-GB"/>
+          </a:p>
+        </p:txBody>
+      </p:sp>
+    </p:spTree>
+    <p:extLst>
+      <p:ext uri="{BB962C8B-B14F-4D97-AF65-F5344CB8AC3E}">
+        <p14:creationId xmlns:p14="http://schemas.microsoft.com/office/powerpoint/2010/main" val="2867927326"/>
+      </p:ext>
+    </p:extLst>
+  </p:cSld>
+  <p:clrMapOvr>
+    <a:masterClrMapping/>
+  </p:clrMapOvr>
+</p:notes>
+</file>
+
+<file path=ppt/notesSlides/notesSlide9.xml><?xml version="1.0" encoding="utf-8"?>
+<p:notes xmlns:a="http://schemas.openxmlformats.org/drawingml/2006/main" xmlns:r="http://schemas.openxmlformats.org/officeDocument/2006/relationships" xmlns:p="http://schemas.openxmlformats.org/presentationml/2006/main">
+  <p:cSld>
+    <p:spTree>
+      <p:nvGrpSpPr>
+        <p:cNvPr id="1" name="">
+          <a:extLst>
+            <a:ext uri="{FF2B5EF4-FFF2-40B4-BE49-F238E27FC236}">
+              <a16:creationId xmlns:a16="http://schemas.microsoft.com/office/drawing/2014/main" id="{BD37C883-85BB-FD85-41AB-370F2EF19F6C}"/>
+            </a:ext>
+          </a:extLst>
+        </p:cNvPr>
+        <p:cNvGrpSpPr/>
+        <p:nvPr/>
+      </p:nvGrpSpPr>
+      <p:grpSpPr>
+        <a:xfrm>
+          <a:off x="0" y="0"/>
+          <a:ext cx="0" cy="0"/>
+          <a:chOff x="0" y="0"/>
+          <a:chExt cx="0" cy="0"/>
+        </a:xfrm>
+      </p:grpSpPr>
+      <p:sp>
+        <p:nvSpPr>
+          <p:cNvPr id="2" name="Slide Image Placeholder 1">
+            <a:extLst>
+              <a:ext uri="{FF2B5EF4-FFF2-40B4-BE49-F238E27FC236}">
+                <a16:creationId xmlns:a16="http://schemas.microsoft.com/office/drawing/2014/main" id="{4DFC8894-5CEC-DC3C-6EFF-5A82B5300057}"/>
+              </a:ext>
+            </a:extLst>
+          </p:cNvPr>
+          <p:cNvSpPr>
+            <a:spLocks noGrp="1" noRot="1" noChangeAspect="1"/>
+          </p:cNvSpPr>
+          <p:nvPr>
+            <p:ph type="sldImg"/>
+          </p:nvPr>
+        </p:nvSpPr>
+        <p:spPr/>
+      </p:sp>
+      <p:sp>
+        <p:nvSpPr>
+          <p:cNvPr id="3" name="Notes Placeholder 2">
+            <a:extLst>
+              <a:ext uri="{FF2B5EF4-FFF2-40B4-BE49-F238E27FC236}">
+                <a16:creationId xmlns:a16="http://schemas.microsoft.com/office/drawing/2014/main" id="{7AD625EB-1156-1985-02FA-320B5C40A8EA}"/>
+              </a:ext>
+            </a:extLst>
+          </p:cNvPr>
+          <p:cNvSpPr>
+            <a:spLocks noGrp="1"/>
+          </p:cNvSpPr>
+          <p:nvPr>
+            <p:ph type="body" idx="1"/>
+          </p:nvPr>
+        </p:nvSpPr>
+        <p:spPr/>
+        <p:txBody>
+          <a:bodyPr/>
+          <a:lstStyle/>
+          <a:p>
+            <a:endParaRPr lang="en-GB" dirty="0"/>
+          </a:p>
+        </p:txBody>
+      </p:sp>
+      <p:sp>
+        <p:nvSpPr>
+          <p:cNvPr id="4" name="Slide Number Placeholder 3">
+            <a:extLst>
+              <a:ext uri="{FF2B5EF4-FFF2-40B4-BE49-F238E27FC236}">
+                <a16:creationId xmlns:a16="http://schemas.microsoft.com/office/drawing/2014/main" id="{92E9FDA2-B50C-F900-D33B-FCB246DF5FFA}"/>
+              </a:ext>
+            </a:extLst>
+          </p:cNvPr>
+          <p:cNvSpPr>
+            <a:spLocks noGrp="1"/>
+          </p:cNvSpPr>
+          <p:nvPr>
+            <p:ph type="sldNum" sz="quarter" idx="5"/>
+          </p:nvPr>
+        </p:nvSpPr>
+        <p:spPr/>
+        <p:txBody>
+          <a:bodyPr/>
+          <a:lstStyle/>
+          <a:p>
+            <a:fld id="{67FC2F5D-A00A-4392-B28E-0201BF8C74BB}" type="slidenum">
+              <a:rPr lang="en-GB" smtClean="0"/>
+              <a:t>10</a:t>
+            </a:fld>
+            <a:endParaRPr lang="en-GB"/>
+          </a:p>
+        </p:txBody>
+      </p:sp>
+    </p:spTree>
+    <p:extLst>
+      <p:ext uri="{BB962C8B-B14F-4D97-AF65-F5344CB8AC3E}">
+        <p14:creationId xmlns:p14="http://schemas.microsoft.com/office/powerpoint/2010/main" val="3823072353"/>
       </p:ext>
     </p:extLst>
   </p:cSld>
@@ -1476,7 +1970,7 @@
           <a:p>
             <a:fld id="{259F4B15-8AB2-4C86-B5C5-75A9D4FD84E4}" type="datetimeFigureOut">
               <a:rPr lang="de-DE" smtClean="0"/>
-              <a:t>25.05.2026</a:t>
+              <a:t>26.05.2026</a:t>
             </a:fld>
             <a:endParaRPr lang="de-DE"/>
           </a:p>
@@ -1674,7 +2168,7 @@
           <a:p>
             <a:fld id="{259F4B15-8AB2-4C86-B5C5-75A9D4FD84E4}" type="datetimeFigureOut">
               <a:rPr lang="de-DE" smtClean="0"/>
-              <a:t>25.05.2026</a:t>
+              <a:t>26.05.2026</a:t>
             </a:fld>
             <a:endParaRPr lang="de-DE"/>
           </a:p>
@@ -1882,7 +2376,7 @@
           <a:p>
             <a:fld id="{259F4B15-8AB2-4C86-B5C5-75A9D4FD84E4}" type="datetimeFigureOut">
               <a:rPr lang="de-DE" smtClean="0"/>
-              <a:t>25.05.2026</a:t>
+              <a:t>26.05.2026</a:t>
             </a:fld>
             <a:endParaRPr lang="de-DE"/>
           </a:p>
@@ -2080,7 +2574,7 @@
           <a:p>
             <a:fld id="{259F4B15-8AB2-4C86-B5C5-75A9D4FD84E4}" type="datetimeFigureOut">
               <a:rPr lang="de-DE" smtClean="0"/>
-              <a:t>25.05.2026</a:t>
+              <a:t>26.05.2026</a:t>
             </a:fld>
             <a:endParaRPr lang="de-DE"/>
           </a:p>
@@ -2355,7 +2849,7 @@
           <a:p>
             <a:fld id="{259F4B15-8AB2-4C86-B5C5-75A9D4FD84E4}" type="datetimeFigureOut">
               <a:rPr lang="de-DE" smtClean="0"/>
-              <a:t>25.05.2026</a:t>
+              <a:t>26.05.2026</a:t>
             </a:fld>
             <a:endParaRPr lang="de-DE"/>
           </a:p>
@@ -2620,7 +3114,7 @@
           <a:p>
             <a:fld id="{259F4B15-8AB2-4C86-B5C5-75A9D4FD84E4}" type="datetimeFigureOut">
               <a:rPr lang="de-DE" smtClean="0"/>
-              <a:t>25.05.2026</a:t>
+              <a:t>26.05.2026</a:t>
             </a:fld>
             <a:endParaRPr lang="de-DE"/>
           </a:p>
@@ -3032,7 +3526,7 @@
           <a:p>
             <a:fld id="{259F4B15-8AB2-4C86-B5C5-75A9D4FD84E4}" type="datetimeFigureOut">
               <a:rPr lang="de-DE" smtClean="0"/>
-              <a:t>25.05.2026</a:t>
+              <a:t>26.05.2026</a:t>
             </a:fld>
             <a:endParaRPr lang="de-DE"/>
           </a:p>
@@ -3173,7 +3667,7 @@
           <a:p>
             <a:fld id="{259F4B15-8AB2-4C86-B5C5-75A9D4FD84E4}" type="datetimeFigureOut">
               <a:rPr lang="de-DE" smtClean="0"/>
-              <a:t>25.05.2026</a:t>
+              <a:t>26.05.2026</a:t>
             </a:fld>
             <a:endParaRPr lang="de-DE"/>
           </a:p>
@@ -3286,7 +3780,7 @@
           <a:p>
             <a:fld id="{259F4B15-8AB2-4C86-B5C5-75A9D4FD84E4}" type="datetimeFigureOut">
               <a:rPr lang="de-DE" smtClean="0"/>
-              <a:t>25.05.2026</a:t>
+              <a:t>26.05.2026</a:t>
             </a:fld>
             <a:endParaRPr lang="de-DE"/>
           </a:p>
@@ -3597,7 +4091,7 @@
           <a:p>
             <a:fld id="{259F4B15-8AB2-4C86-B5C5-75A9D4FD84E4}" type="datetimeFigureOut">
               <a:rPr lang="de-DE" smtClean="0"/>
-              <a:t>25.05.2026</a:t>
+              <a:t>26.05.2026</a:t>
             </a:fld>
             <a:endParaRPr lang="de-DE"/>
           </a:p>
@@ -3885,7 +4379,7 @@
           <a:p>
             <a:fld id="{259F4B15-8AB2-4C86-B5C5-75A9D4FD84E4}" type="datetimeFigureOut">
               <a:rPr lang="de-DE" smtClean="0"/>
-              <a:t>25.05.2026</a:t>
+              <a:t>26.05.2026</a:t>
             </a:fld>
             <a:endParaRPr lang="de-DE"/>
           </a:p>
@@ -4126,7 +4620,7 @@
           <a:p>
             <a:fld id="{259F4B15-8AB2-4C86-B5C5-75A9D4FD84E4}" type="datetimeFigureOut">
               <a:rPr lang="de-DE" smtClean="0"/>
-              <a:t>25.05.2026</a:t>
+              <a:t>26.05.2026</a:t>
             </a:fld>
             <a:endParaRPr lang="de-DE"/>
           </a:p>
@@ -5022,8 +5516,21 @@
                   <a:srgbClr val="FFFFFF"/>
                 </a:solidFill>
               </a:rPr>
-              <a:t>Kewan</a:t>
-            </a:r>
+              <a:t>Kewan </a:t>
+            </a:r>
+            <a:r>
+              <a:rPr lang="en-GB" sz="1400" dirty="0" err="1">
+                <a:solidFill>
+                  <a:srgbClr val="FFFFFF"/>
+                </a:solidFill>
+              </a:rPr>
+              <a:t>Marboeuf</a:t>
+            </a:r>
+            <a:endParaRPr lang="en-GB" sz="1400" dirty="0">
+              <a:solidFill>
+                <a:srgbClr val="FFFFFF"/>
+              </a:solidFill>
+            </a:endParaRPr>
           </a:p>
           <a:p>
             <a:pPr algn="l"/>
@@ -5044,8 +5551,21 @@
                   <a:srgbClr val="FFFFFF"/>
                 </a:solidFill>
               </a:rPr>
-              <a:t>Tizian</a:t>
-            </a:r>
+              <a:t>Tizian </a:t>
+            </a:r>
+            <a:r>
+              <a:rPr lang="en-GB" sz="1400" dirty="0" err="1">
+                <a:solidFill>
+                  <a:srgbClr val="FFFFFF"/>
+                </a:solidFill>
+              </a:rPr>
+              <a:t>Quinque</a:t>
+            </a:r>
+            <a:endParaRPr lang="en-GB" sz="1400" dirty="0">
+              <a:solidFill>
+                <a:srgbClr val="FFFFFF"/>
+              </a:solidFill>
+            </a:endParaRPr>
           </a:p>
           <a:p>
             <a:pPr algn="l"/>
@@ -5247,6 +5767,582 @@
     <p:extLst>
       <p:ext uri="{BB962C8B-B14F-4D97-AF65-F5344CB8AC3E}">
         <p14:creationId xmlns:p14="http://schemas.microsoft.com/office/powerpoint/2010/main" val="1416759022"/>
+      </p:ext>
+    </p:extLst>
+  </p:cSld>
+  <p:clrMapOvr>
+    <a:masterClrMapping/>
+  </p:clrMapOvr>
+</p:sld>
+</file>
+
+<file path=ppt/slides/slide10.xml><?xml version="1.0" encoding="utf-8"?>
+<p:sld xmlns:a="http://schemas.openxmlformats.org/drawingml/2006/main" xmlns:r="http://schemas.openxmlformats.org/officeDocument/2006/relationships" xmlns:p="http://schemas.openxmlformats.org/presentationml/2006/main">
+  <p:cSld>
+    <p:bg>
+      <p:bgPr>
+        <a:solidFill>
+          <a:schemeClr val="bg1"/>
+        </a:solidFill>
+        <a:effectLst/>
+      </p:bgPr>
+    </p:bg>
+    <p:spTree>
+      <p:nvGrpSpPr>
+        <p:cNvPr id="1" name="">
+          <a:extLst>
+            <a:ext uri="{FF2B5EF4-FFF2-40B4-BE49-F238E27FC236}">
+              <a16:creationId xmlns:a16="http://schemas.microsoft.com/office/drawing/2014/main" id="{1F910E22-B8BE-0E38-2268-53FE0946EEA1}"/>
+            </a:ext>
+          </a:extLst>
+        </p:cNvPr>
+        <p:cNvGrpSpPr/>
+        <p:nvPr/>
+      </p:nvGrpSpPr>
+      <p:grpSpPr>
+        <a:xfrm>
+          <a:off x="0" y="0"/>
+          <a:ext cx="0" cy="0"/>
+          <a:chOff x="0" y="0"/>
+          <a:chExt cx="0" cy="0"/>
+        </a:xfrm>
+      </p:grpSpPr>
+      <p:sp useBgFill="1">
+        <p:nvSpPr>
+          <p:cNvPr id="13" name="Rectangle 12">
+            <a:extLst>
+              <a:ext uri="{FF2B5EF4-FFF2-40B4-BE49-F238E27FC236}">
+                <a16:creationId xmlns:a16="http://schemas.microsoft.com/office/drawing/2014/main" id="{39059127-A7AF-1B00-0380-0B688E302614}"/>
+              </a:ext>
+              <a:ext uri="{C183D7F6-B498-43B3-948B-1728B52AA6E4}">
+                <adec:decorative xmlns:adec="http://schemas.microsoft.com/office/drawing/2017/decorative" val="1"/>
+              </a:ext>
+            </a:extLst>
+          </p:cNvPr>
+          <p:cNvSpPr>
+            <a:spLocks noGrp="1" noRot="1" noChangeAspect="1" noMove="1" noResize="1" noEditPoints="1" noAdjustHandles="1" noChangeArrowheads="1" noChangeShapeType="1" noTextEdit="1"/>
+          </p:cNvSpPr>
+          <p:nvPr>
+            <p:extLst>
+              <p:ext uri="{386F3935-93C4-4BCD-93E2-E3B085C9AB24}">
+                <p16:designElem xmlns:p16="http://schemas.microsoft.com/office/powerpoint/2015/main" val="1"/>
+              </p:ext>
+            </p:extLst>
+          </p:nvPr>
+        </p:nvSpPr>
+        <p:spPr>
+          <a:xfrm>
+            <a:off x="0" y="0"/>
+            <a:ext cx="12192000" cy="6858000"/>
+          </a:xfrm>
+          <a:prstGeom prst="rect">
+            <a:avLst/>
+          </a:prstGeom>
+          <a:ln w="12700" cap="flat" cmpd="sng" algn="ctr">
+            <a:noFill/>
+            <a:prstDash val="solid"/>
+            <a:miter lim="800000"/>
+          </a:ln>
+          <a:effectLst/>
+          <a:extLst>
+            <a:ext uri="{91240B29-F687-4F45-9708-019B960494DF}">
+              <a14:hiddenLine xmlns:a14="http://schemas.microsoft.com/office/drawing/2010/main" w="12700" cap="flat" cmpd="sng" algn="ctr">
+                <a:solidFill>
+                  <a:schemeClr val="accent1">
+                    <a:shade val="50000"/>
+                  </a:schemeClr>
+                </a:solidFill>
+                <a:prstDash val="solid"/>
+                <a:miter lim="800000"/>
+              </a14:hiddenLine>
+            </a:ext>
+          </a:extLst>
+        </p:spPr>
+        <p:style>
+          <a:lnRef idx="2">
+            <a:schemeClr val="accent1">
+              <a:shade val="50000"/>
+            </a:schemeClr>
+          </a:lnRef>
+          <a:fillRef idx="1">
+            <a:schemeClr val="accent1"/>
+          </a:fillRef>
+          <a:effectRef idx="0">
+            <a:schemeClr val="accent1"/>
+          </a:effectRef>
+          <a:fontRef idx="minor">
+            <a:schemeClr val="lt1"/>
+          </a:fontRef>
+        </p:style>
+        <p:txBody>
+          <a:bodyPr rtlCol="0" anchor="ctr"/>
+          <a:lstStyle/>
+          <a:p>
+            <a:pPr algn="ctr"/>
+            <a:endParaRPr lang="en-US"/>
+          </a:p>
+        </p:txBody>
+      </p:sp>
+      <p:sp>
+        <p:nvSpPr>
+          <p:cNvPr id="15" name="Rectangle 14">
+            <a:extLst>
+              <a:ext uri="{FF2B5EF4-FFF2-40B4-BE49-F238E27FC236}">
+                <a16:creationId xmlns:a16="http://schemas.microsoft.com/office/drawing/2014/main" id="{4D0DDB81-A934-962F-525E-BDE75051559A}"/>
+              </a:ext>
+              <a:ext uri="{C183D7F6-B498-43B3-948B-1728B52AA6E4}">
+                <adec:decorative xmlns:adec="http://schemas.microsoft.com/office/drawing/2017/decorative" val="1"/>
+              </a:ext>
+            </a:extLst>
+          </p:cNvPr>
+          <p:cNvSpPr>
+            <a:spLocks noGrp="1" noRot="1" noChangeAspect="1" noMove="1" noResize="1" noEditPoints="1" noAdjustHandles="1" noChangeArrowheads="1" noChangeShapeType="1" noTextEdit="1"/>
+          </p:cNvSpPr>
+          <p:nvPr>
+            <p:extLst>
+              <p:ext uri="{386F3935-93C4-4BCD-93E2-E3B085C9AB24}">
+                <p16:designElem xmlns:p16="http://schemas.microsoft.com/office/powerpoint/2015/main" val="1"/>
+              </p:ext>
+            </p:extLst>
+          </p:nvPr>
+        </p:nvSpPr>
+        <p:spPr>
+          <a:xfrm rot="10800000" flipH="1">
+            <a:off x="2" y="0"/>
+            <a:ext cx="12191998" cy="1575955"/>
+          </a:xfrm>
+          <a:prstGeom prst="rect">
+            <a:avLst/>
+          </a:prstGeom>
+          <a:gradFill>
+            <a:gsLst>
+              <a:gs pos="0">
+                <a:srgbClr val="000000">
+                  <a:alpha val="96000"/>
+                </a:srgbClr>
+              </a:gs>
+              <a:gs pos="100000">
+                <a:schemeClr val="accent1">
+                  <a:lumMod val="75000"/>
+                </a:schemeClr>
+              </a:gs>
+            </a:gsLst>
+            <a:lin ang="6000000" scaled="0"/>
+          </a:gradFill>
+          <a:ln>
+            <a:noFill/>
+          </a:ln>
+        </p:spPr>
+        <p:style>
+          <a:lnRef idx="2">
+            <a:schemeClr val="accent1">
+              <a:shade val="50000"/>
+            </a:schemeClr>
+          </a:lnRef>
+          <a:fillRef idx="1">
+            <a:schemeClr val="accent1"/>
+          </a:fillRef>
+          <a:effectRef idx="0">
+            <a:schemeClr val="accent1"/>
+          </a:effectRef>
+          <a:fontRef idx="minor">
+            <a:schemeClr val="lt1"/>
+          </a:fontRef>
+        </p:style>
+        <p:txBody>
+          <a:bodyPr rtlCol="0" anchor="ctr"/>
+          <a:lstStyle/>
+          <a:p>
+            <a:pPr algn="ctr"/>
+            <a:endParaRPr lang="en-US"/>
+          </a:p>
+        </p:txBody>
+      </p:sp>
+      <p:sp>
+        <p:nvSpPr>
+          <p:cNvPr id="17" name="Rectangle 16">
+            <a:extLst>
+              <a:ext uri="{FF2B5EF4-FFF2-40B4-BE49-F238E27FC236}">
+                <a16:creationId xmlns:a16="http://schemas.microsoft.com/office/drawing/2014/main" id="{3ED11AFD-5A53-D32B-18A5-9C53A16B26D3}"/>
+              </a:ext>
+              <a:ext uri="{C183D7F6-B498-43B3-948B-1728B52AA6E4}">
+                <adec:decorative xmlns:adec="http://schemas.microsoft.com/office/drawing/2017/decorative" val="1"/>
+              </a:ext>
+            </a:extLst>
+          </p:cNvPr>
+          <p:cNvSpPr>
+            <a:spLocks noGrp="1" noRot="1" noChangeAspect="1" noMove="1" noResize="1" noEditPoints="1" noAdjustHandles="1" noChangeArrowheads="1" noChangeShapeType="1" noTextEdit="1"/>
+          </p:cNvSpPr>
+          <p:nvPr>
+            <p:extLst>
+              <p:ext uri="{386F3935-93C4-4BCD-93E2-E3B085C9AB24}">
+                <p16:designElem xmlns:p16="http://schemas.microsoft.com/office/powerpoint/2015/main" val="1"/>
+              </p:ext>
+            </p:extLst>
+          </p:nvPr>
+        </p:nvSpPr>
+        <p:spPr>
+          <a:xfrm>
+            <a:off x="0" y="0"/>
+            <a:ext cx="8128856" cy="1575461"/>
+          </a:xfrm>
+          <a:prstGeom prst="rect">
+            <a:avLst/>
+          </a:prstGeom>
+          <a:gradFill>
+            <a:gsLst>
+              <a:gs pos="0">
+                <a:schemeClr val="accent1">
+                  <a:alpha val="41000"/>
+                </a:schemeClr>
+              </a:gs>
+              <a:gs pos="74000">
+                <a:schemeClr val="accent1">
+                  <a:lumMod val="60000"/>
+                  <a:lumOff val="40000"/>
+                  <a:alpha val="0"/>
+                </a:schemeClr>
+              </a:gs>
+            </a:gsLst>
+            <a:lin ang="8400000" scaled="0"/>
+          </a:gradFill>
+          <a:ln>
+            <a:noFill/>
+          </a:ln>
+        </p:spPr>
+        <p:style>
+          <a:lnRef idx="2">
+            <a:schemeClr val="accent1">
+              <a:shade val="50000"/>
+            </a:schemeClr>
+          </a:lnRef>
+          <a:fillRef idx="1">
+            <a:schemeClr val="accent1"/>
+          </a:fillRef>
+          <a:effectRef idx="0">
+            <a:schemeClr val="accent1"/>
+          </a:effectRef>
+          <a:fontRef idx="minor">
+            <a:schemeClr val="lt1"/>
+          </a:fontRef>
+        </p:style>
+        <p:txBody>
+          <a:bodyPr rtlCol="0" anchor="ctr"/>
+          <a:lstStyle/>
+          <a:p>
+            <a:pPr algn="ctr"/>
+            <a:endParaRPr lang="en-US"/>
+          </a:p>
+        </p:txBody>
+      </p:sp>
+      <p:sp>
+        <p:nvSpPr>
+          <p:cNvPr id="19" name="Rectangle 18">
+            <a:extLst>
+              <a:ext uri="{FF2B5EF4-FFF2-40B4-BE49-F238E27FC236}">
+                <a16:creationId xmlns:a16="http://schemas.microsoft.com/office/drawing/2014/main" id="{600BD797-42C1-ABEF-F253-34D69960545B}"/>
+              </a:ext>
+              <a:ext uri="{C183D7F6-B498-43B3-948B-1728B52AA6E4}">
+                <adec:decorative xmlns:adec="http://schemas.microsoft.com/office/drawing/2017/decorative" val="1"/>
+              </a:ext>
+            </a:extLst>
+          </p:cNvPr>
+          <p:cNvSpPr>
+            <a:spLocks noGrp="1" noRot="1" noChangeAspect="1" noMove="1" noResize="1" noEditPoints="1" noAdjustHandles="1" noChangeArrowheads="1" noChangeShapeType="1" noTextEdit="1"/>
+          </p:cNvSpPr>
+          <p:nvPr>
+            <p:extLst>
+              <p:ext uri="{386F3935-93C4-4BCD-93E2-E3B085C9AB24}">
+                <p16:designElem xmlns:p16="http://schemas.microsoft.com/office/powerpoint/2015/main" val="1"/>
+              </p:ext>
+            </p:extLst>
+          </p:nvPr>
+        </p:nvSpPr>
+        <p:spPr>
+          <a:xfrm flipH="1">
+            <a:off x="-3" y="-1"/>
+            <a:ext cx="12192002" cy="1574311"/>
+          </a:xfrm>
+          <a:prstGeom prst="rect">
+            <a:avLst/>
+          </a:prstGeom>
+          <a:gradFill>
+            <a:gsLst>
+              <a:gs pos="0">
+                <a:srgbClr val="000000">
+                  <a:alpha val="63000"/>
+                </a:srgbClr>
+              </a:gs>
+              <a:gs pos="78000">
+                <a:schemeClr val="accent1">
+                  <a:alpha val="15000"/>
+                </a:schemeClr>
+              </a:gs>
+            </a:gsLst>
+            <a:lin ang="15600000" scaled="0"/>
+          </a:gradFill>
+          <a:ln>
+            <a:noFill/>
+          </a:ln>
+        </p:spPr>
+        <p:style>
+          <a:lnRef idx="2">
+            <a:schemeClr val="accent1">
+              <a:shade val="50000"/>
+            </a:schemeClr>
+          </a:lnRef>
+          <a:fillRef idx="1">
+            <a:schemeClr val="accent1"/>
+          </a:fillRef>
+          <a:effectRef idx="0">
+            <a:schemeClr val="accent1"/>
+          </a:effectRef>
+          <a:fontRef idx="minor">
+            <a:schemeClr val="lt1"/>
+          </a:fontRef>
+        </p:style>
+        <p:txBody>
+          <a:bodyPr rtlCol="0" anchor="ctr"/>
+          <a:lstStyle/>
+          <a:p>
+            <a:pPr algn="ctr"/>
+            <a:endParaRPr lang="en-US"/>
+          </a:p>
+        </p:txBody>
+      </p:sp>
+      <p:sp>
+        <p:nvSpPr>
+          <p:cNvPr id="2" name="Title 1">
+            <a:extLst>
+              <a:ext uri="{FF2B5EF4-FFF2-40B4-BE49-F238E27FC236}">
+                <a16:creationId xmlns:a16="http://schemas.microsoft.com/office/drawing/2014/main" id="{74499C71-6F18-9E00-C5B9-FDFDB32C39CF}"/>
+              </a:ext>
+            </a:extLst>
+          </p:cNvPr>
+          <p:cNvSpPr>
+            <a:spLocks noGrp="1"/>
+          </p:cNvSpPr>
+          <p:nvPr>
+            <p:ph type="title"/>
+          </p:nvPr>
+        </p:nvSpPr>
+        <p:spPr>
+          <a:xfrm>
+            <a:off x="699713" y="248038"/>
+            <a:ext cx="7063721" cy="1159200"/>
+          </a:xfrm>
+        </p:spPr>
+        <p:txBody>
+          <a:bodyPr vert="horz" lIns="91440" tIns="45720" rIns="91440" bIns="45720" rtlCol="0" anchor="ctr">
+            <a:normAutofit/>
+          </a:bodyPr>
+          <a:lstStyle/>
+          <a:p>
+            <a:r>
+              <a:rPr lang="en-GB" sz="4000" dirty="0">
+                <a:solidFill>
+                  <a:schemeClr val="bg1"/>
+                </a:solidFill>
+              </a:rPr>
+              <a:t>Conclusion</a:t>
+            </a:r>
+            <a:endParaRPr lang="en-US" sz="4000" kern="1200" dirty="0">
+              <a:solidFill>
+                <a:schemeClr val="bg1"/>
+              </a:solidFill>
+              <a:latin typeface="+mj-lt"/>
+              <a:ea typeface="+mj-ea"/>
+              <a:cs typeface="+mj-cs"/>
+            </a:endParaRPr>
+          </a:p>
+        </p:txBody>
+      </p:sp>
+      <p:sp>
+        <p:nvSpPr>
+          <p:cNvPr id="3" name="Inhaltsplatzhalter 2">
+            <a:extLst>
+              <a:ext uri="{FF2B5EF4-FFF2-40B4-BE49-F238E27FC236}">
+                <a16:creationId xmlns:a16="http://schemas.microsoft.com/office/drawing/2014/main" id="{6D7D5056-CEC7-1818-3685-79A489EC827B}"/>
+              </a:ext>
+            </a:extLst>
+          </p:cNvPr>
+          <p:cNvSpPr>
+            <a:spLocks noGrp="1"/>
+          </p:cNvSpPr>
+          <p:nvPr>
+            <p:ph idx="1"/>
+          </p:nvPr>
+        </p:nvSpPr>
+        <p:spPr>
+          <a:xfrm>
+            <a:off x="838200" y="1825625"/>
+            <a:ext cx="10515600" cy="4351338"/>
+          </a:xfrm>
+        </p:spPr>
+        <p:txBody>
+          <a:bodyPr/>
+          <a:lstStyle/>
+          <a:p>
+            <a:r>
+              <a:rPr lang="de-DE" dirty="0" err="1"/>
+              <a:t>Successful</a:t>
+            </a:r>
+            <a:r>
+              <a:rPr lang="de-DE" dirty="0"/>
+              <a:t> </a:t>
+            </a:r>
+            <a:r>
+              <a:rPr lang="de-DE" dirty="0" err="1"/>
+              <a:t>proof</a:t>
+            </a:r>
+            <a:r>
+              <a:rPr lang="de-DE" dirty="0"/>
+              <a:t> </a:t>
+            </a:r>
+            <a:r>
+              <a:rPr lang="de-DE" dirty="0" err="1"/>
+              <a:t>of</a:t>
+            </a:r>
+            <a:r>
+              <a:rPr lang="de-DE" dirty="0"/>
+              <a:t> </a:t>
+            </a:r>
+            <a:r>
+              <a:rPr lang="de-DE" dirty="0" err="1"/>
+              <a:t>concept</a:t>
+            </a:r>
+            <a:endParaRPr lang="de-DE" dirty="0"/>
+          </a:p>
+          <a:p>
+            <a:r>
+              <a:rPr lang="de-DE" dirty="0"/>
+              <a:t>Speech </a:t>
+            </a:r>
+            <a:r>
+              <a:rPr lang="de-DE" dirty="0" err="1"/>
+              <a:t>as</a:t>
+            </a:r>
+            <a:r>
+              <a:rPr lang="de-DE" dirty="0"/>
+              <a:t> </a:t>
+            </a:r>
+            <a:r>
+              <a:rPr lang="de-DE" dirty="0" err="1"/>
+              <a:t>lightweight</a:t>
+            </a:r>
+            <a:r>
+              <a:rPr lang="de-DE" dirty="0"/>
+              <a:t> interface</a:t>
+            </a:r>
+            <a:endParaRPr lang="en-US" dirty="0"/>
+          </a:p>
+          <a:p>
+            <a:r>
+              <a:rPr lang="en-US" dirty="0"/>
+              <a:t>Real-time control works </a:t>
+            </a:r>
+          </a:p>
+          <a:p>
+            <a:r>
+              <a:rPr lang="en-US" dirty="0"/>
+              <a:t>Reliable command recognition</a:t>
+            </a:r>
+          </a:p>
+          <a:p>
+            <a:pPr lvl="1"/>
+            <a:r>
+              <a:rPr lang="en-US" dirty="0"/>
+              <a:t>HOWEVER: Problems with accents and background noises</a:t>
+            </a:r>
+          </a:p>
+        </p:txBody>
+      </p:sp>
+    </p:spTree>
+    <p:extLst>
+      <p:ext uri="{BB962C8B-B14F-4D97-AF65-F5344CB8AC3E}">
+        <p14:creationId xmlns:p14="http://schemas.microsoft.com/office/powerpoint/2010/main" val="243006629"/>
+      </p:ext>
+    </p:extLst>
+  </p:cSld>
+  <p:clrMapOvr>
+    <a:masterClrMapping/>
+  </p:clrMapOvr>
+</p:sld>
+</file>
+
+<file path=ppt/slides/slide11.xml><?xml version="1.0" encoding="utf-8"?>
+<p:sld xmlns:a="http://schemas.openxmlformats.org/drawingml/2006/main" xmlns:r="http://schemas.openxmlformats.org/officeDocument/2006/relationships" xmlns:p="http://schemas.openxmlformats.org/presentationml/2006/main">
+  <p:cSld>
+    <p:spTree>
+      <p:nvGrpSpPr>
+        <p:cNvPr id="1" name="">
+          <a:extLst>
+            <a:ext uri="{FF2B5EF4-FFF2-40B4-BE49-F238E27FC236}">
+              <a16:creationId xmlns:a16="http://schemas.microsoft.com/office/drawing/2014/main" id="{0CDF591F-EA1C-E0DF-88E9-5A77A2C854CE}"/>
+            </a:ext>
+          </a:extLst>
+        </p:cNvPr>
+        <p:cNvGrpSpPr/>
+        <p:nvPr/>
+      </p:nvGrpSpPr>
+      <p:grpSpPr>
+        <a:xfrm>
+          <a:off x="0" y="0"/>
+          <a:ext cx="0" cy="0"/>
+          <a:chOff x="0" y="0"/>
+          <a:chExt cx="0" cy="0"/>
+        </a:xfrm>
+      </p:grpSpPr>
+      <p:pic>
+        <p:nvPicPr>
+          <p:cNvPr id="1026" name="Picture 2">
+            <a:extLst>
+              <a:ext uri="{FF2B5EF4-FFF2-40B4-BE49-F238E27FC236}">
+                <a16:creationId xmlns:a16="http://schemas.microsoft.com/office/drawing/2014/main" id="{DC88B356-9E53-528C-51AE-11145311970B}"/>
+              </a:ext>
+            </a:extLst>
+          </p:cNvPr>
+          <p:cNvPicPr>
+            <a:picLocks noChangeAspect="1" noChangeArrowheads="1"/>
+          </p:cNvPicPr>
+          <p:nvPr/>
+        </p:nvPicPr>
+        <p:blipFill>
+          <a:blip r:embed="rId2">
+            <a:extLst>
+              <a:ext uri="{28A0092B-C50C-407E-A947-70E740481C1C}">
+                <a14:useLocalDpi xmlns:a14="http://schemas.microsoft.com/office/drawing/2010/main" val="0"/>
+              </a:ext>
+            </a:extLst>
+          </a:blip>
+          <a:stretch>
+            <a:fillRect/>
+          </a:stretch>
+        </p:blipFill>
+        <p:spPr bwMode="auto">
+          <a:xfrm>
+            <a:off x="2072504" y="2010716"/>
+            <a:ext cx="8046992" cy="2836567"/>
+          </a:xfrm>
+          <a:prstGeom prst="rect">
+            <a:avLst/>
+          </a:prstGeom>
+          <a:noFill/>
+          <a:extLst>
+            <a:ext uri="{909E8E84-426E-40DD-AFC4-6F175D3DCCD1}">
+              <a14:hiddenFill xmlns:a14="http://schemas.microsoft.com/office/drawing/2010/main">
+                <a:solidFill>
+                  <a:srgbClr val="FFFFFF"/>
+                </a:solidFill>
+              </a14:hiddenFill>
+            </a:ext>
+          </a:extLst>
+        </p:spPr>
+      </p:pic>
+    </p:spTree>
+    <p:extLst>
+      <p:ext uri="{BB962C8B-B14F-4D97-AF65-F5344CB8AC3E}">
+        <p14:creationId xmlns:p14="http://schemas.microsoft.com/office/powerpoint/2010/main" val="1459537525"/>
       </p:ext>
     </p:extLst>
   </p:cSld>
@@ -6034,14 +7130,34 @@
               <a:tabLst/>
             </a:pPr>
             <a:r>
-              <a:rPr kumimoji="0" lang="en-US" altLang="en-US" sz="2000" b="0" i="0" u="none" strike="noStrike" cap="none" normalizeH="0" baseline="0" dirty="0">
-                <a:ln>
-                  <a:noFill/>
-                </a:ln>
-                <a:effectLst/>
-              </a:rPr>
-              <a:t>Project Idea</a:t>
-            </a:r>
+              <a:rPr lang="en-US" altLang="en-US" sz="2200" dirty="0"/>
+              <a:t>Motivation</a:t>
+            </a:r>
+          </a:p>
+          <a:p>
+            <a:pPr marL="228600" indent="-457200" fontAlgn="base">
+              <a:lnSpc>
+                <a:spcPct val="90000"/>
+              </a:lnSpc>
+              <a:spcBef>
+                <a:spcPct val="0"/>
+              </a:spcBef>
+              <a:spcAft>
+                <a:spcPts val="600"/>
+              </a:spcAft>
+              <a:buFont typeface="+mj-lt"/>
+              <a:buAutoNum type="arabicPeriod"/>
+            </a:pPr>
+            <a:r>
+              <a:rPr lang="en-US" altLang="en-US" sz="2200" dirty="0"/>
+              <a:t>Task Division</a:t>
+            </a:r>
+            <a:endParaRPr kumimoji="0" lang="en-US" altLang="en-US" sz="2200" b="0" i="0" u="none" strike="noStrike" cap="none" normalizeH="0" baseline="0" dirty="0">
+              <a:ln>
+                <a:noFill/>
+              </a:ln>
+              <a:effectLst/>
+            </a:endParaRPr>
           </a:p>
           <a:p>
             <a:pPr marL="228600" marR="0" lvl="0" indent="-457200" fontAlgn="base">
@@ -6061,14 +7177,23 @@
               <a:tabLst/>
             </a:pPr>
             <a:r>
-              <a:rPr kumimoji="0" lang="en-US" altLang="en-US" sz="2000" b="0" i="0" u="none" strike="noStrike" cap="none" normalizeH="0" baseline="0" dirty="0">
-                <a:ln>
-                  <a:noFill/>
-                </a:ln>
-                <a:effectLst/>
-              </a:rPr>
-              <a:t>Technologies Used</a:t>
-            </a:r>
+              <a:rPr lang="en-US" altLang="en-US" sz="2200" dirty="0"/>
+              <a:t>Introduction to </a:t>
+            </a:r>
+            <a:r>
+              <a:rPr lang="en-US" altLang="en-US" sz="2200" dirty="0" err="1"/>
+              <a:t>Vosk</a:t>
+            </a:r>
+            <a:r>
+              <a:rPr lang="en-US" altLang="en-US" sz="2200" dirty="0"/>
+              <a:t> Speech Recognition</a:t>
+            </a:r>
+            <a:endParaRPr kumimoji="0" lang="en-US" altLang="en-US" sz="2200" b="0" i="0" u="none" strike="noStrike" cap="none" normalizeH="0" baseline="0" dirty="0">
+              <a:ln>
+                <a:noFill/>
+              </a:ln>
+              <a:effectLst/>
+            </a:endParaRPr>
           </a:p>
           <a:p>
             <a:pPr marL="228600" marR="0" lvl="0" indent="-457200" fontAlgn="base">
@@ -6088,14 +7213,67 @@
               <a:tabLst/>
             </a:pPr>
             <a:r>
-              <a:rPr kumimoji="0" lang="en-US" altLang="en-US" sz="2000" b="0" i="0" u="none" strike="noStrike" cap="none" normalizeH="0" baseline="0" dirty="0">
+              <a:rPr kumimoji="0" lang="en-US" altLang="en-US" sz="2200" b="0" i="0" u="none" strike="noStrike" cap="none" normalizeH="0" baseline="0" dirty="0">
                 <a:ln>
                   <a:noFill/>
                 </a:ln>
                 <a:effectLst/>
               </a:rPr>
-              <a:t>System Structure</a:t>
-            </a:r>
+              <a:t>Code I</a:t>
+            </a:r>
+            <a:r>
+              <a:rPr lang="en-US" altLang="en-US" sz="2200" dirty="0"/>
+              <a:t>mplementation</a:t>
+            </a:r>
+          </a:p>
+          <a:p>
+            <a:pPr marL="685800" lvl="1" indent="-457200" fontAlgn="base">
+              <a:lnSpc>
+                <a:spcPct val="90000"/>
+              </a:lnSpc>
+              <a:spcBef>
+                <a:spcPct val="0"/>
+              </a:spcBef>
+              <a:spcAft>
+                <a:spcPts val="600"/>
+              </a:spcAft>
+              <a:buFont typeface="+mj-lt"/>
+              <a:buAutoNum type="arabicPeriod"/>
+            </a:pPr>
+            <a:r>
+              <a:rPr kumimoji="0" lang="en-US" altLang="en-US" sz="2200" b="0" i="0" u="none" strike="noStrike" cap="none" normalizeH="0" baseline="0" dirty="0">
+                <a:ln>
+                  <a:noFill/>
+                </a:ln>
+                <a:effectLst/>
+              </a:rPr>
+              <a:t>Voice Control</a:t>
+            </a:r>
+          </a:p>
+          <a:p>
+            <a:pPr marL="685800" lvl="1" indent="-457200" fontAlgn="base">
+              <a:lnSpc>
+                <a:spcPct val="90000"/>
+              </a:lnSpc>
+              <a:spcBef>
+                <a:spcPct val="0"/>
+              </a:spcBef>
+              <a:spcAft>
+                <a:spcPts val="600"/>
+              </a:spcAft>
+              <a:buFont typeface="+mj-lt"/>
+              <a:buAutoNum type="arabicPeriod"/>
+            </a:pPr>
+            <a:r>
+              <a:rPr lang="en-US" altLang="en-US" sz="2200" dirty="0"/>
+              <a:t>Game Integration</a:t>
+            </a:r>
+            <a:endParaRPr kumimoji="0" lang="en-US" altLang="en-US" sz="2200" b="0" i="0" u="none" strike="noStrike" cap="none" normalizeH="0" baseline="0" dirty="0">
+              <a:ln>
+                <a:noFill/>
+              </a:ln>
+              <a:effectLst/>
+            </a:endParaRPr>
           </a:p>
           <a:p>
             <a:pPr marL="228600" marR="0" lvl="0" indent="-457200" fontAlgn="base">
@@ -6115,13 +7293,13 @@
               <a:tabLst/>
             </a:pPr>
             <a:r>
-              <a:rPr kumimoji="0" lang="en-US" altLang="en-US" sz="2000" b="0" i="0" u="none" strike="noStrike" cap="none" normalizeH="0" baseline="0" dirty="0">
+              <a:rPr kumimoji="0" lang="en-US" altLang="en-US" sz="2200" b="0" i="0" u="none" strike="noStrike" cap="none" normalizeH="0" baseline="0" dirty="0">
                 <a:ln>
                   <a:noFill/>
                 </a:ln>
                 <a:effectLst/>
               </a:rPr>
-              <a:t>Development Decisions</a:t>
+              <a:t>Demonstration</a:t>
             </a:r>
           </a:p>
           <a:p>
@@ -6142,61 +7320,7 @@
               <a:tabLst/>
             </a:pPr>
             <a:r>
-              <a:rPr kumimoji="0" lang="en-US" altLang="en-US" sz="2000" b="0" i="0" u="none" strike="noStrike" cap="none" normalizeH="0" baseline="0" dirty="0">
-                <a:ln>
-                  <a:noFill/>
-                </a:ln>
-                <a:effectLst/>
-              </a:rPr>
-              <a:t>Task Division</a:t>
-            </a:r>
-          </a:p>
-          <a:p>
-            <a:pPr marL="228600" marR="0" lvl="0" indent="-457200" fontAlgn="base">
-              <a:lnSpc>
-                <a:spcPct val="90000"/>
-              </a:lnSpc>
-              <a:spcBef>
-                <a:spcPct val="0"/>
-              </a:spcBef>
-              <a:spcAft>
-                <a:spcPts val="600"/>
-              </a:spcAft>
-              <a:buClrTx/>
-              <a:buSzTx/>
-              <a:buFont typeface="+mj-lt"/>
-              <a:buAutoNum type="arabicPeriod"/>
-              <a:tabLst/>
-            </a:pPr>
-            <a:r>
-              <a:rPr kumimoji="0" lang="en-US" altLang="en-US" sz="2000" b="0" i="0" u="none" strike="noStrike" cap="none" normalizeH="0" baseline="0" dirty="0">
-                <a:ln>
-                  <a:noFill/>
-                </a:ln>
-                <a:effectLst/>
-              </a:rPr>
-              <a:t>Demonstration</a:t>
-            </a:r>
-          </a:p>
-          <a:p>
-            <a:pPr marL="228600" marR="0" lvl="0" indent="-457200" fontAlgn="base">
-              <a:lnSpc>
-                <a:spcPct val="90000"/>
-              </a:lnSpc>
-              <a:spcBef>
-                <a:spcPct val="0"/>
-              </a:spcBef>
-              <a:spcAft>
-                <a:spcPts val="600"/>
-              </a:spcAft>
-              <a:buClrTx/>
-              <a:buSzTx/>
-              <a:buFont typeface="+mj-lt"/>
-              <a:buAutoNum type="arabicPeriod"/>
-              <a:tabLst/>
-            </a:pPr>
-            <a:r>
-              <a:rPr kumimoji="0" lang="en-US" altLang="en-US" sz="2000" b="0" i="0" u="none" strike="noStrike" cap="none" normalizeH="0" baseline="0" dirty="0">
+              <a:rPr kumimoji="0" lang="en-US" altLang="en-US" sz="2200" b="0" i="0" u="none" strike="noStrike" cap="none" normalizeH="0" baseline="0" dirty="0">
                 <a:ln>
                   <a:noFill/>
                 </a:ln>
@@ -6247,333 +7371,6 @@
 <file path=ppt/slides/slide3.xml><?xml version="1.0" encoding="utf-8"?>
 <p:sld xmlns:a="http://schemas.openxmlformats.org/drawingml/2006/main" xmlns:r="http://schemas.openxmlformats.org/officeDocument/2006/relationships" xmlns:p="http://schemas.openxmlformats.org/presentationml/2006/main">
   <p:cSld>
-    <p:spTree>
-      <p:nvGrpSpPr>
-        <p:cNvPr id="1" name=""/>
-        <p:cNvGrpSpPr/>
-        <p:nvPr/>
-      </p:nvGrpSpPr>
-      <p:grpSpPr>
-        <a:xfrm>
-          <a:off x="0" y="0"/>
-          <a:ext cx="0" cy="0"/>
-          <a:chOff x="0" y="0"/>
-          <a:chExt cx="0" cy="0"/>
-        </a:xfrm>
-      </p:grpSpPr>
-      <p:sp>
-        <p:nvSpPr>
-          <p:cNvPr id="2" name="Titel 1">
-            <a:extLst>
-              <a:ext uri="{FF2B5EF4-FFF2-40B4-BE49-F238E27FC236}">
-                <a16:creationId xmlns:a16="http://schemas.microsoft.com/office/drawing/2014/main" id="{1241084D-4EA9-9F67-4D56-817382901744}"/>
-              </a:ext>
-            </a:extLst>
-          </p:cNvPr>
-          <p:cNvSpPr>
-            <a:spLocks noGrp="1"/>
-          </p:cNvSpPr>
-          <p:nvPr>
-            <p:ph type="title"/>
-          </p:nvPr>
-        </p:nvSpPr>
-        <p:spPr/>
-        <p:txBody>
-          <a:bodyPr/>
-          <a:lstStyle/>
-          <a:p>
-            <a:r>
-              <a:rPr lang="de-DE" dirty="0"/>
-              <a:t>Motivation</a:t>
-            </a:r>
-          </a:p>
-        </p:txBody>
-      </p:sp>
-      <p:sp>
-        <p:nvSpPr>
-          <p:cNvPr id="3" name="Inhaltsplatzhalter 2">
-            <a:extLst>
-              <a:ext uri="{FF2B5EF4-FFF2-40B4-BE49-F238E27FC236}">
-                <a16:creationId xmlns:a16="http://schemas.microsoft.com/office/drawing/2014/main" id="{DE5ACB14-07A7-6E9D-DF8B-5BE261815C15}"/>
-              </a:ext>
-            </a:extLst>
-          </p:cNvPr>
-          <p:cNvSpPr>
-            <a:spLocks noGrp="1"/>
-          </p:cNvSpPr>
-          <p:nvPr>
-            <p:ph idx="1"/>
-          </p:nvPr>
-        </p:nvSpPr>
-        <p:spPr/>
-        <p:txBody>
-          <a:bodyPr>
-            <a:normAutofit fontScale="92500" lnSpcReduction="10000"/>
-          </a:bodyPr>
-          <a:lstStyle/>
-          <a:p>
-            <a:pPr marL="0" indent="0">
-              <a:buNone/>
-            </a:pPr>
-            <a:r>
-              <a:rPr lang="en-US" b="1" dirty="0"/>
-              <a:t>Why voice control?</a:t>
-            </a:r>
-          </a:p>
-          <a:p>
-            <a:r>
-              <a:rPr lang="en-US" dirty="0"/>
-              <a:t>Human-computer interaction </a:t>
-            </a:r>
-          </a:p>
-          <a:p>
-            <a:r>
-              <a:rPr lang="en-US" dirty="0"/>
-              <a:t>Lightweight alternative to vision systems </a:t>
-            </a:r>
-          </a:p>
-          <a:p>
-            <a:r>
-              <a:rPr lang="en-US" dirty="0"/>
-              <a:t>No large training dataset required</a:t>
-            </a:r>
-          </a:p>
-          <a:p>
-            <a:endParaRPr lang="de-DE" dirty="0"/>
-          </a:p>
-          <a:p>
-            <a:r>
-              <a:rPr lang="en-GB" dirty="0"/>
-              <a:t>Maze game controlled by voice </a:t>
-            </a:r>
-          </a:p>
-          <a:p>
-            <a:r>
-              <a:rPr lang="en-GB" dirty="0"/>
-              <a:t>Combination of: </a:t>
-            </a:r>
-          </a:p>
-          <a:p>
-            <a:pPr lvl="1"/>
-            <a:r>
-              <a:rPr lang="en-GB" dirty="0"/>
-              <a:t>Speech Recognition </a:t>
-            </a:r>
-          </a:p>
-          <a:p>
-            <a:pPr lvl="1"/>
-            <a:r>
-              <a:rPr lang="en-GB" dirty="0"/>
-              <a:t>Game Development </a:t>
-            </a:r>
-          </a:p>
-          <a:p>
-            <a:pPr lvl="1"/>
-            <a:r>
-              <a:rPr lang="en-GB" dirty="0"/>
-              <a:t>Real-time interaction</a:t>
-            </a:r>
-          </a:p>
-          <a:p>
-            <a:endParaRPr lang="de-DE" dirty="0"/>
-          </a:p>
-        </p:txBody>
-      </p:sp>
-    </p:spTree>
-    <p:extLst>
-      <p:ext uri="{BB962C8B-B14F-4D97-AF65-F5344CB8AC3E}">
-        <p14:creationId xmlns:p14="http://schemas.microsoft.com/office/powerpoint/2010/main" val="569187550"/>
-      </p:ext>
-    </p:extLst>
-  </p:cSld>
-  <p:clrMapOvr>
-    <a:masterClrMapping/>
-  </p:clrMapOvr>
-</p:sld>
-</file>
-
-<file path=ppt/slides/slide4.xml><?xml version="1.0" encoding="utf-8"?>
-<p:sld xmlns:a="http://schemas.openxmlformats.org/drawingml/2006/main" xmlns:r="http://schemas.openxmlformats.org/officeDocument/2006/relationships" xmlns:p="http://schemas.openxmlformats.org/presentationml/2006/main">
-  <p:cSld>
-    <p:spTree>
-      <p:nvGrpSpPr>
-        <p:cNvPr id="1" name=""/>
-        <p:cNvGrpSpPr/>
-        <p:nvPr/>
-      </p:nvGrpSpPr>
-      <p:grpSpPr>
-        <a:xfrm>
-          <a:off x="0" y="0"/>
-          <a:ext cx="0" cy="0"/>
-          <a:chOff x="0" y="0"/>
-          <a:chExt cx="0" cy="0"/>
-        </a:xfrm>
-      </p:grpSpPr>
-      <p:sp>
-        <p:nvSpPr>
-          <p:cNvPr id="2" name="Titel 1">
-            <a:extLst>
-              <a:ext uri="{FF2B5EF4-FFF2-40B4-BE49-F238E27FC236}">
-                <a16:creationId xmlns:a16="http://schemas.microsoft.com/office/drawing/2014/main" id="{0B344914-F6CA-0805-4AC4-10385719B592}"/>
-              </a:ext>
-            </a:extLst>
-          </p:cNvPr>
-          <p:cNvSpPr>
-            <a:spLocks noGrp="1"/>
-          </p:cNvSpPr>
-          <p:nvPr>
-            <p:ph type="title"/>
-          </p:nvPr>
-        </p:nvSpPr>
-        <p:spPr/>
-        <p:txBody>
-          <a:bodyPr/>
-          <a:lstStyle/>
-          <a:p>
-            <a:r>
-              <a:rPr lang="de-DE" dirty="0"/>
-              <a:t>Project Goal</a:t>
-            </a:r>
-          </a:p>
-        </p:txBody>
-      </p:sp>
-      <p:sp>
-        <p:nvSpPr>
-          <p:cNvPr id="6" name="Rectangle 3">
-            <a:extLst>
-              <a:ext uri="{FF2B5EF4-FFF2-40B4-BE49-F238E27FC236}">
-                <a16:creationId xmlns:a16="http://schemas.microsoft.com/office/drawing/2014/main" id="{489896FB-2CDB-AF0F-F869-14AA93DDD1D8}"/>
-              </a:ext>
-            </a:extLst>
-          </p:cNvPr>
-          <p:cNvSpPr>
-            <a:spLocks noGrp="1" noChangeArrowheads="1"/>
-          </p:cNvSpPr>
-          <p:nvPr>
-            <p:ph idx="1"/>
-          </p:nvPr>
-        </p:nvSpPr>
-        <p:spPr bwMode="auto">
-          <a:xfrm>
-            <a:off x="838200" y="1690688"/>
-            <a:ext cx="5157053" cy="1427057"/>
-          </a:xfrm>
-          <a:prstGeom prst="rect">
-            <a:avLst/>
-          </a:prstGeom>
-          <a:noFill/>
-          <a:ln>
-            <a:noFill/>
-          </a:ln>
-          <a:effectLst/>
-          <a:extLst>
-            <a:ext uri="{909E8E84-426E-40DD-AFC4-6F175D3DCCD1}">
-              <a14:hiddenFill xmlns:a14="http://schemas.microsoft.com/office/drawing/2010/main">
-                <a:solidFill>
-                  <a:schemeClr val="accent1"/>
-                </a:solidFill>
-              </a14:hiddenFill>
-            </a:ext>
-            <a:ext uri="{91240B29-F687-4F45-9708-019B960494DF}">
-              <a14:hiddenLine xmlns:a14="http://schemas.microsoft.com/office/drawing/2010/main" w="9525">
-                <a:solidFill>
-                  <a:schemeClr val="tx1"/>
-                </a:solidFill>
-                <a:miter lim="800000"/>
-                <a:headEnd/>
-                <a:tailEnd/>
-              </a14:hiddenLine>
-            </a:ext>
-            <a:ext uri="{AF507438-7753-43E0-B8FC-AC1667EBCBE1}">
-              <a14:hiddenEffects xmlns:a14="http://schemas.microsoft.com/office/drawing/2010/main">
-                <a:effectLst>
-                  <a:outerShdw dist="35921" dir="2700000" algn="ctr" rotWithShape="0">
-                    <a:schemeClr val="bg2"/>
-                  </a:outerShdw>
-                </a:effectLst>
-              </a14:hiddenEffects>
-            </a:ext>
-          </a:extLst>
-        </p:spPr>
-        <p:txBody>
-          <a:bodyPr vert="horz" wrap="none" lIns="91440" tIns="45720" rIns="91440" bIns="45720" numCol="1" anchor="ctr" anchorCtr="0" compatLnSpc="1">
-            <a:prstTxWarp prst="textNoShape">
-              <a:avLst/>
-            </a:prstTxWarp>
-            <a:spAutoFit/>
-          </a:bodyPr>
-          <a:lstStyle/>
-          <a:p>
-            <a:r>
-              <a:rPr lang="en-US" dirty="0"/>
-              <a:t>Control a game using speech</a:t>
-            </a:r>
-          </a:p>
-          <a:p>
-            <a:r>
-              <a:rPr lang="de-DE" dirty="0" err="1"/>
-              <a:t>Recognize</a:t>
-            </a:r>
-            <a:r>
-              <a:rPr lang="de-DE" dirty="0"/>
-              <a:t>: </a:t>
-            </a:r>
-            <a:r>
-              <a:rPr lang="en-US" dirty="0"/>
-              <a:t> up, down, </a:t>
-            </a:r>
-            <a:r>
-              <a:rPr lang="en-US" dirty="0" err="1"/>
-              <a:t>left,right</a:t>
-            </a:r>
-            <a:endParaRPr lang="en-US" dirty="0"/>
-          </a:p>
-          <a:p>
-            <a:pPr marL="0" marR="0" lvl="0" indent="0" algn="l" defTabSz="914400" rtl="0" eaLnBrk="0" fontAlgn="base" latinLnBrk="0" hangingPunct="0">
-              <a:lnSpc>
-                <a:spcPct val="100000"/>
-              </a:lnSpc>
-              <a:spcBef>
-                <a:spcPct val="0"/>
-              </a:spcBef>
-              <a:spcAft>
-                <a:spcPct val="0"/>
-              </a:spcAft>
-              <a:buClrTx/>
-              <a:buSzTx/>
-              <a:buFontTx/>
-              <a:buNone/>
-              <a:tabLst/>
-            </a:pPr>
-            <a:endParaRPr kumimoji="0" lang="de-DE" altLang="de-DE" b="0" i="0" u="none" strike="noStrike" cap="none" normalizeH="0" baseline="0" dirty="0">
-              <a:ln>
-                <a:noFill/>
-              </a:ln>
-              <a:solidFill>
-                <a:schemeClr val="tx1"/>
-              </a:solidFill>
-              <a:effectLst/>
-              <a:latin typeface="Arial" panose="020B0604020202020204" pitchFamily="34" charset="0"/>
-            </a:endParaRPr>
-          </a:p>
-        </p:txBody>
-      </p:sp>
-    </p:spTree>
-    <p:extLst>
-      <p:ext uri="{BB962C8B-B14F-4D97-AF65-F5344CB8AC3E}">
-        <p14:creationId xmlns:p14="http://schemas.microsoft.com/office/powerpoint/2010/main" val="609130170"/>
-      </p:ext>
-    </p:extLst>
-  </p:cSld>
-  <p:clrMapOvr>
-    <a:masterClrMapping/>
-  </p:clrMapOvr>
-</p:sld>
-</file>
-
-<file path=ppt/slides/slide5.xml><?xml version="1.0" encoding="utf-8"?>
-<p:sld xmlns:a="http://schemas.openxmlformats.org/drawingml/2006/main" xmlns:r="http://schemas.openxmlformats.org/officeDocument/2006/relationships" xmlns:p="http://schemas.openxmlformats.org/presentationml/2006/main">
-  <p:cSld>
     <p:bg>
       <p:bgPr>
         <a:solidFill>
@@ -6584,7 +7381,13 @@
     </p:bg>
     <p:spTree>
       <p:nvGrpSpPr>
-        <p:cNvPr id="1" name=""/>
+        <p:cNvPr id="1" name="">
+          <a:extLst>
+            <a:ext uri="{FF2B5EF4-FFF2-40B4-BE49-F238E27FC236}">
+              <a16:creationId xmlns:a16="http://schemas.microsoft.com/office/drawing/2014/main" id="{8D25674D-14FD-CBE9-3522-64BE1368DD79}"/>
+            </a:ext>
+          </a:extLst>
+        </p:cNvPr>
         <p:cNvGrpSpPr/>
         <p:nvPr/>
       </p:nvGrpSpPr>
@@ -6601,7 +7404,7 @@
           <p:cNvPr id="13" name="Rectangle 12">
             <a:extLst>
               <a:ext uri="{FF2B5EF4-FFF2-40B4-BE49-F238E27FC236}">
-                <a16:creationId xmlns:a16="http://schemas.microsoft.com/office/drawing/2014/main" id="{A8384FB5-9ADC-4DDC-881B-597D56F5B15D}"/>
+                <a16:creationId xmlns:a16="http://schemas.microsoft.com/office/drawing/2014/main" id="{409E2AC7-479C-8480-B46C-2569FFF09A30}"/>
               </a:ext>
               <a:ext uri="{C183D7F6-B498-43B3-948B-1728B52AA6E4}">
                 <adec:decorative xmlns:adec="http://schemas.microsoft.com/office/drawing/2017/decorative" val="1"/>
@@ -6677,7 +7480,7 @@
           <p:cNvPr id="15" name="Rectangle 14">
             <a:extLst>
               <a:ext uri="{FF2B5EF4-FFF2-40B4-BE49-F238E27FC236}">
-                <a16:creationId xmlns:a16="http://schemas.microsoft.com/office/drawing/2014/main" id="{1199E1B1-A8C0-4FE8-A5A8-1CB41D69F857}"/>
+                <a16:creationId xmlns:a16="http://schemas.microsoft.com/office/drawing/2014/main" id="{7A9D3E5D-BD93-A020-AE13-E6C96A5D4131}"/>
               </a:ext>
               <a:ext uri="{C183D7F6-B498-43B3-948B-1728B52AA6E4}">
                 <adec:decorative xmlns:adec="http://schemas.microsoft.com/office/drawing/2017/decorative" val="1"/>
@@ -6752,7 +7555,7 @@
           <p:cNvPr id="17" name="Rectangle 16">
             <a:extLst>
               <a:ext uri="{FF2B5EF4-FFF2-40B4-BE49-F238E27FC236}">
-                <a16:creationId xmlns:a16="http://schemas.microsoft.com/office/drawing/2014/main" id="{84A8DE83-DE75-4B41-9DB4-A7EC0B0DEC0B}"/>
+                <a16:creationId xmlns:a16="http://schemas.microsoft.com/office/drawing/2014/main" id="{E7ED978B-F479-8A93-5FCD-217AD398841C}"/>
               </a:ext>
               <a:ext uri="{C183D7F6-B498-43B3-948B-1728B52AA6E4}">
                 <adec:decorative xmlns:adec="http://schemas.microsoft.com/office/drawing/2017/decorative" val="1"/>
@@ -6829,7 +7632,7 @@
           <p:cNvPr id="19" name="Rectangle 18">
             <a:extLst>
               <a:ext uri="{FF2B5EF4-FFF2-40B4-BE49-F238E27FC236}">
-                <a16:creationId xmlns:a16="http://schemas.microsoft.com/office/drawing/2014/main" id="{A7009A0A-BEF5-4EAC-AF15-E4F9F002E239}"/>
+                <a16:creationId xmlns:a16="http://schemas.microsoft.com/office/drawing/2014/main" id="{41D728CF-92A9-B780-E581-41ADB7820A9D}"/>
               </a:ext>
               <a:ext uri="{C183D7F6-B498-43B3-948B-1728B52AA6E4}">
                 <adec:decorative xmlns:adec="http://schemas.microsoft.com/office/drawing/2017/decorative" val="1"/>
@@ -6904,7 +7707,556 @@
           <p:cNvPr id="2" name="Title 1">
             <a:extLst>
               <a:ext uri="{FF2B5EF4-FFF2-40B4-BE49-F238E27FC236}">
-                <a16:creationId xmlns:a16="http://schemas.microsoft.com/office/drawing/2014/main" id="{1DC43200-F066-9A23-D854-DB860B26BAC5}"/>
+                <a16:creationId xmlns:a16="http://schemas.microsoft.com/office/drawing/2014/main" id="{7E75674F-B793-B1A6-E399-D1F18FC93819}"/>
+              </a:ext>
+            </a:extLst>
+          </p:cNvPr>
+          <p:cNvSpPr>
+            <a:spLocks noGrp="1"/>
+          </p:cNvSpPr>
+          <p:nvPr>
+            <p:ph type="title"/>
+          </p:nvPr>
+        </p:nvSpPr>
+        <p:spPr>
+          <a:xfrm>
+            <a:off x="699713" y="248038"/>
+            <a:ext cx="7063721" cy="1159200"/>
+          </a:xfrm>
+        </p:spPr>
+        <p:txBody>
+          <a:bodyPr vert="horz" lIns="91440" tIns="45720" rIns="91440" bIns="45720" rtlCol="0" anchor="ctr">
+            <a:normAutofit/>
+          </a:bodyPr>
+          <a:lstStyle/>
+          <a:p>
+            <a:r>
+              <a:rPr lang="en-US" sz="4000" kern="1200" dirty="0">
+                <a:solidFill>
+                  <a:srgbClr val="FFFFFF"/>
+                </a:solidFill>
+                <a:latin typeface="+mj-lt"/>
+                <a:ea typeface="+mj-ea"/>
+                <a:cs typeface="+mj-cs"/>
+              </a:rPr>
+              <a:t>Motivation</a:t>
+            </a:r>
+          </a:p>
+        </p:txBody>
+      </p:sp>
+      <p:sp>
+        <p:nvSpPr>
+          <p:cNvPr id="5" name="Inhaltsplatzhalter 2">
+            <a:extLst>
+              <a:ext uri="{FF2B5EF4-FFF2-40B4-BE49-F238E27FC236}">
+                <a16:creationId xmlns:a16="http://schemas.microsoft.com/office/drawing/2014/main" id="{3B5BD181-EB80-567C-1F9C-0FDB3E91DEFD}"/>
+              </a:ext>
+            </a:extLst>
+          </p:cNvPr>
+          <p:cNvSpPr>
+            <a:spLocks noGrp="1"/>
+          </p:cNvSpPr>
+          <p:nvPr>
+            <p:ph idx="1"/>
+          </p:nvPr>
+        </p:nvSpPr>
+        <p:spPr>
+          <a:xfrm>
+            <a:off x="838200" y="1825625"/>
+            <a:ext cx="10515600" cy="4351338"/>
+          </a:xfrm>
+        </p:spPr>
+        <p:txBody>
+          <a:bodyPr>
+            <a:normAutofit fontScale="85000" lnSpcReduction="20000"/>
+          </a:bodyPr>
+          <a:lstStyle/>
+          <a:p>
+            <a:pPr marL="0" indent="0">
+              <a:buNone/>
+            </a:pPr>
+            <a:r>
+              <a:rPr lang="en-US" b="1" dirty="0"/>
+              <a:t>Why voice control?</a:t>
+            </a:r>
+          </a:p>
+          <a:p>
+            <a:r>
+              <a:rPr lang="en-US" dirty="0"/>
+              <a:t>Human-computer interaction </a:t>
+            </a:r>
+          </a:p>
+          <a:p>
+            <a:r>
+              <a:rPr lang="en-US" dirty="0"/>
+              <a:t>Lightweight alternative to vision systems </a:t>
+            </a:r>
+          </a:p>
+          <a:p>
+            <a:r>
+              <a:rPr lang="en-US" dirty="0"/>
+              <a:t>No large training dataset required</a:t>
+            </a:r>
+          </a:p>
+          <a:p>
+            <a:endParaRPr lang="de-DE" dirty="0"/>
+          </a:p>
+          <a:p>
+            <a:pPr marL="0" indent="0">
+              <a:buNone/>
+            </a:pPr>
+            <a:r>
+              <a:rPr lang="en-US" b="1" dirty="0"/>
+              <a:t>Project Goal</a:t>
+            </a:r>
+            <a:endParaRPr lang="de-DE" dirty="0"/>
+          </a:p>
+          <a:p>
+            <a:r>
+              <a:rPr lang="en-GB" dirty="0"/>
+              <a:t>Maze game controlled by voice </a:t>
+            </a:r>
+          </a:p>
+          <a:p>
+            <a:r>
+              <a:rPr lang="en-GB" dirty="0"/>
+              <a:t>Combination of: </a:t>
+            </a:r>
+          </a:p>
+          <a:p>
+            <a:pPr lvl="1"/>
+            <a:r>
+              <a:rPr lang="en-GB" dirty="0"/>
+              <a:t>Speech Recognition </a:t>
+            </a:r>
+          </a:p>
+          <a:p>
+            <a:pPr lvl="1"/>
+            <a:r>
+              <a:rPr lang="en-GB" dirty="0"/>
+              <a:t>Game Development </a:t>
+            </a:r>
+          </a:p>
+          <a:p>
+            <a:pPr lvl="1"/>
+            <a:r>
+              <a:rPr lang="en-GB" dirty="0"/>
+              <a:t>Real-time interaction</a:t>
+            </a:r>
+          </a:p>
+          <a:p>
+            <a:pPr marL="0" indent="0">
+              <a:buNone/>
+            </a:pPr>
+            <a:r>
+              <a:rPr lang="en-GB" dirty="0">
+                <a:sym typeface="Wingdings" panose="05000000000000000000" pitchFamily="2" charset="2"/>
+              </a:rPr>
+              <a:t> </a:t>
+            </a:r>
+            <a:r>
+              <a:rPr lang="de-DE" dirty="0" err="1"/>
+              <a:t>Recognize</a:t>
+            </a:r>
+            <a:r>
+              <a:rPr lang="de-DE" dirty="0"/>
+              <a:t>: </a:t>
+            </a:r>
+            <a:r>
+              <a:rPr lang="en-US" dirty="0"/>
+              <a:t> “up”, “down”, “left”, “right”, “exit”</a:t>
+            </a:r>
+            <a:endParaRPr lang="en-GB" dirty="0"/>
+          </a:p>
+          <a:p>
+            <a:endParaRPr lang="de-DE" dirty="0"/>
+          </a:p>
+        </p:txBody>
+      </p:sp>
+      <p:pic>
+        <p:nvPicPr>
+          <p:cNvPr id="6" name="Picture 5">
+            <a:extLst>
+              <a:ext uri="{FF2B5EF4-FFF2-40B4-BE49-F238E27FC236}">
+                <a16:creationId xmlns:a16="http://schemas.microsoft.com/office/drawing/2014/main" id="{049E8492-5CDC-DE2C-BCB3-96A39B5A4C10}"/>
+              </a:ext>
+            </a:extLst>
+          </p:cNvPr>
+          <p:cNvPicPr>
+            <a:picLocks noChangeAspect="1"/>
+          </p:cNvPicPr>
+          <p:nvPr/>
+        </p:nvPicPr>
+        <p:blipFill>
+          <a:blip r:embed="rId3"/>
+          <a:srcRect t="2536"/>
+          <a:stretch>
+            <a:fillRect/>
+          </a:stretch>
+        </p:blipFill>
+        <p:spPr>
+          <a:xfrm>
+            <a:off x="7354237" y="1986746"/>
+            <a:ext cx="4418663" cy="4439886"/>
+          </a:xfrm>
+          <a:prstGeom prst="rect">
+            <a:avLst/>
+          </a:prstGeom>
+        </p:spPr>
+      </p:pic>
+    </p:spTree>
+    <p:extLst>
+      <p:ext uri="{BB962C8B-B14F-4D97-AF65-F5344CB8AC3E}">
+        <p14:creationId xmlns:p14="http://schemas.microsoft.com/office/powerpoint/2010/main" val="1107255345"/>
+      </p:ext>
+    </p:extLst>
+  </p:cSld>
+  <p:clrMapOvr>
+    <a:masterClrMapping/>
+  </p:clrMapOvr>
+</p:sld>
+</file>
+
+<file path=ppt/slides/slide4.xml><?xml version="1.0" encoding="utf-8"?>
+<p:sld xmlns:a="http://schemas.openxmlformats.org/drawingml/2006/main" xmlns:r="http://schemas.openxmlformats.org/officeDocument/2006/relationships" xmlns:p="http://schemas.openxmlformats.org/presentationml/2006/main">
+  <p:cSld>
+    <p:bg>
+      <p:bgPr>
+        <a:solidFill>
+          <a:schemeClr val="bg1"/>
+        </a:solidFill>
+        <a:effectLst/>
+      </p:bgPr>
+    </p:bg>
+    <p:spTree>
+      <p:nvGrpSpPr>
+        <p:cNvPr id="1" name="">
+          <a:extLst>
+            <a:ext uri="{FF2B5EF4-FFF2-40B4-BE49-F238E27FC236}">
+              <a16:creationId xmlns:a16="http://schemas.microsoft.com/office/drawing/2014/main" id="{84BBF159-B88D-E44E-5C4C-BC33F2B68457}"/>
+            </a:ext>
+          </a:extLst>
+        </p:cNvPr>
+        <p:cNvGrpSpPr/>
+        <p:nvPr/>
+      </p:nvGrpSpPr>
+      <p:grpSpPr>
+        <a:xfrm>
+          <a:off x="0" y="0"/>
+          <a:ext cx="0" cy="0"/>
+          <a:chOff x="0" y="0"/>
+          <a:chExt cx="0" cy="0"/>
+        </a:xfrm>
+      </p:grpSpPr>
+      <p:sp useBgFill="1">
+        <p:nvSpPr>
+          <p:cNvPr id="13" name="Rectangle 12">
+            <a:extLst>
+              <a:ext uri="{FF2B5EF4-FFF2-40B4-BE49-F238E27FC236}">
+                <a16:creationId xmlns:a16="http://schemas.microsoft.com/office/drawing/2014/main" id="{6263DD31-7F3C-B8A1-0F9A-98A28A7093A8}"/>
+              </a:ext>
+              <a:ext uri="{C183D7F6-B498-43B3-948B-1728B52AA6E4}">
+                <adec:decorative xmlns:adec="http://schemas.microsoft.com/office/drawing/2017/decorative" val="1"/>
+              </a:ext>
+            </a:extLst>
+          </p:cNvPr>
+          <p:cNvSpPr>
+            <a:spLocks noGrp="1" noRot="1" noChangeAspect="1" noMove="1" noResize="1" noEditPoints="1" noAdjustHandles="1" noChangeArrowheads="1" noChangeShapeType="1" noTextEdit="1"/>
+          </p:cNvSpPr>
+          <p:nvPr>
+            <p:extLst>
+              <p:ext uri="{386F3935-93C4-4BCD-93E2-E3B085C9AB24}">
+                <p16:designElem xmlns:p16="http://schemas.microsoft.com/office/powerpoint/2015/main" val="1"/>
+              </p:ext>
+            </p:extLst>
+          </p:nvPr>
+        </p:nvSpPr>
+        <p:spPr>
+          <a:xfrm>
+            <a:off x="0" y="0"/>
+            <a:ext cx="12192000" cy="6858000"/>
+          </a:xfrm>
+          <a:prstGeom prst="rect">
+            <a:avLst/>
+          </a:prstGeom>
+          <a:ln w="12700" cap="flat" cmpd="sng" algn="ctr">
+            <a:noFill/>
+            <a:prstDash val="solid"/>
+            <a:miter lim="800000"/>
+          </a:ln>
+          <a:effectLst/>
+          <a:extLst>
+            <a:ext uri="{91240B29-F687-4F45-9708-019B960494DF}">
+              <a14:hiddenLine xmlns:a14="http://schemas.microsoft.com/office/drawing/2010/main" w="12700" cap="flat" cmpd="sng" algn="ctr">
+                <a:solidFill>
+                  <a:schemeClr val="accent1">
+                    <a:shade val="50000"/>
+                  </a:schemeClr>
+                </a:solidFill>
+                <a:prstDash val="solid"/>
+                <a:miter lim="800000"/>
+              </a14:hiddenLine>
+            </a:ext>
+          </a:extLst>
+        </p:spPr>
+        <p:style>
+          <a:lnRef idx="2">
+            <a:schemeClr val="accent1">
+              <a:shade val="50000"/>
+            </a:schemeClr>
+          </a:lnRef>
+          <a:fillRef idx="1">
+            <a:schemeClr val="accent1"/>
+          </a:fillRef>
+          <a:effectRef idx="0">
+            <a:schemeClr val="accent1"/>
+          </a:effectRef>
+          <a:fontRef idx="minor">
+            <a:schemeClr val="lt1"/>
+          </a:fontRef>
+        </p:style>
+        <p:txBody>
+          <a:bodyPr rtlCol="0" anchor="ctr"/>
+          <a:lstStyle/>
+          <a:p>
+            <a:pPr algn="ctr"/>
+            <a:endParaRPr lang="en-US"/>
+          </a:p>
+        </p:txBody>
+      </p:sp>
+      <p:sp>
+        <p:nvSpPr>
+          <p:cNvPr id="15" name="Rectangle 14">
+            <a:extLst>
+              <a:ext uri="{FF2B5EF4-FFF2-40B4-BE49-F238E27FC236}">
+                <a16:creationId xmlns:a16="http://schemas.microsoft.com/office/drawing/2014/main" id="{3266348B-8C87-D245-6D41-8F7DAF80C51B}"/>
+              </a:ext>
+              <a:ext uri="{C183D7F6-B498-43B3-948B-1728B52AA6E4}">
+                <adec:decorative xmlns:adec="http://schemas.microsoft.com/office/drawing/2017/decorative" val="1"/>
+              </a:ext>
+            </a:extLst>
+          </p:cNvPr>
+          <p:cNvSpPr>
+            <a:spLocks noGrp="1" noRot="1" noChangeAspect="1" noMove="1" noResize="1" noEditPoints="1" noAdjustHandles="1" noChangeArrowheads="1" noChangeShapeType="1" noTextEdit="1"/>
+          </p:cNvSpPr>
+          <p:nvPr>
+            <p:extLst>
+              <p:ext uri="{386F3935-93C4-4BCD-93E2-E3B085C9AB24}">
+                <p16:designElem xmlns:p16="http://schemas.microsoft.com/office/powerpoint/2015/main" val="1"/>
+              </p:ext>
+            </p:extLst>
+          </p:nvPr>
+        </p:nvSpPr>
+        <p:spPr>
+          <a:xfrm rot="10800000" flipH="1">
+            <a:off x="2" y="0"/>
+            <a:ext cx="12191998" cy="1575955"/>
+          </a:xfrm>
+          <a:prstGeom prst="rect">
+            <a:avLst/>
+          </a:prstGeom>
+          <a:gradFill>
+            <a:gsLst>
+              <a:gs pos="0">
+                <a:srgbClr val="000000">
+                  <a:alpha val="96000"/>
+                </a:srgbClr>
+              </a:gs>
+              <a:gs pos="100000">
+                <a:schemeClr val="accent1">
+                  <a:lumMod val="75000"/>
+                </a:schemeClr>
+              </a:gs>
+            </a:gsLst>
+            <a:lin ang="6000000" scaled="0"/>
+          </a:gradFill>
+          <a:ln>
+            <a:noFill/>
+          </a:ln>
+        </p:spPr>
+        <p:style>
+          <a:lnRef idx="2">
+            <a:schemeClr val="accent1">
+              <a:shade val="50000"/>
+            </a:schemeClr>
+          </a:lnRef>
+          <a:fillRef idx="1">
+            <a:schemeClr val="accent1"/>
+          </a:fillRef>
+          <a:effectRef idx="0">
+            <a:schemeClr val="accent1"/>
+          </a:effectRef>
+          <a:fontRef idx="minor">
+            <a:schemeClr val="lt1"/>
+          </a:fontRef>
+        </p:style>
+        <p:txBody>
+          <a:bodyPr rtlCol="0" anchor="ctr"/>
+          <a:lstStyle/>
+          <a:p>
+            <a:pPr algn="ctr"/>
+            <a:endParaRPr lang="en-US"/>
+          </a:p>
+        </p:txBody>
+      </p:sp>
+      <p:sp>
+        <p:nvSpPr>
+          <p:cNvPr id="17" name="Rectangle 16">
+            <a:extLst>
+              <a:ext uri="{FF2B5EF4-FFF2-40B4-BE49-F238E27FC236}">
+                <a16:creationId xmlns:a16="http://schemas.microsoft.com/office/drawing/2014/main" id="{2F8D637E-767C-8A9F-8F3B-7C19FE08B3B1}"/>
+              </a:ext>
+              <a:ext uri="{C183D7F6-B498-43B3-948B-1728B52AA6E4}">
+                <adec:decorative xmlns:adec="http://schemas.microsoft.com/office/drawing/2017/decorative" val="1"/>
+              </a:ext>
+            </a:extLst>
+          </p:cNvPr>
+          <p:cNvSpPr>
+            <a:spLocks noGrp="1" noRot="1" noChangeAspect="1" noMove="1" noResize="1" noEditPoints="1" noAdjustHandles="1" noChangeArrowheads="1" noChangeShapeType="1" noTextEdit="1"/>
+          </p:cNvSpPr>
+          <p:nvPr>
+            <p:extLst>
+              <p:ext uri="{386F3935-93C4-4BCD-93E2-E3B085C9AB24}">
+                <p16:designElem xmlns:p16="http://schemas.microsoft.com/office/powerpoint/2015/main" val="1"/>
+              </p:ext>
+            </p:extLst>
+          </p:nvPr>
+        </p:nvSpPr>
+        <p:spPr>
+          <a:xfrm>
+            <a:off x="0" y="0"/>
+            <a:ext cx="8128856" cy="1575461"/>
+          </a:xfrm>
+          <a:prstGeom prst="rect">
+            <a:avLst/>
+          </a:prstGeom>
+          <a:gradFill>
+            <a:gsLst>
+              <a:gs pos="0">
+                <a:schemeClr val="accent1">
+                  <a:alpha val="41000"/>
+                </a:schemeClr>
+              </a:gs>
+              <a:gs pos="74000">
+                <a:schemeClr val="accent1">
+                  <a:lumMod val="60000"/>
+                  <a:lumOff val="40000"/>
+                  <a:alpha val="0"/>
+                </a:schemeClr>
+              </a:gs>
+            </a:gsLst>
+            <a:lin ang="8400000" scaled="0"/>
+          </a:gradFill>
+          <a:ln>
+            <a:noFill/>
+          </a:ln>
+        </p:spPr>
+        <p:style>
+          <a:lnRef idx="2">
+            <a:schemeClr val="accent1">
+              <a:shade val="50000"/>
+            </a:schemeClr>
+          </a:lnRef>
+          <a:fillRef idx="1">
+            <a:schemeClr val="accent1"/>
+          </a:fillRef>
+          <a:effectRef idx="0">
+            <a:schemeClr val="accent1"/>
+          </a:effectRef>
+          <a:fontRef idx="minor">
+            <a:schemeClr val="lt1"/>
+          </a:fontRef>
+        </p:style>
+        <p:txBody>
+          <a:bodyPr rtlCol="0" anchor="ctr"/>
+          <a:lstStyle/>
+          <a:p>
+            <a:pPr algn="ctr"/>
+            <a:endParaRPr lang="en-US"/>
+          </a:p>
+        </p:txBody>
+      </p:sp>
+      <p:sp>
+        <p:nvSpPr>
+          <p:cNvPr id="19" name="Rectangle 18">
+            <a:extLst>
+              <a:ext uri="{FF2B5EF4-FFF2-40B4-BE49-F238E27FC236}">
+                <a16:creationId xmlns:a16="http://schemas.microsoft.com/office/drawing/2014/main" id="{5E24AC30-503F-A2D1-CEC0-BD3758EC6AAD}"/>
+              </a:ext>
+              <a:ext uri="{C183D7F6-B498-43B3-948B-1728B52AA6E4}">
+                <adec:decorative xmlns:adec="http://schemas.microsoft.com/office/drawing/2017/decorative" val="1"/>
+              </a:ext>
+            </a:extLst>
+          </p:cNvPr>
+          <p:cNvSpPr>
+            <a:spLocks noGrp="1" noRot="1" noChangeAspect="1" noMove="1" noResize="1" noEditPoints="1" noAdjustHandles="1" noChangeArrowheads="1" noChangeShapeType="1" noTextEdit="1"/>
+          </p:cNvSpPr>
+          <p:nvPr>
+            <p:extLst>
+              <p:ext uri="{386F3935-93C4-4BCD-93E2-E3B085C9AB24}">
+                <p16:designElem xmlns:p16="http://schemas.microsoft.com/office/powerpoint/2015/main" val="1"/>
+              </p:ext>
+            </p:extLst>
+          </p:nvPr>
+        </p:nvSpPr>
+        <p:spPr>
+          <a:xfrm flipH="1">
+            <a:off x="-3" y="-1"/>
+            <a:ext cx="12192002" cy="1574311"/>
+          </a:xfrm>
+          <a:prstGeom prst="rect">
+            <a:avLst/>
+          </a:prstGeom>
+          <a:gradFill>
+            <a:gsLst>
+              <a:gs pos="0">
+                <a:srgbClr val="000000">
+                  <a:alpha val="63000"/>
+                </a:srgbClr>
+              </a:gs>
+              <a:gs pos="78000">
+                <a:schemeClr val="accent1">
+                  <a:alpha val="15000"/>
+                </a:schemeClr>
+              </a:gs>
+            </a:gsLst>
+            <a:lin ang="15600000" scaled="0"/>
+          </a:gradFill>
+          <a:ln>
+            <a:noFill/>
+          </a:ln>
+        </p:spPr>
+        <p:style>
+          <a:lnRef idx="2">
+            <a:schemeClr val="accent1">
+              <a:shade val="50000"/>
+            </a:schemeClr>
+          </a:lnRef>
+          <a:fillRef idx="1">
+            <a:schemeClr val="accent1"/>
+          </a:fillRef>
+          <a:effectRef idx="0">
+            <a:schemeClr val="accent1"/>
+          </a:effectRef>
+          <a:fontRef idx="minor">
+            <a:schemeClr val="lt1"/>
+          </a:fontRef>
+        </p:style>
+        <p:txBody>
+          <a:bodyPr rtlCol="0" anchor="ctr"/>
+          <a:lstStyle/>
+          <a:p>
+            <a:pPr algn="ctr"/>
+            <a:endParaRPr lang="en-US"/>
+          </a:p>
+        </p:txBody>
+      </p:sp>
+      <p:sp>
+        <p:nvSpPr>
+          <p:cNvPr id="2" name="Title 1">
+            <a:extLst>
+              <a:ext uri="{FF2B5EF4-FFF2-40B4-BE49-F238E27FC236}">
+                <a16:creationId xmlns:a16="http://schemas.microsoft.com/office/drawing/2014/main" id="{AECAD4C1-6753-F759-DD75-479FF4F60CC4}"/>
               </a:ext>
             </a:extLst>
           </p:cNvPr>
@@ -6936,17 +8288,25 @@
                 <a:ea typeface="+mj-ea"/>
                 <a:cs typeface="+mj-cs"/>
               </a:rPr>
-              <a:t>Intoduction to Vosk</a:t>
-            </a:r>
+              <a:t>Task Division</a:t>
+            </a:r>
+            <a:endParaRPr lang="en-US" sz="4000" kern="1200" dirty="0">
+              <a:solidFill>
+                <a:srgbClr val="FFFFFF"/>
+              </a:solidFill>
+              <a:latin typeface="+mj-lt"/>
+              <a:ea typeface="+mj-ea"/>
+              <a:cs typeface="+mj-cs"/>
+            </a:endParaRPr>
           </a:p>
         </p:txBody>
       </p:sp>
       <p:pic>
         <p:nvPicPr>
-          <p:cNvPr id="8" name="Picture 7">
-            <a:extLst>
-              <a:ext uri="{FF2B5EF4-FFF2-40B4-BE49-F238E27FC236}">
-                <a16:creationId xmlns:a16="http://schemas.microsoft.com/office/drawing/2014/main" id="{1B48D639-FD8A-0FDE-188F-EECB87DEF95B}"/>
+          <p:cNvPr id="20" name="Picture 19">
+            <a:extLst>
+              <a:ext uri="{FF2B5EF4-FFF2-40B4-BE49-F238E27FC236}">
+                <a16:creationId xmlns:a16="http://schemas.microsoft.com/office/drawing/2014/main" id="{378D12C9-D162-64ED-37AD-5B00D664774F}"/>
               </a:ext>
             </a:extLst>
           </p:cNvPr>
@@ -6963,8 +8323,421 @@
         </p:blipFill>
         <p:spPr>
           <a:xfrm>
-            <a:off x="1665989" y="1966293"/>
-            <a:ext cx="8860021" cy="4452160"/>
+            <a:off x="3283531" y="1655276"/>
+            <a:ext cx="5624933" cy="4873759"/>
+          </a:xfrm>
+          <a:prstGeom prst="rect">
+            <a:avLst/>
+          </a:prstGeom>
+        </p:spPr>
+      </p:pic>
+    </p:spTree>
+    <p:extLst>
+      <p:ext uri="{BB962C8B-B14F-4D97-AF65-F5344CB8AC3E}">
+        <p14:creationId xmlns:p14="http://schemas.microsoft.com/office/powerpoint/2010/main" val="2412359973"/>
+      </p:ext>
+    </p:extLst>
+  </p:cSld>
+  <p:clrMapOvr>
+    <a:masterClrMapping/>
+  </p:clrMapOvr>
+</p:sld>
+</file>
+
+<file path=ppt/slides/slide5.xml><?xml version="1.0" encoding="utf-8"?>
+<p:sld xmlns:a="http://schemas.openxmlformats.org/drawingml/2006/main" xmlns:r="http://schemas.openxmlformats.org/officeDocument/2006/relationships" xmlns:p="http://schemas.openxmlformats.org/presentationml/2006/main">
+  <p:cSld>
+    <p:bg>
+      <p:bgPr>
+        <a:solidFill>
+          <a:schemeClr val="bg1"/>
+        </a:solidFill>
+        <a:effectLst/>
+      </p:bgPr>
+    </p:bg>
+    <p:spTree>
+      <p:nvGrpSpPr>
+        <p:cNvPr id="1" name=""/>
+        <p:cNvGrpSpPr/>
+        <p:nvPr/>
+      </p:nvGrpSpPr>
+      <p:grpSpPr>
+        <a:xfrm>
+          <a:off x="0" y="0"/>
+          <a:ext cx="0" cy="0"/>
+          <a:chOff x="0" y="0"/>
+          <a:chExt cx="0" cy="0"/>
+        </a:xfrm>
+      </p:grpSpPr>
+      <p:sp useBgFill="1">
+        <p:nvSpPr>
+          <p:cNvPr id="13" name="Rectangle 12">
+            <a:extLst>
+              <a:ext uri="{FF2B5EF4-FFF2-40B4-BE49-F238E27FC236}">
+                <a16:creationId xmlns:a16="http://schemas.microsoft.com/office/drawing/2014/main" id="{A8384FB5-9ADC-4DDC-881B-597D56F5B15D}"/>
+              </a:ext>
+              <a:ext uri="{C183D7F6-B498-43B3-948B-1728B52AA6E4}">
+                <adec:decorative xmlns:adec="http://schemas.microsoft.com/office/drawing/2017/decorative" val="1"/>
+              </a:ext>
+            </a:extLst>
+          </p:cNvPr>
+          <p:cNvSpPr>
+            <a:spLocks noGrp="1" noRot="1" noChangeAspect="1" noMove="1" noResize="1" noEditPoints="1" noAdjustHandles="1" noChangeArrowheads="1" noChangeShapeType="1" noTextEdit="1"/>
+          </p:cNvSpPr>
+          <p:nvPr>
+            <p:extLst>
+              <p:ext uri="{386F3935-93C4-4BCD-93E2-E3B085C9AB24}">
+                <p16:designElem xmlns:p16="http://schemas.microsoft.com/office/powerpoint/2015/main" val="1"/>
+              </p:ext>
+            </p:extLst>
+          </p:nvPr>
+        </p:nvSpPr>
+        <p:spPr>
+          <a:xfrm>
+            <a:off x="0" y="0"/>
+            <a:ext cx="12192000" cy="6858000"/>
+          </a:xfrm>
+          <a:prstGeom prst="rect">
+            <a:avLst/>
+          </a:prstGeom>
+          <a:ln w="12700" cap="flat" cmpd="sng" algn="ctr">
+            <a:noFill/>
+            <a:prstDash val="solid"/>
+            <a:miter lim="800000"/>
+          </a:ln>
+          <a:effectLst/>
+          <a:extLst>
+            <a:ext uri="{91240B29-F687-4F45-9708-019B960494DF}">
+              <a14:hiddenLine xmlns:a14="http://schemas.microsoft.com/office/drawing/2010/main" w="12700" cap="flat" cmpd="sng" algn="ctr">
+                <a:solidFill>
+                  <a:schemeClr val="accent1">
+                    <a:shade val="50000"/>
+                  </a:schemeClr>
+                </a:solidFill>
+                <a:prstDash val="solid"/>
+                <a:miter lim="800000"/>
+              </a14:hiddenLine>
+            </a:ext>
+          </a:extLst>
+        </p:spPr>
+        <p:style>
+          <a:lnRef idx="2">
+            <a:schemeClr val="accent1">
+              <a:shade val="50000"/>
+            </a:schemeClr>
+          </a:lnRef>
+          <a:fillRef idx="1">
+            <a:schemeClr val="accent1"/>
+          </a:fillRef>
+          <a:effectRef idx="0">
+            <a:schemeClr val="accent1"/>
+          </a:effectRef>
+          <a:fontRef idx="minor">
+            <a:schemeClr val="lt1"/>
+          </a:fontRef>
+        </p:style>
+        <p:txBody>
+          <a:bodyPr rtlCol="0" anchor="ctr"/>
+          <a:lstStyle/>
+          <a:p>
+            <a:pPr algn="ctr"/>
+            <a:endParaRPr lang="en-US"/>
+          </a:p>
+        </p:txBody>
+      </p:sp>
+      <p:sp>
+        <p:nvSpPr>
+          <p:cNvPr id="15" name="Rectangle 14">
+            <a:extLst>
+              <a:ext uri="{FF2B5EF4-FFF2-40B4-BE49-F238E27FC236}">
+                <a16:creationId xmlns:a16="http://schemas.microsoft.com/office/drawing/2014/main" id="{1199E1B1-A8C0-4FE8-A5A8-1CB41D69F857}"/>
+              </a:ext>
+              <a:ext uri="{C183D7F6-B498-43B3-948B-1728B52AA6E4}">
+                <adec:decorative xmlns:adec="http://schemas.microsoft.com/office/drawing/2017/decorative" val="1"/>
+              </a:ext>
+            </a:extLst>
+          </p:cNvPr>
+          <p:cNvSpPr>
+            <a:spLocks noGrp="1" noRot="1" noChangeAspect="1" noMove="1" noResize="1" noEditPoints="1" noAdjustHandles="1" noChangeArrowheads="1" noChangeShapeType="1" noTextEdit="1"/>
+          </p:cNvSpPr>
+          <p:nvPr>
+            <p:extLst>
+              <p:ext uri="{386F3935-93C4-4BCD-93E2-E3B085C9AB24}">
+                <p16:designElem xmlns:p16="http://schemas.microsoft.com/office/powerpoint/2015/main" val="1"/>
+              </p:ext>
+            </p:extLst>
+          </p:nvPr>
+        </p:nvSpPr>
+        <p:spPr>
+          <a:xfrm rot="10800000" flipH="1">
+            <a:off x="2" y="0"/>
+            <a:ext cx="12191998" cy="1575955"/>
+          </a:xfrm>
+          <a:prstGeom prst="rect">
+            <a:avLst/>
+          </a:prstGeom>
+          <a:gradFill>
+            <a:gsLst>
+              <a:gs pos="0">
+                <a:srgbClr val="000000">
+                  <a:alpha val="96000"/>
+                </a:srgbClr>
+              </a:gs>
+              <a:gs pos="100000">
+                <a:schemeClr val="accent1">
+                  <a:lumMod val="75000"/>
+                </a:schemeClr>
+              </a:gs>
+            </a:gsLst>
+            <a:lin ang="6000000" scaled="0"/>
+          </a:gradFill>
+          <a:ln>
+            <a:noFill/>
+          </a:ln>
+        </p:spPr>
+        <p:style>
+          <a:lnRef idx="2">
+            <a:schemeClr val="accent1">
+              <a:shade val="50000"/>
+            </a:schemeClr>
+          </a:lnRef>
+          <a:fillRef idx="1">
+            <a:schemeClr val="accent1"/>
+          </a:fillRef>
+          <a:effectRef idx="0">
+            <a:schemeClr val="accent1"/>
+          </a:effectRef>
+          <a:fontRef idx="minor">
+            <a:schemeClr val="lt1"/>
+          </a:fontRef>
+        </p:style>
+        <p:txBody>
+          <a:bodyPr rtlCol="0" anchor="ctr"/>
+          <a:lstStyle/>
+          <a:p>
+            <a:pPr algn="ctr"/>
+            <a:endParaRPr lang="en-US"/>
+          </a:p>
+        </p:txBody>
+      </p:sp>
+      <p:sp>
+        <p:nvSpPr>
+          <p:cNvPr id="17" name="Rectangle 16">
+            <a:extLst>
+              <a:ext uri="{FF2B5EF4-FFF2-40B4-BE49-F238E27FC236}">
+                <a16:creationId xmlns:a16="http://schemas.microsoft.com/office/drawing/2014/main" id="{84A8DE83-DE75-4B41-9DB4-A7EC0B0DEC0B}"/>
+              </a:ext>
+              <a:ext uri="{C183D7F6-B498-43B3-948B-1728B52AA6E4}">
+                <adec:decorative xmlns:adec="http://schemas.microsoft.com/office/drawing/2017/decorative" val="1"/>
+              </a:ext>
+            </a:extLst>
+          </p:cNvPr>
+          <p:cNvSpPr>
+            <a:spLocks noGrp="1" noRot="1" noChangeAspect="1" noMove="1" noResize="1" noEditPoints="1" noAdjustHandles="1" noChangeArrowheads="1" noChangeShapeType="1" noTextEdit="1"/>
+          </p:cNvSpPr>
+          <p:nvPr>
+            <p:extLst>
+              <p:ext uri="{386F3935-93C4-4BCD-93E2-E3B085C9AB24}">
+                <p16:designElem xmlns:p16="http://schemas.microsoft.com/office/powerpoint/2015/main" val="1"/>
+              </p:ext>
+            </p:extLst>
+          </p:nvPr>
+        </p:nvSpPr>
+        <p:spPr>
+          <a:xfrm>
+            <a:off x="0" y="0"/>
+            <a:ext cx="8128856" cy="1575461"/>
+          </a:xfrm>
+          <a:prstGeom prst="rect">
+            <a:avLst/>
+          </a:prstGeom>
+          <a:gradFill>
+            <a:gsLst>
+              <a:gs pos="0">
+                <a:schemeClr val="accent1">
+                  <a:alpha val="41000"/>
+                </a:schemeClr>
+              </a:gs>
+              <a:gs pos="74000">
+                <a:schemeClr val="accent1">
+                  <a:lumMod val="60000"/>
+                  <a:lumOff val="40000"/>
+                  <a:alpha val="0"/>
+                </a:schemeClr>
+              </a:gs>
+            </a:gsLst>
+            <a:lin ang="8400000" scaled="0"/>
+          </a:gradFill>
+          <a:ln>
+            <a:noFill/>
+          </a:ln>
+        </p:spPr>
+        <p:style>
+          <a:lnRef idx="2">
+            <a:schemeClr val="accent1">
+              <a:shade val="50000"/>
+            </a:schemeClr>
+          </a:lnRef>
+          <a:fillRef idx="1">
+            <a:schemeClr val="accent1"/>
+          </a:fillRef>
+          <a:effectRef idx="0">
+            <a:schemeClr val="accent1"/>
+          </a:effectRef>
+          <a:fontRef idx="minor">
+            <a:schemeClr val="lt1"/>
+          </a:fontRef>
+        </p:style>
+        <p:txBody>
+          <a:bodyPr rtlCol="0" anchor="ctr"/>
+          <a:lstStyle/>
+          <a:p>
+            <a:pPr algn="ctr"/>
+            <a:endParaRPr lang="en-US"/>
+          </a:p>
+        </p:txBody>
+      </p:sp>
+      <p:sp>
+        <p:nvSpPr>
+          <p:cNvPr id="19" name="Rectangle 18">
+            <a:extLst>
+              <a:ext uri="{FF2B5EF4-FFF2-40B4-BE49-F238E27FC236}">
+                <a16:creationId xmlns:a16="http://schemas.microsoft.com/office/drawing/2014/main" id="{A7009A0A-BEF5-4EAC-AF15-E4F9F002E239}"/>
+              </a:ext>
+              <a:ext uri="{C183D7F6-B498-43B3-948B-1728B52AA6E4}">
+                <adec:decorative xmlns:adec="http://schemas.microsoft.com/office/drawing/2017/decorative" val="1"/>
+              </a:ext>
+            </a:extLst>
+          </p:cNvPr>
+          <p:cNvSpPr>
+            <a:spLocks noGrp="1" noRot="1" noChangeAspect="1" noMove="1" noResize="1" noEditPoints="1" noAdjustHandles="1" noChangeArrowheads="1" noChangeShapeType="1" noTextEdit="1"/>
+          </p:cNvSpPr>
+          <p:nvPr>
+            <p:extLst>
+              <p:ext uri="{386F3935-93C4-4BCD-93E2-E3B085C9AB24}">
+                <p16:designElem xmlns:p16="http://schemas.microsoft.com/office/powerpoint/2015/main" val="1"/>
+              </p:ext>
+            </p:extLst>
+          </p:nvPr>
+        </p:nvSpPr>
+        <p:spPr>
+          <a:xfrm flipH="1">
+            <a:off x="-3" y="-1"/>
+            <a:ext cx="12192002" cy="1574311"/>
+          </a:xfrm>
+          <a:prstGeom prst="rect">
+            <a:avLst/>
+          </a:prstGeom>
+          <a:gradFill>
+            <a:gsLst>
+              <a:gs pos="0">
+                <a:srgbClr val="000000">
+                  <a:alpha val="63000"/>
+                </a:srgbClr>
+              </a:gs>
+              <a:gs pos="78000">
+                <a:schemeClr val="accent1">
+                  <a:alpha val="15000"/>
+                </a:schemeClr>
+              </a:gs>
+            </a:gsLst>
+            <a:lin ang="15600000" scaled="0"/>
+          </a:gradFill>
+          <a:ln>
+            <a:noFill/>
+          </a:ln>
+        </p:spPr>
+        <p:style>
+          <a:lnRef idx="2">
+            <a:schemeClr val="accent1">
+              <a:shade val="50000"/>
+            </a:schemeClr>
+          </a:lnRef>
+          <a:fillRef idx="1">
+            <a:schemeClr val="accent1"/>
+          </a:fillRef>
+          <a:effectRef idx="0">
+            <a:schemeClr val="accent1"/>
+          </a:effectRef>
+          <a:fontRef idx="minor">
+            <a:schemeClr val="lt1"/>
+          </a:fontRef>
+        </p:style>
+        <p:txBody>
+          <a:bodyPr rtlCol="0" anchor="ctr"/>
+          <a:lstStyle/>
+          <a:p>
+            <a:pPr algn="ctr"/>
+            <a:endParaRPr lang="en-US"/>
+          </a:p>
+        </p:txBody>
+      </p:sp>
+      <p:sp>
+        <p:nvSpPr>
+          <p:cNvPr id="2" name="Title 1">
+            <a:extLst>
+              <a:ext uri="{FF2B5EF4-FFF2-40B4-BE49-F238E27FC236}">
+                <a16:creationId xmlns:a16="http://schemas.microsoft.com/office/drawing/2014/main" id="{1DC43200-F066-9A23-D854-DB860B26BAC5}"/>
+              </a:ext>
+            </a:extLst>
+          </p:cNvPr>
+          <p:cNvSpPr>
+            <a:spLocks noGrp="1"/>
+          </p:cNvSpPr>
+          <p:nvPr>
+            <p:ph type="title"/>
+          </p:nvPr>
+        </p:nvSpPr>
+        <p:spPr>
+          <a:xfrm>
+            <a:off x="699713" y="248038"/>
+            <a:ext cx="7063721" cy="1159200"/>
+          </a:xfrm>
+        </p:spPr>
+        <p:txBody>
+          <a:bodyPr vert="horz" lIns="91440" tIns="45720" rIns="91440" bIns="45720" rtlCol="0" anchor="ctr">
+            <a:normAutofit/>
+          </a:bodyPr>
+          <a:lstStyle/>
+          <a:p>
+            <a:r>
+              <a:rPr lang="en-US" sz="4000" kern="1200">
+                <a:solidFill>
+                  <a:srgbClr val="FFFFFF"/>
+                </a:solidFill>
+                <a:latin typeface="+mj-lt"/>
+                <a:ea typeface="+mj-ea"/>
+                <a:cs typeface="+mj-cs"/>
+              </a:rPr>
+              <a:t>Intoduction to Vosk</a:t>
+            </a:r>
+          </a:p>
+        </p:txBody>
+      </p:sp>
+      <p:pic>
+        <p:nvPicPr>
+          <p:cNvPr id="8" name="Picture 7">
+            <a:extLst>
+              <a:ext uri="{FF2B5EF4-FFF2-40B4-BE49-F238E27FC236}">
+                <a16:creationId xmlns:a16="http://schemas.microsoft.com/office/drawing/2014/main" id="{1B48D639-FD8A-0FDE-188F-EECB87DEF95B}"/>
+              </a:ext>
+            </a:extLst>
+          </p:cNvPr>
+          <p:cNvPicPr>
+            <a:picLocks noChangeAspect="1"/>
+          </p:cNvPicPr>
+          <p:nvPr/>
+        </p:nvPicPr>
+        <p:blipFill>
+          <a:blip r:embed="rId3"/>
+          <a:stretch>
+            <a:fillRect/>
+          </a:stretch>
+        </p:blipFill>
+        <p:spPr>
+          <a:xfrm>
+            <a:off x="981823" y="1645707"/>
+            <a:ext cx="10228350" cy="5139745"/>
           </a:xfrm>
           <a:prstGeom prst="rect">
             <a:avLst/>
@@ -7548,9 +9321,23 @@
 <file path=ppt/slides/slide7.xml><?xml version="1.0" encoding="utf-8"?>
 <p:sld xmlns:a="http://schemas.openxmlformats.org/drawingml/2006/main" xmlns:r="http://schemas.openxmlformats.org/officeDocument/2006/relationships" xmlns:p="http://schemas.openxmlformats.org/presentationml/2006/main">
   <p:cSld>
+    <p:bg>
+      <p:bgPr>
+        <a:solidFill>
+          <a:schemeClr val="bg1"/>
+        </a:solidFill>
+        <a:effectLst/>
+      </p:bgPr>
+    </p:bg>
     <p:spTree>
       <p:nvGrpSpPr>
-        <p:cNvPr id="1" name=""/>
+        <p:cNvPr id="1" name="">
+          <a:extLst>
+            <a:ext uri="{FF2B5EF4-FFF2-40B4-BE49-F238E27FC236}">
+              <a16:creationId xmlns:a16="http://schemas.microsoft.com/office/drawing/2014/main" id="{CB34A122-7797-DA5A-B347-1451091C335E}"/>
+            </a:ext>
+          </a:extLst>
+        </p:cNvPr>
         <p:cNvGrpSpPr/>
         <p:nvPr/>
       </p:nvGrpSpPr>
@@ -7562,12 +9349,315 @@
           <a:chExt cx="0" cy="0"/>
         </a:xfrm>
       </p:grpSpPr>
-      <p:sp>
-        <p:nvSpPr>
-          <p:cNvPr id="2" name="Titel 1">
-            <a:extLst>
-              <a:ext uri="{FF2B5EF4-FFF2-40B4-BE49-F238E27FC236}">
-                <a16:creationId xmlns:a16="http://schemas.microsoft.com/office/drawing/2014/main" id="{DE91ACC9-79D4-17C2-681B-F78A70151FD9}"/>
+      <p:sp useBgFill="1">
+        <p:nvSpPr>
+          <p:cNvPr id="13" name="Rectangle 12">
+            <a:extLst>
+              <a:ext uri="{FF2B5EF4-FFF2-40B4-BE49-F238E27FC236}">
+                <a16:creationId xmlns:a16="http://schemas.microsoft.com/office/drawing/2014/main" id="{BF1F40FB-18AB-757F-52E2-A5D850BD4022}"/>
+              </a:ext>
+              <a:ext uri="{C183D7F6-B498-43B3-948B-1728B52AA6E4}">
+                <adec:decorative xmlns:adec="http://schemas.microsoft.com/office/drawing/2017/decorative" val="1"/>
+              </a:ext>
+            </a:extLst>
+          </p:cNvPr>
+          <p:cNvSpPr>
+            <a:spLocks noGrp="1" noRot="1" noChangeAspect="1" noMove="1" noResize="1" noEditPoints="1" noAdjustHandles="1" noChangeArrowheads="1" noChangeShapeType="1" noTextEdit="1"/>
+          </p:cNvSpPr>
+          <p:nvPr>
+            <p:extLst>
+              <p:ext uri="{386F3935-93C4-4BCD-93E2-E3B085C9AB24}">
+                <p16:designElem xmlns:p16="http://schemas.microsoft.com/office/powerpoint/2015/main" val="1"/>
+              </p:ext>
+            </p:extLst>
+          </p:nvPr>
+        </p:nvSpPr>
+        <p:spPr>
+          <a:xfrm>
+            <a:off x="0" y="0"/>
+            <a:ext cx="12192000" cy="6858000"/>
+          </a:xfrm>
+          <a:prstGeom prst="rect">
+            <a:avLst/>
+          </a:prstGeom>
+          <a:ln w="12700" cap="flat" cmpd="sng" algn="ctr">
+            <a:noFill/>
+            <a:prstDash val="solid"/>
+            <a:miter lim="800000"/>
+          </a:ln>
+          <a:effectLst/>
+          <a:extLst>
+            <a:ext uri="{91240B29-F687-4F45-9708-019B960494DF}">
+              <a14:hiddenLine xmlns:a14="http://schemas.microsoft.com/office/drawing/2010/main" w="12700" cap="flat" cmpd="sng" algn="ctr">
+                <a:solidFill>
+                  <a:schemeClr val="accent1">
+                    <a:shade val="50000"/>
+                  </a:schemeClr>
+                </a:solidFill>
+                <a:prstDash val="solid"/>
+                <a:miter lim="800000"/>
+              </a14:hiddenLine>
+            </a:ext>
+          </a:extLst>
+        </p:spPr>
+        <p:style>
+          <a:lnRef idx="2">
+            <a:schemeClr val="accent1">
+              <a:shade val="50000"/>
+            </a:schemeClr>
+          </a:lnRef>
+          <a:fillRef idx="1">
+            <a:schemeClr val="accent1"/>
+          </a:fillRef>
+          <a:effectRef idx="0">
+            <a:schemeClr val="accent1"/>
+          </a:effectRef>
+          <a:fontRef idx="minor">
+            <a:schemeClr val="lt1"/>
+          </a:fontRef>
+        </p:style>
+        <p:txBody>
+          <a:bodyPr rtlCol="0" anchor="ctr"/>
+          <a:lstStyle/>
+          <a:p>
+            <a:pPr algn="ctr"/>
+            <a:endParaRPr lang="en-US"/>
+          </a:p>
+        </p:txBody>
+      </p:sp>
+      <p:sp>
+        <p:nvSpPr>
+          <p:cNvPr id="15" name="Rectangle 14">
+            <a:extLst>
+              <a:ext uri="{FF2B5EF4-FFF2-40B4-BE49-F238E27FC236}">
+                <a16:creationId xmlns:a16="http://schemas.microsoft.com/office/drawing/2014/main" id="{C32230C8-DA72-BBD1-07A1-06C4C3B72063}"/>
+              </a:ext>
+              <a:ext uri="{C183D7F6-B498-43B3-948B-1728B52AA6E4}">
+                <adec:decorative xmlns:adec="http://schemas.microsoft.com/office/drawing/2017/decorative" val="1"/>
+              </a:ext>
+            </a:extLst>
+          </p:cNvPr>
+          <p:cNvSpPr>
+            <a:spLocks noGrp="1" noRot="1" noChangeAspect="1" noMove="1" noResize="1" noEditPoints="1" noAdjustHandles="1" noChangeArrowheads="1" noChangeShapeType="1" noTextEdit="1"/>
+          </p:cNvSpPr>
+          <p:nvPr>
+            <p:extLst>
+              <p:ext uri="{386F3935-93C4-4BCD-93E2-E3B085C9AB24}">
+                <p16:designElem xmlns:p16="http://schemas.microsoft.com/office/powerpoint/2015/main" val="1"/>
+              </p:ext>
+            </p:extLst>
+          </p:nvPr>
+        </p:nvSpPr>
+        <p:spPr>
+          <a:xfrm rot="10800000" flipH="1">
+            <a:off x="2" y="0"/>
+            <a:ext cx="12191998" cy="1575955"/>
+          </a:xfrm>
+          <a:prstGeom prst="rect">
+            <a:avLst/>
+          </a:prstGeom>
+          <a:gradFill>
+            <a:gsLst>
+              <a:gs pos="0">
+                <a:srgbClr val="000000">
+                  <a:alpha val="96000"/>
+                </a:srgbClr>
+              </a:gs>
+              <a:gs pos="100000">
+                <a:schemeClr val="accent1">
+                  <a:lumMod val="75000"/>
+                </a:schemeClr>
+              </a:gs>
+            </a:gsLst>
+            <a:lin ang="6000000" scaled="0"/>
+          </a:gradFill>
+          <a:ln>
+            <a:noFill/>
+          </a:ln>
+        </p:spPr>
+        <p:style>
+          <a:lnRef idx="2">
+            <a:schemeClr val="accent1">
+              <a:shade val="50000"/>
+            </a:schemeClr>
+          </a:lnRef>
+          <a:fillRef idx="1">
+            <a:schemeClr val="accent1"/>
+          </a:fillRef>
+          <a:effectRef idx="0">
+            <a:schemeClr val="accent1"/>
+          </a:effectRef>
+          <a:fontRef idx="minor">
+            <a:schemeClr val="lt1"/>
+          </a:fontRef>
+        </p:style>
+        <p:txBody>
+          <a:bodyPr rtlCol="0" anchor="ctr"/>
+          <a:lstStyle/>
+          <a:p>
+            <a:pPr algn="ctr"/>
+            <a:endParaRPr lang="en-US"/>
+          </a:p>
+        </p:txBody>
+      </p:sp>
+      <p:sp>
+        <p:nvSpPr>
+          <p:cNvPr id="17" name="Rectangle 16">
+            <a:extLst>
+              <a:ext uri="{FF2B5EF4-FFF2-40B4-BE49-F238E27FC236}">
+                <a16:creationId xmlns:a16="http://schemas.microsoft.com/office/drawing/2014/main" id="{EB24B9B3-556D-0995-AB5A-1A5793ECA5AF}"/>
+              </a:ext>
+              <a:ext uri="{C183D7F6-B498-43B3-948B-1728B52AA6E4}">
+                <adec:decorative xmlns:adec="http://schemas.microsoft.com/office/drawing/2017/decorative" val="1"/>
+              </a:ext>
+            </a:extLst>
+          </p:cNvPr>
+          <p:cNvSpPr>
+            <a:spLocks noGrp="1" noRot="1" noChangeAspect="1" noMove="1" noResize="1" noEditPoints="1" noAdjustHandles="1" noChangeArrowheads="1" noChangeShapeType="1" noTextEdit="1"/>
+          </p:cNvSpPr>
+          <p:nvPr>
+            <p:extLst>
+              <p:ext uri="{386F3935-93C4-4BCD-93E2-E3B085C9AB24}">
+                <p16:designElem xmlns:p16="http://schemas.microsoft.com/office/powerpoint/2015/main" val="1"/>
+              </p:ext>
+            </p:extLst>
+          </p:nvPr>
+        </p:nvSpPr>
+        <p:spPr>
+          <a:xfrm>
+            <a:off x="0" y="0"/>
+            <a:ext cx="8128856" cy="1575461"/>
+          </a:xfrm>
+          <a:prstGeom prst="rect">
+            <a:avLst/>
+          </a:prstGeom>
+          <a:gradFill>
+            <a:gsLst>
+              <a:gs pos="0">
+                <a:schemeClr val="accent1">
+                  <a:alpha val="41000"/>
+                </a:schemeClr>
+              </a:gs>
+              <a:gs pos="74000">
+                <a:schemeClr val="accent1">
+                  <a:lumMod val="60000"/>
+                  <a:lumOff val="40000"/>
+                  <a:alpha val="0"/>
+                </a:schemeClr>
+              </a:gs>
+            </a:gsLst>
+            <a:lin ang="8400000" scaled="0"/>
+          </a:gradFill>
+          <a:ln>
+            <a:noFill/>
+          </a:ln>
+        </p:spPr>
+        <p:style>
+          <a:lnRef idx="2">
+            <a:schemeClr val="accent1">
+              <a:shade val="50000"/>
+            </a:schemeClr>
+          </a:lnRef>
+          <a:fillRef idx="1">
+            <a:schemeClr val="accent1"/>
+          </a:fillRef>
+          <a:effectRef idx="0">
+            <a:schemeClr val="accent1"/>
+          </a:effectRef>
+          <a:fontRef idx="minor">
+            <a:schemeClr val="lt1"/>
+          </a:fontRef>
+        </p:style>
+        <p:txBody>
+          <a:bodyPr rtlCol="0" anchor="ctr"/>
+          <a:lstStyle/>
+          <a:p>
+            <a:pPr algn="ctr"/>
+            <a:endParaRPr lang="en-US"/>
+          </a:p>
+        </p:txBody>
+      </p:sp>
+      <p:sp>
+        <p:nvSpPr>
+          <p:cNvPr id="19" name="Rectangle 18">
+            <a:extLst>
+              <a:ext uri="{FF2B5EF4-FFF2-40B4-BE49-F238E27FC236}">
+                <a16:creationId xmlns:a16="http://schemas.microsoft.com/office/drawing/2014/main" id="{5EFE942F-C8E6-ABD6-610D-1CEB19DF51DD}"/>
+              </a:ext>
+              <a:ext uri="{C183D7F6-B498-43B3-948B-1728B52AA6E4}">
+                <adec:decorative xmlns:adec="http://schemas.microsoft.com/office/drawing/2017/decorative" val="1"/>
+              </a:ext>
+            </a:extLst>
+          </p:cNvPr>
+          <p:cNvSpPr>
+            <a:spLocks noGrp="1" noRot="1" noChangeAspect="1" noMove="1" noResize="1" noEditPoints="1" noAdjustHandles="1" noChangeArrowheads="1" noChangeShapeType="1" noTextEdit="1"/>
+          </p:cNvSpPr>
+          <p:nvPr>
+            <p:extLst>
+              <p:ext uri="{386F3935-93C4-4BCD-93E2-E3B085C9AB24}">
+                <p16:designElem xmlns:p16="http://schemas.microsoft.com/office/powerpoint/2015/main" val="1"/>
+              </p:ext>
+            </p:extLst>
+          </p:nvPr>
+        </p:nvSpPr>
+        <p:spPr>
+          <a:xfrm flipH="1">
+            <a:off x="-3" y="-1"/>
+            <a:ext cx="12192002" cy="1574311"/>
+          </a:xfrm>
+          <a:prstGeom prst="rect">
+            <a:avLst/>
+          </a:prstGeom>
+          <a:gradFill>
+            <a:gsLst>
+              <a:gs pos="0">
+                <a:srgbClr val="000000">
+                  <a:alpha val="63000"/>
+                </a:srgbClr>
+              </a:gs>
+              <a:gs pos="78000">
+                <a:schemeClr val="accent1">
+                  <a:alpha val="15000"/>
+                </a:schemeClr>
+              </a:gs>
+            </a:gsLst>
+            <a:lin ang="15600000" scaled="0"/>
+          </a:gradFill>
+          <a:ln>
+            <a:noFill/>
+          </a:ln>
+        </p:spPr>
+        <p:style>
+          <a:lnRef idx="2">
+            <a:schemeClr val="accent1">
+              <a:shade val="50000"/>
+            </a:schemeClr>
+          </a:lnRef>
+          <a:fillRef idx="1">
+            <a:schemeClr val="accent1"/>
+          </a:fillRef>
+          <a:effectRef idx="0">
+            <a:schemeClr val="accent1"/>
+          </a:effectRef>
+          <a:fontRef idx="minor">
+            <a:schemeClr val="lt1"/>
+          </a:fontRef>
+        </p:style>
+        <p:txBody>
+          <a:bodyPr rtlCol="0" anchor="ctr"/>
+          <a:lstStyle/>
+          <a:p>
+            <a:pPr algn="ctr"/>
+            <a:endParaRPr lang="en-US"/>
+          </a:p>
+        </p:txBody>
+      </p:sp>
+      <p:sp>
+        <p:nvSpPr>
+          <p:cNvPr id="2" name="Title 1">
+            <a:extLst>
+              <a:ext uri="{FF2B5EF4-FFF2-40B4-BE49-F238E27FC236}">
+                <a16:creationId xmlns:a16="http://schemas.microsoft.com/office/drawing/2014/main" id="{24C08299-A037-119E-EFFC-EE036847024F}"/>
               </a:ext>
             </a:extLst>
           </p:cNvPr>
@@ -7578,29 +9668,43 @@
             <p:ph type="title"/>
           </p:nvPr>
         </p:nvSpPr>
-        <p:spPr/>
-        <p:txBody>
-          <a:bodyPr/>
-          <a:lstStyle/>
-          <a:p>
-            <a:r>
-              <a:rPr lang="de-DE" dirty="0"/>
-              <a:t>System </a:t>
-            </a:r>
-            <a:r>
-              <a:rPr lang="de-DE" dirty="0" err="1"/>
-              <a:t>Overview</a:t>
-            </a:r>
-            <a:endParaRPr lang="de-DE" dirty="0"/>
-          </a:p>
-        </p:txBody>
-      </p:sp>
-      <p:sp>
-        <p:nvSpPr>
-          <p:cNvPr id="3" name="Inhaltsplatzhalter 2">
-            <a:extLst>
-              <a:ext uri="{FF2B5EF4-FFF2-40B4-BE49-F238E27FC236}">
-                <a16:creationId xmlns:a16="http://schemas.microsoft.com/office/drawing/2014/main" id="{DAB83250-174B-4DC9-6B1F-0F086478514B}"/>
+        <p:spPr>
+          <a:xfrm>
+            <a:off x="699713" y="248038"/>
+            <a:ext cx="7063721" cy="1159200"/>
+          </a:xfrm>
+        </p:spPr>
+        <p:txBody>
+          <a:bodyPr vert="horz" lIns="91440" tIns="45720" rIns="91440" bIns="45720" rtlCol="0" anchor="ctr">
+            <a:normAutofit/>
+          </a:bodyPr>
+          <a:lstStyle/>
+          <a:p>
+            <a:r>
+              <a:rPr lang="en-GB" sz="4000" dirty="0">
+                <a:solidFill>
+                  <a:schemeClr val="bg1"/>
+                </a:solidFill>
+              </a:rPr>
+              <a:t>Game integration</a:t>
+            </a:r>
+            <a:endParaRPr lang="en-US" sz="4000" kern="1200" dirty="0">
+              <a:solidFill>
+                <a:schemeClr val="bg1"/>
+              </a:solidFill>
+              <a:latin typeface="+mj-lt"/>
+              <a:ea typeface="+mj-ea"/>
+              <a:cs typeface="+mj-cs"/>
+            </a:endParaRPr>
+          </a:p>
+        </p:txBody>
+      </p:sp>
+      <p:sp>
+        <p:nvSpPr>
+          <p:cNvPr id="3" name="Content Placeholder 2">
+            <a:extLst>
+              <a:ext uri="{FF2B5EF4-FFF2-40B4-BE49-F238E27FC236}">
+                <a16:creationId xmlns:a16="http://schemas.microsoft.com/office/drawing/2014/main" id="{25DEF4F3-5AA0-C4A7-F9EA-33A485BF28C3}"/>
               </a:ext>
             </a:extLst>
           </p:cNvPr>
@@ -7611,43 +9715,104 @@
             <p:ph idx="1"/>
           </p:nvPr>
         </p:nvSpPr>
-        <p:spPr/>
-        <p:txBody>
-          <a:bodyPr/>
-          <a:lstStyle/>
-          <a:p>
-            <a:r>
-              <a:rPr lang="en-US" dirty="0"/>
-              <a:t>Audio input </a:t>
-            </a:r>
-          </a:p>
-          <a:p>
-            <a:r>
-              <a:rPr lang="en-US" dirty="0"/>
-              <a:t>MFCC feature extraction </a:t>
-            </a:r>
-          </a:p>
-          <a:p>
-            <a:r>
-              <a:rPr lang="en-US" dirty="0"/>
-              <a:t>DNN + HMM processing </a:t>
-            </a:r>
-          </a:p>
-          <a:p>
-            <a:r>
-              <a:rPr lang="en-US" dirty="0"/>
-              <a:t>Word prediction</a:t>
-            </a:r>
-          </a:p>
-          <a:p>
-            <a:endParaRPr lang="de-DE" dirty="0"/>
+        <p:spPr>
+          <a:xfrm>
+            <a:off x="6047084" y="1899919"/>
+            <a:ext cx="5623560" cy="1056641"/>
+          </a:xfrm>
+        </p:spPr>
+        <p:txBody>
+          <a:bodyPr>
+            <a:normAutofit/>
+          </a:bodyPr>
+          <a:lstStyle/>
+          <a:p>
+            <a:r>
+              <a:rPr lang="en-GB" dirty="0"/>
+              <a:t>Recursive backtracking maze generation</a:t>
+            </a:r>
+          </a:p>
+        </p:txBody>
+      </p:sp>
+      <p:pic>
+        <p:nvPicPr>
+          <p:cNvPr id="6" name="Picture 5">
+            <a:extLst>
+              <a:ext uri="{FF2B5EF4-FFF2-40B4-BE49-F238E27FC236}">
+                <a16:creationId xmlns:a16="http://schemas.microsoft.com/office/drawing/2014/main" id="{075156BD-F60A-FF0C-227C-6D7E339C9026}"/>
+              </a:ext>
+            </a:extLst>
+          </p:cNvPr>
+          <p:cNvPicPr>
+            <a:picLocks noChangeAspect="1"/>
+          </p:cNvPicPr>
+          <p:nvPr/>
+        </p:nvPicPr>
+        <p:blipFill>
+          <a:blip r:embed="rId3"/>
+          <a:srcRect t="2536"/>
+          <a:stretch>
+            <a:fillRect/>
+          </a:stretch>
+        </p:blipFill>
+        <p:spPr>
+          <a:xfrm>
+            <a:off x="699713" y="1765887"/>
+            <a:ext cx="4820920" cy="4844075"/>
+          </a:xfrm>
+          <a:prstGeom prst="rect">
+            <a:avLst/>
+          </a:prstGeom>
+        </p:spPr>
+      </p:pic>
+      <p:sp>
+        <p:nvSpPr>
+          <p:cNvPr id="8" name="TextBox 7">
+            <a:extLst>
+              <a:ext uri="{FF2B5EF4-FFF2-40B4-BE49-F238E27FC236}">
+                <a16:creationId xmlns:a16="http://schemas.microsoft.com/office/drawing/2014/main" id="{0C01C29D-DED3-AC37-489D-99100642E287}"/>
+              </a:ext>
+            </a:extLst>
+          </p:cNvPr>
+          <p:cNvSpPr txBox="1"/>
+          <p:nvPr/>
+        </p:nvSpPr>
+        <p:spPr>
+          <a:xfrm>
+            <a:off x="6502400" y="2956560"/>
+            <a:ext cx="4307840" cy="1200329"/>
+          </a:xfrm>
+          <a:prstGeom prst="rect">
+            <a:avLst/>
+          </a:prstGeom>
+          <a:noFill/>
+        </p:spPr>
+        <p:txBody>
+          <a:bodyPr wrap="square" rtlCol="0">
+            <a:spAutoFit/>
+          </a:bodyPr>
+          <a:lstStyle/>
+          <a:p>
+            <a:r>
+              <a:rPr lang="en-GB" dirty="0"/>
+              <a:t>1- Initialize maze with walls everywhere </a:t>
+            </a:r>
+          </a:p>
+          <a:p>
+            <a:endParaRPr lang="en-GB" dirty="0"/>
+          </a:p>
+          <a:p>
+            <a:r>
+              <a:rPr lang="en-GB" dirty="0"/>
+              <a:t>2- Do a depth first search while removing the walls between neighbours </a:t>
+            </a:r>
           </a:p>
         </p:txBody>
       </p:sp>
     </p:spTree>
     <p:extLst>
       <p:ext uri="{BB962C8B-B14F-4D97-AF65-F5344CB8AC3E}">
-        <p14:creationId xmlns:p14="http://schemas.microsoft.com/office/powerpoint/2010/main" val="466913703"/>
+        <p14:creationId xmlns:p14="http://schemas.microsoft.com/office/powerpoint/2010/main" val="125624488"/>
       </p:ext>
     </p:extLst>
   </p:cSld>
@@ -7660,9 +9825,23 @@
 <file path=ppt/slides/slide8.xml><?xml version="1.0" encoding="utf-8"?>
 <p:sld xmlns:a="http://schemas.openxmlformats.org/drawingml/2006/main" xmlns:r="http://schemas.openxmlformats.org/officeDocument/2006/relationships" xmlns:p="http://schemas.openxmlformats.org/presentationml/2006/main">
   <p:cSld>
+    <p:bg>
+      <p:bgPr>
+        <a:solidFill>
+          <a:schemeClr val="bg1"/>
+        </a:solidFill>
+        <a:effectLst/>
+      </p:bgPr>
+    </p:bg>
     <p:spTree>
       <p:nvGrpSpPr>
-        <p:cNvPr id="1" name=""/>
+        <p:cNvPr id="1" name="">
+          <a:extLst>
+            <a:ext uri="{FF2B5EF4-FFF2-40B4-BE49-F238E27FC236}">
+              <a16:creationId xmlns:a16="http://schemas.microsoft.com/office/drawing/2014/main" id="{A99956A7-46B4-9625-F3E4-A95F35906949}"/>
+            </a:ext>
+          </a:extLst>
+        </p:cNvPr>
         <p:cNvGrpSpPr/>
         <p:nvPr/>
       </p:nvGrpSpPr>
@@ -7674,12 +9853,315 @@
           <a:chExt cx="0" cy="0"/>
         </a:xfrm>
       </p:grpSpPr>
-      <p:sp>
-        <p:nvSpPr>
-          <p:cNvPr id="2" name="Titel 1">
-            <a:extLst>
-              <a:ext uri="{FF2B5EF4-FFF2-40B4-BE49-F238E27FC236}">
-                <a16:creationId xmlns:a16="http://schemas.microsoft.com/office/drawing/2014/main" id="{FA111BCC-1FCB-797D-6A46-449BCAB31DD4}"/>
+      <p:sp useBgFill="1">
+        <p:nvSpPr>
+          <p:cNvPr id="13" name="Rectangle 12">
+            <a:extLst>
+              <a:ext uri="{FF2B5EF4-FFF2-40B4-BE49-F238E27FC236}">
+                <a16:creationId xmlns:a16="http://schemas.microsoft.com/office/drawing/2014/main" id="{9D474B9D-F108-890B-7F40-677FA49E91B7}"/>
+              </a:ext>
+              <a:ext uri="{C183D7F6-B498-43B3-948B-1728B52AA6E4}">
+                <adec:decorative xmlns:adec="http://schemas.microsoft.com/office/drawing/2017/decorative" val="1"/>
+              </a:ext>
+            </a:extLst>
+          </p:cNvPr>
+          <p:cNvSpPr>
+            <a:spLocks noGrp="1" noRot="1" noChangeAspect="1" noMove="1" noResize="1" noEditPoints="1" noAdjustHandles="1" noChangeArrowheads="1" noChangeShapeType="1" noTextEdit="1"/>
+          </p:cNvSpPr>
+          <p:nvPr>
+            <p:extLst>
+              <p:ext uri="{386F3935-93C4-4BCD-93E2-E3B085C9AB24}">
+                <p16:designElem xmlns:p16="http://schemas.microsoft.com/office/powerpoint/2015/main" val="1"/>
+              </p:ext>
+            </p:extLst>
+          </p:nvPr>
+        </p:nvSpPr>
+        <p:spPr>
+          <a:xfrm>
+            <a:off x="0" y="0"/>
+            <a:ext cx="12192000" cy="6858000"/>
+          </a:xfrm>
+          <a:prstGeom prst="rect">
+            <a:avLst/>
+          </a:prstGeom>
+          <a:ln w="12700" cap="flat" cmpd="sng" algn="ctr">
+            <a:noFill/>
+            <a:prstDash val="solid"/>
+            <a:miter lim="800000"/>
+          </a:ln>
+          <a:effectLst/>
+          <a:extLst>
+            <a:ext uri="{91240B29-F687-4F45-9708-019B960494DF}">
+              <a14:hiddenLine xmlns:a14="http://schemas.microsoft.com/office/drawing/2010/main" w="12700" cap="flat" cmpd="sng" algn="ctr">
+                <a:solidFill>
+                  <a:schemeClr val="accent1">
+                    <a:shade val="50000"/>
+                  </a:schemeClr>
+                </a:solidFill>
+                <a:prstDash val="solid"/>
+                <a:miter lim="800000"/>
+              </a14:hiddenLine>
+            </a:ext>
+          </a:extLst>
+        </p:spPr>
+        <p:style>
+          <a:lnRef idx="2">
+            <a:schemeClr val="accent1">
+              <a:shade val="50000"/>
+            </a:schemeClr>
+          </a:lnRef>
+          <a:fillRef idx="1">
+            <a:schemeClr val="accent1"/>
+          </a:fillRef>
+          <a:effectRef idx="0">
+            <a:schemeClr val="accent1"/>
+          </a:effectRef>
+          <a:fontRef idx="minor">
+            <a:schemeClr val="lt1"/>
+          </a:fontRef>
+        </p:style>
+        <p:txBody>
+          <a:bodyPr rtlCol="0" anchor="ctr"/>
+          <a:lstStyle/>
+          <a:p>
+            <a:pPr algn="ctr"/>
+            <a:endParaRPr lang="en-US"/>
+          </a:p>
+        </p:txBody>
+      </p:sp>
+      <p:sp>
+        <p:nvSpPr>
+          <p:cNvPr id="15" name="Rectangle 14">
+            <a:extLst>
+              <a:ext uri="{FF2B5EF4-FFF2-40B4-BE49-F238E27FC236}">
+                <a16:creationId xmlns:a16="http://schemas.microsoft.com/office/drawing/2014/main" id="{8F7C90E5-F183-A269-4E23-2DA300B26169}"/>
+              </a:ext>
+              <a:ext uri="{C183D7F6-B498-43B3-948B-1728B52AA6E4}">
+                <adec:decorative xmlns:adec="http://schemas.microsoft.com/office/drawing/2017/decorative" val="1"/>
+              </a:ext>
+            </a:extLst>
+          </p:cNvPr>
+          <p:cNvSpPr>
+            <a:spLocks noGrp="1" noRot="1" noChangeAspect="1" noMove="1" noResize="1" noEditPoints="1" noAdjustHandles="1" noChangeArrowheads="1" noChangeShapeType="1" noTextEdit="1"/>
+          </p:cNvSpPr>
+          <p:nvPr>
+            <p:extLst>
+              <p:ext uri="{386F3935-93C4-4BCD-93E2-E3B085C9AB24}">
+                <p16:designElem xmlns:p16="http://schemas.microsoft.com/office/powerpoint/2015/main" val="1"/>
+              </p:ext>
+            </p:extLst>
+          </p:nvPr>
+        </p:nvSpPr>
+        <p:spPr>
+          <a:xfrm rot="10800000" flipH="1">
+            <a:off x="2" y="0"/>
+            <a:ext cx="12191998" cy="1575955"/>
+          </a:xfrm>
+          <a:prstGeom prst="rect">
+            <a:avLst/>
+          </a:prstGeom>
+          <a:gradFill>
+            <a:gsLst>
+              <a:gs pos="0">
+                <a:srgbClr val="000000">
+                  <a:alpha val="96000"/>
+                </a:srgbClr>
+              </a:gs>
+              <a:gs pos="100000">
+                <a:schemeClr val="accent1">
+                  <a:lumMod val="75000"/>
+                </a:schemeClr>
+              </a:gs>
+            </a:gsLst>
+            <a:lin ang="6000000" scaled="0"/>
+          </a:gradFill>
+          <a:ln>
+            <a:noFill/>
+          </a:ln>
+        </p:spPr>
+        <p:style>
+          <a:lnRef idx="2">
+            <a:schemeClr val="accent1">
+              <a:shade val="50000"/>
+            </a:schemeClr>
+          </a:lnRef>
+          <a:fillRef idx="1">
+            <a:schemeClr val="accent1"/>
+          </a:fillRef>
+          <a:effectRef idx="0">
+            <a:schemeClr val="accent1"/>
+          </a:effectRef>
+          <a:fontRef idx="minor">
+            <a:schemeClr val="lt1"/>
+          </a:fontRef>
+        </p:style>
+        <p:txBody>
+          <a:bodyPr rtlCol="0" anchor="ctr"/>
+          <a:lstStyle/>
+          <a:p>
+            <a:pPr algn="ctr"/>
+            <a:endParaRPr lang="en-US"/>
+          </a:p>
+        </p:txBody>
+      </p:sp>
+      <p:sp>
+        <p:nvSpPr>
+          <p:cNvPr id="17" name="Rectangle 16">
+            <a:extLst>
+              <a:ext uri="{FF2B5EF4-FFF2-40B4-BE49-F238E27FC236}">
+                <a16:creationId xmlns:a16="http://schemas.microsoft.com/office/drawing/2014/main" id="{05B3C5F7-A888-EB15-E4B6-F64EBF0A5073}"/>
+              </a:ext>
+              <a:ext uri="{C183D7F6-B498-43B3-948B-1728B52AA6E4}">
+                <adec:decorative xmlns:adec="http://schemas.microsoft.com/office/drawing/2017/decorative" val="1"/>
+              </a:ext>
+            </a:extLst>
+          </p:cNvPr>
+          <p:cNvSpPr>
+            <a:spLocks noGrp="1" noRot="1" noChangeAspect="1" noMove="1" noResize="1" noEditPoints="1" noAdjustHandles="1" noChangeArrowheads="1" noChangeShapeType="1" noTextEdit="1"/>
+          </p:cNvSpPr>
+          <p:nvPr>
+            <p:extLst>
+              <p:ext uri="{386F3935-93C4-4BCD-93E2-E3B085C9AB24}">
+                <p16:designElem xmlns:p16="http://schemas.microsoft.com/office/powerpoint/2015/main" val="1"/>
+              </p:ext>
+            </p:extLst>
+          </p:nvPr>
+        </p:nvSpPr>
+        <p:spPr>
+          <a:xfrm>
+            <a:off x="0" y="0"/>
+            <a:ext cx="8128856" cy="1575461"/>
+          </a:xfrm>
+          <a:prstGeom prst="rect">
+            <a:avLst/>
+          </a:prstGeom>
+          <a:gradFill>
+            <a:gsLst>
+              <a:gs pos="0">
+                <a:schemeClr val="accent1">
+                  <a:alpha val="41000"/>
+                </a:schemeClr>
+              </a:gs>
+              <a:gs pos="74000">
+                <a:schemeClr val="accent1">
+                  <a:lumMod val="60000"/>
+                  <a:lumOff val="40000"/>
+                  <a:alpha val="0"/>
+                </a:schemeClr>
+              </a:gs>
+            </a:gsLst>
+            <a:lin ang="8400000" scaled="0"/>
+          </a:gradFill>
+          <a:ln>
+            <a:noFill/>
+          </a:ln>
+        </p:spPr>
+        <p:style>
+          <a:lnRef idx="2">
+            <a:schemeClr val="accent1">
+              <a:shade val="50000"/>
+            </a:schemeClr>
+          </a:lnRef>
+          <a:fillRef idx="1">
+            <a:schemeClr val="accent1"/>
+          </a:fillRef>
+          <a:effectRef idx="0">
+            <a:schemeClr val="accent1"/>
+          </a:effectRef>
+          <a:fontRef idx="minor">
+            <a:schemeClr val="lt1"/>
+          </a:fontRef>
+        </p:style>
+        <p:txBody>
+          <a:bodyPr rtlCol="0" anchor="ctr"/>
+          <a:lstStyle/>
+          <a:p>
+            <a:pPr algn="ctr"/>
+            <a:endParaRPr lang="en-US"/>
+          </a:p>
+        </p:txBody>
+      </p:sp>
+      <p:sp>
+        <p:nvSpPr>
+          <p:cNvPr id="19" name="Rectangle 18">
+            <a:extLst>
+              <a:ext uri="{FF2B5EF4-FFF2-40B4-BE49-F238E27FC236}">
+                <a16:creationId xmlns:a16="http://schemas.microsoft.com/office/drawing/2014/main" id="{F3F6812B-1151-3841-2C70-DFB38E78B24D}"/>
+              </a:ext>
+              <a:ext uri="{C183D7F6-B498-43B3-948B-1728B52AA6E4}">
+                <adec:decorative xmlns:adec="http://schemas.microsoft.com/office/drawing/2017/decorative" val="1"/>
+              </a:ext>
+            </a:extLst>
+          </p:cNvPr>
+          <p:cNvSpPr>
+            <a:spLocks noGrp="1" noRot="1" noChangeAspect="1" noMove="1" noResize="1" noEditPoints="1" noAdjustHandles="1" noChangeArrowheads="1" noChangeShapeType="1" noTextEdit="1"/>
+          </p:cNvSpPr>
+          <p:nvPr>
+            <p:extLst>
+              <p:ext uri="{386F3935-93C4-4BCD-93E2-E3B085C9AB24}">
+                <p16:designElem xmlns:p16="http://schemas.microsoft.com/office/powerpoint/2015/main" val="1"/>
+              </p:ext>
+            </p:extLst>
+          </p:nvPr>
+        </p:nvSpPr>
+        <p:spPr>
+          <a:xfrm flipH="1">
+            <a:off x="-3" y="-1"/>
+            <a:ext cx="12192002" cy="1574311"/>
+          </a:xfrm>
+          <a:prstGeom prst="rect">
+            <a:avLst/>
+          </a:prstGeom>
+          <a:gradFill>
+            <a:gsLst>
+              <a:gs pos="0">
+                <a:srgbClr val="000000">
+                  <a:alpha val="63000"/>
+                </a:srgbClr>
+              </a:gs>
+              <a:gs pos="78000">
+                <a:schemeClr val="accent1">
+                  <a:alpha val="15000"/>
+                </a:schemeClr>
+              </a:gs>
+            </a:gsLst>
+            <a:lin ang="15600000" scaled="0"/>
+          </a:gradFill>
+          <a:ln>
+            <a:noFill/>
+          </a:ln>
+        </p:spPr>
+        <p:style>
+          <a:lnRef idx="2">
+            <a:schemeClr val="accent1">
+              <a:shade val="50000"/>
+            </a:schemeClr>
+          </a:lnRef>
+          <a:fillRef idx="1">
+            <a:schemeClr val="accent1"/>
+          </a:fillRef>
+          <a:effectRef idx="0">
+            <a:schemeClr val="accent1"/>
+          </a:effectRef>
+          <a:fontRef idx="minor">
+            <a:schemeClr val="lt1"/>
+          </a:fontRef>
+        </p:style>
+        <p:txBody>
+          <a:bodyPr rtlCol="0" anchor="ctr"/>
+          <a:lstStyle/>
+          <a:p>
+            <a:pPr algn="ctr"/>
+            <a:endParaRPr lang="en-US"/>
+          </a:p>
+        </p:txBody>
+      </p:sp>
+      <p:sp>
+        <p:nvSpPr>
+          <p:cNvPr id="2" name="Title 1">
+            <a:extLst>
+              <a:ext uri="{FF2B5EF4-FFF2-40B4-BE49-F238E27FC236}">
+                <a16:creationId xmlns:a16="http://schemas.microsoft.com/office/drawing/2014/main" id="{CE91FCD4-D558-EC04-D133-F00AA2F7A2EC}"/>
               </a:ext>
             </a:extLst>
           </p:cNvPr>
@@ -7690,103 +10172,382 @@
             <p:ph type="title"/>
           </p:nvPr>
         </p:nvSpPr>
-        <p:spPr/>
-        <p:txBody>
-          <a:bodyPr/>
-          <a:lstStyle/>
-          <a:p>
-            <a:r>
-              <a:rPr lang="de-DE" dirty="0" err="1"/>
-              <a:t>Conclusion</a:t>
-            </a:r>
-            <a:endParaRPr lang="de-DE" dirty="0"/>
-          </a:p>
-        </p:txBody>
-      </p:sp>
-      <p:sp>
-        <p:nvSpPr>
-          <p:cNvPr id="3" name="Inhaltsplatzhalter 2">
-            <a:extLst>
-              <a:ext uri="{FF2B5EF4-FFF2-40B4-BE49-F238E27FC236}">
-                <a16:creationId xmlns:a16="http://schemas.microsoft.com/office/drawing/2014/main" id="{13680EE8-07C5-28E5-EB00-12F747B70BC0}"/>
-              </a:ext>
-            </a:extLst>
-          </p:cNvPr>
-          <p:cNvSpPr>
-            <a:spLocks noGrp="1"/>
-          </p:cNvSpPr>
-          <p:nvPr>
-            <p:ph idx="1"/>
-          </p:nvPr>
-        </p:nvSpPr>
-        <p:spPr/>
-        <p:txBody>
-          <a:bodyPr/>
-          <a:lstStyle/>
-          <a:p>
-            <a:r>
-              <a:rPr lang="de-DE" dirty="0" err="1"/>
-              <a:t>Successful</a:t>
-            </a:r>
-            <a:r>
-              <a:rPr lang="de-DE" dirty="0"/>
-              <a:t> </a:t>
-            </a:r>
-            <a:r>
-              <a:rPr lang="de-DE" dirty="0" err="1"/>
-              <a:t>proof</a:t>
-            </a:r>
-            <a:r>
-              <a:rPr lang="de-DE" dirty="0"/>
-              <a:t> </a:t>
-            </a:r>
-            <a:r>
-              <a:rPr lang="de-DE" dirty="0" err="1"/>
-              <a:t>of</a:t>
-            </a:r>
-            <a:r>
-              <a:rPr lang="de-DE" dirty="0"/>
-              <a:t> </a:t>
-            </a:r>
-            <a:r>
-              <a:rPr lang="de-DE" dirty="0" err="1"/>
-              <a:t>concept</a:t>
-            </a:r>
-            <a:endParaRPr lang="de-DE" dirty="0"/>
-          </a:p>
-          <a:p>
-            <a:r>
-              <a:rPr lang="de-DE" dirty="0"/>
-              <a:t>Speech </a:t>
-            </a:r>
-            <a:r>
-              <a:rPr lang="de-DE" dirty="0" err="1"/>
-              <a:t>as</a:t>
-            </a:r>
-            <a:r>
-              <a:rPr lang="de-DE" dirty="0"/>
-              <a:t> </a:t>
-            </a:r>
-            <a:r>
-              <a:rPr lang="de-DE" dirty="0" err="1"/>
-              <a:t>lightweight</a:t>
-            </a:r>
-            <a:r>
-              <a:rPr lang="de-DE" dirty="0"/>
-              <a:t> interface</a:t>
-            </a:r>
-            <a:endParaRPr lang="en-US" dirty="0"/>
-          </a:p>
-          <a:p>
-            <a:r>
-              <a:rPr lang="en-US" dirty="0"/>
-              <a:t>Real-time control works </a:t>
-            </a:r>
-          </a:p>
-          <a:p>
-            <a:r>
-              <a:rPr lang="en-US" dirty="0"/>
-              <a:t>Reliable command recognition </a:t>
+        <p:spPr>
+          <a:xfrm>
+            <a:off x="699713" y="248038"/>
+            <a:ext cx="7063721" cy="1159200"/>
+          </a:xfrm>
+        </p:spPr>
+        <p:txBody>
+          <a:bodyPr vert="horz" lIns="91440" tIns="45720" rIns="91440" bIns="45720" rtlCol="0" anchor="ctr">
+            <a:normAutofit/>
+          </a:bodyPr>
+          <a:lstStyle/>
+          <a:p>
+            <a:r>
+              <a:rPr lang="en-GB" sz="4000" dirty="0">
+                <a:solidFill>
+                  <a:schemeClr val="bg1"/>
+                </a:solidFill>
+              </a:rPr>
+              <a:t>Game integration</a:t>
+            </a:r>
+            <a:endParaRPr lang="en-US" sz="4000" kern="1200" dirty="0">
+              <a:solidFill>
+                <a:schemeClr val="bg1"/>
+              </a:solidFill>
+              <a:latin typeface="+mj-lt"/>
+              <a:ea typeface="+mj-ea"/>
+              <a:cs typeface="+mj-cs"/>
+            </a:endParaRPr>
+          </a:p>
+        </p:txBody>
+      </p:sp>
+      <p:pic>
+        <p:nvPicPr>
+          <p:cNvPr id="6" name="Picture 5">
+            <a:extLst>
+              <a:ext uri="{FF2B5EF4-FFF2-40B4-BE49-F238E27FC236}">
+                <a16:creationId xmlns:a16="http://schemas.microsoft.com/office/drawing/2014/main" id="{27351AA0-1576-AF35-533F-93138789F743}"/>
+              </a:ext>
+            </a:extLst>
+          </p:cNvPr>
+          <p:cNvPicPr>
+            <a:picLocks noChangeAspect="1"/>
+          </p:cNvPicPr>
+          <p:nvPr/>
+        </p:nvPicPr>
+        <p:blipFill>
+          <a:blip r:embed="rId3"/>
+          <a:srcRect t="2536"/>
+          <a:stretch>
+            <a:fillRect/>
+          </a:stretch>
+        </p:blipFill>
+        <p:spPr>
+          <a:xfrm>
+            <a:off x="699713" y="1765887"/>
+            <a:ext cx="4820920" cy="4844075"/>
+          </a:xfrm>
+          <a:prstGeom prst="rect">
+            <a:avLst/>
+          </a:prstGeom>
+        </p:spPr>
+      </p:pic>
+      <p:pic>
+        <p:nvPicPr>
+          <p:cNvPr id="9" name="Picture 8">
+            <a:extLst>
+              <a:ext uri="{FF2B5EF4-FFF2-40B4-BE49-F238E27FC236}">
+                <a16:creationId xmlns:a16="http://schemas.microsoft.com/office/drawing/2014/main" id="{B2C0A6C8-5D43-92EB-EA16-424655F4349C}"/>
+              </a:ext>
+            </a:extLst>
+          </p:cNvPr>
+          <p:cNvPicPr>
+            <a:picLocks noChangeAspect="1"/>
+          </p:cNvPicPr>
+          <p:nvPr/>
+        </p:nvPicPr>
+        <p:blipFill>
+          <a:blip r:embed="rId4"/>
+          <a:stretch>
+            <a:fillRect/>
+          </a:stretch>
+        </p:blipFill>
+        <p:spPr>
+          <a:xfrm>
+            <a:off x="699713" y="1763082"/>
+            <a:ext cx="4793253" cy="4787614"/>
+          </a:xfrm>
+          <a:prstGeom prst="rect">
+            <a:avLst/>
+          </a:prstGeom>
+        </p:spPr>
+      </p:pic>
+      <p:grpSp>
+        <p:nvGrpSpPr>
+          <p:cNvPr id="26" name="Group 25">
+            <a:extLst>
+              <a:ext uri="{FF2B5EF4-FFF2-40B4-BE49-F238E27FC236}">
+                <a16:creationId xmlns:a16="http://schemas.microsoft.com/office/drawing/2014/main" id="{00292793-C6BB-C7E6-D6CF-E3A7CA90A6E1}"/>
+              </a:ext>
+            </a:extLst>
+          </p:cNvPr>
+          <p:cNvGrpSpPr/>
+          <p:nvPr/>
+        </p:nvGrpSpPr>
+        <p:grpSpPr>
+          <a:xfrm>
+            <a:off x="7677756" y="2764529"/>
+            <a:ext cx="2357120" cy="3553688"/>
+            <a:chOff x="8016240" y="2316480"/>
+            <a:chExt cx="2357120" cy="3553688"/>
+          </a:xfrm>
+        </p:grpSpPr>
+        <p:sp>
+          <p:nvSpPr>
+            <p:cNvPr id="12" name="Rectangle: Rounded Corners 11">
+              <a:extLst>
+                <a:ext uri="{FF2B5EF4-FFF2-40B4-BE49-F238E27FC236}">
+                  <a16:creationId xmlns:a16="http://schemas.microsoft.com/office/drawing/2014/main" id="{C0D50266-3730-1F07-FC3C-3BF65A9C53F5}"/>
+                </a:ext>
+              </a:extLst>
+            </p:cNvPr>
+            <p:cNvSpPr/>
+            <p:nvPr/>
+          </p:nvSpPr>
+          <p:spPr>
+            <a:xfrm>
+              <a:off x="8016240" y="2316480"/>
+              <a:ext cx="2357120" cy="690880"/>
+            </a:xfrm>
+            <a:prstGeom prst="roundRect">
+              <a:avLst/>
+            </a:prstGeom>
+          </p:spPr>
+          <p:style>
+            <a:lnRef idx="2">
+              <a:schemeClr val="accent1">
+                <a:shade val="15000"/>
+              </a:schemeClr>
+            </a:lnRef>
+            <a:fillRef idx="1">
+              <a:schemeClr val="accent1"/>
+            </a:fillRef>
+            <a:effectRef idx="0">
+              <a:schemeClr val="accent1"/>
+            </a:effectRef>
+            <a:fontRef idx="minor">
+              <a:schemeClr val="lt1"/>
+            </a:fontRef>
+          </p:style>
+          <p:txBody>
+            <a:bodyPr rtlCol="0" anchor="ctr"/>
+            <a:lstStyle/>
+            <a:p>
+              <a:pPr algn="ctr"/>
+              <a:r>
+                <a:rPr lang="en-GB" dirty="0"/>
+                <a:t>speech</a:t>
+              </a:r>
+            </a:p>
+          </p:txBody>
+        </p:sp>
+        <p:sp>
+          <p:nvSpPr>
+            <p:cNvPr id="14" name="Rectangle: Rounded Corners 13">
+              <a:extLst>
+                <a:ext uri="{FF2B5EF4-FFF2-40B4-BE49-F238E27FC236}">
+                  <a16:creationId xmlns:a16="http://schemas.microsoft.com/office/drawing/2014/main" id="{478BA6BF-FF76-4C3A-8CCC-5845A0A51F06}"/>
+                </a:ext>
+              </a:extLst>
+            </p:cNvPr>
+            <p:cNvSpPr/>
+            <p:nvPr/>
+          </p:nvSpPr>
+          <p:spPr>
+            <a:xfrm>
+              <a:off x="8016240" y="3747884"/>
+              <a:ext cx="2357120" cy="690880"/>
+            </a:xfrm>
+            <a:prstGeom prst="roundRect">
+              <a:avLst/>
+            </a:prstGeom>
+          </p:spPr>
+          <p:style>
+            <a:lnRef idx="2">
+              <a:schemeClr val="accent1">
+                <a:shade val="15000"/>
+              </a:schemeClr>
+            </a:lnRef>
+            <a:fillRef idx="1">
+              <a:schemeClr val="accent1"/>
+            </a:fillRef>
+            <a:effectRef idx="0">
+              <a:schemeClr val="accent1"/>
+            </a:effectRef>
+            <a:fontRef idx="minor">
+              <a:schemeClr val="lt1"/>
+            </a:fontRef>
+          </p:style>
+          <p:txBody>
+            <a:bodyPr rtlCol="0" anchor="ctr"/>
+            <a:lstStyle/>
+            <a:p>
+              <a:pPr algn="ctr"/>
+              <a:r>
+                <a:rPr lang="en-GB" dirty="0"/>
+                <a:t>text</a:t>
+              </a:r>
+            </a:p>
+          </p:txBody>
+        </p:sp>
+        <p:sp>
+          <p:nvSpPr>
+            <p:cNvPr id="16" name="Rectangle: Rounded Corners 15">
+              <a:extLst>
+                <a:ext uri="{FF2B5EF4-FFF2-40B4-BE49-F238E27FC236}">
+                  <a16:creationId xmlns:a16="http://schemas.microsoft.com/office/drawing/2014/main" id="{E42F8C2E-C7C1-06C3-0418-EF1626B841F7}"/>
+                </a:ext>
+              </a:extLst>
+            </p:cNvPr>
+            <p:cNvSpPr/>
+            <p:nvPr/>
+          </p:nvSpPr>
+          <p:spPr>
+            <a:xfrm>
+              <a:off x="8016240" y="5179288"/>
+              <a:ext cx="2357120" cy="690880"/>
+            </a:xfrm>
+            <a:prstGeom prst="roundRect">
+              <a:avLst/>
+            </a:prstGeom>
+          </p:spPr>
+          <p:style>
+            <a:lnRef idx="2">
+              <a:schemeClr val="accent1">
+                <a:shade val="15000"/>
+              </a:schemeClr>
+            </a:lnRef>
+            <a:fillRef idx="1">
+              <a:schemeClr val="accent1"/>
+            </a:fillRef>
+            <a:effectRef idx="0">
+              <a:schemeClr val="accent1"/>
+            </a:effectRef>
+            <a:fontRef idx="minor">
+              <a:schemeClr val="lt1"/>
+            </a:fontRef>
+          </p:style>
+          <p:txBody>
+            <a:bodyPr rtlCol="0" anchor="ctr"/>
+            <a:lstStyle/>
+            <a:p>
+              <a:pPr algn="ctr"/>
+              <a:r>
+                <a:rPr lang="en-GB" dirty="0"/>
+                <a:t>direction</a:t>
+              </a:r>
+            </a:p>
+          </p:txBody>
+        </p:sp>
+        <p:cxnSp>
+          <p:nvCxnSpPr>
+            <p:cNvPr id="20" name="Straight Arrow Connector 19">
+              <a:extLst>
+                <a:ext uri="{FF2B5EF4-FFF2-40B4-BE49-F238E27FC236}">
+                  <a16:creationId xmlns:a16="http://schemas.microsoft.com/office/drawing/2014/main" id="{1C522B68-A831-E4C1-3F07-A07D02117E82}"/>
+                </a:ext>
+              </a:extLst>
+            </p:cNvPr>
+            <p:cNvCxnSpPr>
+              <a:stCxn id="12" idx="2"/>
+              <a:endCxn id="14" idx="0"/>
+            </p:cNvCxnSpPr>
+            <p:nvPr/>
+          </p:nvCxnSpPr>
+          <p:spPr>
+            <a:xfrm>
+              <a:off x="9194800" y="3007360"/>
+              <a:ext cx="0" cy="740524"/>
+            </a:xfrm>
+            <a:prstGeom prst="straightConnector1">
+              <a:avLst/>
+            </a:prstGeom>
+            <a:ln>
+              <a:tailEnd type="triangle"/>
+            </a:ln>
+          </p:spPr>
+          <p:style>
+            <a:lnRef idx="2">
+              <a:schemeClr val="accent1"/>
+            </a:lnRef>
+            <a:fillRef idx="0">
+              <a:schemeClr val="accent1"/>
+            </a:fillRef>
+            <a:effectRef idx="1">
+              <a:schemeClr val="accent1"/>
+            </a:effectRef>
+            <a:fontRef idx="minor">
+              <a:schemeClr val="tx1"/>
+            </a:fontRef>
+          </p:style>
+        </p:cxnSp>
+        <p:cxnSp>
+          <p:nvCxnSpPr>
+            <p:cNvPr id="24" name="Straight Arrow Connector 23">
+              <a:extLst>
+                <a:ext uri="{FF2B5EF4-FFF2-40B4-BE49-F238E27FC236}">
+                  <a16:creationId xmlns:a16="http://schemas.microsoft.com/office/drawing/2014/main" id="{0CB9133D-E143-A3C3-F85C-24675FB91EAF}"/>
+                </a:ext>
+              </a:extLst>
+            </p:cNvPr>
+            <p:cNvCxnSpPr>
+              <a:stCxn id="14" idx="2"/>
+              <a:endCxn id="16" idx="0"/>
+            </p:cNvCxnSpPr>
+            <p:nvPr/>
+          </p:nvCxnSpPr>
+          <p:spPr>
+            <a:xfrm>
+              <a:off x="9194800" y="4438764"/>
+              <a:ext cx="0" cy="740524"/>
+            </a:xfrm>
+            <a:prstGeom prst="straightConnector1">
+              <a:avLst/>
+            </a:prstGeom>
+            <a:ln>
+              <a:tailEnd type="triangle"/>
+            </a:ln>
+          </p:spPr>
+          <p:style>
+            <a:lnRef idx="2">
+              <a:schemeClr val="accent1"/>
+            </a:lnRef>
+            <a:fillRef idx="0">
+              <a:schemeClr val="accent1"/>
+            </a:fillRef>
+            <a:effectRef idx="1">
+              <a:schemeClr val="accent1"/>
+            </a:effectRef>
+            <a:fontRef idx="minor">
+              <a:schemeClr val="tx1"/>
+            </a:fontRef>
+          </p:style>
+        </p:cxnSp>
+      </p:grpSp>
+      <p:sp>
+        <p:nvSpPr>
+          <p:cNvPr id="25" name="TextBox 24">
+            <a:extLst>
+              <a:ext uri="{FF2B5EF4-FFF2-40B4-BE49-F238E27FC236}">
+                <a16:creationId xmlns:a16="http://schemas.microsoft.com/office/drawing/2014/main" id="{ECC63EB7-8C93-D0E4-9883-BD353DBA142A}"/>
+              </a:ext>
+            </a:extLst>
+          </p:cNvPr>
+          <p:cNvSpPr txBox="1"/>
+          <p:nvPr/>
+        </p:nvSpPr>
+        <p:spPr>
+          <a:xfrm>
+            <a:off x="7800104" y="1847077"/>
+            <a:ext cx="2112424" cy="646331"/>
+          </a:xfrm>
+          <a:prstGeom prst="rect">
+            <a:avLst/>
+          </a:prstGeom>
+          <a:noFill/>
+        </p:spPr>
+        <p:txBody>
+          <a:bodyPr wrap="square" rtlCol="0">
+            <a:spAutoFit/>
+          </a:bodyPr>
+          <a:lstStyle/>
+          <a:p>
+            <a:pPr algn="ctr"/>
+            <a:r>
+              <a:rPr lang="en-GB" sz="3600" b="1" dirty="0"/>
+              <a:t>Pipeline</a:t>
             </a:r>
           </a:p>
         </p:txBody>
@@ -7794,7 +10555,435 @@
     </p:spTree>
     <p:extLst>
       <p:ext uri="{BB962C8B-B14F-4D97-AF65-F5344CB8AC3E}">
-        <p14:creationId xmlns:p14="http://schemas.microsoft.com/office/powerpoint/2010/main" val="3625072128"/>
+        <p14:creationId xmlns:p14="http://schemas.microsoft.com/office/powerpoint/2010/main" val="2180038919"/>
+      </p:ext>
+    </p:extLst>
+  </p:cSld>
+  <p:clrMapOvr>
+    <a:masterClrMapping/>
+  </p:clrMapOvr>
+</p:sld>
+</file>
+
+<file path=ppt/slides/slide9.xml><?xml version="1.0" encoding="utf-8"?>
+<p:sld xmlns:a="http://schemas.openxmlformats.org/drawingml/2006/main" xmlns:r="http://schemas.openxmlformats.org/officeDocument/2006/relationships" xmlns:p="http://schemas.openxmlformats.org/presentationml/2006/main">
+  <p:cSld>
+    <p:bg>
+      <p:bgPr>
+        <a:solidFill>
+          <a:schemeClr val="bg1"/>
+        </a:solidFill>
+        <a:effectLst/>
+      </p:bgPr>
+    </p:bg>
+    <p:spTree>
+      <p:nvGrpSpPr>
+        <p:cNvPr id="1" name="">
+          <a:extLst>
+            <a:ext uri="{FF2B5EF4-FFF2-40B4-BE49-F238E27FC236}">
+              <a16:creationId xmlns:a16="http://schemas.microsoft.com/office/drawing/2014/main" id="{9B1F940C-4A11-7344-631D-C7F4428F0F9C}"/>
+            </a:ext>
+          </a:extLst>
+        </p:cNvPr>
+        <p:cNvGrpSpPr/>
+        <p:nvPr/>
+      </p:nvGrpSpPr>
+      <p:grpSpPr>
+        <a:xfrm>
+          <a:off x="0" y="0"/>
+          <a:ext cx="0" cy="0"/>
+          <a:chOff x="0" y="0"/>
+          <a:chExt cx="0" cy="0"/>
+        </a:xfrm>
+      </p:grpSpPr>
+      <p:sp useBgFill="1">
+        <p:nvSpPr>
+          <p:cNvPr id="41" name="Rectangle 40">
+            <a:extLst>
+              <a:ext uri="{FF2B5EF4-FFF2-40B4-BE49-F238E27FC236}">
+                <a16:creationId xmlns:a16="http://schemas.microsoft.com/office/drawing/2014/main" id="{A8384FB5-9ADC-4DDC-881B-597D56F5B15D}"/>
+              </a:ext>
+              <a:ext uri="{C183D7F6-B498-43B3-948B-1728B52AA6E4}">
+                <adec:decorative xmlns:adec="http://schemas.microsoft.com/office/drawing/2017/decorative" val="1"/>
+              </a:ext>
+            </a:extLst>
+          </p:cNvPr>
+          <p:cNvSpPr>
+            <a:spLocks noGrp="1" noRot="1" noChangeAspect="1" noMove="1" noResize="1" noEditPoints="1" noAdjustHandles="1" noChangeArrowheads="1" noChangeShapeType="1" noTextEdit="1"/>
+          </p:cNvSpPr>
+          <p:nvPr>
+            <p:extLst>
+              <p:ext uri="{386F3935-93C4-4BCD-93E2-E3B085C9AB24}">
+                <p16:designElem xmlns:p16="http://schemas.microsoft.com/office/powerpoint/2015/main" val="1"/>
+              </p:ext>
+            </p:extLst>
+          </p:nvPr>
+        </p:nvSpPr>
+        <p:spPr>
+          <a:xfrm>
+            <a:off x="0" y="0"/>
+            <a:ext cx="12192000" cy="6858000"/>
+          </a:xfrm>
+          <a:prstGeom prst="rect">
+            <a:avLst/>
+          </a:prstGeom>
+          <a:ln w="12700" cap="flat" cmpd="sng" algn="ctr">
+            <a:noFill/>
+            <a:prstDash val="solid"/>
+            <a:miter lim="800000"/>
+          </a:ln>
+          <a:effectLst/>
+          <a:extLst>
+            <a:ext uri="{91240B29-F687-4F45-9708-019B960494DF}">
+              <a14:hiddenLine xmlns:a14="http://schemas.microsoft.com/office/drawing/2010/main" w="12700" cap="flat" cmpd="sng" algn="ctr">
+                <a:solidFill>
+                  <a:schemeClr val="accent1">
+                    <a:shade val="50000"/>
+                  </a:schemeClr>
+                </a:solidFill>
+                <a:prstDash val="solid"/>
+                <a:miter lim="800000"/>
+              </a14:hiddenLine>
+            </a:ext>
+          </a:extLst>
+        </p:spPr>
+        <p:style>
+          <a:lnRef idx="2">
+            <a:schemeClr val="accent1">
+              <a:shade val="50000"/>
+            </a:schemeClr>
+          </a:lnRef>
+          <a:fillRef idx="1">
+            <a:schemeClr val="accent1"/>
+          </a:fillRef>
+          <a:effectRef idx="0">
+            <a:schemeClr val="accent1"/>
+          </a:effectRef>
+          <a:fontRef idx="minor">
+            <a:schemeClr val="lt1"/>
+          </a:fontRef>
+        </p:style>
+        <p:txBody>
+          <a:bodyPr rtlCol="0" anchor="ctr"/>
+          <a:lstStyle/>
+          <a:p>
+            <a:pPr algn="ctr"/>
+            <a:endParaRPr lang="en-US"/>
+          </a:p>
+        </p:txBody>
+      </p:sp>
+      <p:sp>
+        <p:nvSpPr>
+          <p:cNvPr id="28" name="Rectangle 27">
+            <a:extLst>
+              <a:ext uri="{FF2B5EF4-FFF2-40B4-BE49-F238E27FC236}">
+                <a16:creationId xmlns:a16="http://schemas.microsoft.com/office/drawing/2014/main" id="{1199E1B1-A8C0-4FE8-A5A8-1CB41D69F857}"/>
+              </a:ext>
+              <a:ext uri="{C183D7F6-B498-43B3-948B-1728B52AA6E4}">
+                <adec:decorative xmlns:adec="http://schemas.microsoft.com/office/drawing/2017/decorative" val="1"/>
+              </a:ext>
+            </a:extLst>
+          </p:cNvPr>
+          <p:cNvSpPr>
+            <a:spLocks noGrp="1" noRot="1" noChangeAspect="1" noMove="1" noResize="1" noEditPoints="1" noAdjustHandles="1" noChangeArrowheads="1" noChangeShapeType="1" noTextEdit="1"/>
+          </p:cNvSpPr>
+          <p:nvPr>
+            <p:extLst>
+              <p:ext uri="{386F3935-93C4-4BCD-93E2-E3B085C9AB24}">
+                <p16:designElem xmlns:p16="http://schemas.microsoft.com/office/powerpoint/2015/main" val="1"/>
+              </p:ext>
+            </p:extLst>
+          </p:nvPr>
+        </p:nvSpPr>
+        <p:spPr>
+          <a:xfrm rot="10800000" flipH="1">
+            <a:off x="2" y="0"/>
+            <a:ext cx="12191998" cy="1575955"/>
+          </a:xfrm>
+          <a:prstGeom prst="rect">
+            <a:avLst/>
+          </a:prstGeom>
+          <a:gradFill>
+            <a:gsLst>
+              <a:gs pos="0">
+                <a:srgbClr val="000000">
+                  <a:alpha val="96000"/>
+                </a:srgbClr>
+              </a:gs>
+              <a:gs pos="100000">
+                <a:schemeClr val="accent1">
+                  <a:lumMod val="75000"/>
+                </a:schemeClr>
+              </a:gs>
+            </a:gsLst>
+            <a:lin ang="6000000" scaled="0"/>
+          </a:gradFill>
+          <a:ln>
+            <a:noFill/>
+          </a:ln>
+        </p:spPr>
+        <p:style>
+          <a:lnRef idx="2">
+            <a:schemeClr val="accent1">
+              <a:shade val="50000"/>
+            </a:schemeClr>
+          </a:lnRef>
+          <a:fillRef idx="1">
+            <a:schemeClr val="accent1"/>
+          </a:fillRef>
+          <a:effectRef idx="0">
+            <a:schemeClr val="accent1"/>
+          </a:effectRef>
+          <a:fontRef idx="minor">
+            <a:schemeClr val="lt1"/>
+          </a:fontRef>
+        </p:style>
+        <p:txBody>
+          <a:bodyPr rtlCol="0" anchor="ctr"/>
+          <a:lstStyle/>
+          <a:p>
+            <a:pPr algn="ctr"/>
+            <a:endParaRPr lang="en-US"/>
+          </a:p>
+        </p:txBody>
+      </p:sp>
+      <p:sp>
+        <p:nvSpPr>
+          <p:cNvPr id="30" name="Rectangle 29">
+            <a:extLst>
+              <a:ext uri="{FF2B5EF4-FFF2-40B4-BE49-F238E27FC236}">
+                <a16:creationId xmlns:a16="http://schemas.microsoft.com/office/drawing/2014/main" id="{84A8DE83-DE75-4B41-9DB4-A7EC0B0DEC0B}"/>
+              </a:ext>
+              <a:ext uri="{C183D7F6-B498-43B3-948B-1728B52AA6E4}">
+                <adec:decorative xmlns:adec="http://schemas.microsoft.com/office/drawing/2017/decorative" val="1"/>
+              </a:ext>
+            </a:extLst>
+          </p:cNvPr>
+          <p:cNvSpPr>
+            <a:spLocks noGrp="1" noRot="1" noChangeAspect="1" noMove="1" noResize="1" noEditPoints="1" noAdjustHandles="1" noChangeArrowheads="1" noChangeShapeType="1" noTextEdit="1"/>
+          </p:cNvSpPr>
+          <p:nvPr>
+            <p:extLst>
+              <p:ext uri="{386F3935-93C4-4BCD-93E2-E3B085C9AB24}">
+                <p16:designElem xmlns:p16="http://schemas.microsoft.com/office/powerpoint/2015/main" val="1"/>
+              </p:ext>
+            </p:extLst>
+          </p:nvPr>
+        </p:nvSpPr>
+        <p:spPr>
+          <a:xfrm>
+            <a:off x="0" y="0"/>
+            <a:ext cx="8128856" cy="1575461"/>
+          </a:xfrm>
+          <a:prstGeom prst="rect">
+            <a:avLst/>
+          </a:prstGeom>
+          <a:gradFill>
+            <a:gsLst>
+              <a:gs pos="0">
+                <a:schemeClr val="accent1">
+                  <a:alpha val="41000"/>
+                </a:schemeClr>
+              </a:gs>
+              <a:gs pos="74000">
+                <a:schemeClr val="accent1">
+                  <a:lumMod val="60000"/>
+                  <a:lumOff val="40000"/>
+                  <a:alpha val="0"/>
+                </a:schemeClr>
+              </a:gs>
+            </a:gsLst>
+            <a:lin ang="8400000" scaled="0"/>
+          </a:gradFill>
+          <a:ln>
+            <a:noFill/>
+          </a:ln>
+        </p:spPr>
+        <p:style>
+          <a:lnRef idx="2">
+            <a:schemeClr val="accent1">
+              <a:shade val="50000"/>
+            </a:schemeClr>
+          </a:lnRef>
+          <a:fillRef idx="1">
+            <a:schemeClr val="accent1"/>
+          </a:fillRef>
+          <a:effectRef idx="0">
+            <a:schemeClr val="accent1"/>
+          </a:effectRef>
+          <a:fontRef idx="minor">
+            <a:schemeClr val="lt1"/>
+          </a:fontRef>
+        </p:style>
+        <p:txBody>
+          <a:bodyPr rtlCol="0" anchor="ctr"/>
+          <a:lstStyle/>
+          <a:p>
+            <a:pPr algn="ctr"/>
+            <a:endParaRPr lang="en-US"/>
+          </a:p>
+        </p:txBody>
+      </p:sp>
+      <p:sp>
+        <p:nvSpPr>
+          <p:cNvPr id="32" name="Rectangle 31">
+            <a:extLst>
+              <a:ext uri="{FF2B5EF4-FFF2-40B4-BE49-F238E27FC236}">
+                <a16:creationId xmlns:a16="http://schemas.microsoft.com/office/drawing/2014/main" id="{A7009A0A-BEF5-4EAC-AF15-E4F9F002E239}"/>
+              </a:ext>
+              <a:ext uri="{C183D7F6-B498-43B3-948B-1728B52AA6E4}">
+                <adec:decorative xmlns:adec="http://schemas.microsoft.com/office/drawing/2017/decorative" val="1"/>
+              </a:ext>
+            </a:extLst>
+          </p:cNvPr>
+          <p:cNvSpPr>
+            <a:spLocks noGrp="1" noRot="1" noChangeAspect="1" noMove="1" noResize="1" noEditPoints="1" noAdjustHandles="1" noChangeArrowheads="1" noChangeShapeType="1" noTextEdit="1"/>
+          </p:cNvSpPr>
+          <p:nvPr>
+            <p:extLst>
+              <p:ext uri="{386F3935-93C4-4BCD-93E2-E3B085C9AB24}">
+                <p16:designElem xmlns:p16="http://schemas.microsoft.com/office/powerpoint/2015/main" val="1"/>
+              </p:ext>
+            </p:extLst>
+          </p:nvPr>
+        </p:nvSpPr>
+        <p:spPr>
+          <a:xfrm flipH="1">
+            <a:off x="-3" y="-1"/>
+            <a:ext cx="12192002" cy="1574311"/>
+          </a:xfrm>
+          <a:prstGeom prst="rect">
+            <a:avLst/>
+          </a:prstGeom>
+          <a:gradFill>
+            <a:gsLst>
+              <a:gs pos="0">
+                <a:srgbClr val="000000">
+                  <a:alpha val="63000"/>
+                </a:srgbClr>
+              </a:gs>
+              <a:gs pos="78000">
+                <a:schemeClr val="accent1">
+                  <a:alpha val="15000"/>
+                </a:schemeClr>
+              </a:gs>
+            </a:gsLst>
+            <a:lin ang="15600000" scaled="0"/>
+          </a:gradFill>
+          <a:ln>
+            <a:noFill/>
+          </a:ln>
+        </p:spPr>
+        <p:style>
+          <a:lnRef idx="2">
+            <a:schemeClr val="accent1">
+              <a:shade val="50000"/>
+            </a:schemeClr>
+          </a:lnRef>
+          <a:fillRef idx="1">
+            <a:schemeClr val="accent1"/>
+          </a:fillRef>
+          <a:effectRef idx="0">
+            <a:schemeClr val="accent1"/>
+          </a:effectRef>
+          <a:fontRef idx="minor">
+            <a:schemeClr val="lt1"/>
+          </a:fontRef>
+        </p:style>
+        <p:txBody>
+          <a:bodyPr rtlCol="0" anchor="ctr"/>
+          <a:lstStyle/>
+          <a:p>
+            <a:pPr algn="ctr"/>
+            <a:endParaRPr lang="en-US"/>
+          </a:p>
+        </p:txBody>
+      </p:sp>
+      <p:sp>
+        <p:nvSpPr>
+          <p:cNvPr id="2" name="Title 1">
+            <a:extLst>
+              <a:ext uri="{FF2B5EF4-FFF2-40B4-BE49-F238E27FC236}">
+                <a16:creationId xmlns:a16="http://schemas.microsoft.com/office/drawing/2014/main" id="{0868CF30-D0BC-63A6-F4CA-B894C798C611}"/>
+              </a:ext>
+            </a:extLst>
+          </p:cNvPr>
+          <p:cNvSpPr>
+            <a:spLocks noGrp="1"/>
+          </p:cNvSpPr>
+          <p:nvPr>
+            <p:ph type="title"/>
+          </p:nvPr>
+        </p:nvSpPr>
+        <p:spPr>
+          <a:xfrm>
+            <a:off x="699713" y="248038"/>
+            <a:ext cx="7063721" cy="1159200"/>
+          </a:xfrm>
+        </p:spPr>
+        <p:txBody>
+          <a:bodyPr vert="horz" lIns="91440" tIns="45720" rIns="91440" bIns="45720" rtlCol="0" anchor="ctr">
+            <a:normAutofit/>
+          </a:bodyPr>
+          <a:lstStyle/>
+          <a:p>
+            <a:r>
+              <a:rPr lang="en-US" sz="4000" kern="1200">
+                <a:solidFill>
+                  <a:srgbClr val="FFFFFF"/>
+                </a:solidFill>
+                <a:latin typeface="+mj-lt"/>
+                <a:ea typeface="+mj-ea"/>
+                <a:cs typeface="+mj-cs"/>
+              </a:rPr>
+              <a:t>Gameplay DEMO</a:t>
+            </a:r>
+          </a:p>
+        </p:txBody>
+      </p:sp>
+      <p:pic>
+        <p:nvPicPr>
+          <p:cNvPr id="23" name="Graphic 22" descr="Monitor">
+            <a:extLst>
+              <a:ext uri="{FF2B5EF4-FFF2-40B4-BE49-F238E27FC236}">
+                <a16:creationId xmlns:a16="http://schemas.microsoft.com/office/drawing/2014/main" id="{6347FDAD-293F-8A6D-C7BE-4ABA135BEFA3}"/>
+              </a:ext>
+            </a:extLst>
+          </p:cNvPr>
+          <p:cNvPicPr>
+            <a:picLocks noChangeAspect="1"/>
+          </p:cNvPicPr>
+          <p:nvPr/>
+        </p:nvPicPr>
+        <p:blipFill>
+          <a:blip>
+            <a:extLst>
+              <a:ext uri="{28A0092B-C50C-407E-A947-70E740481C1C}">
+                <a14:useLocalDpi xmlns:a14="http://schemas.microsoft.com/office/drawing/2010/main" val="0"/>
+              </a:ext>
+              <a:ext uri="{96DAC541-7B7A-43D3-8B79-37D633B846F1}">
+                <asvg:svgBlip xmlns:asvg="http://schemas.microsoft.com/office/drawing/2016/SVG/main" r:embed="rId3"/>
+              </a:ext>
+            </a:extLst>
+          </a:blip>
+          <a:stretch>
+            <a:fillRect/>
+          </a:stretch>
+        </p:blipFill>
+        <p:spPr>
+          <a:xfrm>
+            <a:off x="3869919" y="1966293"/>
+            <a:ext cx="4452160" cy="4452160"/>
+          </a:xfrm>
+          <a:prstGeom prst="rect">
+            <a:avLst/>
+          </a:prstGeom>
+        </p:spPr>
+      </p:pic>
+    </p:spTree>
+    <p:extLst>
+      <p:ext uri="{BB962C8B-B14F-4D97-AF65-F5344CB8AC3E}">
+        <p14:creationId xmlns:p14="http://schemas.microsoft.com/office/powerpoint/2010/main" val="1855787068"/>
       </p:ext>
     </p:extLst>
   </p:cSld>
